--- a/21_September_Monday/01_Seeking_for_AI/01_Seeking_for_AI.pptx
+++ b/21_September_Monday/01_Seeking_for_AI/01_Seeking_for_AI.pptx
@@ -24,6 +24,7 @@
     <p:sldId id="269" r:id="rId17"/>
     <p:sldId id="270" r:id="rId18"/>
     <p:sldId id="271" r:id="rId19"/>
+    <p:sldId id="272" r:id="rId20"/>
   </p:sldIdLst>
   <p:sldSz cx="12192000" cy="6858000"/>
   <p:notesSz cx="6858000" cy="12192000"/>
@@ -380,7 +381,7 @@
             <a:pPr indent="0" algn="r">
               <a:buNone/>
             </a:pPr>
-            <a:fld id="{E168E7A8-48A1-4FA9-9A19-B0DDACA7B031}" type="slidenum">
+            <a:fld id="{36A6B957-7FA4-4B37-AF94-8C0D0E2A218C}" type="slidenum">
               <a:rPr b="0" lang="fr-FR" sz="1400" strike="noStrike" u="none">
                 <a:solidFill>
                   <a:srgbClr val="000000"/>
@@ -427,7 +428,7 @@
       </p:grpSpPr>
       <p:sp>
         <p:nvSpPr>
-          <p:cNvPr id="120" name="PlaceHolder 1"/>
+          <p:cNvPr id="124" name="PlaceHolder 1"/>
           <p:cNvSpPr>
             <a:spLocks noGrp="1"/>
           </p:cNvSpPr>
@@ -450,7 +451,7 @@
       </p:sp>
       <p:sp>
         <p:nvSpPr>
-          <p:cNvPr id="121" name="PlaceHolder 2"/>
+          <p:cNvPr id="125" name="PlaceHolder 2"/>
           <p:cNvSpPr>
             <a:spLocks noGrp="1"/>
           </p:cNvSpPr>
@@ -492,7 +493,7 @@
       </p:sp>
       <p:sp>
         <p:nvSpPr>
-          <p:cNvPr id="122" name="PlaceHolder 3"/>
+          <p:cNvPr id="126" name="PlaceHolder 3"/>
           <p:cNvSpPr>
             <a:spLocks noGrp="1"/>
           </p:cNvSpPr>
@@ -547,7 +548,7 @@
                 <a:tab algn="l" pos="0"/>
               </a:tabLst>
             </a:pPr>
-            <a:fld id="{8EBBC98B-22B7-4840-9EEC-117454C58929}" type="slidenum">
+            <a:fld id="{AD0744F6-99A8-455A-B74D-5916CC368BAD}" type="slidenum">
               <a:rPr b="0" lang="en-US" sz="1800" strike="noStrike" u="none">
                 <a:solidFill>
                   <a:schemeClr val="dk1"/>
@@ -575,7 +576,7 @@
 </p:notes>
 </file>
 
-<file path=ppt/notesSlides/notesSlide16.xml><?xml version="1.0" encoding="utf-8"?>
+<file path=ppt/notesSlides/notesSlide10.xml><?xml version="1.0" encoding="utf-8"?>
 <p:notes xmlns:a="http://schemas.openxmlformats.org/drawingml/2006/main" xmlns:p="http://schemas.openxmlformats.org/presentationml/2006/main" xmlns:r="http://schemas.openxmlformats.org/officeDocument/2006/relationships" xmlns:p14="http://schemas.microsoft.com/office/powerpoint/2010/main" xmlns:p15="http://schemas.microsoft.com/office/powerpoint/2012/main" xmlns:mc="http://schemas.openxmlformats.org/markup-compatibility/2006">
   <p:cSld>
     <p:spTree>
@@ -594,7 +595,7 @@
       </p:grpSpPr>
       <p:sp>
         <p:nvSpPr>
-          <p:cNvPr id="147" name="PlaceHolder 1"/>
+          <p:cNvPr id="148" name="PlaceHolder 1"/>
           <p:cNvSpPr>
             <a:spLocks noGrp="1"/>
           </p:cNvSpPr>
@@ -604,7 +605,7 @@
         </p:nvSpPr>
         <p:spPr>
           <a:xfrm>
-            <a:off x="0" y="0"/>
+            <a:off x="-360" y="-360"/>
             <a:ext cx="0" cy="0"/>
           </a:xfrm>
           <a:prstGeom prst="rect">
@@ -617,7 +618,7 @@
       </p:sp>
       <p:sp>
         <p:nvSpPr>
-          <p:cNvPr id="148" name="PlaceHolder 2"/>
+          <p:cNvPr id="149" name="PlaceHolder 2"/>
           <p:cNvSpPr>
             <a:spLocks noGrp="1"/>
           </p:cNvSpPr>
@@ -659,7 +660,174 @@
       </p:sp>
       <p:sp>
         <p:nvSpPr>
-          <p:cNvPr id="149" name="PlaceHolder 3"/>
+          <p:cNvPr id="150" name="PlaceHolder 3"/>
+          <p:cNvSpPr>
+            <a:spLocks noGrp="1"/>
+          </p:cNvSpPr>
+          <p:nvPr>
+            <p:ph type="sldNum" idx="12"/>
+          </p:nvPr>
+        </p:nvSpPr>
+        <p:spPr>
+          <a:xfrm>
+            <a:off x="0" y="0"/>
+            <a:ext cx="0" cy="0"/>
+          </a:xfrm>
+          <a:prstGeom prst="rect">
+            <a:avLst/>
+          </a:prstGeom>
+          <a:noFill/>
+          <a:ln w="0">
+            <a:noFill/>
+          </a:ln>
+        </p:spPr>
+        <p:txBody>
+          <a:bodyPr lIns="90000" rIns="90000" tIns="-45000" bIns="-45000" anchor="t">
+            <a:noAutofit/>
+          </a:bodyPr>
+          <a:lstStyle>
+            <a:lvl1pPr indent="0" algn="r" defTabSz="914400">
+              <a:lnSpc>
+                <a:spcPct val="100000"/>
+              </a:lnSpc>
+              <a:buNone/>
+              <a:tabLst>
+                <a:tab algn="l" pos="0"/>
+              </a:tabLst>
+              <a:defRPr b="0" lang="en-US" sz="1800" strike="noStrike" u="none">
+                <a:solidFill>
+                  <a:schemeClr val="dk1"/>
+                </a:solidFill>
+                <a:effectLst/>
+                <a:uFillTx/>
+                <a:latin typeface="+mn-lt"/>
+                <a:ea typeface="+mn-ea"/>
+              </a:defRPr>
+            </a:lvl1pPr>
+          </a:lstStyle>
+          <a:p>
+            <a:pPr indent="0" algn="r" defTabSz="914400">
+              <a:lnSpc>
+                <a:spcPct val="100000"/>
+              </a:lnSpc>
+              <a:buNone/>
+              <a:tabLst>
+                <a:tab algn="l" pos="0"/>
+              </a:tabLst>
+            </a:pPr>
+            <a:fld id="{14C745CD-2591-40C7-A08C-011FCC347757}" type="slidenum">
+              <a:rPr b="0" lang="en-US" sz="1800" strike="noStrike" u="none">
+                <a:solidFill>
+                  <a:schemeClr val="dk1"/>
+                </a:solidFill>
+                <a:effectLst/>
+                <a:uFillTx/>
+                <a:latin typeface="+mn-lt"/>
+                <a:ea typeface="+mn-ea"/>
+              </a:rPr>
+              <a:t>&lt;numéro&gt;</a:t>
+            </a:fld>
+            <a:endParaRPr b="0" lang="fr-FR" sz="1800" strike="noStrike" u="none">
+              <a:solidFill>
+                <a:srgbClr val="000000"/>
+              </a:solidFill>
+              <a:effectLst/>
+              <a:uFillTx/>
+              <a:latin typeface="Times New Roman"/>
+            </a:endParaRPr>
+          </a:p>
+        </p:txBody>
+      </p:sp>
+    </p:spTree>
+  </p:cSld>
+</p:notes>
+</file>
+
+<file path=ppt/notesSlides/notesSlide17.xml><?xml version="1.0" encoding="utf-8"?>
+<p:notes xmlns:a="http://schemas.openxmlformats.org/drawingml/2006/main" xmlns:p="http://schemas.openxmlformats.org/presentationml/2006/main" xmlns:r="http://schemas.openxmlformats.org/officeDocument/2006/relationships" xmlns:p14="http://schemas.microsoft.com/office/powerpoint/2010/main" xmlns:p15="http://schemas.microsoft.com/office/powerpoint/2012/main" xmlns:mc="http://schemas.openxmlformats.org/markup-compatibility/2006">
+  <p:cSld>
+    <p:spTree>
+      <p:nvGrpSpPr>
+        <p:cNvPr id="1" name=""/>
+        <p:cNvGrpSpPr/>
+        <p:nvPr/>
+      </p:nvGrpSpPr>
+      <p:grpSpPr>
+        <a:xfrm>
+          <a:off x="0" y="0"/>
+          <a:ext cx="0" cy="0"/>
+          <a:chOff x="0" y="0"/>
+          <a:chExt cx="0" cy="0"/>
+        </a:xfrm>
+      </p:grpSpPr>
+      <p:sp>
+        <p:nvSpPr>
+          <p:cNvPr id="151" name="PlaceHolder 1"/>
+          <p:cNvSpPr>
+            <a:spLocks noGrp="1"/>
+          </p:cNvSpPr>
+          <p:nvPr>
+            <p:ph type="sldImg"/>
+          </p:nvPr>
+        </p:nvSpPr>
+        <p:spPr>
+          <a:xfrm>
+            <a:off x="0" y="0"/>
+            <a:ext cx="0" cy="0"/>
+          </a:xfrm>
+          <a:prstGeom prst="rect">
+            <a:avLst/>
+          </a:prstGeom>
+          <a:ln w="0">
+            <a:noFill/>
+          </a:ln>
+        </p:spPr>
+      </p:sp>
+      <p:sp>
+        <p:nvSpPr>
+          <p:cNvPr id="152" name="PlaceHolder 2"/>
+          <p:cNvSpPr>
+            <a:spLocks noGrp="1"/>
+          </p:cNvSpPr>
+          <p:nvPr>
+            <p:ph type="body"/>
+          </p:nvPr>
+        </p:nvSpPr>
+        <p:spPr>
+          <a:xfrm>
+            <a:off x="0" y="0"/>
+            <a:ext cx="0" cy="0"/>
+          </a:xfrm>
+          <a:prstGeom prst="rect">
+            <a:avLst/>
+          </a:prstGeom>
+          <a:noFill/>
+          <a:ln w="0">
+            <a:noFill/>
+          </a:ln>
+        </p:spPr>
+        <p:txBody>
+          <a:bodyPr lIns="90000" rIns="90000" tIns="-45000" bIns="-45000" anchor="t">
+            <a:noAutofit/>
+          </a:bodyPr>
+          <a:p>
+            <a:pPr indent="0">
+              <a:buNone/>
+            </a:pPr>
+            <a:endParaRPr b="0" lang="fr-FR" sz="1800" strike="noStrike" u="none">
+              <a:solidFill>
+                <a:srgbClr val="000000"/>
+              </a:solidFill>
+              <a:effectLst/>
+              <a:uFillTx/>
+              <a:latin typeface="Arial"/>
+            </a:endParaRPr>
+          </a:p>
+        </p:txBody>
+      </p:sp>
+      <p:sp>
+        <p:nvSpPr>
+          <p:cNvPr id="153" name="PlaceHolder 3"/>
           <p:cNvSpPr>
             <a:spLocks noGrp="1"/>
           </p:cNvSpPr>
@@ -714,7 +882,7 @@
                 <a:tab algn="l" pos="0"/>
               </a:tabLst>
             </a:pPr>
-            <a:fld id="{D34D1B19-BCA0-46A9-BE15-AB95761E7AFB}" type="slidenum">
+            <a:fld id="{A4168247-6272-4E14-AD51-4092B572EE20}" type="slidenum">
               <a:rPr b="0" lang="en-US" sz="1800" strike="noStrike" u="none">
                 <a:solidFill>
                   <a:schemeClr val="dk1"/>
@@ -761,7 +929,7 @@
       </p:grpSpPr>
       <p:sp>
         <p:nvSpPr>
-          <p:cNvPr id="123" name="PlaceHolder 1"/>
+          <p:cNvPr id="127" name="PlaceHolder 1"/>
           <p:cNvSpPr>
             <a:spLocks noGrp="1"/>
           </p:cNvSpPr>
@@ -784,7 +952,7 @@
       </p:sp>
       <p:sp>
         <p:nvSpPr>
-          <p:cNvPr id="124" name="PlaceHolder 2"/>
+          <p:cNvPr id="128" name="PlaceHolder 2"/>
           <p:cNvSpPr>
             <a:spLocks noGrp="1"/>
           </p:cNvSpPr>
@@ -826,7 +994,7 @@
       </p:sp>
       <p:sp>
         <p:nvSpPr>
-          <p:cNvPr id="125" name="PlaceHolder 3"/>
+          <p:cNvPr id="129" name="PlaceHolder 3"/>
           <p:cNvSpPr>
             <a:spLocks noGrp="1"/>
           </p:cNvSpPr>
@@ -881,7 +1049,7 @@
                 <a:tab algn="l" pos="0"/>
               </a:tabLst>
             </a:pPr>
-            <a:fld id="{BA9243A0-50AD-4A81-A1A3-5A90C35997E5}" type="slidenum">
+            <a:fld id="{392C4F97-A299-416D-849B-E8A6D6342965}" type="slidenum">
               <a:rPr b="0" lang="en-US" sz="1800" strike="noStrike" u="none">
                 <a:solidFill>
                   <a:schemeClr val="dk1"/>
@@ -928,7 +1096,7 @@
       </p:grpSpPr>
       <p:sp>
         <p:nvSpPr>
-          <p:cNvPr id="126" name="PlaceHolder 1"/>
+          <p:cNvPr id="130" name="PlaceHolder 1"/>
           <p:cNvSpPr>
             <a:spLocks noGrp="1"/>
           </p:cNvSpPr>
@@ -951,7 +1119,7 @@
       </p:sp>
       <p:sp>
         <p:nvSpPr>
-          <p:cNvPr id="127" name="PlaceHolder 2"/>
+          <p:cNvPr id="131" name="PlaceHolder 2"/>
           <p:cNvSpPr>
             <a:spLocks noGrp="1"/>
           </p:cNvSpPr>
@@ -993,7 +1161,7 @@
       </p:sp>
       <p:sp>
         <p:nvSpPr>
-          <p:cNvPr id="128" name="PlaceHolder 3"/>
+          <p:cNvPr id="132" name="PlaceHolder 3"/>
           <p:cNvSpPr>
             <a:spLocks noGrp="1"/>
           </p:cNvSpPr>
@@ -1048,7 +1216,7 @@
                 <a:tab algn="l" pos="0"/>
               </a:tabLst>
             </a:pPr>
-            <a:fld id="{7F6B979D-DEE5-416A-8D93-FF0C08CE741B}" type="slidenum">
+            <a:fld id="{4C363B45-95F7-497D-9430-C451829F28F7}" type="slidenum">
               <a:rPr b="0" lang="en-US" sz="1800" strike="noStrike" u="none">
                 <a:solidFill>
                   <a:schemeClr val="dk1"/>
@@ -1095,7 +1263,7 @@
       </p:grpSpPr>
       <p:sp>
         <p:nvSpPr>
-          <p:cNvPr id="129" name="PlaceHolder 1"/>
+          <p:cNvPr id="133" name="PlaceHolder 1"/>
           <p:cNvSpPr>
             <a:spLocks noGrp="1"/>
           </p:cNvSpPr>
@@ -1118,7 +1286,7 @@
       </p:sp>
       <p:sp>
         <p:nvSpPr>
-          <p:cNvPr id="130" name="PlaceHolder 2"/>
+          <p:cNvPr id="134" name="PlaceHolder 2"/>
           <p:cNvSpPr>
             <a:spLocks noGrp="1"/>
           </p:cNvSpPr>
@@ -1160,7 +1328,7 @@
       </p:sp>
       <p:sp>
         <p:nvSpPr>
-          <p:cNvPr id="131" name="PlaceHolder 3"/>
+          <p:cNvPr id="135" name="PlaceHolder 3"/>
           <p:cNvSpPr>
             <a:spLocks noGrp="1"/>
           </p:cNvSpPr>
@@ -1215,7 +1383,7 @@
                 <a:tab algn="l" pos="0"/>
               </a:tabLst>
             </a:pPr>
-            <a:fld id="{E3DD09C8-6741-42C8-96E8-C323F26ED609}" type="slidenum">
+            <a:fld id="{92834131-A786-4D1F-AD60-18D46722D9A6}" type="slidenum">
               <a:rPr b="0" lang="en-US" sz="1800" strike="noStrike" u="none">
                 <a:solidFill>
                   <a:schemeClr val="dk1"/>
@@ -1262,7 +1430,7 @@
       </p:grpSpPr>
       <p:sp>
         <p:nvSpPr>
-          <p:cNvPr id="132" name="PlaceHolder 1"/>
+          <p:cNvPr id="136" name="PlaceHolder 1"/>
           <p:cNvSpPr>
             <a:spLocks noGrp="1"/>
           </p:cNvSpPr>
@@ -1285,7 +1453,7 @@
       </p:sp>
       <p:sp>
         <p:nvSpPr>
-          <p:cNvPr id="133" name="PlaceHolder 2"/>
+          <p:cNvPr id="137" name="PlaceHolder 2"/>
           <p:cNvSpPr>
             <a:spLocks noGrp="1"/>
           </p:cNvSpPr>
@@ -1327,7 +1495,7 @@
       </p:sp>
       <p:sp>
         <p:nvSpPr>
-          <p:cNvPr id="134" name="PlaceHolder 3"/>
+          <p:cNvPr id="138" name="PlaceHolder 3"/>
           <p:cNvSpPr>
             <a:spLocks noGrp="1"/>
           </p:cNvSpPr>
@@ -1382,7 +1550,7 @@
                 <a:tab algn="l" pos="0"/>
               </a:tabLst>
             </a:pPr>
-            <a:fld id="{32F8B674-9D05-4D5B-9317-5CE9FD926249}" type="slidenum">
+            <a:fld id="{F1F391A1-C91F-4029-B3F9-0A0FC139E963}" type="slidenum">
               <a:rPr b="0" lang="en-US" sz="1800" strike="noStrike" u="none">
                 <a:solidFill>
                   <a:schemeClr val="dk1"/>
@@ -1429,7 +1597,7 @@
       </p:grpSpPr>
       <p:sp>
         <p:nvSpPr>
-          <p:cNvPr id="135" name="PlaceHolder 1"/>
+          <p:cNvPr id="139" name="PlaceHolder 1"/>
           <p:cNvSpPr>
             <a:spLocks noGrp="1"/>
           </p:cNvSpPr>
@@ -1452,7 +1620,7 @@
       </p:sp>
       <p:sp>
         <p:nvSpPr>
-          <p:cNvPr id="136" name="PlaceHolder 2"/>
+          <p:cNvPr id="140" name="PlaceHolder 2"/>
           <p:cNvSpPr>
             <a:spLocks noGrp="1"/>
           </p:cNvSpPr>
@@ -1494,7 +1662,7 @@
       </p:sp>
       <p:sp>
         <p:nvSpPr>
-          <p:cNvPr id="137" name="PlaceHolder 3"/>
+          <p:cNvPr id="141" name="PlaceHolder 3"/>
           <p:cNvSpPr>
             <a:spLocks noGrp="1"/>
           </p:cNvSpPr>
@@ -1549,7 +1717,7 @@
                 <a:tab algn="l" pos="0"/>
               </a:tabLst>
             </a:pPr>
-            <a:fld id="{3DF68067-C16B-4172-A2CE-86C128800FDA}" type="slidenum">
+            <a:fld id="{1F584802-63CD-4F18-A4D0-C5FF4B4ED0BB}" type="slidenum">
               <a:rPr b="0" lang="en-US" sz="1800" strike="noStrike" u="none">
                 <a:solidFill>
                   <a:schemeClr val="dk1"/>
@@ -1577,7 +1745,7 @@
 </p:notes>
 </file>
 
-<file path=ppt/notesSlides/notesSlide7.xml><?xml version="1.0" encoding="utf-8"?>
+<file path=ppt/notesSlides/notesSlide8.xml><?xml version="1.0" encoding="utf-8"?>
 <p:notes xmlns:a="http://schemas.openxmlformats.org/drawingml/2006/main" xmlns:p="http://schemas.openxmlformats.org/presentationml/2006/main" xmlns:r="http://schemas.openxmlformats.org/officeDocument/2006/relationships" xmlns:p14="http://schemas.microsoft.com/office/powerpoint/2010/main" xmlns:p15="http://schemas.microsoft.com/office/powerpoint/2012/main" xmlns:mc="http://schemas.openxmlformats.org/markup-compatibility/2006">
   <p:cSld>
     <p:spTree>
@@ -1596,7 +1764,7 @@
       </p:grpSpPr>
       <p:sp>
         <p:nvSpPr>
-          <p:cNvPr id="138" name="PlaceHolder 1"/>
+          <p:cNvPr id="142" name="PlaceHolder 1"/>
           <p:cNvSpPr>
             <a:spLocks noGrp="1"/>
           </p:cNvSpPr>
@@ -1619,7 +1787,7 @@
       </p:sp>
       <p:sp>
         <p:nvSpPr>
-          <p:cNvPr id="139" name="PlaceHolder 2"/>
+          <p:cNvPr id="143" name="PlaceHolder 2"/>
           <p:cNvSpPr>
             <a:spLocks noGrp="1"/>
           </p:cNvSpPr>
@@ -1661,7 +1829,7 @@
       </p:sp>
       <p:sp>
         <p:nvSpPr>
-          <p:cNvPr id="140" name="PlaceHolder 3"/>
+          <p:cNvPr id="144" name="PlaceHolder 3"/>
           <p:cNvSpPr>
             <a:spLocks noGrp="1"/>
           </p:cNvSpPr>
@@ -1716,7 +1884,7 @@
                 <a:tab algn="l" pos="0"/>
               </a:tabLst>
             </a:pPr>
-            <a:fld id="{06DBD384-38A5-4C95-A3FC-6A65A8F34D03}" type="slidenum">
+            <a:fld id="{8558122D-F703-449A-A8A8-1C6C535E70A0}" type="slidenum">
               <a:rPr b="0" lang="en-US" sz="1800" strike="noStrike" u="none">
                 <a:solidFill>
                   <a:schemeClr val="dk1"/>
@@ -1744,7 +1912,7 @@
 </p:notes>
 </file>
 
-<file path=ppt/notesSlides/notesSlide8.xml><?xml version="1.0" encoding="utf-8"?>
+<file path=ppt/notesSlides/notesSlide9.xml><?xml version="1.0" encoding="utf-8"?>
 <p:notes xmlns:a="http://schemas.openxmlformats.org/drawingml/2006/main" xmlns:p="http://schemas.openxmlformats.org/presentationml/2006/main" xmlns:r="http://schemas.openxmlformats.org/officeDocument/2006/relationships" xmlns:p14="http://schemas.microsoft.com/office/powerpoint/2010/main" xmlns:p15="http://schemas.microsoft.com/office/powerpoint/2012/main" xmlns:mc="http://schemas.openxmlformats.org/markup-compatibility/2006">
   <p:cSld>
     <p:spTree>
@@ -1763,7 +1931,7 @@
       </p:grpSpPr>
       <p:sp>
         <p:nvSpPr>
-          <p:cNvPr id="141" name="PlaceHolder 1"/>
+          <p:cNvPr id="145" name="PlaceHolder 1"/>
           <p:cNvSpPr>
             <a:spLocks noGrp="1"/>
           </p:cNvSpPr>
@@ -1786,7 +1954,7 @@
       </p:sp>
       <p:sp>
         <p:nvSpPr>
-          <p:cNvPr id="142" name="PlaceHolder 2"/>
+          <p:cNvPr id="146" name="PlaceHolder 2"/>
           <p:cNvSpPr>
             <a:spLocks noGrp="1"/>
           </p:cNvSpPr>
@@ -1828,7 +1996,7 @@
       </p:sp>
       <p:sp>
         <p:nvSpPr>
-          <p:cNvPr id="143" name="PlaceHolder 3"/>
+          <p:cNvPr id="147" name="PlaceHolder 3"/>
           <p:cNvSpPr>
             <a:spLocks noGrp="1"/>
           </p:cNvSpPr>
@@ -1883,174 +2051,7 @@
                 <a:tab algn="l" pos="0"/>
               </a:tabLst>
             </a:pPr>
-            <a:fld id="{EA61D0EB-45FA-43F5-A42A-9FBC45689AC8}" type="slidenum">
-              <a:rPr b="0" lang="en-US" sz="1800" strike="noStrike" u="none">
-                <a:solidFill>
-                  <a:schemeClr val="dk1"/>
-                </a:solidFill>
-                <a:effectLst/>
-                <a:uFillTx/>
-                <a:latin typeface="+mn-lt"/>
-                <a:ea typeface="+mn-ea"/>
-              </a:rPr>
-              <a:t>&lt;numéro&gt;</a:t>
-            </a:fld>
-            <a:endParaRPr b="0" lang="fr-FR" sz="1800" strike="noStrike" u="none">
-              <a:solidFill>
-                <a:srgbClr val="000000"/>
-              </a:solidFill>
-              <a:effectLst/>
-              <a:uFillTx/>
-              <a:latin typeface="Times New Roman"/>
-            </a:endParaRPr>
-          </a:p>
-        </p:txBody>
-      </p:sp>
-    </p:spTree>
-  </p:cSld>
-</p:notes>
-</file>
-
-<file path=ppt/notesSlides/notesSlide9.xml><?xml version="1.0" encoding="utf-8"?>
-<p:notes xmlns:a="http://schemas.openxmlformats.org/drawingml/2006/main" xmlns:p="http://schemas.openxmlformats.org/presentationml/2006/main" xmlns:r="http://schemas.openxmlformats.org/officeDocument/2006/relationships" xmlns:p14="http://schemas.microsoft.com/office/powerpoint/2010/main" xmlns:p15="http://schemas.microsoft.com/office/powerpoint/2012/main" xmlns:mc="http://schemas.openxmlformats.org/markup-compatibility/2006">
-  <p:cSld>
-    <p:spTree>
-      <p:nvGrpSpPr>
-        <p:cNvPr id="1" name=""/>
-        <p:cNvGrpSpPr/>
-        <p:nvPr/>
-      </p:nvGrpSpPr>
-      <p:grpSpPr>
-        <a:xfrm>
-          <a:off x="0" y="0"/>
-          <a:ext cx="0" cy="0"/>
-          <a:chOff x="0" y="0"/>
-          <a:chExt cx="0" cy="0"/>
-        </a:xfrm>
-      </p:grpSpPr>
-      <p:sp>
-        <p:nvSpPr>
-          <p:cNvPr id="144" name="PlaceHolder 1"/>
-          <p:cNvSpPr>
-            <a:spLocks noGrp="1"/>
-          </p:cNvSpPr>
-          <p:nvPr>
-            <p:ph type="sldImg"/>
-          </p:nvPr>
-        </p:nvSpPr>
-        <p:spPr>
-          <a:xfrm>
-            <a:off x="-360" y="-360"/>
-            <a:ext cx="0" cy="0"/>
-          </a:xfrm>
-          <a:prstGeom prst="rect">
-            <a:avLst/>
-          </a:prstGeom>
-          <a:ln w="0">
-            <a:noFill/>
-          </a:ln>
-        </p:spPr>
-      </p:sp>
-      <p:sp>
-        <p:nvSpPr>
-          <p:cNvPr id="145" name="PlaceHolder 2"/>
-          <p:cNvSpPr>
-            <a:spLocks noGrp="1"/>
-          </p:cNvSpPr>
-          <p:nvPr>
-            <p:ph type="body"/>
-          </p:nvPr>
-        </p:nvSpPr>
-        <p:spPr>
-          <a:xfrm>
-            <a:off x="0" y="0"/>
-            <a:ext cx="0" cy="0"/>
-          </a:xfrm>
-          <a:prstGeom prst="rect">
-            <a:avLst/>
-          </a:prstGeom>
-          <a:noFill/>
-          <a:ln w="0">
-            <a:noFill/>
-          </a:ln>
-        </p:spPr>
-        <p:txBody>
-          <a:bodyPr lIns="90000" rIns="90000" tIns="-45000" bIns="-45000" anchor="t">
-            <a:noAutofit/>
-          </a:bodyPr>
-          <a:p>
-            <a:pPr indent="0">
-              <a:buNone/>
-            </a:pPr>
-            <a:endParaRPr b="0" lang="fr-FR" sz="1800" strike="noStrike" u="none">
-              <a:solidFill>
-                <a:srgbClr val="000000"/>
-              </a:solidFill>
-              <a:effectLst/>
-              <a:uFillTx/>
-              <a:latin typeface="Arial"/>
-            </a:endParaRPr>
-          </a:p>
-        </p:txBody>
-      </p:sp>
-      <p:sp>
-        <p:nvSpPr>
-          <p:cNvPr id="146" name="PlaceHolder 3"/>
-          <p:cNvSpPr>
-            <a:spLocks noGrp="1"/>
-          </p:cNvSpPr>
-          <p:nvPr>
-            <p:ph type="sldNum" idx="12"/>
-          </p:nvPr>
-        </p:nvSpPr>
-        <p:spPr>
-          <a:xfrm>
-            <a:off x="0" y="0"/>
-            <a:ext cx="0" cy="0"/>
-          </a:xfrm>
-          <a:prstGeom prst="rect">
-            <a:avLst/>
-          </a:prstGeom>
-          <a:noFill/>
-          <a:ln w="0">
-            <a:noFill/>
-          </a:ln>
-        </p:spPr>
-        <p:txBody>
-          <a:bodyPr lIns="90000" rIns="90000" tIns="-45000" bIns="-45000" anchor="t">
-            <a:noAutofit/>
-          </a:bodyPr>
-          <a:lstStyle>
-            <a:lvl1pPr indent="0" algn="r" defTabSz="914400">
-              <a:lnSpc>
-                <a:spcPct val="100000"/>
-              </a:lnSpc>
-              <a:buNone/>
-              <a:tabLst>
-                <a:tab algn="l" pos="0"/>
-              </a:tabLst>
-              <a:defRPr b="0" lang="en-US" sz="1800" strike="noStrike" u="none">
-                <a:solidFill>
-                  <a:schemeClr val="dk1"/>
-                </a:solidFill>
-                <a:effectLst/>
-                <a:uFillTx/>
-                <a:latin typeface="+mn-lt"/>
-                <a:ea typeface="+mn-ea"/>
-              </a:defRPr>
-            </a:lvl1pPr>
-          </a:lstStyle>
-          <a:p>
-            <a:pPr indent="0" algn="r" defTabSz="914400">
-              <a:lnSpc>
-                <a:spcPct val="100000"/>
-              </a:lnSpc>
-              <a:buNone/>
-              <a:tabLst>
-                <a:tab algn="l" pos="0"/>
-              </a:tabLst>
-            </a:pPr>
-            <a:fld id="{1BB7C9C3-CBA6-437E-A8C5-01DEDB00205E}" type="slidenum">
+            <a:fld id="{AC96F2DC-E5DC-4CCB-8F09-E5AA3CD442F2}" type="slidenum">
               <a:rPr b="0" lang="en-US" sz="1800" strike="noStrike" u="none">
                 <a:solidFill>
                   <a:schemeClr val="dk1"/>
@@ -2111,7 +2112,7 @@
         <p:spPr>
           <a:xfrm>
             <a:off x="548640" y="6446880"/>
-            <a:ext cx="6399000" cy="272520"/>
+            <a:ext cx="6398640" cy="272160"/>
           </a:xfrm>
           <a:prstGeom prst="rect">
             <a:avLst/>
@@ -2172,7 +2173,7 @@
         <p:spPr>
           <a:xfrm>
             <a:off x="11185920" y="6446880"/>
-            <a:ext cx="455400" cy="272520"/>
+            <a:ext cx="455040" cy="272160"/>
           </a:xfrm>
           <a:prstGeom prst="rect">
             <a:avLst/>
@@ -2238,7 +2239,7 @@
         <p:spPr>
           <a:xfrm>
             <a:off x="10375920" y="356040"/>
-            <a:ext cx="1268280" cy="649800"/>
+            <a:ext cx="1267920" cy="649440"/>
           </a:xfrm>
           <a:prstGeom prst="rect">
             <a:avLst/>
@@ -2262,7 +2263,7 @@
         <p:spPr>
           <a:xfrm>
             <a:off x="609480" y="273600"/>
-            <a:ext cx="10971720" cy="1144080"/>
+            <a:ext cx="10971360" cy="1143720"/>
           </a:xfrm>
           <a:prstGeom prst="rect">
             <a:avLst/>
@@ -2321,7 +2322,7 @@
         <p:spPr>
           <a:xfrm>
             <a:off x="609480" y="1604520"/>
-            <a:ext cx="10971720" cy="3976560"/>
+            <a:ext cx="10971360" cy="3976200"/>
           </a:xfrm>
           <a:prstGeom prst="rect">
             <a:avLst/>
@@ -2620,7 +2621,7 @@
         <p:spPr>
           <a:xfrm>
             <a:off x="548640" y="6446880"/>
-            <a:ext cx="6399000" cy="272520"/>
+            <a:ext cx="6398640" cy="272160"/>
           </a:xfrm>
           <a:prstGeom prst="rect">
             <a:avLst/>
@@ -2681,7 +2682,7 @@
         <p:spPr>
           <a:xfrm>
             <a:off x="11185920" y="6446880"/>
-            <a:ext cx="455400" cy="272520"/>
+            <a:ext cx="455040" cy="272160"/>
           </a:xfrm>
           <a:prstGeom prst="rect">
             <a:avLst/>
@@ -2747,7 +2748,7 @@
         <p:spPr>
           <a:xfrm>
             <a:off x="10375920" y="356040"/>
-            <a:ext cx="1268280" cy="649800"/>
+            <a:ext cx="1267920" cy="649440"/>
           </a:xfrm>
           <a:prstGeom prst="rect">
             <a:avLst/>
@@ -2771,7 +2772,7 @@
         <p:spPr>
           <a:xfrm>
             <a:off x="609480" y="273600"/>
-            <a:ext cx="10971720" cy="1144080"/>
+            <a:ext cx="10971360" cy="1143720"/>
           </a:xfrm>
           <a:prstGeom prst="rect">
             <a:avLst/>
@@ -2830,7 +2831,7 @@
         <p:spPr>
           <a:xfrm>
             <a:off x="609480" y="1604520"/>
-            <a:ext cx="10971720" cy="3976560"/>
+            <a:ext cx="10971360" cy="3976200"/>
           </a:xfrm>
           <a:prstGeom prst="rect">
             <a:avLst/>
@@ -3129,7 +3130,7 @@
         <p:spPr>
           <a:xfrm>
             <a:off x="548640" y="6446880"/>
-            <a:ext cx="6399000" cy="272520"/>
+            <a:ext cx="6398640" cy="272160"/>
           </a:xfrm>
           <a:prstGeom prst="rect">
             <a:avLst/>
@@ -3190,7 +3191,7 @@
         <p:spPr>
           <a:xfrm>
             <a:off x="11185920" y="6446880"/>
-            <a:ext cx="455400" cy="272520"/>
+            <a:ext cx="455040" cy="272160"/>
           </a:xfrm>
           <a:prstGeom prst="rect">
             <a:avLst/>
@@ -3256,7 +3257,7 @@
         <p:spPr>
           <a:xfrm>
             <a:off x="10375920" y="356040"/>
-            <a:ext cx="1268280" cy="649800"/>
+            <a:ext cx="1267920" cy="649440"/>
           </a:xfrm>
           <a:prstGeom prst="rect">
             <a:avLst/>
@@ -3280,7 +3281,7 @@
         <p:spPr>
           <a:xfrm>
             <a:off x="609480" y="273600"/>
-            <a:ext cx="10971720" cy="1144080"/>
+            <a:ext cx="10971360" cy="1143720"/>
           </a:xfrm>
           <a:prstGeom prst="rect">
             <a:avLst/>
@@ -3339,7 +3340,7 @@
         <p:spPr>
           <a:xfrm>
             <a:off x="609480" y="1604520"/>
-            <a:ext cx="10971720" cy="3976560"/>
+            <a:ext cx="10971360" cy="3976200"/>
           </a:xfrm>
           <a:prstGeom prst="rect">
             <a:avLst/>
@@ -3666,7 +3667,7 @@
         <p:spPr>
           <a:xfrm>
             <a:off x="9392760" y="-1425960"/>
-            <a:ext cx="4753080" cy="4753080"/>
+            <a:ext cx="4752720" cy="4752720"/>
           </a:xfrm>
           <a:prstGeom prst="ellipse">
             <a:avLst/>
@@ -3714,7 +3715,7 @@
         <p:spPr>
           <a:xfrm>
             <a:off x="-1828800" y="4206240"/>
-            <a:ext cx="4204440" cy="4204440"/>
+            <a:ext cx="4204080" cy="4204080"/>
           </a:xfrm>
           <a:prstGeom prst="ellipse">
             <a:avLst/>
@@ -3762,7 +3763,7 @@
         <p:spPr>
           <a:xfrm>
             <a:off x="777240" y="1828800"/>
-            <a:ext cx="10513800" cy="1552680"/>
+            <a:ext cx="10513440" cy="1552320"/>
           </a:xfrm>
           <a:prstGeom prst="rect">
             <a:avLst/>
@@ -3823,7 +3824,7 @@
         <p:spPr>
           <a:xfrm>
             <a:off x="822960" y="3246120"/>
-            <a:ext cx="6348240" cy="546840"/>
+            <a:ext cx="6347880" cy="546480"/>
           </a:xfrm>
           <a:prstGeom prst="rect">
             <a:avLst/>
@@ -3890,7 +3891,7 @@
         <p:spPr>
           <a:xfrm>
             <a:off x="822960" y="4160520"/>
-            <a:ext cx="1415520" cy="309240"/>
+            <a:ext cx="1415160" cy="308880"/>
           </a:xfrm>
           <a:prstGeom prst="roundRect">
             <a:avLst>
@@ -3940,7 +3941,7 @@
         <p:spPr>
           <a:xfrm>
             <a:off x="822960" y="4160520"/>
-            <a:ext cx="1415520" cy="309240"/>
+            <a:ext cx="1415160" cy="308880"/>
           </a:xfrm>
           <a:prstGeom prst="rect">
             <a:avLst/>
@@ -4001,7 +4002,7 @@
         <p:spPr>
           <a:xfrm>
             <a:off x="2377440" y="4160520"/>
-            <a:ext cx="1415520" cy="309240"/>
+            <a:ext cx="1415160" cy="308880"/>
           </a:xfrm>
           <a:prstGeom prst="roundRect">
             <a:avLst>
@@ -4051,7 +4052,7 @@
         <p:spPr>
           <a:xfrm>
             <a:off x="2377440" y="4160520"/>
-            <a:ext cx="1415520" cy="309240"/>
+            <a:ext cx="1415160" cy="308880"/>
           </a:xfrm>
           <a:prstGeom prst="rect">
             <a:avLst/>
@@ -4155,7 +4156,7 @@
         <p:spPr>
           <a:xfrm>
             <a:off x="822960" y="5897880"/>
-            <a:ext cx="5484600" cy="318240"/>
+            <a:ext cx="5484240" cy="317880"/>
           </a:xfrm>
           <a:prstGeom prst="rect">
             <a:avLst/>
@@ -4216,7 +4217,7 @@
         <p:spPr>
           <a:xfrm>
             <a:off x="7429680" y="3759120"/>
-            <a:ext cx="3808080" cy="1496880"/>
+            <a:ext cx="3807720" cy="1496520"/>
           </a:xfrm>
           <a:prstGeom prst="roundRect">
             <a:avLst>
@@ -4274,7 +4275,7 @@
         <p:spPr>
           <a:xfrm>
             <a:off x="7429680" y="5384880"/>
-            <a:ext cx="3808080" cy="277560"/>
+            <a:ext cx="3807720" cy="277200"/>
           </a:xfrm>
           <a:prstGeom prst="rect">
             <a:avLst/>
@@ -4336,7 +4337,7 @@
         <p:spPr>
           <a:xfrm>
             <a:off x="825480" y="457200"/>
-            <a:ext cx="1395360" cy="715320"/>
+            <a:ext cx="1395000" cy="714960"/>
           </a:xfrm>
           <a:prstGeom prst="rect">
             <a:avLst/>
@@ -4360,7 +4361,7 @@
         <p:spPr>
           <a:xfrm>
             <a:off x="7429680" y="478800"/>
-            <a:ext cx="4537800" cy="671760"/>
+            <a:ext cx="4537440" cy="671400"/>
           </a:xfrm>
           <a:prstGeom prst="rect">
             <a:avLst/>
@@ -4380,9 +4381,9 @@
         <p:grpSpPr>
           <a:xfrm>
             <a:off x="7936200" y="3847680"/>
-            <a:ext cx="2794680" cy="1319760"/>
+            <a:ext cx="2794320" cy="1319400"/>
             <a:chOff x="7936200" y="3847680"/>
-            <a:chExt cx="2794680" cy="1319760"/>
+            <a:chExt cx="2794320" cy="1319400"/>
           </a:xfrm>
         </p:grpSpPr>
         <p:grpSp>
@@ -4394,9 +4395,9 @@
           <p:grpSpPr>
             <a:xfrm>
               <a:off x="9343440" y="3847680"/>
-              <a:ext cx="1387440" cy="1256760"/>
+              <a:ext cx="1387080" cy="1256400"/>
               <a:chOff x="9343440" y="3847680"/>
-              <a:chExt cx="1387440" cy="1256760"/>
+              <a:chExt cx="1387080" cy="1256400"/>
             </a:xfrm>
           </p:grpSpPr>
           <p:pic>
@@ -4413,7 +4414,7 @@
             <p:spPr>
               <a:xfrm>
                 <a:off x="9392760" y="3847680"/>
-                <a:ext cx="1292760" cy="774360"/>
+                <a:ext cx="1292400" cy="774000"/>
               </a:xfrm>
               <a:prstGeom prst="rect">
                 <a:avLst/>
@@ -4437,7 +4438,7 @@
             <p:spPr>
               <a:xfrm>
                 <a:off x="9343440" y="4576320"/>
-                <a:ext cx="961560" cy="463680"/>
+                <a:ext cx="961200" cy="463320"/>
               </a:xfrm>
               <a:prstGeom prst="rect">
                 <a:avLst/>
@@ -4461,7 +4462,7 @@
             <p:spPr>
               <a:xfrm>
                 <a:off x="10378800" y="4584960"/>
-                <a:ext cx="352080" cy="519480"/>
+                <a:ext cx="351720" cy="519120"/>
               </a:xfrm>
               <a:prstGeom prst="rect">
                 <a:avLst/>
@@ -4486,7 +4487,7 @@
           <p:spPr>
             <a:xfrm>
               <a:off x="7936200" y="3852360"/>
-              <a:ext cx="1292760" cy="1315080"/>
+              <a:ext cx="1292400" cy="1314720"/>
             </a:xfrm>
             <a:prstGeom prst="rect">
               <a:avLst/>
@@ -4514,6 +4515,13 @@
 <file path=ppt/slides/slide10.xml><?xml version="1.0" encoding="utf-8"?>
 <p:sld xmlns:a="http://schemas.openxmlformats.org/drawingml/2006/main" xmlns:p="http://schemas.openxmlformats.org/presentationml/2006/main" xmlns:r="http://schemas.openxmlformats.org/officeDocument/2006/relationships" xmlns:p14="http://schemas.microsoft.com/office/powerpoint/2010/main" xmlns:p15="http://schemas.microsoft.com/office/powerpoint/2012/main" xmlns:mc="http://schemas.openxmlformats.org/markup-compatibility/2006">
   <p:cSld>
+    <p:bg>
+      <p:bgPr>
+        <a:solidFill>
+          <a:srgbClr val="ffffff"/>
+        </a:solidFill>
+      </p:bgPr>
+    </p:bg>
     <p:spTree>
       <p:nvGrpSpPr>
         <p:cNvPr id="1" name=""/>
@@ -4530,14 +4538,14 @@
       </p:grpSpPr>
       <p:sp>
         <p:nvSpPr>
-          <p:cNvPr id="73" name="Text 34"/>
+          <p:cNvPr id="73" name="Text 31"/>
           <p:cNvSpPr/>
           <p:nvPr/>
         </p:nvSpPr>
         <p:spPr>
           <a:xfrm>
             <a:off x="548640" y="384120"/>
-            <a:ext cx="9142200" cy="290880"/>
+            <a:ext cx="9141840" cy="290520"/>
           </a:xfrm>
           <a:prstGeom prst="rect">
             <a:avLst/>
@@ -4562,12 +4570,6 @@
               <a:lnSpc>
                 <a:spcPct val="100000"/>
               </a:lnSpc>
-              <a:spcBef>
-                <a:spcPts val="1191"/>
-              </a:spcBef>
-              <a:spcAft>
-                <a:spcPts val="992"/>
-              </a:spcAft>
               <a:tabLst>
                 <a:tab algn="l" pos="0"/>
               </a:tabLst>
@@ -4581,7 +4583,7 @@
                 <a:uFillTx/>
                 <a:latin typeface="Calibri"/>
               </a:rPr>
-              <a:t>General AI Methodology</a:t>
+              <a:t>Realistic datasets</a:t>
             </a:r>
             <a:endParaRPr b="0" lang="fr-FR" sz="1200" strike="noStrike" u="none">
               <a:solidFill>
@@ -4596,14 +4598,14 @@
       </p:sp>
       <p:sp>
         <p:nvSpPr>
-          <p:cNvPr id="74" name="Text 35"/>
+          <p:cNvPr id="74" name="Text 32"/>
           <p:cNvSpPr/>
           <p:nvPr/>
         </p:nvSpPr>
         <p:spPr>
           <a:xfrm>
             <a:off x="548640" y="658440"/>
-            <a:ext cx="11062440" cy="821160"/>
+            <a:ext cx="11062080" cy="820800"/>
           </a:xfrm>
           <a:prstGeom prst="rect">
             <a:avLst/>
@@ -4647,7 +4649,7 @@
                 <a:uFillTx/>
                 <a:latin typeface="Cambria"/>
               </a:rPr>
-              <a:t>General AI Methodology</a:t>
+              <a:t>Why Realistic AI Datasets?</a:t>
             </a:r>
             <a:endParaRPr b="0" lang="fr-FR" sz="3000" strike="noStrike" u="none">
               <a:solidFill>
@@ -4662,14 +4664,14 @@
       </p:sp>
       <p:sp>
         <p:nvSpPr>
-          <p:cNvPr id="75" name="Text 36"/>
+          <p:cNvPr id="75" name="Text 33"/>
           <p:cNvSpPr/>
           <p:nvPr/>
         </p:nvSpPr>
         <p:spPr>
           <a:xfrm>
             <a:off x="11185920" y="6446520"/>
-            <a:ext cx="455400" cy="272520"/>
+            <a:ext cx="455040" cy="272160"/>
           </a:xfrm>
           <a:prstGeom prst="rect">
             <a:avLst/>
@@ -4730,7 +4732,7 @@
         <p:spPr>
           <a:xfrm>
             <a:off x="540000" y="1800000"/>
-            <a:ext cx="10978920" cy="4604760"/>
+            <a:ext cx="10978560" cy="3160080"/>
           </a:xfrm>
           <a:prstGeom prst="rect">
             <a:avLst/>
@@ -4751,21 +4753,13 @@
             <a:spAutoFit/>
           </a:bodyPr>
           <a:p>
-            <a:pPr marL="343080" indent="-343080" defTabSz="343080">
+            <a:pPr defTabSz="343080">
               <a:lnSpc>
                 <a:spcPct val="100000"/>
               </a:lnSpc>
               <a:spcBef>
-                <a:spcPts val="1191"/>
+                <a:spcPts val="479"/>
               </a:spcBef>
-              <a:spcAft>
-                <a:spcPts val="992"/>
-              </a:spcAft>
-              <a:buClr>
-                <a:srgbClr val="000000"/>
-              </a:buClr>
-              <a:buFont typeface="Arial"/>
-              <a:buChar char="•"/>
               <a:tabLst>
                 <a:tab algn="l" pos="0"/>
               </a:tabLst>
@@ -4779,7 +4773,7 @@
                 <a:uFillTx/>
                 <a:latin typeface="Calibri"/>
               </a:rPr>
-              <a:t>AI as a Universal Function Approximator</a:t>
+              <a:t>Model optimization</a:t>
             </a:r>
             <a:r>
               <a:rPr b="0" lang="fr-FR" sz="2400" strike="noStrike" u="none">
@@ -4791,83 +4785,6 @@
                 <a:latin typeface="Calibri"/>
               </a:rPr>
               <a:t>:</a:t>
-            </a:r>
-            <a:endParaRPr b="0" lang="fr-FR" sz="2400" strike="noStrike" u="none">
-              <a:solidFill>
-                <a:srgbClr val="000000"/>
-              </a:solidFill>
-              <a:effectLst/>
-              <a:uFillTx/>
-              <a:latin typeface="Arial"/>
-            </a:endParaRPr>
-          </a:p>
-          <a:p>
-            <a:pPr marL="343080" indent="-343080" defTabSz="343080">
-              <a:lnSpc>
-                <a:spcPct val="100000"/>
-              </a:lnSpc>
-              <a:buClr>
-                <a:srgbClr val="000000"/>
-              </a:buClr>
-              <a:buFont typeface="Arial"/>
-              <a:buChar char="•"/>
-              <a:tabLst>
-                <a:tab algn="l" pos="0"/>
-              </a:tabLst>
-            </a:pPr>
-            <a:r>
-              <a:rPr b="1" lang="fr-FR" sz="2400" strike="noStrike" u="none">
-                <a:solidFill>
-                  <a:srgbClr val="000000"/>
-                </a:solidFill>
-                <a:effectLst/>
-                <a:uFillTx/>
-                <a:latin typeface="Calibri"/>
-              </a:rPr>
-              <a:t>Black Box Concept:</a:t>
-            </a:r>
-            <a:br>
-              <a:rPr sz="2400"/>
-            </a:br>
-            <a:r>
-              <a:rPr b="1" lang="fr-FR" sz="2400" strike="noStrike" u="none">
-                <a:solidFill>
-                  <a:srgbClr val="000000"/>
-                </a:solidFill>
-                <a:effectLst/>
-                <a:uFillTx/>
-                <a:latin typeface="Calibri"/>
-              </a:rPr>
-              <a:t> </a:t>
-            </a:r>
-            <a:endParaRPr b="0" lang="fr-FR" sz="2400" strike="noStrike" u="none">
-              <a:solidFill>
-                <a:srgbClr val="000000"/>
-              </a:solidFill>
-              <a:effectLst/>
-              <a:uFillTx/>
-              <a:latin typeface="Arial"/>
-            </a:endParaRPr>
-          </a:p>
-          <a:p>
-            <a:pPr marL="720000" defTabSz="343080">
-              <a:lnSpc>
-                <a:spcPct val="100000"/>
-              </a:lnSpc>
-              <a:tabLst>
-                <a:tab algn="l" pos="0"/>
-              </a:tabLst>
-            </a:pPr>
-            <a:r>
-              <a:rPr b="1" lang="fr-FR" sz="2400" strike="noStrike" u="none">
-                <a:solidFill>
-                  <a:srgbClr val="ff00ff"/>
-                </a:solidFill>
-                <a:effectLst/>
-                <a:uFillTx/>
-                <a:latin typeface="FreeMono"/>
-              </a:rPr>
-              <a:t>Input → [AI Model] → Output</a:t>
             </a:r>
             <a:br>
               <a:rPr sz="2400"/>
@@ -4886,6 +4803,9 @@
               <a:lnSpc>
                 <a:spcPct val="100000"/>
               </a:lnSpc>
+              <a:spcBef>
+                <a:spcPts val="479"/>
+              </a:spcBef>
               <a:buClr>
                 <a:srgbClr val="000000"/>
               </a:buClr>
@@ -4898,74 +4818,72 @@
             <a:r>
               <a:rPr b="1" lang="fr-FR" sz="2400" strike="noStrike" u="none">
                 <a:solidFill>
-                  <a:srgbClr val="000000"/>
-                </a:solidFill>
-                <a:effectLst/>
-                <a:uFillTx/>
-                <a:latin typeface="Calibri"/>
-                <a:ea typeface="Unifont"/>
-              </a:rPr>
-              <a:t>Universal Approximation Theorem</a:t>
+                  <a:schemeClr val="dk1"/>
+                </a:solidFill>
+                <a:effectLst/>
+                <a:uFillTx/>
+                <a:latin typeface="Calibri"/>
+              </a:rPr>
+              <a:t>Purpose</a:t>
             </a:r>
             <a:r>
               <a:rPr b="0" lang="fr-FR" sz="2400" strike="noStrike" u="none">
                 <a:solidFill>
-                  <a:srgbClr val="000000"/>
-                </a:solidFill>
-                <a:effectLst/>
-                <a:uFillTx/>
-                <a:latin typeface="Calibri"/>
-                <a:ea typeface="Unifont"/>
-              </a:rPr>
-              <a:t>: A neural network can </a:t>
+                  <a:schemeClr val="dk1"/>
+                </a:solidFill>
+                <a:effectLst/>
+                <a:uFillTx/>
+                <a:latin typeface="Calibri"/>
+              </a:rPr>
+              <a:t>: Find best parameters to get min/max signal.</a:t>
+            </a:r>
+            <a:endParaRPr b="0" lang="fr-FR" sz="2400" strike="noStrike" u="none">
+              <a:solidFill>
+                <a:srgbClr val="000000"/>
+              </a:solidFill>
+              <a:effectLst/>
+              <a:uFillTx/>
+              <a:latin typeface="Arial"/>
+            </a:endParaRPr>
+          </a:p>
+          <a:p>
+            <a:pPr marL="343080" indent="-343080" defTabSz="343080">
+              <a:lnSpc>
+                <a:spcPct val="100000"/>
+              </a:lnSpc>
+              <a:spcBef>
+                <a:spcPts val="479"/>
+              </a:spcBef>
+              <a:buClr>
+                <a:srgbClr val="000000"/>
+              </a:buClr>
+              <a:buFont typeface="Arial"/>
+              <a:buChar char="•"/>
+              <a:tabLst>
+                <a:tab algn="l" pos="0"/>
+              </a:tabLst>
+            </a:pPr>
+            <a:r>
+              <a:rPr b="1" lang="fr-FR" sz="2400" strike="noStrike" u="none">
+                <a:solidFill>
+                  <a:schemeClr val="dk1"/>
+                </a:solidFill>
+                <a:effectLst/>
+                <a:uFillTx/>
+                <a:latin typeface="Calibri"/>
+              </a:rPr>
+              <a:t>Pipeline</a:t>
             </a:r>
             <a:r>
               <a:rPr b="0" lang="fr-FR" sz="2400" strike="noStrike" u="none">
                 <a:solidFill>
-                  <a:srgbClr val="008000"/>
-                </a:solidFill>
-                <a:effectLst/>
-                <a:uFillTx/>
-                <a:latin typeface="Calibri"/>
-                <a:ea typeface="Unifont"/>
-              </a:rPr>
-              <a:t>approximate</a:t>
-            </a:r>
-            <a:r>
-              <a:rPr b="0" lang="fr-FR" sz="2400" strike="noStrike" u="none">
-                <a:solidFill>
-                  <a:srgbClr val="000000"/>
-                </a:solidFill>
-                <a:effectLst/>
-                <a:uFillTx/>
-                <a:latin typeface="Calibri"/>
-                <a:ea typeface="Unifont"/>
-              </a:rPr>
-              <a:t> </a:t>
-            </a:r>
-            <a:r>
-              <a:rPr b="0" lang="fr-FR" sz="2400" strike="noStrike" u="none">
-                <a:solidFill>
-                  <a:srgbClr val="008000"/>
-                </a:solidFill>
-                <a:effectLst/>
-                <a:uFillTx/>
-                <a:latin typeface="Calibri"/>
-                <a:ea typeface="Unifont"/>
-              </a:rPr>
-              <a:t>any continuous function</a:t>
-            </a:r>
-            <a:r>
-              <a:rPr b="0" lang="fr-FR" sz="2400" strike="noStrike" u="none">
-                <a:solidFill>
-                  <a:srgbClr val="000000"/>
-                </a:solidFill>
-                <a:effectLst/>
-                <a:uFillTx/>
-                <a:latin typeface="Calibri"/>
-                <a:ea typeface="Unifont"/>
-              </a:rPr>
-              <a:t> given sufficient data and complexity.</a:t>
+                  <a:schemeClr val="dk1"/>
+                </a:solidFill>
+                <a:effectLst/>
+                <a:uFillTx/>
+                <a:latin typeface="Calibri"/>
+              </a:rPr>
+              <a:t>:</a:t>
             </a:r>
             <a:br>
               <a:rPr sz="2400"/>
@@ -4973,12 +4891,11 @@
             <a:r>
               <a:rPr b="0" lang="fr-FR" sz="2400" strike="noStrike" u="none">
                 <a:solidFill>
-                  <a:srgbClr val="000000"/>
-                </a:solidFill>
-                <a:effectLst/>
-                <a:uFillTx/>
-                <a:latin typeface="Calibri"/>
-                <a:ea typeface="Unifont"/>
+                  <a:schemeClr val="dk1"/>
+                </a:solidFill>
+                <a:effectLst/>
+                <a:uFillTx/>
+                <a:latin typeface="Calibri"/>
               </a:rPr>
               <a:t> </a:t>
             </a:r>
@@ -4992,10 +4909,48 @@
             </a:endParaRPr>
           </a:p>
           <a:p>
+            <a:pPr marL="685800" defTabSz="343080">
+              <a:lnSpc>
+                <a:spcPct val="100000"/>
+              </a:lnSpc>
+              <a:spcBef>
+                <a:spcPts val="420"/>
+              </a:spcBef>
+              <a:tabLst>
+                <a:tab algn="l" pos="0"/>
+              </a:tabLst>
+            </a:pPr>
+            <a:r>
+              <a:rPr b="1" lang="fr-FR" sz="2100" strike="noStrike" u="none">
+                <a:solidFill>
+                  <a:srgbClr val="ff00ff"/>
+                </a:solidFill>
+                <a:effectLst/>
+                <a:uFillTx/>
+                <a:latin typeface="Courier New"/>
+              </a:rPr>
+              <a:t>Parameters → [Optimizer] → Best Parameters</a:t>
+            </a:r>
+            <a:br>
+              <a:rPr sz="2100"/>
+            </a:br>
+            <a:endParaRPr b="0" lang="fr-FR" sz="2100" strike="noStrike" u="none">
+              <a:solidFill>
+                <a:srgbClr val="000000"/>
+              </a:solidFill>
+              <a:effectLst/>
+              <a:uFillTx/>
+              <a:latin typeface="Arial"/>
+            </a:endParaRPr>
+          </a:p>
+          <a:p>
             <a:pPr marL="343080" indent="-343080" defTabSz="343080">
               <a:lnSpc>
                 <a:spcPct val="100000"/>
               </a:lnSpc>
+              <a:spcBef>
+                <a:spcPts val="479"/>
+              </a:spcBef>
               <a:buClr>
                 <a:srgbClr val="000000"/>
               </a:buClr>
@@ -5008,84 +4963,24 @@
             <a:r>
               <a:rPr b="1" lang="fr-FR" sz="2400" strike="noStrike" u="none">
                 <a:solidFill>
-                  <a:srgbClr val="000000"/>
-                </a:solidFill>
-                <a:effectLst/>
-                <a:uFillTx/>
-                <a:latin typeface="Calibri"/>
-                <a:ea typeface="Unifont"/>
-              </a:rPr>
-              <a:t>General Behavior:</a:t>
-            </a:r>
-            <a:endParaRPr b="0" lang="fr-FR" sz="2400" strike="noStrike" u="none">
-              <a:solidFill>
-                <a:srgbClr val="000000"/>
-              </a:solidFill>
-              <a:effectLst/>
-              <a:uFillTx/>
-              <a:latin typeface="Arial"/>
-            </a:endParaRPr>
-          </a:p>
-          <a:p>
-            <a:pPr marL="360000" indent="-343080" defTabSz="343080">
-              <a:lnSpc>
-                <a:spcPct val="100000"/>
-              </a:lnSpc>
-              <a:buClr>
-                <a:srgbClr val="000000"/>
-              </a:buClr>
-              <a:buFont typeface="OpenSymbol"/>
-              <a:buChar char="►"/>
-              <a:tabLst>
-                <a:tab algn="l" pos="0"/>
-              </a:tabLst>
-            </a:pPr>
+                  <a:schemeClr val="dk1"/>
+                </a:solidFill>
+                <a:effectLst/>
+                <a:uFillTx/>
+                <a:latin typeface="Calibri"/>
+              </a:rPr>
+              <a:t>Use Case</a:t>
+            </a:r>
             <a:r>
               <a:rPr b="0" lang="fr-FR" sz="2400" strike="noStrike" u="none">
                 <a:solidFill>
-                  <a:srgbClr val="000000"/>
-                </a:solidFill>
-                <a:effectLst/>
-                <a:uFillTx/>
-                <a:latin typeface="Calibri"/>
-                <a:ea typeface="Unifont"/>
-              </a:rPr>
-              <a:t>All AI methods (CNNs, RNNs, SVMs) follow the same principle: map inputs to outputs via learned weights.</a:t>
-            </a:r>
-            <a:endParaRPr b="0" lang="fr-FR" sz="2400" strike="noStrike" u="none">
-              <a:solidFill>
-                <a:srgbClr val="000000"/>
-              </a:solidFill>
-              <a:effectLst/>
-              <a:uFillTx/>
-              <a:latin typeface="Arial"/>
-            </a:endParaRPr>
-          </a:p>
-          <a:p>
-            <a:pPr marL="360000" indent="-343080" defTabSz="343080">
-              <a:lnSpc>
-                <a:spcPct val="100000"/>
-              </a:lnSpc>
-              <a:buClr>
-                <a:srgbClr val="000000"/>
-              </a:buClr>
-              <a:buFont typeface="OpenSymbol"/>
-              <a:buChar char="►"/>
-              <a:tabLst>
-                <a:tab algn="l" pos="0"/>
-              </a:tabLst>
-            </a:pPr>
-            <a:r>
-              <a:rPr b="0" lang="fr-FR" sz="2400" strike="noStrike" u="none">
-                <a:solidFill>
-                  <a:srgbClr val="000000"/>
-                </a:solidFill>
-                <a:effectLst/>
-                <a:uFillTx/>
-                <a:latin typeface="Calibri"/>
-                <a:ea typeface="Unifont"/>
-              </a:rPr>
-              <a:t>Differences lie in architecture, training efficiency, and interpretability.</a:t>
+                  <a:schemeClr val="dk1"/>
+                </a:solidFill>
+                <a:effectLst/>
+                <a:uFillTx/>
+                <a:latin typeface="Calibri"/>
+              </a:rPr>
+              <a:t>: Optimization of beamline configurations.</a:t>
             </a:r>
             <a:endParaRPr b="0" lang="fr-FR" sz="2400" strike="noStrike" u="none">
               <a:solidFill>
@@ -5130,14 +5025,14 @@
       </p:grpSpPr>
       <p:sp>
         <p:nvSpPr>
-          <p:cNvPr id="77" name="Text 37"/>
+          <p:cNvPr id="77" name="Text 34"/>
           <p:cNvSpPr/>
           <p:nvPr/>
         </p:nvSpPr>
         <p:spPr>
           <a:xfrm>
             <a:off x="548640" y="384120"/>
-            <a:ext cx="9142200" cy="290880"/>
+            <a:ext cx="9141840" cy="290520"/>
           </a:xfrm>
           <a:prstGeom prst="rect">
             <a:avLst/>
@@ -5196,14 +5091,14 @@
       </p:sp>
       <p:sp>
         <p:nvSpPr>
-          <p:cNvPr id="78" name="Text 38"/>
+          <p:cNvPr id="78" name="Text 35"/>
           <p:cNvSpPr/>
           <p:nvPr/>
         </p:nvSpPr>
         <p:spPr>
           <a:xfrm>
             <a:off x="548640" y="658440"/>
-            <a:ext cx="11062440" cy="821160"/>
+            <a:ext cx="11062080" cy="820800"/>
           </a:xfrm>
           <a:prstGeom prst="rect">
             <a:avLst/>
@@ -5262,14 +5157,14 @@
       </p:sp>
       <p:sp>
         <p:nvSpPr>
-          <p:cNvPr id="79" name="Text 39"/>
+          <p:cNvPr id="79" name="Text 36"/>
           <p:cNvSpPr/>
           <p:nvPr/>
         </p:nvSpPr>
         <p:spPr>
           <a:xfrm>
             <a:off x="11185920" y="6446520"/>
-            <a:ext cx="455400" cy="272520"/>
+            <a:ext cx="455040" cy="272160"/>
           </a:xfrm>
           <a:prstGeom prst="rect">
             <a:avLst/>
@@ -5330,7 +5225,7 @@
         <p:spPr>
           <a:xfrm>
             <a:off x="540000" y="1800000"/>
-            <a:ext cx="10978920" cy="4604760"/>
+            <a:ext cx="10978560" cy="4604760"/>
           </a:xfrm>
           <a:prstGeom prst="rect">
             <a:avLst/>
@@ -5379,22 +5274,99 @@
                 <a:uFillTx/>
                 <a:latin typeface="Calibri"/>
               </a:rPr>
-              <a:t>Training: The Core Process</a:t>
+              <a:t>AI as a Universal Function Approximator</a:t>
+            </a:r>
+            <a:r>
+              <a:rPr b="0" lang="fr-FR" sz="2400" strike="noStrike" u="none">
+                <a:solidFill>
+                  <a:srgbClr val="0000ff"/>
+                </a:solidFill>
+                <a:effectLst/>
+                <a:uFillTx/>
+                <a:latin typeface="Calibri"/>
+              </a:rPr>
+              <a:t>:</a:t>
+            </a:r>
+            <a:endParaRPr b="0" lang="fr-FR" sz="2400" strike="noStrike" u="none">
+              <a:solidFill>
+                <a:srgbClr val="000000"/>
+              </a:solidFill>
+              <a:effectLst/>
+              <a:uFillTx/>
+              <a:latin typeface="Arial"/>
+            </a:endParaRPr>
+          </a:p>
+          <a:p>
+            <a:pPr marL="343080" indent="-343080" defTabSz="343080">
+              <a:lnSpc>
+                <a:spcPct val="100000"/>
+              </a:lnSpc>
+              <a:buClr>
+                <a:srgbClr val="000000"/>
+              </a:buClr>
+              <a:buFont typeface="Arial"/>
+              <a:buChar char="•"/>
+              <a:tabLst>
+                <a:tab algn="l" pos="0"/>
+              </a:tabLst>
+            </a:pPr>
+            <a:r>
+              <a:rPr b="1" lang="fr-FR" sz="2400" strike="noStrike" u="none">
+                <a:solidFill>
+                  <a:srgbClr val="000000"/>
+                </a:solidFill>
+                <a:effectLst/>
+                <a:uFillTx/>
+                <a:latin typeface="Calibri"/>
+              </a:rPr>
+              <a:t>Black Box Concept:</a:t>
             </a:r>
             <a:br>
               <a:rPr sz="2400"/>
             </a:br>
             <a:r>
-              <a:rPr b="0" lang="en-US" sz="2400" strike="noStrike" u="none">
+              <a:rPr b="1" lang="fr-FR" sz="2400" strike="noStrike" u="none">
                 <a:solidFill>
                   <a:srgbClr val="000000"/>
                 </a:solidFill>
                 <a:effectLst/>
                 <a:uFillTx/>
-                <a:latin typeface="Arial"/>
+                <a:latin typeface="Calibri"/>
               </a:rPr>
               <a:t> </a:t>
             </a:r>
+            <a:endParaRPr b="0" lang="fr-FR" sz="2400" strike="noStrike" u="none">
+              <a:solidFill>
+                <a:srgbClr val="000000"/>
+              </a:solidFill>
+              <a:effectLst/>
+              <a:uFillTx/>
+              <a:latin typeface="Arial"/>
+            </a:endParaRPr>
+          </a:p>
+          <a:p>
+            <a:pPr marL="720000" defTabSz="343080">
+              <a:lnSpc>
+                <a:spcPct val="100000"/>
+              </a:lnSpc>
+              <a:tabLst>
+                <a:tab algn="l" pos="0"/>
+              </a:tabLst>
+            </a:pPr>
+            <a:r>
+              <a:rPr b="1" lang="fr-FR" sz="2400" strike="noStrike" u="none">
+                <a:solidFill>
+                  <a:srgbClr val="ff00ff"/>
+                </a:solidFill>
+                <a:effectLst/>
+                <a:uFillTx/>
+                <a:latin typeface="FreeMono"/>
+              </a:rPr>
+              <a:t>Input → [AI Model] → Output</a:t>
+            </a:r>
+            <a:br>
+              <a:rPr sz="2400"/>
+            </a:br>
             <a:endParaRPr b="0" lang="fr-FR" sz="2400" strike="noStrike" u="none">
               <a:solidFill>
                 <a:srgbClr val="000000"/>
@@ -5425,10 +5397,10 @@
                 </a:solidFill>
                 <a:effectLst/>
                 <a:uFillTx/>
-                <a:latin typeface="Arial"/>
+                <a:latin typeface="Calibri"/>
                 <a:ea typeface="Unifont"/>
               </a:rPr>
-              <a:t>Objective</a:t>
+              <a:t>Universal Approximation Theorem</a:t>
             </a:r>
             <a:r>
               <a:rPr b="0" lang="fr-FR" sz="2400" strike="noStrike" u="none">
@@ -5437,10 +5409,73 @@
                 </a:solidFill>
                 <a:effectLst/>
                 <a:uFillTx/>
-                <a:latin typeface="Arial"/>
+                <a:latin typeface="Calibri"/>
                 <a:ea typeface="Unifont"/>
               </a:rPr>
-              <a:t>: Minimize the loss function (e.g., Mean Squared Error, Cross-Entropy).</a:t>
+              <a:t>: A neural network can </a:t>
+            </a:r>
+            <a:r>
+              <a:rPr b="0" lang="fr-FR" sz="2400" strike="noStrike" u="none">
+                <a:solidFill>
+                  <a:srgbClr val="008000"/>
+                </a:solidFill>
+                <a:effectLst/>
+                <a:uFillTx/>
+                <a:latin typeface="Calibri"/>
+                <a:ea typeface="Unifont"/>
+              </a:rPr>
+              <a:t>approximate</a:t>
+            </a:r>
+            <a:r>
+              <a:rPr b="0" lang="fr-FR" sz="2400" strike="noStrike" u="none">
+                <a:solidFill>
+                  <a:srgbClr val="000000"/>
+                </a:solidFill>
+                <a:effectLst/>
+                <a:uFillTx/>
+                <a:latin typeface="Calibri"/>
+                <a:ea typeface="Unifont"/>
+              </a:rPr>
+              <a:t> </a:t>
+            </a:r>
+            <a:r>
+              <a:rPr b="0" lang="fr-FR" sz="2400" strike="noStrike" u="none">
+                <a:solidFill>
+                  <a:srgbClr val="008000"/>
+                </a:solidFill>
+                <a:effectLst/>
+                <a:uFillTx/>
+                <a:latin typeface="Calibri"/>
+                <a:ea typeface="Unifont"/>
+              </a:rPr>
+              <a:t>any continuous function</a:t>
+            </a:r>
+            <a:r>
+              <a:rPr b="0" lang="fr-FR" sz="2400" strike="noStrike" u="none">
+                <a:solidFill>
+                  <a:srgbClr val="000000"/>
+                </a:solidFill>
+                <a:effectLst/>
+                <a:uFillTx/>
+                <a:latin typeface="Calibri"/>
+                <a:ea typeface="Unifont"/>
+              </a:rPr>
+              <a:t> given sufficient data and complexity.</a:t>
+            </a:r>
+            <a:br>
+              <a:rPr sz="2400"/>
+            </a:br>
+            <a:r>
+              <a:rPr b="0" lang="fr-FR" sz="2400" strike="noStrike" u="none">
+                <a:solidFill>
+                  <a:srgbClr val="000000"/>
+                </a:solidFill>
+                <a:effectLst/>
+                <a:uFillTx/>
+                <a:latin typeface="Calibri"/>
+                <a:ea typeface="Unifont"/>
+              </a:rPr>
+              <a:t> </a:t>
             </a:r>
             <a:endParaRPr b="0" lang="fr-FR" sz="2400" strike="noStrike" u="none">
               <a:solidFill>
@@ -5452,7 +5487,7 @@
             </a:endParaRPr>
           </a:p>
           <a:p>
-            <a:pPr marL="360000" indent="-343080" defTabSz="343080">
+            <a:pPr marL="343080" indent="-343080" defTabSz="343080">
               <a:lnSpc>
                 <a:spcPct val="100000"/>
               </a:lnSpc>
@@ -5466,16 +5501,51 @@
               </a:tabLst>
             </a:pPr>
             <a:r>
+              <a:rPr b="1" lang="fr-FR" sz="2400" strike="noStrike" u="none">
+                <a:solidFill>
+                  <a:srgbClr val="000000"/>
+                </a:solidFill>
+                <a:effectLst/>
+                <a:uFillTx/>
+                <a:latin typeface="Calibri"/>
+                <a:ea typeface="Unifont"/>
+              </a:rPr>
+              <a:t>General Behavior:</a:t>
+            </a:r>
+            <a:endParaRPr b="0" lang="fr-FR" sz="2400" strike="noStrike" u="none">
+              <a:solidFill>
+                <a:srgbClr val="000000"/>
+              </a:solidFill>
+              <a:effectLst/>
+              <a:uFillTx/>
+              <a:latin typeface="Arial"/>
+            </a:endParaRPr>
+          </a:p>
+          <a:p>
+            <a:pPr marL="360000" indent="-343080" defTabSz="343080">
+              <a:lnSpc>
+                <a:spcPct val="100000"/>
+              </a:lnSpc>
+              <a:buClr>
+                <a:srgbClr val="000000"/>
+              </a:buClr>
+              <a:buFont typeface="OpenSymbol"/>
+              <a:buChar char="►"/>
+              <a:tabLst>
+                <a:tab algn="l" pos="0"/>
+              </a:tabLst>
+            </a:pPr>
+            <a:r>
               <a:rPr b="0" lang="fr-FR" sz="2400" strike="noStrike" u="none">
                 <a:solidFill>
                   <a:srgbClr val="000000"/>
                 </a:solidFill>
                 <a:effectLst/>
                 <a:uFillTx/>
-                <a:latin typeface="Arial"/>
+                <a:latin typeface="Calibri"/>
                 <a:ea typeface="Unifont"/>
               </a:rPr>
-              <a:t>Loss Function: Measures the difference between predicted and actual outputs.</a:t>
+              <a:t>All AI methods (CNNs, RNNs, SVMs) follow the same principle: map inputs to outputs via learned weights.</a:t>
             </a:r>
             <a:endParaRPr b="0" lang="fr-FR" sz="2400" strike="noStrike" u="none">
               <a:solidFill>
@@ -5487,201 +5557,31 @@
             </a:endParaRPr>
           </a:p>
           <a:p>
-            <a:pPr marL="343080" indent="-343080" defTabSz="343080">
+            <a:pPr marL="360000" indent="-343080" defTabSz="343080">
               <a:lnSpc>
                 <a:spcPct val="100000"/>
               </a:lnSpc>
               <a:buClr>
                 <a:srgbClr val="000000"/>
               </a:buClr>
-              <a:buFont typeface="Arial"/>
-              <a:buChar char="•"/>
-              <a:tabLst>
-                <a:tab algn="l" pos="0"/>
-              </a:tabLst>
-            </a:pPr>
-            <a:r>
-              <a:rPr b="1" lang="fr-FR" sz="2400" strike="noStrike" u="none">
+              <a:buFont typeface="OpenSymbol"/>
+              <a:buChar char="►"/>
+              <a:tabLst>
+                <a:tab algn="l" pos="0"/>
+              </a:tabLst>
+            </a:pPr>
+            <a:r>
+              <a:rPr b="0" lang="fr-FR" sz="2400" strike="noStrike" u="none">
                 <a:solidFill>
                   <a:srgbClr val="000000"/>
                 </a:solidFill>
                 <a:effectLst/>
                 <a:uFillTx/>
-                <a:latin typeface="Arial"/>
+                <a:latin typeface="Calibri"/>
                 <a:ea typeface="Unifont"/>
               </a:rPr>
-              <a:t>Steps</a:t>
-            </a:r>
-            <a:r>
-              <a:rPr b="0" lang="fr-FR" sz="2400" strike="noStrike" u="none">
-                <a:solidFill>
-                  <a:srgbClr val="000000"/>
-                </a:solidFill>
-                <a:effectLst/>
-                <a:uFillTx/>
-                <a:latin typeface="Arial"/>
-                <a:ea typeface="Unifont"/>
-              </a:rPr>
-              <a:t>:</a:t>
-            </a:r>
-            <a:endParaRPr b="0" lang="fr-FR" sz="2400" strike="noStrike" u="none">
-              <a:solidFill>
-                <a:srgbClr val="000000"/>
-              </a:solidFill>
-              <a:effectLst/>
-              <a:uFillTx/>
-              <a:latin typeface="Arial"/>
-            </a:endParaRPr>
-          </a:p>
-          <a:p>
-            <a:pPr marL="360000" indent="-343080" defTabSz="343080">
-              <a:lnSpc>
-                <a:spcPct val="100000"/>
-              </a:lnSpc>
-              <a:buClr>
-                <a:srgbClr val="000000"/>
-              </a:buClr>
-              <a:buFont typeface="Arial"/>
-              <a:buChar char="•"/>
-              <a:tabLst>
-                <a:tab algn="l" pos="0"/>
-              </a:tabLst>
-            </a:pPr>
-            <a:r>
-              <a:rPr b="0" lang="fr-FR" sz="2400" strike="noStrike" u="none">
-                <a:solidFill>
-                  <a:srgbClr val="000000"/>
-                </a:solidFill>
-                <a:effectLst/>
-                <a:uFillTx/>
-                <a:latin typeface="Arial"/>
-                <a:ea typeface="Unifont"/>
-              </a:rPr>
-              <a:t>Forward Pass: Compute predictions for a batch of training data.</a:t>
-            </a:r>
-            <a:endParaRPr b="0" lang="fr-FR" sz="2400" strike="noStrike" u="none">
-              <a:solidFill>
-                <a:srgbClr val="000000"/>
-              </a:solidFill>
-              <a:effectLst/>
-              <a:uFillTx/>
-              <a:latin typeface="Arial"/>
-            </a:endParaRPr>
-          </a:p>
-          <a:p>
-            <a:pPr marL="360000" indent="-343080" defTabSz="343080">
-              <a:lnSpc>
-                <a:spcPct val="100000"/>
-              </a:lnSpc>
-              <a:buClr>
-                <a:srgbClr val="000000"/>
-              </a:buClr>
-              <a:buFont typeface="Arial"/>
-              <a:buChar char="•"/>
-              <a:tabLst>
-                <a:tab algn="l" pos="0"/>
-              </a:tabLst>
-            </a:pPr>
-            <a:r>
-              <a:rPr b="0" lang="fr-FR" sz="2400" strike="noStrike" u="none">
-                <a:solidFill>
-                  <a:srgbClr val="000000"/>
-                </a:solidFill>
-                <a:effectLst/>
-                <a:uFillTx/>
-                <a:latin typeface="Arial"/>
-                <a:ea typeface="Unifont"/>
-              </a:rPr>
-              <a:t>Loss Calculation: Evaluate how far predictions are from true values.</a:t>
-            </a:r>
-            <a:endParaRPr b="0" lang="fr-FR" sz="2400" strike="noStrike" u="none">
-              <a:solidFill>
-                <a:srgbClr val="000000"/>
-              </a:solidFill>
-              <a:effectLst/>
-              <a:uFillTx/>
-              <a:latin typeface="Arial"/>
-            </a:endParaRPr>
-          </a:p>
-          <a:p>
-            <a:pPr marL="360000" indent="-343080" defTabSz="343080">
-              <a:lnSpc>
-                <a:spcPct val="100000"/>
-              </a:lnSpc>
-              <a:buClr>
-                <a:srgbClr val="000000"/>
-              </a:buClr>
-              <a:buFont typeface="Arial"/>
-              <a:buChar char="•"/>
-              <a:tabLst>
-                <a:tab algn="l" pos="0"/>
-              </a:tabLst>
-            </a:pPr>
-            <a:r>
-              <a:rPr b="0" lang="fr-FR" sz="2400" strike="noStrike" u="none">
-                <a:solidFill>
-                  <a:srgbClr val="000000"/>
-                </a:solidFill>
-                <a:effectLst/>
-                <a:uFillTx/>
-                <a:latin typeface="Arial"/>
-                <a:ea typeface="Unifont"/>
-              </a:rPr>
-              <a:t>Backpropagation: Compute gradients of the loss with respect to weights.</a:t>
-            </a:r>
-            <a:endParaRPr b="0" lang="fr-FR" sz="2400" strike="noStrike" u="none">
-              <a:solidFill>
-                <a:srgbClr val="000000"/>
-              </a:solidFill>
-              <a:effectLst/>
-              <a:uFillTx/>
-              <a:latin typeface="Arial"/>
-            </a:endParaRPr>
-          </a:p>
-          <a:p>
-            <a:pPr marL="360000" indent="-343080" defTabSz="343080">
-              <a:lnSpc>
-                <a:spcPct val="100000"/>
-              </a:lnSpc>
-              <a:buClr>
-                <a:srgbClr val="000000"/>
-              </a:buClr>
-              <a:buFont typeface="Arial"/>
-              <a:buChar char="•"/>
-              <a:tabLst>
-                <a:tab algn="l" pos="0"/>
-              </a:tabLst>
-            </a:pPr>
-            <a:r>
-              <a:rPr b="0" lang="fr-FR" sz="2400" strike="noStrike" u="none">
-                <a:solidFill>
-                  <a:srgbClr val="000000"/>
-                </a:solidFill>
-                <a:effectLst/>
-                <a:uFillTx/>
-                <a:latin typeface="Arial"/>
-                <a:ea typeface="Unifont"/>
-              </a:rPr>
-              <a:t>Optimization: Update weights using an optimizer (e.g., Adam, SGD).</a:t>
-            </a:r>
-            <a:endParaRPr b="0" lang="fr-FR" sz="2400" strike="noStrike" u="none">
-              <a:solidFill>
-                <a:srgbClr val="000000"/>
-              </a:solidFill>
-              <a:effectLst/>
-              <a:uFillTx/>
-              <a:latin typeface="Arial"/>
-            </a:endParaRPr>
-          </a:p>
-          <a:p>
-            <a:pPr defTabSz="343080">
-              <a:lnSpc>
-                <a:spcPct val="100000"/>
-              </a:lnSpc>
-              <a:tabLst>
-                <a:tab algn="l" pos="0"/>
-              </a:tabLst>
-            </a:pPr>
+              <a:t>Differences lie in architecture, training efficiency, and interpretability.</a:t>
+            </a:r>
             <a:endParaRPr b="0" lang="fr-FR" sz="2400" strike="noStrike" u="none">
               <a:solidFill>
                 <a:srgbClr val="000000"/>
@@ -5725,14 +5625,14 @@
       </p:grpSpPr>
       <p:sp>
         <p:nvSpPr>
-          <p:cNvPr id="81" name="Text 40"/>
+          <p:cNvPr id="81" name="Text 37"/>
           <p:cNvSpPr/>
           <p:nvPr/>
         </p:nvSpPr>
         <p:spPr>
           <a:xfrm>
-            <a:off x="548640" y="383760"/>
-            <a:ext cx="9142200" cy="290880"/>
+            <a:off x="548640" y="384120"/>
+            <a:ext cx="9141840" cy="290520"/>
           </a:xfrm>
           <a:prstGeom prst="rect">
             <a:avLst/>
@@ -5791,14 +5691,14 @@
       </p:sp>
       <p:sp>
         <p:nvSpPr>
-          <p:cNvPr id="82" name="Text 41"/>
+          <p:cNvPr id="82" name="Text 38"/>
           <p:cNvSpPr/>
           <p:nvPr/>
         </p:nvSpPr>
         <p:spPr>
           <a:xfrm>
-            <a:off x="548640" y="658080"/>
-            <a:ext cx="11062440" cy="821160"/>
+            <a:off x="548640" y="658440"/>
+            <a:ext cx="11062080" cy="820800"/>
           </a:xfrm>
           <a:prstGeom prst="rect">
             <a:avLst/>
@@ -5857,14 +5757,14 @@
       </p:sp>
       <p:sp>
         <p:nvSpPr>
-          <p:cNvPr id="83" name="Text 42"/>
+          <p:cNvPr id="83" name="Text 39"/>
           <p:cNvSpPr/>
           <p:nvPr/>
         </p:nvSpPr>
         <p:spPr>
           <a:xfrm>
-            <a:off x="11185920" y="6446160"/>
-            <a:ext cx="455400" cy="272520"/>
+            <a:off x="11185920" y="6446520"/>
+            <a:ext cx="455040" cy="272160"/>
           </a:xfrm>
           <a:prstGeom prst="rect">
             <a:avLst/>
@@ -5924,8 +5824,8 @@
         </p:nvSpPr>
         <p:spPr>
           <a:xfrm>
-            <a:off x="540000" y="1799640"/>
-            <a:ext cx="10978920" cy="2775960"/>
+            <a:off x="540000" y="1800000"/>
+            <a:ext cx="10978560" cy="4604760"/>
           </a:xfrm>
           <a:prstGeom prst="rect">
             <a:avLst/>
@@ -5976,24 +5876,20 @@
               </a:rPr>
               <a:t>Training: The Core Process</a:t>
             </a:r>
-            <a:endParaRPr b="0" lang="fr-FR" sz="2400" strike="noStrike" u="none">
-              <a:solidFill>
-                <a:srgbClr val="000000"/>
-              </a:solidFill>
-              <a:effectLst/>
-              <a:uFillTx/>
-              <a:latin typeface="Arial"/>
-            </a:endParaRPr>
-          </a:p>
-          <a:p>
-            <a:pPr defTabSz="343080">
-              <a:lnSpc>
-                <a:spcPct val="100000"/>
-              </a:lnSpc>
-              <a:tabLst>
-                <a:tab algn="l" pos="0"/>
-              </a:tabLst>
-            </a:pPr>
+            <a:br>
+              <a:rPr sz="2400"/>
+            </a:br>
+            <a:r>
+              <a:rPr b="0" lang="en-US" sz="2400" strike="noStrike" u="none">
+                <a:solidFill>
+                  <a:srgbClr val="000000"/>
+                </a:solidFill>
+                <a:effectLst/>
+                <a:uFillTx/>
+                <a:latin typeface="Arial"/>
+              </a:rPr>
+              <a:t> </a:t>
+            </a:r>
             <a:endParaRPr b="0" lang="fr-FR" sz="2400" strike="noStrike" u="none">
               <a:solidFill>
                 <a:srgbClr val="000000"/>
@@ -6027,7 +5923,19 @@
                 <a:latin typeface="Arial"/>
                 <a:ea typeface="Unifont"/>
               </a:rPr>
-              <a:t>Key Factors for Success:</a:t>
+              <a:t>Objective</a:t>
+            </a:r>
+            <a:r>
+              <a:rPr b="0" lang="fr-FR" sz="2400" strike="noStrike" u="none">
+                <a:solidFill>
+                  <a:srgbClr val="000000"/>
+                </a:solidFill>
+                <a:effectLst/>
+                <a:uFillTx/>
+                <a:latin typeface="Arial"/>
+                <a:ea typeface="Unifont"/>
+              </a:rPr>
+              <a:t>: Minimize the loss function (e.g., Mean Squared Error, Cross-Entropy).</a:t>
             </a:r>
             <a:endParaRPr b="0" lang="fr-FR" sz="2400" strike="noStrike" u="none">
               <a:solidFill>
@@ -6062,7 +5970,7 @@
                 <a:latin typeface="Arial"/>
                 <a:ea typeface="Unifont"/>
               </a:rPr>
-              <a:t>Data Quality: High-fidelity simulations with diverse parameters.</a:t>
+              <a:t>Loss Function: Measures the difference between predicted and actual outputs.</a:t>
             </a:r>
             <a:endParaRPr b="0" lang="fr-FR" sz="2400" strike="noStrike" u="none">
               <a:solidFill>
@@ -6074,7 +5982,7 @@
             </a:endParaRPr>
           </a:p>
           <a:p>
-            <a:pPr marL="360000" indent="-343080" defTabSz="343080">
+            <a:pPr marL="343080" indent="-343080" defTabSz="343080">
               <a:lnSpc>
                 <a:spcPct val="100000"/>
               </a:lnSpc>
@@ -6088,7 +5996,7 @@
               </a:tabLst>
             </a:pPr>
             <a:r>
-              <a:rPr b="0" lang="fr-FR" sz="2400" strike="noStrike" u="none">
+              <a:rPr b="1" lang="fr-FR" sz="2400" strike="noStrike" u="none">
                 <a:solidFill>
                   <a:srgbClr val="000000"/>
                 </a:solidFill>
@@ -6097,7 +6005,19 @@
                 <a:latin typeface="Arial"/>
                 <a:ea typeface="Unifont"/>
               </a:rPr>
-              <a:t>Model Architecture: Match complexity to the problem (e.g., CNNs for images, Transformers for sequences).</a:t>
+              <a:t>Steps</a:t>
+            </a:r>
+            <a:r>
+              <a:rPr b="0" lang="fr-FR" sz="2400" strike="noStrike" u="none">
+                <a:solidFill>
+                  <a:srgbClr val="000000"/>
+                </a:solidFill>
+                <a:effectLst/>
+                <a:uFillTx/>
+                <a:latin typeface="Arial"/>
+                <a:ea typeface="Unifont"/>
+              </a:rPr>
+              <a:t>:</a:t>
             </a:r>
             <a:endParaRPr b="0" lang="fr-FR" sz="2400" strike="noStrike" u="none">
               <a:solidFill>
@@ -6132,8 +6052,131 @@
                 <a:latin typeface="Arial"/>
                 <a:ea typeface="Unifont"/>
               </a:rPr>
-              <a:t>Hyperparameters: Learning rate, batch size, number of epochs.</a:t>
-            </a:r>
+              <a:t>Forward Pass: Compute predictions for a batch of training data.</a:t>
+            </a:r>
+            <a:endParaRPr b="0" lang="fr-FR" sz="2400" strike="noStrike" u="none">
+              <a:solidFill>
+                <a:srgbClr val="000000"/>
+              </a:solidFill>
+              <a:effectLst/>
+              <a:uFillTx/>
+              <a:latin typeface="Arial"/>
+            </a:endParaRPr>
+          </a:p>
+          <a:p>
+            <a:pPr marL="360000" indent="-343080" defTabSz="343080">
+              <a:lnSpc>
+                <a:spcPct val="100000"/>
+              </a:lnSpc>
+              <a:buClr>
+                <a:srgbClr val="000000"/>
+              </a:buClr>
+              <a:buFont typeface="Arial"/>
+              <a:buChar char="•"/>
+              <a:tabLst>
+                <a:tab algn="l" pos="0"/>
+              </a:tabLst>
+            </a:pPr>
+            <a:r>
+              <a:rPr b="0" lang="fr-FR" sz="2400" strike="noStrike" u="none">
+                <a:solidFill>
+                  <a:srgbClr val="000000"/>
+                </a:solidFill>
+                <a:effectLst/>
+                <a:uFillTx/>
+                <a:latin typeface="Arial"/>
+                <a:ea typeface="Unifont"/>
+              </a:rPr>
+              <a:t>Loss Calculation: Evaluate how far predictions are from true values.</a:t>
+            </a:r>
+            <a:endParaRPr b="0" lang="fr-FR" sz="2400" strike="noStrike" u="none">
+              <a:solidFill>
+                <a:srgbClr val="000000"/>
+              </a:solidFill>
+              <a:effectLst/>
+              <a:uFillTx/>
+              <a:latin typeface="Arial"/>
+            </a:endParaRPr>
+          </a:p>
+          <a:p>
+            <a:pPr marL="360000" indent="-343080" defTabSz="343080">
+              <a:lnSpc>
+                <a:spcPct val="100000"/>
+              </a:lnSpc>
+              <a:buClr>
+                <a:srgbClr val="000000"/>
+              </a:buClr>
+              <a:buFont typeface="Arial"/>
+              <a:buChar char="•"/>
+              <a:tabLst>
+                <a:tab algn="l" pos="0"/>
+              </a:tabLst>
+            </a:pPr>
+            <a:r>
+              <a:rPr b="0" lang="fr-FR" sz="2400" strike="noStrike" u="none">
+                <a:solidFill>
+                  <a:srgbClr val="000000"/>
+                </a:solidFill>
+                <a:effectLst/>
+                <a:uFillTx/>
+                <a:latin typeface="Arial"/>
+                <a:ea typeface="Unifont"/>
+              </a:rPr>
+              <a:t>Backpropagation: Compute gradients of the loss with respect to weights.</a:t>
+            </a:r>
+            <a:endParaRPr b="0" lang="fr-FR" sz="2400" strike="noStrike" u="none">
+              <a:solidFill>
+                <a:srgbClr val="000000"/>
+              </a:solidFill>
+              <a:effectLst/>
+              <a:uFillTx/>
+              <a:latin typeface="Arial"/>
+            </a:endParaRPr>
+          </a:p>
+          <a:p>
+            <a:pPr marL="360000" indent="-343080" defTabSz="343080">
+              <a:lnSpc>
+                <a:spcPct val="100000"/>
+              </a:lnSpc>
+              <a:buClr>
+                <a:srgbClr val="000000"/>
+              </a:buClr>
+              <a:buFont typeface="Arial"/>
+              <a:buChar char="•"/>
+              <a:tabLst>
+                <a:tab algn="l" pos="0"/>
+              </a:tabLst>
+            </a:pPr>
+            <a:r>
+              <a:rPr b="0" lang="fr-FR" sz="2400" strike="noStrike" u="none">
+                <a:solidFill>
+                  <a:srgbClr val="000000"/>
+                </a:solidFill>
+                <a:effectLst/>
+                <a:uFillTx/>
+                <a:latin typeface="Arial"/>
+                <a:ea typeface="Unifont"/>
+              </a:rPr>
+              <a:t>Optimization: Update weights using an optimizer (e.g., Adam, SGD).</a:t>
+            </a:r>
+            <a:endParaRPr b="0" lang="fr-FR" sz="2400" strike="noStrike" u="none">
+              <a:solidFill>
+                <a:srgbClr val="000000"/>
+              </a:solidFill>
+              <a:effectLst/>
+              <a:uFillTx/>
+              <a:latin typeface="Arial"/>
+            </a:endParaRPr>
+          </a:p>
+          <a:p>
+            <a:pPr defTabSz="343080">
+              <a:lnSpc>
+                <a:spcPct val="100000"/>
+              </a:lnSpc>
+              <a:tabLst>
+                <a:tab algn="l" pos="0"/>
+              </a:tabLst>
+            </a:pPr>
             <a:endParaRPr b="0" lang="fr-FR" sz="2400" strike="noStrike" u="none">
               <a:solidFill>
                 <a:srgbClr val="000000"/>
@@ -6177,14 +6220,14 @@
       </p:grpSpPr>
       <p:sp>
         <p:nvSpPr>
-          <p:cNvPr id="85" name="Text 46"/>
+          <p:cNvPr id="85" name="Text 40"/>
           <p:cNvSpPr/>
           <p:nvPr/>
         </p:nvSpPr>
         <p:spPr>
           <a:xfrm>
             <a:off x="548640" y="383760"/>
-            <a:ext cx="9142200" cy="290880"/>
+            <a:ext cx="9141840" cy="290520"/>
           </a:xfrm>
           <a:prstGeom prst="rect">
             <a:avLst/>
@@ -6228,7 +6271,7 @@
                 <a:uFillTx/>
                 <a:latin typeface="Calibri"/>
               </a:rPr>
-              <a:t>Lessons and praticals</a:t>
+              <a:t>General AI Methodology</a:t>
             </a:r>
             <a:endParaRPr b="0" lang="fr-FR" sz="1200" strike="noStrike" u="none">
               <a:solidFill>
@@ -6243,14 +6286,14 @@
       </p:sp>
       <p:sp>
         <p:nvSpPr>
-          <p:cNvPr id="86" name="Text 47"/>
+          <p:cNvPr id="86" name="Text 41"/>
           <p:cNvSpPr/>
           <p:nvPr/>
         </p:nvSpPr>
         <p:spPr>
           <a:xfrm>
             <a:off x="548640" y="658080"/>
-            <a:ext cx="11062440" cy="821160"/>
+            <a:ext cx="11062080" cy="820800"/>
           </a:xfrm>
           <a:prstGeom prst="rect">
             <a:avLst/>
@@ -6294,7 +6337,7 @@
                 <a:uFillTx/>
                 <a:latin typeface="Cambria"/>
               </a:rPr>
-              <a:t>What You Will Learn and Practice</a:t>
+              <a:t>General AI Methodology</a:t>
             </a:r>
             <a:endParaRPr b="0" lang="fr-FR" sz="3000" strike="noStrike" u="none">
               <a:solidFill>
@@ -6309,14 +6352,14 @@
       </p:sp>
       <p:sp>
         <p:nvSpPr>
-          <p:cNvPr id="87" name="Text 48"/>
+          <p:cNvPr id="87" name="Text 42"/>
           <p:cNvSpPr/>
           <p:nvPr/>
         </p:nvSpPr>
         <p:spPr>
           <a:xfrm>
             <a:off x="11185920" y="6446160"/>
-            <a:ext cx="455400" cy="272520"/>
+            <a:ext cx="455040" cy="272160"/>
           </a:xfrm>
           <a:prstGeom prst="rect">
             <a:avLst/>
@@ -6377,7 +6420,7 @@
         <p:spPr>
           <a:xfrm>
             <a:off x="540000" y="1799640"/>
-            <a:ext cx="10978920" cy="4303080"/>
+            <a:ext cx="10978560" cy="2775960"/>
           </a:xfrm>
           <a:prstGeom prst="rect">
             <a:avLst/>
@@ -6426,7 +6469,7 @@
                 <a:uFillTx/>
                 <a:latin typeface="Calibri"/>
               </a:rPr>
-              <a:t>Hands-on skills</a:t>
+              <a:t>Training: The Core Process</a:t>
             </a:r>
             <a:endParaRPr b="0" lang="fr-FR" sz="2400" strike="noStrike" u="none">
               <a:solidFill>
@@ -6446,7 +6489,7 @@
                 <a:tab algn="l" pos="0"/>
               </a:tabLst>
             </a:pPr>
-            <a:endParaRPr b="0" lang="fr-FR" sz="1000" strike="noStrike" u="none">
+            <a:endParaRPr b="0" lang="fr-FR" sz="2400" strike="noStrike" u="none">
               <a:solidFill>
                 <a:srgbClr val="000000"/>
               </a:solidFill>
@@ -6460,12 +6503,6 @@
               <a:lnSpc>
                 <a:spcPct val="100000"/>
               </a:lnSpc>
-              <a:spcBef>
-                <a:spcPts val="1191"/>
-              </a:spcBef>
-              <a:spcAft>
-                <a:spcPts val="992"/>
-              </a:spcAft>
               <a:buClr>
                 <a:srgbClr val="000000"/>
               </a:buClr>
@@ -6485,7 +6522,7 @@
                 <a:latin typeface="Arial"/>
                 <a:ea typeface="Unifont"/>
               </a:rPr>
-              <a:t>Setting Up Simulations:</a:t>
+              <a:t>Key Factors for Success:</a:t>
             </a:r>
             <a:endParaRPr b="0" lang="fr-FR" sz="2400" strike="noStrike" u="none">
               <a:solidFill>
@@ -6520,7 +6557,7 @@
                 <a:latin typeface="Arial"/>
                 <a:ea typeface="Unifont"/>
               </a:rPr>
-              <a:t>Configure beamlines/instruments in McStas (neutrons) and McXtrace (X-rays).</a:t>
+              <a:t>Data Quality: High-fidelity simulations with diverse parameters.</a:t>
             </a:r>
             <a:endParaRPr b="0" lang="fr-FR" sz="2400" strike="noStrike" u="none">
               <a:solidFill>
@@ -6555,22 +6592,7 @@
                 <a:latin typeface="Arial"/>
                 <a:ea typeface="Unifont"/>
               </a:rPr>
-              <a:t>Define sample properties (e.g., crystal structure, composition).</a:t>
-            </a:r>
-            <a:br>
-              <a:rPr sz="2400"/>
-            </a:br>
-            <a:r>
-              <a:rPr b="0" lang="fr-FR" sz="2400" strike="noStrike" u="none">
-                <a:solidFill>
-                  <a:srgbClr val="000000"/>
-                </a:solidFill>
-                <a:effectLst/>
-                <a:uFillTx/>
-                <a:latin typeface="Arial"/>
-                <a:ea typeface="Unifont"/>
-              </a:rPr>
-              <a:t> </a:t>
+              <a:t>Model Architecture: Match complexity to the problem (e.g., CNNs for images, Transformers for sequences).</a:t>
             </a:r>
             <a:endParaRPr b="0" lang="fr-FR" sz="2400" strike="noStrike" u="none">
               <a:solidFill>
@@ -6582,7 +6604,7 @@
             </a:endParaRPr>
           </a:p>
           <a:p>
-            <a:pPr marL="343080" indent="-343080" defTabSz="343080">
+            <a:pPr marL="360000" indent="-343080" defTabSz="343080">
               <a:lnSpc>
                 <a:spcPct val="100000"/>
               </a:lnSpc>
@@ -6596,7 +6618,7 @@
               </a:tabLst>
             </a:pPr>
             <a:r>
-              <a:rPr b="1" lang="fr-FR" sz="2400" strike="noStrike" u="none">
+              <a:rPr b="0" lang="fr-FR" sz="2400" strike="noStrike" u="none">
                 <a:solidFill>
                   <a:srgbClr val="000000"/>
                 </a:solidFill>
@@ -6605,77 +6627,7 @@
                 <a:latin typeface="Arial"/>
                 <a:ea typeface="Unifont"/>
               </a:rPr>
-              <a:t>Characterizing Models:</a:t>
-            </a:r>
-            <a:endParaRPr b="0" lang="fr-FR" sz="2400" strike="noStrike" u="none">
-              <a:solidFill>
-                <a:srgbClr val="000000"/>
-              </a:solidFill>
-              <a:effectLst/>
-              <a:uFillTx/>
-              <a:latin typeface="Arial"/>
-            </a:endParaRPr>
-          </a:p>
-          <a:p>
-            <a:pPr marL="360000" indent="-343080" defTabSz="343080">
-              <a:lnSpc>
-                <a:spcPct val="100000"/>
-              </a:lnSpc>
-              <a:buClr>
-                <a:srgbClr val="000000"/>
-              </a:buClr>
-              <a:buFont typeface="Arial"/>
-              <a:buChar char="•"/>
-              <a:tabLst>
-                <a:tab algn="l" pos="0"/>
-              </a:tabLst>
-            </a:pPr>
-            <a:r>
-              <a:rPr b="0" lang="fr-FR" sz="2400" strike="noStrike" u="none">
-                <a:solidFill>
-                  <a:srgbClr val="000000"/>
-                </a:solidFill>
-                <a:effectLst/>
-                <a:uFillTx/>
-                <a:latin typeface="Arial"/>
-                <a:ea typeface="Unifont"/>
-              </a:rPr>
-              <a:t>Check geometry (e.g., detector positions, slit sizes).</a:t>
-            </a:r>
-            <a:endParaRPr b="0" lang="fr-FR" sz="2400" strike="noStrike" u="none">
-              <a:solidFill>
-                <a:srgbClr val="000000"/>
-              </a:solidFill>
-              <a:effectLst/>
-              <a:uFillTx/>
-              <a:latin typeface="Arial"/>
-            </a:endParaRPr>
-          </a:p>
-          <a:p>
-            <a:pPr marL="360000" indent="-343080" defTabSz="343080">
-              <a:lnSpc>
-                <a:spcPct val="100000"/>
-              </a:lnSpc>
-              <a:buClr>
-                <a:srgbClr val="000000"/>
-              </a:buClr>
-              <a:buFont typeface="Arial"/>
-              <a:buChar char="•"/>
-              <a:tabLst>
-                <a:tab algn="l" pos="0"/>
-              </a:tabLst>
-            </a:pPr>
-            <a:r>
-              <a:rPr b="0" lang="fr-FR" sz="2400" strike="noStrike" u="none">
-                <a:solidFill>
-                  <a:srgbClr val="000000"/>
-                </a:solidFill>
-                <a:effectLst/>
-                <a:uFillTx/>
-                <a:latin typeface="Arial"/>
-                <a:ea typeface="Unifont"/>
-              </a:rPr>
-              <a:t>Extract parameters (e.g., resolution, flux) and results (e.g., spectra, diffraction patterns).</a:t>
+              <a:t>Hyperparameters: Learning rate, batch size, number of epochs.</a:t>
             </a:r>
             <a:endParaRPr b="0" lang="fr-FR" sz="2400" strike="noStrike" u="none">
               <a:solidFill>
@@ -6720,14 +6672,14 @@
       </p:grpSpPr>
       <p:sp>
         <p:nvSpPr>
-          <p:cNvPr id="89" name="Text 43"/>
+          <p:cNvPr id="89" name="Text 46"/>
           <p:cNvSpPr/>
           <p:nvPr/>
         </p:nvSpPr>
         <p:spPr>
           <a:xfrm>
             <a:off x="548640" y="383760"/>
-            <a:ext cx="9142200" cy="290880"/>
+            <a:ext cx="9141840" cy="290520"/>
           </a:xfrm>
           <a:prstGeom prst="rect">
             <a:avLst/>
@@ -6786,14 +6738,14 @@
       </p:sp>
       <p:sp>
         <p:nvSpPr>
-          <p:cNvPr id="90" name="Text 44"/>
+          <p:cNvPr id="90" name="Text 47"/>
           <p:cNvSpPr/>
           <p:nvPr/>
         </p:nvSpPr>
         <p:spPr>
           <a:xfrm>
             <a:off x="548640" y="658080"/>
-            <a:ext cx="11062440" cy="821160"/>
+            <a:ext cx="11062080" cy="820800"/>
           </a:xfrm>
           <a:prstGeom prst="rect">
             <a:avLst/>
@@ -6852,14 +6804,14 @@
       </p:sp>
       <p:sp>
         <p:nvSpPr>
-          <p:cNvPr id="91" name="Text 45"/>
+          <p:cNvPr id="91" name="Text 48"/>
           <p:cNvSpPr/>
           <p:nvPr/>
         </p:nvSpPr>
         <p:spPr>
           <a:xfrm>
             <a:off x="11185920" y="6446160"/>
-            <a:ext cx="455400" cy="272520"/>
+            <a:ext cx="455040" cy="272160"/>
           </a:xfrm>
           <a:prstGeom prst="rect">
             <a:avLst/>
@@ -6920,7 +6872,7 @@
         <p:spPr>
           <a:xfrm>
             <a:off x="540000" y="1799640"/>
-            <a:ext cx="10978920" cy="4336200"/>
+            <a:ext cx="10978560" cy="4303080"/>
           </a:xfrm>
           <a:prstGeom prst="rect">
             <a:avLst/>
@@ -7028,7 +6980,7 @@
                 <a:latin typeface="Arial"/>
                 <a:ea typeface="Unifont"/>
               </a:rPr>
-              <a:t>Generating Datasets:</a:t>
+              <a:t>Setting Up Simulations:</a:t>
             </a:r>
             <a:endParaRPr b="0" lang="fr-FR" sz="2400" strike="noStrike" u="none">
               <a:solidFill>
@@ -7044,12 +6996,6 @@
               <a:lnSpc>
                 <a:spcPct val="100000"/>
               </a:lnSpc>
-              <a:spcBef>
-                <a:spcPts val="624"/>
-              </a:spcBef>
-              <a:spcAft>
-                <a:spcPts val="425"/>
-              </a:spcAft>
               <a:buClr>
                 <a:srgbClr val="000000"/>
               </a:buClr>
@@ -7069,31 +7015,7 @@
                 <a:latin typeface="Arial"/>
                 <a:ea typeface="Unifont"/>
               </a:rPr>
-              <a:t>Automate simulations across </a:t>
-            </a:r>
-            <a:r>
-              <a:rPr b="0" i="1" lang="fr-FR" sz="2400" strike="noStrike" u="none">
-                <a:solidFill>
-                  <a:srgbClr val="000000"/>
-                </a:solidFill>
-                <a:effectLst/>
-                <a:uFillTx/>
-                <a:latin typeface="Arial"/>
-                <a:ea typeface="Unifont"/>
-              </a:rPr>
-              <a:t>parameter</a:t>
-            </a:r>
-            <a:r>
-              <a:rPr b="0" lang="fr-FR" sz="2400" strike="noStrike" u="none">
-                <a:solidFill>
-                  <a:srgbClr val="000000"/>
-                </a:solidFill>
-                <a:effectLst/>
-                <a:uFillTx/>
-                <a:latin typeface="Arial"/>
-                <a:ea typeface="Unifont"/>
-              </a:rPr>
-              <a:t> ranges (e.g., vary samples).</a:t>
+              <a:t>Configure beamlines/instruments in McStas (neutrons) and McXtrace (X-rays).</a:t>
             </a:r>
             <a:endParaRPr b="0" lang="fr-FR" sz="2400" strike="noStrike" u="none">
               <a:solidFill>
@@ -7109,12 +7031,6 @@
               <a:lnSpc>
                 <a:spcPct val="100000"/>
               </a:lnSpc>
-              <a:spcBef>
-                <a:spcPts val="624"/>
-              </a:spcBef>
-              <a:spcAft>
-                <a:spcPts val="425"/>
-              </a:spcAft>
               <a:buClr>
                 <a:srgbClr val="000000"/>
               </a:buClr>
@@ -7134,10 +7050,13 @@
                 <a:latin typeface="Arial"/>
                 <a:ea typeface="Unifont"/>
               </a:rPr>
-              <a:t>Output: Labeled datasets of [</a:t>
-            </a:r>
-            <a:r>
-              <a:rPr b="0" i="1" lang="fr-FR" sz="2400" strike="noStrike" u="none">
+              <a:t>Define sample properties (e.g., crystal structure, composition).</a:t>
+            </a:r>
+            <a:br>
+              <a:rPr sz="2400"/>
+            </a:br>
+            <a:r>
+              <a:rPr b="0" lang="fr-FR" sz="2400" strike="noStrike" u="none">
                 <a:solidFill>
                   <a:srgbClr val="000000"/>
                 </a:solidFill>
@@ -7146,36 +7065,9 @@
                 <a:latin typeface="Arial"/>
                 <a:ea typeface="Unifont"/>
               </a:rPr>
-              <a:t>parameters, virtual_measurements</a:t>
-            </a:r>
-            <a:r>
-              <a:rPr b="0" lang="fr-FR" sz="2400" strike="noStrike" u="none">
-                <a:solidFill>
-                  <a:srgbClr val="000000"/>
-                </a:solidFill>
-                <a:effectLst/>
-                <a:uFillTx/>
-                <a:latin typeface="Arial"/>
-                <a:ea typeface="Unifont"/>
-              </a:rPr>
-              <a:t>].</a:t>
-            </a:r>
-            <a:br>
-              <a:rPr sz="1000"/>
-            </a:br>
-            <a:r>
-              <a:rPr b="0" lang="fr-FR" sz="1000" strike="noStrike" u="none">
-                <a:solidFill>
-                  <a:srgbClr val="000000"/>
-                </a:solidFill>
-                <a:effectLst/>
-                <a:uFillTx/>
-                <a:latin typeface="Arial"/>
-                <a:ea typeface="Unifont"/>
-              </a:rPr>
               <a:t> </a:t>
             </a:r>
-            <a:endParaRPr b="0" lang="fr-FR" sz="1000" strike="noStrike" u="none">
+            <a:endParaRPr b="0" lang="fr-FR" sz="2400" strike="noStrike" u="none">
               <a:solidFill>
                 <a:srgbClr val="000000"/>
               </a:solidFill>
@@ -7208,7 +7100,7 @@
                 <a:latin typeface="Arial"/>
                 <a:ea typeface="Unifont"/>
               </a:rPr>
-              <a:t>Apply AI :</a:t>
+              <a:t>Characterizing Models:</a:t>
             </a:r>
             <a:endParaRPr b="0" lang="fr-FR" sz="2400" strike="noStrike" u="none">
               <a:solidFill>
@@ -7224,12 +7116,6 @@
               <a:lnSpc>
                 <a:spcPct val="100000"/>
               </a:lnSpc>
-              <a:spcBef>
-                <a:spcPts val="624"/>
-              </a:spcBef>
-              <a:spcAft>
-                <a:spcPts val="425"/>
-              </a:spcAft>
               <a:buClr>
                 <a:srgbClr val="000000"/>
               </a:buClr>
@@ -7249,31 +7135,7 @@
                 <a:latin typeface="Arial"/>
                 <a:ea typeface="Unifont"/>
               </a:rPr>
-              <a:t>Surrogate Modeling: generate </a:t>
-            </a:r>
-            <a:r>
-              <a:rPr b="0" i="1" lang="fr-FR" sz="2400" strike="noStrike" u="none">
-                <a:solidFill>
-                  <a:srgbClr val="000000"/>
-                </a:solidFill>
-                <a:effectLst/>
-                <a:uFillTx/>
-                <a:latin typeface="Arial"/>
-                <a:ea typeface="Unifont"/>
-              </a:rPr>
-              <a:t>virtual_measurements</a:t>
-            </a:r>
-            <a:r>
-              <a:rPr b="0" lang="fr-FR" sz="2400" strike="noStrike" u="none">
-                <a:solidFill>
-                  <a:srgbClr val="000000"/>
-                </a:solidFill>
-                <a:effectLst/>
-                <a:uFillTx/>
-                <a:latin typeface="Arial"/>
-                <a:ea typeface="Unifont"/>
-              </a:rPr>
-              <a:t> faster.</a:t>
+              <a:t>Check geometry (e.g., detector positions, slit sizes).</a:t>
             </a:r>
             <a:endParaRPr b="0" lang="fr-FR" sz="2400" strike="noStrike" u="none">
               <a:solidFill>
@@ -7289,12 +7151,6 @@
               <a:lnSpc>
                 <a:spcPct val="100000"/>
               </a:lnSpc>
-              <a:spcBef>
-                <a:spcPts val="624"/>
-              </a:spcBef>
-              <a:spcAft>
-                <a:spcPts val="425"/>
-              </a:spcAft>
               <a:buClr>
                 <a:srgbClr val="000000"/>
               </a:buClr>
@@ -7314,96 +7170,7 @@
                 <a:latin typeface="Arial"/>
                 <a:ea typeface="Unifont"/>
               </a:rPr>
-              <a:t>Solving Inverse Problems: get </a:t>
-            </a:r>
-            <a:r>
-              <a:rPr b="0" i="1" lang="fr-FR" sz="2400" strike="noStrike" u="none">
-                <a:solidFill>
-                  <a:srgbClr val="000000"/>
-                </a:solidFill>
-                <a:effectLst/>
-                <a:uFillTx/>
-                <a:latin typeface="Arial"/>
-                <a:ea typeface="Unifont"/>
-              </a:rPr>
-              <a:t>parameters </a:t>
-            </a:r>
-            <a:r>
-              <a:rPr b="0" lang="fr-FR" sz="2400" strike="noStrike" u="none">
-                <a:solidFill>
-                  <a:srgbClr val="000000"/>
-                </a:solidFill>
-                <a:effectLst/>
-                <a:uFillTx/>
-                <a:latin typeface="Arial"/>
-                <a:ea typeface="Unifont"/>
-              </a:rPr>
-              <a:t>from</a:t>
-            </a:r>
-            <a:r>
-              <a:rPr b="0" i="1" lang="fr-FR" sz="2400" strike="noStrike" u="none">
-                <a:solidFill>
-                  <a:srgbClr val="000000"/>
-                </a:solidFill>
-                <a:effectLst/>
-                <a:uFillTx/>
-                <a:latin typeface="Arial"/>
-                <a:ea typeface="Unifont"/>
-              </a:rPr>
-              <a:t> measurements.</a:t>
-            </a:r>
-            <a:endParaRPr b="0" lang="fr-FR" sz="2400" strike="noStrike" u="none">
-              <a:solidFill>
-                <a:srgbClr val="000000"/>
-              </a:solidFill>
-              <a:effectLst/>
-              <a:uFillTx/>
-              <a:latin typeface="Arial"/>
-            </a:endParaRPr>
-          </a:p>
-          <a:p>
-            <a:pPr marL="360000" indent="-343080" defTabSz="343080">
-              <a:lnSpc>
-                <a:spcPct val="100000"/>
-              </a:lnSpc>
-              <a:spcBef>
-                <a:spcPts val="624"/>
-              </a:spcBef>
-              <a:spcAft>
-                <a:spcPts val="425"/>
-              </a:spcAft>
-              <a:buClr>
-                <a:srgbClr val="000000"/>
-              </a:buClr>
-              <a:buFont typeface="Arial"/>
-              <a:buChar char="•"/>
-              <a:tabLst>
-                <a:tab algn="l" pos="0"/>
-              </a:tabLst>
-            </a:pPr>
-            <a:r>
-              <a:rPr b="0" lang="fr-FR" sz="2400" strike="noStrike" u="none">
-                <a:solidFill>
-                  <a:srgbClr val="000000"/>
-                </a:solidFill>
-                <a:effectLst/>
-                <a:uFillTx/>
-                <a:latin typeface="Arial"/>
-                <a:ea typeface="Unifont"/>
-              </a:rPr>
-              <a:t>Optimization: search fpr best </a:t>
-            </a:r>
-            <a:r>
-              <a:rPr b="0" i="1" lang="fr-FR" sz="2400" strike="noStrike" u="none">
-                <a:solidFill>
-                  <a:srgbClr val="000000"/>
-                </a:solidFill>
-                <a:effectLst/>
-                <a:uFillTx/>
-                <a:latin typeface="Arial"/>
-                <a:ea typeface="Unifont"/>
-              </a:rPr>
-              <a:t>parameters.</a:t>
+              <a:t>Extract parameters (e.g., resolution, flux) and results (e.g., spectra, diffraction patterns).</a:t>
             </a:r>
             <a:endParaRPr b="0" lang="fr-FR" sz="2400" strike="noStrike" u="none">
               <a:solidFill>
@@ -7448,14 +7215,14 @@
       </p:grpSpPr>
       <p:sp>
         <p:nvSpPr>
-          <p:cNvPr id="93" name="Text 49"/>
+          <p:cNvPr id="93" name="Text 43"/>
           <p:cNvSpPr/>
           <p:nvPr/>
         </p:nvSpPr>
         <p:spPr>
           <a:xfrm>
             <a:off x="548640" y="383760"/>
-            <a:ext cx="9142200" cy="290880"/>
+            <a:ext cx="9141840" cy="290520"/>
           </a:xfrm>
           <a:prstGeom prst="rect">
             <a:avLst/>
@@ -7499,7 +7266,7 @@
                 <a:uFillTx/>
                 <a:latin typeface="Calibri"/>
               </a:rPr>
-              <a:t>Resources</a:t>
+              <a:t>Lessons and praticals</a:t>
             </a:r>
             <a:endParaRPr b="0" lang="fr-FR" sz="1200" strike="noStrike" u="none">
               <a:solidFill>
@@ -7514,14 +7281,14 @@
       </p:sp>
       <p:sp>
         <p:nvSpPr>
-          <p:cNvPr id="94" name="Text 50"/>
+          <p:cNvPr id="94" name="Text 44"/>
           <p:cNvSpPr/>
           <p:nvPr/>
         </p:nvSpPr>
         <p:spPr>
           <a:xfrm>
             <a:off x="548640" y="658080"/>
-            <a:ext cx="11062440" cy="821160"/>
+            <a:ext cx="11062080" cy="820800"/>
           </a:xfrm>
           <a:prstGeom prst="rect">
             <a:avLst/>
@@ -7565,7 +7332,7 @@
                 <a:uFillTx/>
                 <a:latin typeface="Cambria"/>
               </a:rPr>
-              <a:t>What You Will Use</a:t>
+              <a:t>What You Will Learn and Practice</a:t>
             </a:r>
             <a:endParaRPr b="0" lang="fr-FR" sz="3000" strike="noStrike" u="none">
               <a:solidFill>
@@ -7580,14 +7347,14 @@
       </p:sp>
       <p:sp>
         <p:nvSpPr>
-          <p:cNvPr id="95" name="Text 51"/>
+          <p:cNvPr id="95" name="Text 45"/>
           <p:cNvSpPr/>
           <p:nvPr/>
         </p:nvSpPr>
         <p:spPr>
           <a:xfrm>
             <a:off x="11185920" y="6446160"/>
-            <a:ext cx="455400" cy="272520"/>
+            <a:ext cx="455040" cy="272160"/>
           </a:xfrm>
           <a:prstGeom prst="rect">
             <a:avLst/>
@@ -7648,7 +7415,7 @@
         <p:spPr>
           <a:xfrm>
             <a:off x="540000" y="1799640"/>
-            <a:ext cx="10978920" cy="2713320"/>
+            <a:ext cx="10978560" cy="4336200"/>
           </a:xfrm>
           <a:prstGeom prst="rect">
             <a:avLst/>
@@ -7697,9 +7464,27 @@
                 <a:uFillTx/>
                 <a:latin typeface="Calibri"/>
               </a:rPr>
-              <a:t>Your Laptop</a:t>
+              <a:t>Hands-on skills</a:t>
             </a:r>
             <a:endParaRPr b="0" lang="fr-FR" sz="2400" strike="noStrike" u="none">
+              <a:solidFill>
+                <a:srgbClr val="000000"/>
+              </a:solidFill>
+              <a:effectLst/>
+              <a:uFillTx/>
+              <a:latin typeface="Arial"/>
+            </a:endParaRPr>
+          </a:p>
+          <a:p>
+            <a:pPr defTabSz="343080">
+              <a:lnSpc>
+                <a:spcPct val="100000"/>
+              </a:lnSpc>
+              <a:tabLst>
+                <a:tab algn="l" pos="0"/>
+              </a:tabLst>
+            </a:pPr>
+            <a:endParaRPr b="0" lang="fr-FR" sz="1000" strike="noStrike" u="none">
               <a:solidFill>
                 <a:srgbClr val="000000"/>
               </a:solidFill>
@@ -7731,13 +7516,14 @@
             <a:r>
               <a:rPr b="1" lang="fr-FR" sz="2400" strike="noStrike" u="none">
                 <a:solidFill>
-                  <a:srgbClr val="0000ff"/>
-                </a:solidFill>
-                <a:effectLst/>
-                <a:uFillTx/>
-                <a:latin typeface="Calibri"/>
-              </a:rPr>
-              <a:t>High Performance Computing (MesoNET)</a:t>
+                  <a:srgbClr val="000000"/>
+                </a:solidFill>
+                <a:effectLst/>
+                <a:uFillTx/>
+                <a:latin typeface="Arial"/>
+                <a:ea typeface="Unifont"/>
+              </a:rPr>
+              <a:t>Generating Datasets:</a:t>
             </a:r>
             <a:endParaRPr b="0" lang="fr-FR" sz="2400" strike="noStrike" u="none">
               <a:solidFill>
@@ -7749,15 +7535,15 @@
             </a:endParaRPr>
           </a:p>
           <a:p>
-            <a:pPr marL="343080" indent="-343080" defTabSz="343080">
+            <a:pPr marL="360000" indent="-343080" defTabSz="343080">
               <a:lnSpc>
                 <a:spcPct val="100000"/>
               </a:lnSpc>
               <a:spcBef>
-                <a:spcPts val="1191"/>
+                <a:spcPts val="624"/>
               </a:spcBef>
               <a:spcAft>
-                <a:spcPts val="992"/>
+                <a:spcPts val="425"/>
               </a:spcAft>
               <a:buClr>
                 <a:srgbClr val="000000"/>
@@ -7769,38 +7555,40 @@
               </a:tabLst>
             </a:pPr>
             <a:r>
-              <a:rPr b="1" lang="fr-FR" sz="2400" strike="noStrike" u="none">
-                <a:solidFill>
-                  <a:srgbClr val="0000ff"/>
-                </a:solidFill>
-                <a:effectLst/>
-                <a:uFillTx/>
-                <a:latin typeface="Calibri"/>
-              </a:rPr>
-              <a:t>Remote Computing Service (</a:t>
-            </a:r>
-            <a:r>
-              <a:rPr b="1" lang="fr-FR" sz="2400" strike="noStrike" u="none">
-                <a:solidFill>
-                  <a:srgbClr val="0563c1"/>
-                </a:solidFill>
-                <a:effectLst/>
-                <a:uFillTx/>
-                <a:latin typeface="Calibri"/>
-                <a:hlinkClick r:id="rId1"/>
-              </a:rPr>
-              <a:t>DARTS@SOLEIL</a:t>
-            </a:r>
-            <a:r>
-              <a:rPr b="1" lang="fr-FR" sz="2400" strike="noStrike" u="none">
-                <a:solidFill>
-                  <a:srgbClr val="0000ff"/>
-                </a:solidFill>
-                <a:effectLst/>
-                <a:uFillTx/>
-                <a:latin typeface="Calibri"/>
-              </a:rPr>
-              <a:t>)</a:t>
+              <a:rPr b="0" lang="fr-FR" sz="2400" strike="noStrike" u="none">
+                <a:solidFill>
+                  <a:srgbClr val="000000"/>
+                </a:solidFill>
+                <a:effectLst/>
+                <a:uFillTx/>
+                <a:latin typeface="Arial"/>
+                <a:ea typeface="Unifont"/>
+              </a:rPr>
+              <a:t>Automate simulations across </a:t>
+            </a:r>
+            <a:r>
+              <a:rPr b="0" i="1" lang="fr-FR" sz="2400" strike="noStrike" u="none">
+                <a:solidFill>
+                  <a:srgbClr val="000000"/>
+                </a:solidFill>
+                <a:effectLst/>
+                <a:uFillTx/>
+                <a:latin typeface="Arial"/>
+                <a:ea typeface="Unifont"/>
+              </a:rPr>
+              <a:t>parameter</a:t>
+            </a:r>
+            <a:r>
+              <a:rPr b="0" lang="fr-FR" sz="2400" strike="noStrike" u="none">
+                <a:solidFill>
+                  <a:srgbClr val="000000"/>
+                </a:solidFill>
+                <a:effectLst/>
+                <a:uFillTx/>
+                <a:latin typeface="Arial"/>
+                <a:ea typeface="Unifont"/>
+              </a:rPr>
+              <a:t> ranges (e.g., vary samples).</a:t>
             </a:r>
             <a:endParaRPr b="0" lang="fr-FR" sz="2400" strike="noStrike" u="none">
               <a:solidFill>
@@ -7812,15 +7600,15 @@
             </a:endParaRPr>
           </a:p>
           <a:p>
-            <a:pPr marL="343080" indent="-343080" defTabSz="343080">
+            <a:pPr marL="360000" indent="-343080" defTabSz="343080">
               <a:lnSpc>
                 <a:spcPct val="100000"/>
               </a:lnSpc>
               <a:spcBef>
-                <a:spcPts val="1191"/>
+                <a:spcPts val="624"/>
               </a:spcBef>
               <a:spcAft>
-                <a:spcPts val="992"/>
+                <a:spcPts val="425"/>
               </a:spcAft>
               <a:buClr>
                 <a:srgbClr val="000000"/>
@@ -7832,15 +7620,90 @@
               </a:tabLst>
             </a:pPr>
             <a:r>
+              <a:rPr b="0" lang="fr-FR" sz="2400" strike="noStrike" u="none">
+                <a:solidFill>
+                  <a:srgbClr val="000000"/>
+                </a:solidFill>
+                <a:effectLst/>
+                <a:uFillTx/>
+                <a:latin typeface="Arial"/>
+                <a:ea typeface="Unifont"/>
+              </a:rPr>
+              <a:t>Output: Labeled datasets of [</a:t>
+            </a:r>
+            <a:r>
+              <a:rPr b="0" i="1" lang="fr-FR" sz="2400" strike="noStrike" u="none">
+                <a:solidFill>
+                  <a:srgbClr val="000000"/>
+                </a:solidFill>
+                <a:effectLst/>
+                <a:uFillTx/>
+                <a:latin typeface="Arial"/>
+                <a:ea typeface="Unifont"/>
+              </a:rPr>
+              <a:t>parameters, virtual_measurements</a:t>
+            </a:r>
+            <a:r>
+              <a:rPr b="0" lang="fr-FR" sz="2400" strike="noStrike" u="none">
+                <a:solidFill>
+                  <a:srgbClr val="000000"/>
+                </a:solidFill>
+                <a:effectLst/>
+                <a:uFillTx/>
+                <a:latin typeface="Arial"/>
+                <a:ea typeface="Unifont"/>
+              </a:rPr>
+              <a:t>].</a:t>
+            </a:r>
+            <a:br>
+              <a:rPr sz="1000"/>
+            </a:br>
+            <a:r>
+              <a:rPr b="0" lang="fr-FR" sz="1000" strike="noStrike" u="none">
+                <a:solidFill>
+                  <a:srgbClr val="000000"/>
+                </a:solidFill>
+                <a:effectLst/>
+                <a:uFillTx/>
+                <a:latin typeface="Arial"/>
+                <a:ea typeface="Unifont"/>
+              </a:rPr>
+              <a:t> </a:t>
+            </a:r>
+            <a:endParaRPr b="0" lang="fr-FR" sz="1000" strike="noStrike" u="none">
+              <a:solidFill>
+                <a:srgbClr val="000000"/>
+              </a:solidFill>
+              <a:effectLst/>
+              <a:uFillTx/>
+              <a:latin typeface="Arial"/>
+            </a:endParaRPr>
+          </a:p>
+          <a:p>
+            <a:pPr marL="343080" indent="-343080" defTabSz="343080">
+              <a:lnSpc>
+                <a:spcPct val="100000"/>
+              </a:lnSpc>
+              <a:buClr>
+                <a:srgbClr val="000000"/>
+              </a:buClr>
+              <a:buFont typeface="Arial"/>
+              <a:buChar char="•"/>
+              <a:tabLst>
+                <a:tab algn="l" pos="0"/>
+              </a:tabLst>
+            </a:pPr>
+            <a:r>
               <a:rPr b="1" lang="fr-FR" sz="2400" strike="noStrike" u="none">
                 <a:solidFill>
-                  <a:srgbClr val="0000ff"/>
-                </a:solidFill>
-                <a:effectLst/>
-                <a:uFillTx/>
-                <a:latin typeface="Calibri"/>
-              </a:rPr>
-              <a:t>Your Brain</a:t>
+                  <a:srgbClr val="000000"/>
+                </a:solidFill>
+                <a:effectLst/>
+                <a:uFillTx/>
+                <a:latin typeface="Arial"/>
+                <a:ea typeface="Unifont"/>
+              </a:rPr>
+              <a:t>Apply AI :</a:t>
             </a:r>
             <a:endParaRPr b="0" lang="fr-FR" sz="2400" strike="noStrike" u="none">
               <a:solidFill>
@@ -7852,15 +7715,192 @@
             </a:endParaRPr>
           </a:p>
           <a:p>
-            <a:pPr defTabSz="343080">
-              <a:lnSpc>
-                <a:spcPct val="100000"/>
-              </a:lnSpc>
-              <a:tabLst>
-                <a:tab algn="l" pos="0"/>
-              </a:tabLst>
-            </a:pPr>
-            <a:endParaRPr b="0" lang="fr-FR" sz="1000" strike="noStrike" u="none">
+            <a:pPr marL="360000" indent="-343080" defTabSz="343080">
+              <a:lnSpc>
+                <a:spcPct val="100000"/>
+              </a:lnSpc>
+              <a:spcBef>
+                <a:spcPts val="624"/>
+              </a:spcBef>
+              <a:spcAft>
+                <a:spcPts val="425"/>
+              </a:spcAft>
+              <a:buClr>
+                <a:srgbClr val="000000"/>
+              </a:buClr>
+              <a:buFont typeface="Arial"/>
+              <a:buChar char="•"/>
+              <a:tabLst>
+                <a:tab algn="l" pos="0"/>
+              </a:tabLst>
+            </a:pPr>
+            <a:r>
+              <a:rPr b="0" lang="fr-FR" sz="2400" strike="noStrike" u="none">
+                <a:solidFill>
+                  <a:srgbClr val="000000"/>
+                </a:solidFill>
+                <a:effectLst/>
+                <a:uFillTx/>
+                <a:latin typeface="Arial"/>
+                <a:ea typeface="Unifont"/>
+              </a:rPr>
+              <a:t>Surrogate Modeling: generate </a:t>
+            </a:r>
+            <a:r>
+              <a:rPr b="0" i="1" lang="fr-FR" sz="2400" strike="noStrike" u="none">
+                <a:solidFill>
+                  <a:srgbClr val="000000"/>
+                </a:solidFill>
+                <a:effectLst/>
+                <a:uFillTx/>
+                <a:latin typeface="Arial"/>
+                <a:ea typeface="Unifont"/>
+              </a:rPr>
+              <a:t>virtual_measurements</a:t>
+            </a:r>
+            <a:r>
+              <a:rPr b="0" lang="fr-FR" sz="2400" strike="noStrike" u="none">
+                <a:solidFill>
+                  <a:srgbClr val="000000"/>
+                </a:solidFill>
+                <a:effectLst/>
+                <a:uFillTx/>
+                <a:latin typeface="Arial"/>
+                <a:ea typeface="Unifont"/>
+              </a:rPr>
+              <a:t> faster.</a:t>
+            </a:r>
+            <a:endParaRPr b="0" lang="fr-FR" sz="2400" strike="noStrike" u="none">
+              <a:solidFill>
+                <a:srgbClr val="000000"/>
+              </a:solidFill>
+              <a:effectLst/>
+              <a:uFillTx/>
+              <a:latin typeface="Arial"/>
+            </a:endParaRPr>
+          </a:p>
+          <a:p>
+            <a:pPr marL="360000" indent="-343080" defTabSz="343080">
+              <a:lnSpc>
+                <a:spcPct val="100000"/>
+              </a:lnSpc>
+              <a:spcBef>
+                <a:spcPts val="624"/>
+              </a:spcBef>
+              <a:spcAft>
+                <a:spcPts val="425"/>
+              </a:spcAft>
+              <a:buClr>
+                <a:srgbClr val="000000"/>
+              </a:buClr>
+              <a:buFont typeface="Arial"/>
+              <a:buChar char="•"/>
+              <a:tabLst>
+                <a:tab algn="l" pos="0"/>
+              </a:tabLst>
+            </a:pPr>
+            <a:r>
+              <a:rPr b="0" lang="fr-FR" sz="2400" strike="noStrike" u="none">
+                <a:solidFill>
+                  <a:srgbClr val="000000"/>
+                </a:solidFill>
+                <a:effectLst/>
+                <a:uFillTx/>
+                <a:latin typeface="Arial"/>
+                <a:ea typeface="Unifont"/>
+              </a:rPr>
+              <a:t>Solving Inverse Problems: get </a:t>
+            </a:r>
+            <a:r>
+              <a:rPr b="0" i="1" lang="fr-FR" sz="2400" strike="noStrike" u="none">
+                <a:solidFill>
+                  <a:srgbClr val="000000"/>
+                </a:solidFill>
+                <a:effectLst/>
+                <a:uFillTx/>
+                <a:latin typeface="Arial"/>
+                <a:ea typeface="Unifont"/>
+              </a:rPr>
+              <a:t>parameters </a:t>
+            </a:r>
+            <a:r>
+              <a:rPr b="0" lang="fr-FR" sz="2400" strike="noStrike" u="none">
+                <a:solidFill>
+                  <a:srgbClr val="000000"/>
+                </a:solidFill>
+                <a:effectLst/>
+                <a:uFillTx/>
+                <a:latin typeface="Arial"/>
+                <a:ea typeface="Unifont"/>
+              </a:rPr>
+              <a:t>from</a:t>
+            </a:r>
+            <a:r>
+              <a:rPr b="0" i="1" lang="fr-FR" sz="2400" strike="noStrike" u="none">
+                <a:solidFill>
+                  <a:srgbClr val="000000"/>
+                </a:solidFill>
+                <a:effectLst/>
+                <a:uFillTx/>
+                <a:latin typeface="Arial"/>
+                <a:ea typeface="Unifont"/>
+              </a:rPr>
+              <a:t> measurements.</a:t>
+            </a:r>
+            <a:endParaRPr b="0" lang="fr-FR" sz="2400" strike="noStrike" u="none">
+              <a:solidFill>
+                <a:srgbClr val="000000"/>
+              </a:solidFill>
+              <a:effectLst/>
+              <a:uFillTx/>
+              <a:latin typeface="Arial"/>
+            </a:endParaRPr>
+          </a:p>
+          <a:p>
+            <a:pPr marL="360000" indent="-343080" defTabSz="343080">
+              <a:lnSpc>
+                <a:spcPct val="100000"/>
+              </a:lnSpc>
+              <a:spcBef>
+                <a:spcPts val="624"/>
+              </a:spcBef>
+              <a:spcAft>
+                <a:spcPts val="425"/>
+              </a:spcAft>
+              <a:buClr>
+                <a:srgbClr val="000000"/>
+              </a:buClr>
+              <a:buFont typeface="Arial"/>
+              <a:buChar char="•"/>
+              <a:tabLst>
+                <a:tab algn="l" pos="0"/>
+              </a:tabLst>
+            </a:pPr>
+            <a:r>
+              <a:rPr b="0" lang="fr-FR" sz="2400" strike="noStrike" u="none">
+                <a:solidFill>
+                  <a:srgbClr val="000000"/>
+                </a:solidFill>
+                <a:effectLst/>
+                <a:uFillTx/>
+                <a:latin typeface="Arial"/>
+                <a:ea typeface="Unifont"/>
+              </a:rPr>
+              <a:t>Optimization: search fpr best </a:t>
+            </a:r>
+            <a:r>
+              <a:rPr b="0" i="1" lang="fr-FR" sz="2400" strike="noStrike" u="none">
+                <a:solidFill>
+                  <a:srgbClr val="000000"/>
+                </a:solidFill>
+                <a:effectLst/>
+                <a:uFillTx/>
+                <a:latin typeface="Arial"/>
+                <a:ea typeface="Unifont"/>
+              </a:rPr>
+              <a:t>parameters.</a:t>
+            </a:r>
+            <a:endParaRPr b="0" lang="fr-FR" sz="2400" strike="noStrike" u="none">
               <a:solidFill>
                 <a:srgbClr val="000000"/>
               </a:solidFill>
@@ -7885,6 +7925,461 @@
 </file>
 
 <file path=ppt/slides/slide16.xml><?xml version="1.0" encoding="utf-8"?>
+<p:sld xmlns:a="http://schemas.openxmlformats.org/drawingml/2006/main" xmlns:p="http://schemas.openxmlformats.org/presentationml/2006/main" xmlns:r="http://schemas.openxmlformats.org/officeDocument/2006/relationships" xmlns:p14="http://schemas.microsoft.com/office/powerpoint/2010/main" xmlns:p15="http://schemas.microsoft.com/office/powerpoint/2012/main" xmlns:mc="http://schemas.openxmlformats.org/markup-compatibility/2006">
+  <p:cSld>
+    <p:spTree>
+      <p:nvGrpSpPr>
+        <p:cNvPr id="1" name=""/>
+        <p:cNvGrpSpPr/>
+        <p:nvPr/>
+      </p:nvGrpSpPr>
+      <p:grpSpPr>
+        <a:xfrm>
+          <a:off x="0" y="0"/>
+          <a:ext cx="0" cy="0"/>
+          <a:chOff x="0" y="0"/>
+          <a:chExt cx="0" cy="0"/>
+        </a:xfrm>
+      </p:grpSpPr>
+      <p:sp>
+        <p:nvSpPr>
+          <p:cNvPr id="97" name="Text 49"/>
+          <p:cNvSpPr/>
+          <p:nvPr/>
+        </p:nvSpPr>
+        <p:spPr>
+          <a:xfrm>
+            <a:off x="548640" y="383760"/>
+            <a:ext cx="9141840" cy="290520"/>
+          </a:xfrm>
+          <a:prstGeom prst="rect">
+            <a:avLst/>
+          </a:prstGeom>
+          <a:noFill/>
+          <a:ln w="0">
+            <a:noFill/>
+          </a:ln>
+        </p:spPr>
+        <p:style>
+          <a:lnRef idx="0"/>
+          <a:fillRef idx="0"/>
+          <a:effectRef idx="0"/>
+          <a:fontRef idx="minor"/>
+        </p:style>
+        <p:txBody>
+          <a:bodyPr lIns="90000" rIns="90000" tIns="45000" bIns="45000" anchor="ctr">
+            <a:noAutofit/>
+          </a:bodyPr>
+          <a:p>
+            <a:pPr defTabSz="914400">
+              <a:lnSpc>
+                <a:spcPct val="100000"/>
+              </a:lnSpc>
+              <a:spcBef>
+                <a:spcPts val="1191"/>
+              </a:spcBef>
+              <a:spcAft>
+                <a:spcPts val="992"/>
+              </a:spcAft>
+              <a:tabLst>
+                <a:tab algn="l" pos="0"/>
+              </a:tabLst>
+            </a:pPr>
+            <a:r>
+              <a:rPr b="1" lang="en-GB" sz="1200" spc="201" strike="noStrike" u="none">
+                <a:solidFill>
+                  <a:srgbClr val="1c7293"/>
+                </a:solidFill>
+                <a:effectLst/>
+                <a:uFillTx/>
+                <a:latin typeface="Calibri"/>
+              </a:rPr>
+              <a:t>Resources</a:t>
+            </a:r>
+            <a:endParaRPr b="0" lang="fr-FR" sz="1200" strike="noStrike" u="none">
+              <a:solidFill>
+                <a:srgbClr val="000000"/>
+              </a:solidFill>
+              <a:effectLst/>
+              <a:uFillTx/>
+              <a:latin typeface="Arial"/>
+            </a:endParaRPr>
+          </a:p>
+        </p:txBody>
+      </p:sp>
+      <p:sp>
+        <p:nvSpPr>
+          <p:cNvPr id="98" name="Text 50"/>
+          <p:cNvSpPr/>
+          <p:nvPr/>
+        </p:nvSpPr>
+        <p:spPr>
+          <a:xfrm>
+            <a:off x="548640" y="658080"/>
+            <a:ext cx="11062080" cy="820800"/>
+          </a:xfrm>
+          <a:prstGeom prst="rect">
+            <a:avLst/>
+          </a:prstGeom>
+          <a:noFill/>
+          <a:ln w="0">
+            <a:noFill/>
+          </a:ln>
+        </p:spPr>
+        <p:style>
+          <a:lnRef idx="0"/>
+          <a:fillRef idx="0"/>
+          <a:effectRef idx="0"/>
+          <a:fontRef idx="minor"/>
+        </p:style>
+        <p:txBody>
+          <a:bodyPr lIns="90000" rIns="90000" tIns="45000" bIns="45000" anchor="ctr">
+            <a:noAutofit/>
+          </a:bodyPr>
+          <a:p>
+            <a:pPr defTabSz="914400">
+              <a:lnSpc>
+                <a:spcPct val="100000"/>
+              </a:lnSpc>
+              <a:spcBef>
+                <a:spcPts val="1191"/>
+              </a:spcBef>
+              <a:spcAft>
+                <a:spcPts val="992"/>
+              </a:spcAft>
+              <a:tabLst>
+                <a:tab algn="l" pos="0"/>
+              </a:tabLst>
+            </a:pPr>
+            <a:r>
+              <a:rPr b="1" lang="en-GB" sz="3000" strike="noStrike" u="none">
+                <a:solidFill>
+                  <a:srgbClr val="20242b"/>
+                </a:solidFill>
+                <a:effectLst/>
+                <a:uFillTx/>
+                <a:latin typeface="Cambria"/>
+              </a:rPr>
+              <a:t>What You Will Use</a:t>
+            </a:r>
+            <a:endParaRPr b="0" lang="fr-FR" sz="3000" strike="noStrike" u="none">
+              <a:solidFill>
+                <a:srgbClr val="000000"/>
+              </a:solidFill>
+              <a:effectLst/>
+              <a:uFillTx/>
+              <a:latin typeface="Arial"/>
+            </a:endParaRPr>
+          </a:p>
+        </p:txBody>
+      </p:sp>
+      <p:sp>
+        <p:nvSpPr>
+          <p:cNvPr id="99" name="Text 51"/>
+          <p:cNvSpPr/>
+          <p:nvPr/>
+        </p:nvSpPr>
+        <p:spPr>
+          <a:xfrm>
+            <a:off x="11185920" y="6446160"/>
+            <a:ext cx="455040" cy="272160"/>
+          </a:xfrm>
+          <a:prstGeom prst="rect">
+            <a:avLst/>
+          </a:prstGeom>
+          <a:noFill/>
+          <a:ln w="0">
+            <a:noFill/>
+          </a:ln>
+        </p:spPr>
+        <p:style>
+          <a:lnRef idx="0"/>
+          <a:fillRef idx="0"/>
+          <a:effectRef idx="0"/>
+          <a:fontRef idx="minor"/>
+        </p:style>
+        <p:txBody>
+          <a:bodyPr lIns="90000" rIns="90000" tIns="45000" bIns="45000" anchor="ctr">
+            <a:noAutofit/>
+          </a:bodyPr>
+          <a:p>
+            <a:pPr algn="r" defTabSz="914400">
+              <a:lnSpc>
+                <a:spcPct val="100000"/>
+              </a:lnSpc>
+              <a:tabLst>
+                <a:tab algn="l" pos="0"/>
+              </a:tabLst>
+            </a:pPr>
+            <a:r>
+              <a:rPr b="0" lang="en-US" sz="900" strike="noStrike" u="none">
+                <a:solidFill>
+                  <a:srgbClr val="6e7580"/>
+                </a:solidFill>
+                <a:effectLst/>
+                <a:uFillTx/>
+                <a:latin typeface="Calibri"/>
+                <a:ea typeface="Calibri"/>
+              </a:rPr>
+              <a:t>2</a:t>
+            </a:r>
+            <a:endParaRPr b="0" lang="fr-FR" sz="900" strike="noStrike" u="none">
+              <a:solidFill>
+                <a:srgbClr val="000000"/>
+              </a:solidFill>
+              <a:effectLst/>
+              <a:uFillTx/>
+              <a:latin typeface="Arial"/>
+            </a:endParaRPr>
+          </a:p>
+        </p:txBody>
+      </p:sp>
+      <p:sp>
+        <p:nvSpPr>
+          <p:cNvPr id="100" name=""/>
+          <p:cNvSpPr/>
+          <p:nvPr/>
+        </p:nvSpPr>
+        <p:spPr>
+          <a:xfrm>
+            <a:off x="540000" y="1799640"/>
+            <a:ext cx="10978560" cy="2713320"/>
+          </a:xfrm>
+          <a:prstGeom prst="rect">
+            <a:avLst/>
+          </a:prstGeom>
+          <a:noFill/>
+          <a:ln w="0">
+            <a:noFill/>
+          </a:ln>
+        </p:spPr>
+        <p:style>
+          <a:lnRef idx="0"/>
+          <a:fillRef idx="0"/>
+          <a:effectRef idx="0"/>
+          <a:fontRef idx="minor"/>
+        </p:style>
+        <p:txBody>
+          <a:bodyPr lIns="90000" rIns="90000" tIns="45000" bIns="45000" anchor="t">
+            <a:spAutoFit/>
+          </a:bodyPr>
+          <a:p>
+            <a:pPr marL="343080" indent="-343080" defTabSz="343080">
+              <a:lnSpc>
+                <a:spcPct val="100000"/>
+              </a:lnSpc>
+              <a:spcBef>
+                <a:spcPts val="1191"/>
+              </a:spcBef>
+              <a:spcAft>
+                <a:spcPts val="992"/>
+              </a:spcAft>
+              <a:buClr>
+                <a:srgbClr val="000000"/>
+              </a:buClr>
+              <a:buFont typeface="Arial"/>
+              <a:buChar char="•"/>
+              <a:tabLst>
+                <a:tab algn="l" pos="0"/>
+              </a:tabLst>
+            </a:pPr>
+            <a:r>
+              <a:rPr b="1" lang="fr-FR" sz="2400" strike="noStrike" u="none">
+                <a:solidFill>
+                  <a:srgbClr val="0000ff"/>
+                </a:solidFill>
+                <a:effectLst/>
+                <a:uFillTx/>
+                <a:latin typeface="Calibri"/>
+              </a:rPr>
+              <a:t>Your Laptop</a:t>
+            </a:r>
+            <a:endParaRPr b="0" lang="fr-FR" sz="2400" strike="noStrike" u="none">
+              <a:solidFill>
+                <a:srgbClr val="000000"/>
+              </a:solidFill>
+              <a:effectLst/>
+              <a:uFillTx/>
+              <a:latin typeface="Arial"/>
+            </a:endParaRPr>
+          </a:p>
+          <a:p>
+            <a:pPr marL="343080" indent="-343080" defTabSz="343080">
+              <a:lnSpc>
+                <a:spcPct val="100000"/>
+              </a:lnSpc>
+              <a:spcBef>
+                <a:spcPts val="1191"/>
+              </a:spcBef>
+              <a:spcAft>
+                <a:spcPts val="992"/>
+              </a:spcAft>
+              <a:buClr>
+                <a:srgbClr val="000000"/>
+              </a:buClr>
+              <a:buFont typeface="Arial"/>
+              <a:buChar char="•"/>
+              <a:tabLst>
+                <a:tab algn="l" pos="0"/>
+              </a:tabLst>
+            </a:pPr>
+            <a:r>
+              <a:rPr b="1" lang="fr-FR" sz="2400" strike="noStrike" u="none">
+                <a:solidFill>
+                  <a:srgbClr val="0000ff"/>
+                </a:solidFill>
+                <a:effectLst/>
+                <a:uFillTx/>
+                <a:latin typeface="Calibri"/>
+              </a:rPr>
+              <a:t>High Performance Computing (MesoNET)</a:t>
+            </a:r>
+            <a:endParaRPr b="0" lang="fr-FR" sz="2400" strike="noStrike" u="none">
+              <a:solidFill>
+                <a:srgbClr val="000000"/>
+              </a:solidFill>
+              <a:effectLst/>
+              <a:uFillTx/>
+              <a:latin typeface="Arial"/>
+            </a:endParaRPr>
+          </a:p>
+          <a:p>
+            <a:pPr marL="343080" indent="-343080" defTabSz="343080">
+              <a:lnSpc>
+                <a:spcPct val="100000"/>
+              </a:lnSpc>
+              <a:spcBef>
+                <a:spcPts val="1191"/>
+              </a:spcBef>
+              <a:spcAft>
+                <a:spcPts val="992"/>
+              </a:spcAft>
+              <a:buClr>
+                <a:srgbClr val="000000"/>
+              </a:buClr>
+              <a:buFont typeface="Arial"/>
+              <a:buChar char="•"/>
+              <a:tabLst>
+                <a:tab algn="l" pos="0"/>
+              </a:tabLst>
+            </a:pPr>
+            <a:r>
+              <a:rPr b="1" lang="fr-FR" sz="2400" strike="noStrike" u="none">
+                <a:solidFill>
+                  <a:srgbClr val="0000ff"/>
+                </a:solidFill>
+                <a:effectLst/>
+                <a:uFillTx/>
+                <a:latin typeface="Calibri"/>
+              </a:rPr>
+              <a:t>Remote Computing Service (</a:t>
+            </a:r>
+            <a:r>
+              <a:rPr b="1" lang="fr-FR" sz="2400" strike="noStrike" u="none">
+                <a:solidFill>
+                  <a:srgbClr val="0563c1"/>
+                </a:solidFill>
+                <a:effectLst/>
+                <a:uFillTx/>
+                <a:latin typeface="Calibri"/>
+                <a:hlinkClick r:id="rId1"/>
+              </a:rPr>
+              <a:t>DARTS@SOLEIL</a:t>
+            </a:r>
+            <a:r>
+              <a:rPr b="1" lang="fr-FR" sz="2400" strike="noStrike" u="none">
+                <a:solidFill>
+                  <a:srgbClr val="0000ff"/>
+                </a:solidFill>
+                <a:effectLst/>
+                <a:uFillTx/>
+                <a:latin typeface="Calibri"/>
+              </a:rPr>
+              <a:t>)</a:t>
+            </a:r>
+            <a:endParaRPr b="0" lang="fr-FR" sz="2400" strike="noStrike" u="none">
+              <a:solidFill>
+                <a:srgbClr val="000000"/>
+              </a:solidFill>
+              <a:effectLst/>
+              <a:uFillTx/>
+              <a:latin typeface="Arial"/>
+            </a:endParaRPr>
+          </a:p>
+          <a:p>
+            <a:pPr marL="343080" indent="-343080" defTabSz="343080">
+              <a:lnSpc>
+                <a:spcPct val="100000"/>
+              </a:lnSpc>
+              <a:spcBef>
+                <a:spcPts val="1191"/>
+              </a:spcBef>
+              <a:spcAft>
+                <a:spcPts val="992"/>
+              </a:spcAft>
+              <a:buClr>
+                <a:srgbClr val="000000"/>
+              </a:buClr>
+              <a:buFont typeface="Arial"/>
+              <a:buChar char="•"/>
+              <a:tabLst>
+                <a:tab algn="l" pos="0"/>
+              </a:tabLst>
+            </a:pPr>
+            <a:r>
+              <a:rPr b="1" lang="fr-FR" sz="2400" strike="noStrike" u="none">
+                <a:solidFill>
+                  <a:srgbClr val="0000ff"/>
+                </a:solidFill>
+                <a:effectLst/>
+                <a:uFillTx/>
+                <a:latin typeface="Calibri"/>
+              </a:rPr>
+              <a:t>Your Brain</a:t>
+            </a:r>
+            <a:endParaRPr b="0" lang="fr-FR" sz="2400" strike="noStrike" u="none">
+              <a:solidFill>
+                <a:srgbClr val="000000"/>
+              </a:solidFill>
+              <a:effectLst/>
+              <a:uFillTx/>
+              <a:latin typeface="Arial"/>
+            </a:endParaRPr>
+          </a:p>
+          <a:p>
+            <a:pPr defTabSz="343080">
+              <a:lnSpc>
+                <a:spcPct val="100000"/>
+              </a:lnSpc>
+              <a:tabLst>
+                <a:tab algn="l" pos="0"/>
+              </a:tabLst>
+            </a:pPr>
+            <a:endParaRPr b="0" lang="fr-FR" sz="1000" strike="noStrike" u="none">
+              <a:solidFill>
+                <a:srgbClr val="000000"/>
+              </a:solidFill>
+              <a:effectLst/>
+              <a:uFillTx/>
+              <a:latin typeface="Arial"/>
+            </a:endParaRPr>
+          </a:p>
+        </p:txBody>
+      </p:sp>
+    </p:spTree>
+  </p:cSld>
+  <mc:AlternateContent>
+    <mc:Choice Requires="p14">
+      <p:transition spd="slow" p14:dur="2000"/>
+    </mc:Choice>
+    <mc:Fallback>
+      <p:transition spd="slow"/>
+    </mc:Fallback>
+  </mc:AlternateContent>
+</p:sld>
+</file>
+
+<file path=ppt/slides/slide17.xml><?xml version="1.0" encoding="utf-8"?>
 <p:sld xmlns:a="http://schemas.openxmlformats.org/drawingml/2006/main" xmlns:p="http://schemas.openxmlformats.org/presentationml/2006/main" xmlns:r="http://schemas.openxmlformats.org/officeDocument/2006/relationships" xmlns:p14="http://schemas.microsoft.com/office/powerpoint/2010/main" xmlns:p15="http://schemas.microsoft.com/office/powerpoint/2012/main" xmlns:mc="http://schemas.openxmlformats.org/markup-compatibility/2006">
   <p:cSld>
     <p:bg>
@@ -7910,14 +8405,14 @@
       </p:grpSpPr>
       <p:sp>
         <p:nvSpPr>
-          <p:cNvPr id="97" name="Shape 0"/>
+          <p:cNvPr id="101" name="Shape 0"/>
           <p:cNvSpPr/>
           <p:nvPr/>
         </p:nvSpPr>
         <p:spPr>
           <a:xfrm>
             <a:off x="9410040" y="-1457640"/>
-            <a:ext cx="4753080" cy="4753080"/>
+            <a:ext cx="4752720" cy="4752720"/>
           </a:xfrm>
           <a:prstGeom prst="ellipse">
             <a:avLst/>
@@ -7958,14 +8453,14 @@
       </p:sp>
       <p:sp>
         <p:nvSpPr>
-          <p:cNvPr id="98" name="Shape 1"/>
+          <p:cNvPr id="102" name="Shape 1"/>
           <p:cNvSpPr/>
           <p:nvPr/>
         </p:nvSpPr>
         <p:spPr>
           <a:xfrm>
             <a:off x="-1828800" y="4206240"/>
-            <a:ext cx="4204440" cy="4204440"/>
+            <a:ext cx="4204080" cy="4204080"/>
           </a:xfrm>
           <a:prstGeom prst="ellipse">
             <a:avLst/>
@@ -8006,14 +8501,14 @@
       </p:sp>
       <p:sp>
         <p:nvSpPr>
-          <p:cNvPr id="99" name="Text 2"/>
+          <p:cNvPr id="103" name="Text 2"/>
           <p:cNvSpPr/>
           <p:nvPr/>
         </p:nvSpPr>
         <p:spPr>
           <a:xfrm>
             <a:off x="822960" y="2286000"/>
-            <a:ext cx="9142200" cy="1095480"/>
+            <a:ext cx="9141840" cy="1095120"/>
           </a:xfrm>
           <a:prstGeom prst="rect">
             <a:avLst/>
@@ -8067,14 +8562,14 @@
       </p:sp>
       <p:sp>
         <p:nvSpPr>
-          <p:cNvPr id="100" name="Text 3"/>
+          <p:cNvPr id="104" name="Text 3"/>
           <p:cNvSpPr/>
           <p:nvPr/>
         </p:nvSpPr>
         <p:spPr>
           <a:xfrm>
             <a:off x="822960" y="3246120"/>
-            <a:ext cx="9142200" cy="638280"/>
+            <a:ext cx="9141840" cy="637920"/>
           </a:xfrm>
           <a:prstGeom prst="rect">
             <a:avLst/>
@@ -8128,14 +8623,14 @@
       </p:sp>
       <p:sp>
         <p:nvSpPr>
-          <p:cNvPr id="101" name="Shape 4"/>
+          <p:cNvPr id="105" name="Shape 4"/>
           <p:cNvSpPr/>
           <p:nvPr/>
         </p:nvSpPr>
         <p:spPr>
           <a:xfrm>
             <a:off x="822960" y="4297680"/>
-            <a:ext cx="1415520" cy="309240"/>
+            <a:ext cx="1415160" cy="308880"/>
           </a:xfrm>
           <a:prstGeom prst="roundRect">
             <a:avLst>
@@ -8178,14 +8673,14 @@
       </p:sp>
       <p:sp>
         <p:nvSpPr>
-          <p:cNvPr id="102" name="Text 5"/>
+          <p:cNvPr id="106" name="Text 5"/>
           <p:cNvSpPr/>
           <p:nvPr/>
         </p:nvSpPr>
         <p:spPr>
           <a:xfrm>
             <a:off x="822960" y="4297680"/>
-            <a:ext cx="1415520" cy="309240"/>
+            <a:ext cx="1415160" cy="308880"/>
           </a:xfrm>
           <a:prstGeom prst="rect">
             <a:avLst/>
@@ -8239,14 +8734,14 @@
       </p:sp>
       <p:sp>
         <p:nvSpPr>
-          <p:cNvPr id="103" name="Shape 6"/>
+          <p:cNvPr id="107" name="Shape 6"/>
           <p:cNvSpPr/>
           <p:nvPr/>
         </p:nvSpPr>
         <p:spPr>
           <a:xfrm>
             <a:off x="2377440" y="4297680"/>
-            <a:ext cx="1415520" cy="309240"/>
+            <a:ext cx="1415160" cy="308880"/>
           </a:xfrm>
           <a:prstGeom prst="roundRect">
             <a:avLst>
@@ -8289,14 +8784,14 @@
       </p:sp>
       <p:sp>
         <p:nvSpPr>
-          <p:cNvPr id="104" name="Text 7"/>
+          <p:cNvPr id="108" name="Text 7"/>
           <p:cNvSpPr/>
           <p:nvPr/>
         </p:nvSpPr>
         <p:spPr>
           <a:xfrm>
             <a:off x="2377440" y="4297680"/>
-            <a:ext cx="1415520" cy="309240"/>
+            <a:ext cx="1415160" cy="308880"/>
           </a:xfrm>
           <a:prstGeom prst="rect">
             <a:avLst/>
@@ -8350,7 +8845,7 @@
       </p:sp>
       <p:sp>
         <p:nvSpPr>
-          <p:cNvPr id="105" name="Shape 8"/>
+          <p:cNvPr id="109" name="Shape 8"/>
           <p:cNvSpPr/>
           <p:nvPr/>
         </p:nvSpPr>
@@ -8393,14 +8888,14 @@
       </p:sp>
       <p:sp>
         <p:nvSpPr>
-          <p:cNvPr id="106" name="Text 9"/>
+          <p:cNvPr id="110" name="Text 9"/>
           <p:cNvSpPr/>
           <p:nvPr/>
         </p:nvSpPr>
         <p:spPr>
           <a:xfrm>
             <a:off x="822960" y="5897880"/>
-            <a:ext cx="7313400" cy="318240"/>
+            <a:ext cx="7313040" cy="317880"/>
           </a:xfrm>
           <a:prstGeom prst="rect">
             <a:avLst/>
@@ -8454,14 +8949,14 @@
       </p:sp>
       <p:sp>
         <p:nvSpPr>
-          <p:cNvPr id="107" name="Text 10"/>
+          <p:cNvPr id="111" name="Text 10"/>
           <p:cNvSpPr/>
           <p:nvPr/>
         </p:nvSpPr>
         <p:spPr>
           <a:xfrm>
             <a:off x="548640" y="6446520"/>
-            <a:ext cx="6399000" cy="272520"/>
+            <a:ext cx="6398640" cy="272160"/>
           </a:xfrm>
           <a:prstGeom prst="rect">
             <a:avLst/>
@@ -8515,14 +9010,14 @@
       </p:sp>
       <p:sp>
         <p:nvSpPr>
-          <p:cNvPr id="108" name="Text 11"/>
+          <p:cNvPr id="112" name="Text 11"/>
           <p:cNvSpPr/>
           <p:nvPr/>
         </p:nvSpPr>
         <p:spPr>
           <a:xfrm>
             <a:off x="11185920" y="6446520"/>
-            <a:ext cx="455400" cy="272520"/>
+            <a:ext cx="455040" cy="272160"/>
           </a:xfrm>
           <a:prstGeom prst="rect">
             <a:avLst/>
@@ -8576,14 +9071,14 @@
       </p:sp>
       <p:sp>
         <p:nvSpPr>
-          <p:cNvPr id="109" name="PartnerCard"/>
+          <p:cNvPr id="113" name="PartnerCard"/>
           <p:cNvSpPr/>
           <p:nvPr/>
         </p:nvSpPr>
         <p:spPr>
           <a:xfrm>
             <a:off x="6603840" y="4165560"/>
-            <a:ext cx="4951080" cy="1572840"/>
+            <a:ext cx="4950720" cy="1572480"/>
           </a:xfrm>
           <a:prstGeom prst="roundRect">
             <a:avLst>
@@ -8634,14 +9129,14 @@
       </p:sp>
       <p:sp>
         <p:nvSpPr>
-          <p:cNvPr id="110" name="PartnerLabel"/>
+          <p:cNvPr id="114" name="PartnerLabel"/>
           <p:cNvSpPr/>
           <p:nvPr/>
         </p:nvSpPr>
         <p:spPr>
           <a:xfrm>
             <a:off x="6921360" y="4368960"/>
-            <a:ext cx="4316040" cy="226800"/>
+            <a:ext cx="4315680" cy="226440"/>
           </a:xfrm>
           <a:prstGeom prst="rect">
             <a:avLst/>
@@ -8691,7 +9186,7 @@
       </p:sp>
       <p:pic>
         <p:nvPicPr>
-          <p:cNvPr id="111" name="Picture 15" descr=""/>
+          <p:cNvPr id="115" name="Picture 15" descr=""/>
           <p:cNvPicPr/>
           <p:nvPr/>
         </p:nvPicPr>
@@ -8702,7 +9197,7 @@
         <p:spPr>
           <a:xfrm>
             <a:off x="6921360" y="4749840"/>
-            <a:ext cx="4316040" cy="638640"/>
+            <a:ext cx="4315680" cy="638280"/>
           </a:xfrm>
           <a:prstGeom prst="rect">
             <a:avLst/>
@@ -8715,7 +9210,7 @@
       </p:pic>
       <p:pic>
         <p:nvPicPr>
-          <p:cNvPr id="112" name="Copied Picture 17" descr=""/>
+          <p:cNvPr id="116" name="Copied Picture 17" descr=""/>
           <p:cNvPicPr/>
           <p:nvPr/>
         </p:nvPicPr>
@@ -8727,7 +9222,7 @@
         <p:spPr>
           <a:xfrm>
             <a:off x="10375920" y="355680"/>
-            <a:ext cx="1268280" cy="649800"/>
+            <a:ext cx="1267920" cy="649440"/>
           </a:xfrm>
           <a:prstGeom prst="rect">
             <a:avLst/>
@@ -8740,14 +9235,14 @@
       </p:pic>
       <p:sp>
         <p:nvSpPr>
-          <p:cNvPr id="113" name="LogoCard"/>
+          <p:cNvPr id="117" name="LogoCard"/>
           <p:cNvSpPr/>
           <p:nvPr/>
         </p:nvSpPr>
         <p:spPr>
           <a:xfrm>
             <a:off x="7375680" y="2105640"/>
-            <a:ext cx="3808080" cy="1496880"/>
+            <a:ext cx="3807720" cy="1496520"/>
           </a:xfrm>
           <a:prstGeom prst="roundRect">
             <a:avLst>
@@ -8798,35 +9293,35 @@
       </p:sp>
       <p:grpSp>
         <p:nvGrpSpPr>
-          <p:cNvPr id="114" name="Group 18"/>
+          <p:cNvPr id="118" name="Group 18"/>
           <p:cNvGrpSpPr/>
           <p:nvPr/>
         </p:nvGrpSpPr>
         <p:grpSpPr>
           <a:xfrm>
             <a:off x="7882560" y="2194200"/>
-            <a:ext cx="2794680" cy="1319760"/>
+            <a:ext cx="2794320" cy="1319400"/>
             <a:chOff x="7882560" y="2194200"/>
-            <a:chExt cx="2794680" cy="1319760"/>
+            <a:chExt cx="2794320" cy="1319400"/>
           </a:xfrm>
         </p:grpSpPr>
         <p:grpSp>
           <p:nvGrpSpPr>
-            <p:cNvPr id="115" name="Group 19"/>
+            <p:cNvPr id="119" name="Group 19"/>
             <p:cNvGrpSpPr/>
             <p:nvPr/>
           </p:nvGrpSpPr>
           <p:grpSpPr>
             <a:xfrm>
               <a:off x="9289440" y="2194200"/>
-              <a:ext cx="1387800" cy="1256760"/>
+              <a:ext cx="1387440" cy="1256400"/>
               <a:chOff x="9289440" y="2194200"/>
-              <a:chExt cx="1387800" cy="1256760"/>
+              <a:chExt cx="1387440" cy="1256400"/>
             </a:xfrm>
           </p:grpSpPr>
           <p:pic>
             <p:nvPicPr>
-              <p:cNvPr id="116" name="Picture 21" descr=""/>
+              <p:cNvPr id="120" name="Picture 21" descr=""/>
               <p:cNvPicPr/>
               <p:nvPr/>
             </p:nvPicPr>
@@ -8838,7 +9333,7 @@
             <p:spPr>
               <a:xfrm>
                 <a:off x="9339120" y="2194200"/>
-                <a:ext cx="1292760" cy="774360"/>
+                <a:ext cx="1292400" cy="774000"/>
               </a:xfrm>
               <a:prstGeom prst="rect">
                 <a:avLst/>
@@ -8851,7 +9346,7 @@
           </p:pic>
           <p:pic>
             <p:nvPicPr>
-              <p:cNvPr id="117" name="Picture 22" descr="Synchrotron SOLEIL"/>
+              <p:cNvPr id="121" name="Picture 22" descr="Synchrotron SOLEIL"/>
               <p:cNvPicPr/>
               <p:nvPr/>
             </p:nvPicPr>
@@ -8862,7 +9357,7 @@
             <p:spPr>
               <a:xfrm>
                 <a:off x="9289440" y="2922840"/>
-                <a:ext cx="961560" cy="463680"/>
+                <a:ext cx="961200" cy="463320"/>
               </a:xfrm>
               <a:prstGeom prst="rect">
                 <a:avLst/>
@@ -8875,7 +9370,7 @@
           </p:pic>
           <p:pic>
             <p:nvPicPr>
-              <p:cNvPr id="118" name="Picture 23" descr="DTU Physics"/>
+              <p:cNvPr id="122" name="Picture 23" descr="DTU Physics"/>
               <p:cNvPicPr/>
               <p:nvPr/>
             </p:nvPicPr>
@@ -8886,7 +9381,7 @@
             <p:spPr>
               <a:xfrm>
                 <a:off x="10325160" y="2931480"/>
-                <a:ext cx="352080" cy="519480"/>
+                <a:ext cx="351720" cy="519120"/>
               </a:xfrm>
               <a:prstGeom prst="rect">
                 <a:avLst/>
@@ -8900,7 +9395,7 @@
         </p:grpSp>
         <p:pic>
           <p:nvPicPr>
-            <p:cNvPr id="119" name="Picture 20" descr=""/>
+            <p:cNvPr id="123" name="Picture 20" descr=""/>
             <p:cNvPicPr/>
             <p:nvPr/>
           </p:nvPicPr>
@@ -8911,7 +9406,7 @@
           <p:spPr>
             <a:xfrm>
               <a:off x="7882560" y="2198880"/>
-              <a:ext cx="1292760" cy="1315080"/>
+              <a:ext cx="1292400" cy="1314720"/>
             </a:xfrm>
             <a:prstGeom prst="rect">
               <a:avLst/>
@@ -8969,7 +9464,7 @@
         <p:spPr>
           <a:xfrm>
             <a:off x="548640" y="384120"/>
-            <a:ext cx="9142200" cy="290880"/>
+            <a:ext cx="9141840" cy="290520"/>
           </a:xfrm>
           <a:prstGeom prst="rect">
             <a:avLst/>
@@ -9029,7 +9524,7 @@
         <p:spPr>
           <a:xfrm>
             <a:off x="548640" y="658440"/>
-            <a:ext cx="11062440" cy="821160"/>
+            <a:ext cx="11062080" cy="820800"/>
           </a:xfrm>
           <a:prstGeom prst="rect">
             <a:avLst/>
@@ -9095,7 +9590,7 @@
         <p:spPr>
           <a:xfrm>
             <a:off x="11185920" y="6446520"/>
-            <a:ext cx="455400" cy="272520"/>
+            <a:ext cx="455040" cy="272160"/>
           </a:xfrm>
           <a:prstGeom prst="rect">
             <a:avLst/>
@@ -9156,7 +9651,7 @@
         <p:spPr>
           <a:xfrm>
             <a:off x="540000" y="1480680"/>
-            <a:ext cx="11518920" cy="3015000"/>
+            <a:ext cx="11518560" cy="3015000"/>
           </a:xfrm>
           <a:prstGeom prst="rect">
             <a:avLst/>
@@ -9441,7 +9936,7 @@
         <p:spPr>
           <a:xfrm>
             <a:off x="548640" y="384120"/>
-            <a:ext cx="9142200" cy="290880"/>
+            <a:ext cx="9141840" cy="290520"/>
           </a:xfrm>
           <a:prstGeom prst="rect">
             <a:avLst/>
@@ -9501,7 +9996,7 @@
         <p:spPr>
           <a:xfrm>
             <a:off x="548640" y="658440"/>
-            <a:ext cx="11062440" cy="821160"/>
+            <a:ext cx="11062080" cy="820800"/>
           </a:xfrm>
           <a:prstGeom prst="rect">
             <a:avLst/>
@@ -9567,7 +10062,7 @@
         <p:spPr>
           <a:xfrm>
             <a:off x="11185920" y="6446520"/>
-            <a:ext cx="455400" cy="272520"/>
+            <a:ext cx="455040" cy="272160"/>
           </a:xfrm>
           <a:prstGeom prst="rect">
             <a:avLst/>
@@ -9628,7 +10123,7 @@
         <p:spPr>
           <a:xfrm>
             <a:off x="476280" y="1930680"/>
-            <a:ext cx="11238480" cy="3381480"/>
+            <a:ext cx="11238120" cy="3381480"/>
           </a:xfrm>
           <a:prstGeom prst="rect">
             <a:avLst/>
@@ -9987,7 +10482,7 @@
         <p:spPr>
           <a:xfrm>
             <a:off x="548640" y="384120"/>
-            <a:ext cx="9142200" cy="290880"/>
+            <a:ext cx="9141840" cy="290520"/>
           </a:xfrm>
           <a:prstGeom prst="rect">
             <a:avLst/>
@@ -10047,7 +10542,7 @@
         <p:spPr>
           <a:xfrm>
             <a:off x="548640" y="658440"/>
-            <a:ext cx="11062440" cy="821160"/>
+            <a:ext cx="11062080" cy="820800"/>
           </a:xfrm>
           <a:prstGeom prst="rect">
             <a:avLst/>
@@ -10113,7 +10608,7 @@
         <p:spPr>
           <a:xfrm>
             <a:off x="11185920" y="6446520"/>
-            <a:ext cx="455400" cy="272520"/>
+            <a:ext cx="455040" cy="272160"/>
           </a:xfrm>
           <a:prstGeom prst="rect">
             <a:avLst/>
@@ -10174,7 +10669,7 @@
         <p:spPr>
           <a:xfrm>
             <a:off x="540000" y="1800000"/>
-            <a:ext cx="11118240" cy="4494600"/>
+            <a:ext cx="11117880" cy="4493880"/>
           </a:xfrm>
           <a:prstGeom prst="rect">
             <a:avLst/>
@@ -10296,10 +10791,13 @@
             </a:endParaRPr>
           </a:p>
           <a:p>
-            <a:pPr>
-              <a:lnSpc>
-                <a:spcPct val="100000"/>
-              </a:lnSpc>
+            <a:pPr defTabSz="343080">
+              <a:lnSpc>
+                <a:spcPct val="100000"/>
+              </a:lnSpc>
+              <a:tabLst>
+                <a:tab algn="l" pos="0"/>
+              </a:tabLst>
             </a:pPr>
             <a:r>
               <a:rPr b="1" lang="fr-FR" sz="2400" strike="noStrike" u="none">
@@ -10333,7 +10831,7 @@
             </a:endParaRPr>
           </a:p>
           <a:p>
-            <a:pPr marL="216000" indent="-216000">
+            <a:pPr marL="216000" indent="-216000" defTabSz="343080">
               <a:lnSpc>
                 <a:spcPct val="100000"/>
               </a:lnSpc>
@@ -10342,6 +10840,9 @@
               </a:buClr>
               <a:buFont typeface="Wingdings" charset="2"/>
               <a:buChar char=""/>
+              <a:tabLst>
+                <a:tab algn="l" pos="0"/>
+              </a:tabLst>
             </a:pPr>
             <a:r>
               <a:rPr b="1" lang="fr-FR" sz="2100" strike="noStrike" u="none">
@@ -10375,7 +10876,7 @@
             </a:endParaRPr>
           </a:p>
           <a:p>
-            <a:pPr marL="216000" indent="-216000">
+            <a:pPr marL="216000" indent="-216000" defTabSz="343080">
               <a:lnSpc>
                 <a:spcPct val="100000"/>
               </a:lnSpc>
@@ -10384,6 +10885,9 @@
               </a:buClr>
               <a:buFont typeface="Wingdings" charset="2"/>
               <a:buChar char=""/>
+              <a:tabLst>
+                <a:tab algn="l" pos="0"/>
+              </a:tabLst>
             </a:pPr>
             <a:r>
               <a:rPr b="1" lang="fr-FR" sz="2100" strike="noStrike" u="none">
@@ -10417,7 +10921,7 @@
             </a:endParaRPr>
           </a:p>
           <a:p>
-            <a:pPr marL="216000" indent="-216000">
+            <a:pPr marL="216000" indent="-216000" defTabSz="343080">
               <a:lnSpc>
                 <a:spcPct val="100000"/>
               </a:lnSpc>
@@ -10426,6 +10930,9 @@
               </a:buClr>
               <a:buFont typeface="Wingdings" charset="2"/>
               <a:buChar char=""/>
+              <a:tabLst>
+                <a:tab algn="l" pos="0"/>
+              </a:tabLst>
             </a:pPr>
             <a:r>
               <a:rPr b="0" lang="fr-FR" sz="2100" strike="noStrike" u="none">
@@ -10448,10 +10955,13 @@
             </a:endParaRPr>
           </a:p>
           <a:p>
-            <a:pPr>
-              <a:lnSpc>
-                <a:spcPct val="100000"/>
-              </a:lnSpc>
+            <a:pPr defTabSz="343080">
+              <a:lnSpc>
+                <a:spcPct val="100000"/>
+              </a:lnSpc>
+              <a:tabLst>
+                <a:tab algn="l" pos="0"/>
+              </a:tabLst>
             </a:pPr>
             <a:endParaRPr b="0" lang="fr-FR" sz="2100" strike="noStrike" u="none">
               <a:solidFill>
@@ -10463,10 +10973,13 @@
             </a:endParaRPr>
           </a:p>
           <a:p>
-            <a:pPr>
-              <a:lnSpc>
-                <a:spcPct val="100000"/>
-              </a:lnSpc>
+            <a:pPr defTabSz="343080">
+              <a:lnSpc>
+                <a:spcPct val="100000"/>
+              </a:lnSpc>
+              <a:tabLst>
+                <a:tab algn="l" pos="0"/>
+              </a:tabLst>
             </a:pPr>
             <a:r>
               <a:rPr b="1" lang="fr-FR" sz="2400" strike="noStrike" u="none">
@@ -10500,7 +11013,7 @@
             </a:endParaRPr>
           </a:p>
           <a:p>
-            <a:pPr marL="216000" indent="-216000">
+            <a:pPr marL="216000" indent="-216000" defTabSz="343080">
               <a:lnSpc>
                 <a:spcPct val="100000"/>
               </a:lnSpc>
@@ -10509,6 +11022,9 @@
               </a:buClr>
               <a:buFont typeface="Wingdings" charset="2"/>
               <a:buChar char=""/>
+              <a:tabLst>
+                <a:tab algn="l" pos="0"/>
+              </a:tabLst>
             </a:pPr>
             <a:r>
               <a:rPr b="1" lang="fr-FR" sz="2100" strike="noStrike" u="none">
@@ -10542,7 +11058,7 @@
             </a:endParaRPr>
           </a:p>
           <a:p>
-            <a:pPr marL="216000" indent="-216000">
+            <a:pPr marL="216000" indent="-216000" defTabSz="343080">
               <a:lnSpc>
                 <a:spcPct val="100000"/>
               </a:lnSpc>
@@ -10551,6 +11067,9 @@
               </a:buClr>
               <a:buFont typeface="Wingdings" charset="2"/>
               <a:buChar char=""/>
+              <a:tabLst>
+                <a:tab algn="l" pos="0"/>
+              </a:tabLst>
             </a:pPr>
             <a:r>
               <a:rPr b="1" lang="fr-FR" sz="2100" strike="noStrike" u="none">
@@ -10584,7 +11103,7 @@
             </a:endParaRPr>
           </a:p>
           <a:p>
-            <a:pPr marL="216000" indent="-216000">
+            <a:pPr marL="216000" indent="-216000" defTabSz="343080">
               <a:lnSpc>
                 <a:spcPct val="100000"/>
               </a:lnSpc>
@@ -10593,6 +11112,9 @@
               </a:buClr>
               <a:buFont typeface="Wingdings" charset="2"/>
               <a:buChar char=""/>
+              <a:tabLst>
+                <a:tab algn="l" pos="0"/>
+              </a:tabLst>
             </a:pPr>
             <a:r>
               <a:rPr b="1" lang="fr-FR" sz="2100" strike="noStrike" u="none">
@@ -10626,10 +11148,13 @@
             </a:endParaRPr>
           </a:p>
           <a:p>
-            <a:pPr>
-              <a:lnSpc>
-                <a:spcPct val="100000"/>
-              </a:lnSpc>
+            <a:pPr defTabSz="343080">
+              <a:lnSpc>
+                <a:spcPct val="100000"/>
+              </a:lnSpc>
+              <a:tabLst>
+                <a:tab algn="l" pos="0"/>
+              </a:tabLst>
             </a:pPr>
             <a:endParaRPr b="0" lang="fr-FR" sz="2100" strike="noStrike" u="none">
               <a:solidFill>
@@ -10688,7 +11213,7 @@
         <p:spPr>
           <a:xfrm>
             <a:off x="548640" y="384120"/>
-            <a:ext cx="9142200" cy="290880"/>
+            <a:ext cx="9141840" cy="290520"/>
           </a:xfrm>
           <a:prstGeom prst="rect">
             <a:avLst/>
@@ -10748,7 +11273,7 @@
         <p:spPr>
           <a:xfrm>
             <a:off x="548640" y="658440"/>
-            <a:ext cx="11062440" cy="821160"/>
+            <a:ext cx="11062080" cy="820800"/>
           </a:xfrm>
           <a:prstGeom prst="rect">
             <a:avLst/>
@@ -10814,7 +11339,7 @@
         <p:spPr>
           <a:xfrm>
             <a:off x="11185920" y="6446520"/>
-            <a:ext cx="455400" cy="272520"/>
+            <a:ext cx="455040" cy="272160"/>
           </a:xfrm>
           <a:prstGeom prst="rect">
             <a:avLst/>
@@ -10875,7 +11400,7 @@
         <p:spPr>
           <a:xfrm>
             <a:off x="540000" y="1800000"/>
-            <a:ext cx="10661040" cy="3807720"/>
+            <a:ext cx="10660680" cy="3807720"/>
           </a:xfrm>
           <a:prstGeom prst="rect">
             <a:avLst/>
@@ -11236,7 +11761,7 @@
         <p:spPr>
           <a:xfrm>
             <a:off x="548640" y="384120"/>
-            <a:ext cx="9142200" cy="290880"/>
+            <a:ext cx="9141840" cy="290520"/>
           </a:xfrm>
           <a:prstGeom prst="rect">
             <a:avLst/>
@@ -11296,7 +11821,7 @@
         <p:spPr>
           <a:xfrm>
             <a:off x="548640" y="658440"/>
-            <a:ext cx="11062440" cy="821160"/>
+            <a:ext cx="11062080" cy="820800"/>
           </a:xfrm>
           <a:prstGeom prst="rect">
             <a:avLst/>
@@ -11362,7 +11887,7 @@
         <p:spPr>
           <a:xfrm>
             <a:off x="11185920" y="6446520"/>
-            <a:ext cx="455400" cy="272520"/>
+            <a:ext cx="455040" cy="272160"/>
           </a:xfrm>
           <a:prstGeom prst="rect">
             <a:avLst/>
@@ -11423,7 +11948,7 @@
         <p:spPr>
           <a:xfrm>
             <a:off x="540000" y="1800000"/>
-            <a:ext cx="9476280" cy="4660920"/>
+            <a:ext cx="9475920" cy="4660920"/>
           </a:xfrm>
           <a:prstGeom prst="rect">
             <a:avLst/>
@@ -11793,13 +12318,6 @@
 <file path=ppt/slides/slide7.xml><?xml version="1.0" encoding="utf-8"?>
 <p:sld xmlns:a="http://schemas.openxmlformats.org/drawingml/2006/main" xmlns:p="http://schemas.openxmlformats.org/presentationml/2006/main" xmlns:r="http://schemas.openxmlformats.org/officeDocument/2006/relationships" xmlns:p14="http://schemas.microsoft.com/office/powerpoint/2010/main" xmlns:p15="http://schemas.microsoft.com/office/powerpoint/2012/main" xmlns:mc="http://schemas.openxmlformats.org/markup-compatibility/2006">
   <p:cSld>
-    <p:bg>
-      <p:bgPr>
-        <a:solidFill>
-          <a:srgbClr val="ffffff"/>
-        </a:solidFill>
-      </p:bgPr>
-    </p:bg>
     <p:spTree>
       <p:nvGrpSpPr>
         <p:cNvPr id="1" name=""/>
@@ -11816,14 +12334,14 @@
       </p:grpSpPr>
       <p:sp>
         <p:nvSpPr>
-          <p:cNvPr id="61" name="Text 24"/>
+          <p:cNvPr id="61" name="Text 52"/>
           <p:cNvSpPr/>
           <p:nvPr/>
         </p:nvSpPr>
         <p:spPr>
           <a:xfrm>
             <a:off x="548640" y="384120"/>
-            <a:ext cx="9142200" cy="290880"/>
+            <a:ext cx="9141840" cy="290520"/>
           </a:xfrm>
           <a:prstGeom prst="rect">
             <a:avLst/>
@@ -11876,14 +12394,14 @@
       </p:sp>
       <p:sp>
         <p:nvSpPr>
-          <p:cNvPr id="62" name="Text 25"/>
+          <p:cNvPr id="62" name="Text 53"/>
           <p:cNvSpPr/>
           <p:nvPr/>
         </p:nvSpPr>
         <p:spPr>
           <a:xfrm>
             <a:off x="548640" y="658440"/>
-            <a:ext cx="11062440" cy="821160"/>
+            <a:ext cx="11062080" cy="820800"/>
           </a:xfrm>
           <a:prstGeom prst="rect">
             <a:avLst/>
@@ -11942,14 +12460,14 @@
       </p:sp>
       <p:sp>
         <p:nvSpPr>
-          <p:cNvPr id="63" name="Text 26"/>
+          <p:cNvPr id="63" name="Text 54"/>
           <p:cNvSpPr/>
           <p:nvPr/>
         </p:nvSpPr>
         <p:spPr>
           <a:xfrm>
             <a:off x="11185920" y="6446520"/>
-            <a:ext cx="455400" cy="272520"/>
+            <a:ext cx="455040" cy="272160"/>
           </a:xfrm>
           <a:prstGeom prst="rect">
             <a:avLst/>
@@ -12001,265 +12519,515 @@
           </a:p>
         </p:txBody>
       </p:sp>
-      <p:sp>
-        <p:nvSpPr>
+      <p:graphicFrame>
+        <p:nvGraphicFramePr>
           <p:cNvPr id="64" name=""/>
-          <p:cNvSpPr/>
+          <p:cNvGraphicFramePr/>
           <p:nvPr/>
-        </p:nvSpPr>
-        <p:spPr>
-          <a:xfrm>
-            <a:off x="540000" y="1800000"/>
-            <a:ext cx="9476280" cy="3525840"/>
-          </a:xfrm>
-          <a:prstGeom prst="rect">
-            <a:avLst/>
-          </a:prstGeom>
-          <a:noFill/>
-          <a:ln w="0">
-            <a:noFill/>
-          </a:ln>
-        </p:spPr>
-        <p:style>
-          <a:lnRef idx="0"/>
-          <a:fillRef idx="0"/>
-          <a:effectRef idx="0"/>
-          <a:fontRef idx="minor"/>
-        </p:style>
-        <p:txBody>
-          <a:bodyPr lIns="90000" rIns="90000" tIns="45000" bIns="45000" anchor="t">
-            <a:spAutoFit/>
-          </a:bodyPr>
-          <a:p>
-            <a:pPr defTabSz="343080">
-              <a:lnSpc>
-                <a:spcPct val="100000"/>
-              </a:lnSpc>
-              <a:spcBef>
-                <a:spcPts val="479"/>
-              </a:spcBef>
-              <a:tabLst>
-                <a:tab algn="l" pos="0"/>
-              </a:tabLst>
-            </a:pPr>
-            <a:r>
-              <a:rPr b="1" lang="fr-FR" sz="2400" strike="noStrike" u="none">
-                <a:solidFill>
-                  <a:srgbClr val="0000ff"/>
-                </a:solidFill>
-                <a:effectLst/>
-                <a:uFillTx/>
-                <a:latin typeface="Calibri"/>
-              </a:rPr>
-              <a:t>Inverse Problem</a:t>
-            </a:r>
-            <a:r>
-              <a:rPr b="0" lang="fr-FR" sz="2400" strike="noStrike" u="none">
-                <a:solidFill>
-                  <a:srgbClr val="0000ff"/>
-                </a:solidFill>
-                <a:effectLst/>
-                <a:uFillTx/>
-                <a:latin typeface="Calibri"/>
-              </a:rPr>
-              <a:t>:</a:t>
-            </a:r>
-            <a:br>
-              <a:rPr sz="2400"/>
-            </a:br>
-            <a:endParaRPr b="0" lang="fr-FR" sz="2400" strike="noStrike" u="none">
-              <a:solidFill>
-                <a:srgbClr val="000000"/>
-              </a:solidFill>
-              <a:effectLst/>
-              <a:uFillTx/>
-              <a:latin typeface="Arial"/>
-            </a:endParaRPr>
-          </a:p>
-          <a:p>
-            <a:pPr marL="343080" indent="-343080" defTabSz="343080">
-              <a:lnSpc>
-                <a:spcPct val="100000"/>
-              </a:lnSpc>
-              <a:spcBef>
-                <a:spcPts val="479"/>
-              </a:spcBef>
-              <a:buClr>
-                <a:srgbClr val="000000"/>
-              </a:buClr>
-              <a:buFont typeface="Arial"/>
-              <a:buChar char="•"/>
-              <a:tabLst>
-                <a:tab algn="l" pos="0"/>
-              </a:tabLst>
-            </a:pPr>
-            <a:r>
-              <a:rPr b="1" lang="fr-FR" sz="2400" strike="noStrike" u="none">
-                <a:solidFill>
-                  <a:schemeClr val="dk1"/>
-                </a:solidFill>
-                <a:effectLst/>
-                <a:uFillTx/>
-                <a:latin typeface="Calibri"/>
-              </a:rPr>
-              <a:t>Goal</a:t>
-            </a:r>
-            <a:r>
-              <a:rPr b="0" lang="fr-FR" sz="2400" strike="noStrike" u="none">
-                <a:solidFill>
-                  <a:schemeClr val="dk1"/>
-                </a:solidFill>
-                <a:effectLst/>
-                <a:uFillTx/>
-                <a:latin typeface="Calibri"/>
-              </a:rPr>
-              <a:t>: Reconstruct input parameters from measured data.</a:t>
-            </a:r>
-            <a:endParaRPr b="0" lang="fr-FR" sz="2400" strike="noStrike" u="none">
-              <a:solidFill>
-                <a:srgbClr val="000000"/>
-              </a:solidFill>
-              <a:effectLst/>
-              <a:uFillTx/>
-              <a:latin typeface="Arial"/>
-            </a:endParaRPr>
-          </a:p>
-          <a:p>
-            <a:pPr marL="343080" indent="-343080" defTabSz="343080">
-              <a:lnSpc>
-                <a:spcPct val="100000"/>
-              </a:lnSpc>
-              <a:spcBef>
-                <a:spcPts val="479"/>
-              </a:spcBef>
-              <a:buClr>
-                <a:srgbClr val="000000"/>
-              </a:buClr>
-              <a:buFont typeface="Arial"/>
-              <a:buChar char="•"/>
-              <a:tabLst>
-                <a:tab algn="l" pos="0"/>
-              </a:tabLst>
-            </a:pPr>
-            <a:r>
-              <a:rPr b="1" lang="fr-FR" sz="2400" strike="noStrike" u="none">
-                <a:solidFill>
-                  <a:schemeClr val="dk1"/>
-                </a:solidFill>
-                <a:effectLst/>
-                <a:uFillTx/>
-                <a:latin typeface="Calibri"/>
-              </a:rPr>
-              <a:t>AI Approach</a:t>
-            </a:r>
-            <a:r>
-              <a:rPr b="0" lang="fr-FR" sz="2400" strike="noStrike" u="none">
-                <a:solidFill>
-                  <a:schemeClr val="dk1"/>
-                </a:solidFill>
-                <a:effectLst/>
-                <a:uFillTx/>
-                <a:latin typeface="Calibri"/>
-              </a:rPr>
-              <a:t>:</a:t>
-            </a:r>
-            <a:br>
-              <a:rPr sz="2400"/>
-            </a:br>
-            <a:r>
-              <a:rPr b="0" lang="fr-FR" sz="2400" strike="noStrike" u="none">
-                <a:solidFill>
-                  <a:schemeClr val="dk1"/>
-                </a:solidFill>
-                <a:effectLst/>
-                <a:uFillTx/>
-                <a:latin typeface="Calibri"/>
-              </a:rPr>
-              <a:t> </a:t>
-            </a:r>
-            <a:endParaRPr b="0" lang="fr-FR" sz="2400" strike="noStrike" u="none">
-              <a:solidFill>
-                <a:srgbClr val="000000"/>
-              </a:solidFill>
-              <a:effectLst/>
-              <a:uFillTx/>
-              <a:latin typeface="Arial"/>
-            </a:endParaRPr>
-          </a:p>
-          <a:p>
-            <a:pPr marL="685800" defTabSz="343080">
-              <a:lnSpc>
-                <a:spcPct val="100000"/>
-              </a:lnSpc>
-              <a:spcBef>
-                <a:spcPts val="420"/>
-              </a:spcBef>
-              <a:tabLst>
-                <a:tab algn="l" pos="0"/>
-              </a:tabLst>
-            </a:pPr>
-            <a:r>
-              <a:rPr b="1" lang="fr-FR" sz="2100" strike="noStrike" u="none">
-                <a:solidFill>
-                  <a:srgbClr val="ff00ff"/>
-                </a:solidFill>
-                <a:effectLst/>
-                <a:uFillTx/>
-                <a:latin typeface="Courier New"/>
-              </a:rPr>
-              <a:t>Measurement → [AI Algorithm] → Parameters</a:t>
-            </a:r>
-            <a:br>
-              <a:rPr sz="2100"/>
-            </a:br>
-            <a:endParaRPr b="0" lang="fr-FR" sz="2100" strike="noStrike" u="none">
-              <a:solidFill>
-                <a:srgbClr val="000000"/>
-              </a:solidFill>
-              <a:effectLst/>
-              <a:uFillTx/>
-              <a:latin typeface="Arial"/>
-            </a:endParaRPr>
-          </a:p>
-          <a:p>
-            <a:pPr marL="343080" indent="-343080" defTabSz="343080">
-              <a:lnSpc>
-                <a:spcPct val="100000"/>
-              </a:lnSpc>
-              <a:spcBef>
-                <a:spcPts val="479"/>
-              </a:spcBef>
-              <a:buClr>
-                <a:srgbClr val="000000"/>
-              </a:buClr>
-              <a:buFont typeface="Arial"/>
-              <a:buChar char="•"/>
-              <a:tabLst>
-                <a:tab algn="l" pos="0"/>
-              </a:tabLst>
-            </a:pPr>
-            <a:r>
-              <a:rPr b="0" lang="fr-FR" sz="2400" strike="noStrike" u="none">
-                <a:solidFill>
-                  <a:schemeClr val="dk1"/>
-                </a:solidFill>
-                <a:effectLst/>
-                <a:uFillTx/>
-                <a:latin typeface="Calibri"/>
-              </a:rPr>
-              <a:t>Example: Predict sample composition from a scattering pattern.</a:t>
-            </a:r>
-            <a:endParaRPr b="0" lang="fr-FR" sz="2400" strike="noStrike" u="none">
-              <a:solidFill>
-                <a:srgbClr val="000000"/>
-              </a:solidFill>
-              <a:effectLst/>
-              <a:uFillTx/>
-              <a:latin typeface="Arial"/>
-            </a:endParaRPr>
-          </a:p>
-        </p:txBody>
-      </p:sp>
+        </p:nvGraphicFramePr>
+        <p:xfrm>
+          <a:off x="2736000" y="2052000"/>
+          <a:ext cx="5364000" cy="4068000"/>
+        </p:xfrm>
+        <a:graphic>
+          <a:graphicData uri="http://schemas.openxmlformats.org/drawingml/2006/table">
+            <a:tbl>
+              <a:tblPr/>
+              <a:tblGrid>
+                <a:gridCol w="1788120"/>
+                <a:gridCol w="1788120"/>
+                <a:gridCol w="1787760"/>
+              </a:tblGrid>
+              <a:tr h="1355760">
+                <a:tc>
+                  <a:txBody>
+                    <a:bodyPr lIns="36000" rIns="36000" tIns="36000" bIns="36000" anchor="t">
+                      <a:noAutofit/>
+                    </a:bodyPr>
+                    <a:p>
+                      <a:endParaRPr b="0" lang="fr-FR" sz="1800" strike="noStrike" u="none">
+                        <a:solidFill>
+                          <a:srgbClr val="000000"/>
+                        </a:solidFill>
+                        <a:effectLst/>
+                        <a:uFillTx/>
+                        <a:latin typeface="Arial"/>
+                      </a:endParaRPr>
+                    </a:p>
+                  </a:txBody>
+                  <a:tcPr anchor="t" marL="36000" marR="36000">
+                    <a:lnL w="7200">
+                      <a:solidFill>
+                        <a:srgbClr val="000000"/>
+                      </a:solidFill>
+                      <a:prstDash val="solid"/>
+                    </a:lnL>
+                    <a:lnR w="7200">
+                      <a:solidFill>
+                        <a:srgbClr val="000000"/>
+                      </a:solidFill>
+                      <a:prstDash val="solid"/>
+                    </a:lnR>
+                    <a:lnT w="7200">
+                      <a:solidFill>
+                        <a:srgbClr val="000000"/>
+                      </a:solidFill>
+                      <a:prstDash val="solid"/>
+                    </a:lnT>
+                    <a:lnB w="7200">
+                      <a:solidFill>
+                        <a:srgbClr val="000000"/>
+                      </a:solidFill>
+                      <a:prstDash val="solid"/>
+                    </a:lnB>
+                    <a:solidFill>
+                      <a:srgbClr val="c0c0c0"/>
+                    </a:solidFill>
+                  </a:tcPr>
+                </a:tc>
+                <a:tc>
+                  <a:txBody>
+                    <a:bodyPr lIns="36000" rIns="36000" tIns="36000" bIns="36000" anchor="t">
+                      <a:noAutofit/>
+                    </a:bodyPr>
+                    <a:p>
+                      <a:r>
+                        <a:rPr b="1" lang="fr-FR" sz="1800" strike="noStrike" u="none">
+                          <a:solidFill>
+                            <a:srgbClr val="000000"/>
+                          </a:solidFill>
+                          <a:effectLst/>
+                          <a:uFillTx/>
+                          <a:latin typeface="Arial"/>
+                        </a:rPr>
+                        <a:t>Input X=Parameters</a:t>
+                      </a:r>
+                      <a:endParaRPr b="1" lang="fr-FR" sz="1800" strike="noStrike" u="none">
+                        <a:solidFill>
+                          <a:srgbClr val="000000"/>
+                        </a:solidFill>
+                        <a:effectLst/>
+                        <a:uFillTx/>
+                        <a:latin typeface="Arial"/>
+                      </a:endParaRPr>
+                    </a:p>
+                  </a:txBody>
+                  <a:tcPr anchor="t" marL="36000" marR="36000">
+                    <a:lnL>
+                      <a:noFill/>
+                    </a:lnL>
+                    <a:lnR w="7200">
+                      <a:solidFill>
+                        <a:srgbClr val="000000"/>
+                      </a:solidFill>
+                      <a:prstDash val="solid"/>
+                    </a:lnR>
+                    <a:lnT w="7200">
+                      <a:solidFill>
+                        <a:srgbClr val="000000"/>
+                      </a:solidFill>
+                      <a:prstDash val="solid"/>
+                    </a:lnT>
+                    <a:lnB w="7200">
+                      <a:solidFill>
+                        <a:srgbClr val="000000"/>
+                      </a:solidFill>
+                      <a:prstDash val="solid"/>
+                    </a:lnB>
+                    <a:solidFill>
+                      <a:srgbClr val="c0c0c0"/>
+                    </a:solidFill>
+                  </a:tcPr>
+                </a:tc>
+                <a:tc>
+                  <a:txBody>
+                    <a:bodyPr lIns="36000" rIns="36000" tIns="36000" bIns="36000" anchor="t">
+                      <a:noAutofit/>
+                    </a:bodyPr>
+                    <a:p>
+                      <a:r>
+                        <a:rPr b="1" lang="fr-FR" sz="1800" strike="noStrike" u="none">
+                          <a:solidFill>
+                            <a:srgbClr val="000000"/>
+                          </a:solidFill>
+                          <a:effectLst/>
+                          <a:uFillTx/>
+                          <a:latin typeface="Arial"/>
+                        </a:rPr>
+                        <a:t>Input X=Measurements</a:t>
+                      </a:r>
+                      <a:endParaRPr b="1" lang="fr-FR" sz="1800" strike="noStrike" u="none">
+                        <a:solidFill>
+                          <a:srgbClr val="000000"/>
+                        </a:solidFill>
+                        <a:effectLst/>
+                        <a:uFillTx/>
+                        <a:latin typeface="Arial"/>
+                      </a:endParaRPr>
+                    </a:p>
+                  </a:txBody>
+                  <a:tcPr anchor="t" marL="36000" marR="36000">
+                    <a:lnL w="7200">
+                      <a:solidFill>
+                        <a:srgbClr val="000000"/>
+                      </a:solidFill>
+                      <a:prstDash val="solid"/>
+                    </a:lnL>
+                    <a:lnR w="7200">
+                      <a:solidFill>
+                        <a:srgbClr val="000000"/>
+                      </a:solidFill>
+                      <a:prstDash val="solid"/>
+                    </a:lnR>
+                    <a:lnT w="7200">
+                      <a:solidFill>
+                        <a:srgbClr val="000000"/>
+                      </a:solidFill>
+                      <a:prstDash val="solid"/>
+                    </a:lnT>
+                    <a:lnB w="7200">
+                      <a:solidFill>
+                        <a:srgbClr val="000000"/>
+                      </a:solidFill>
+                      <a:prstDash val="solid"/>
+                    </a:lnB>
+                    <a:solidFill>
+                      <a:srgbClr val="c0c0c0"/>
+                    </a:solidFill>
+                  </a:tcPr>
+                </a:tc>
+              </a:tr>
+              <a:tr h="1355760">
+                <a:tc>
+                  <a:txBody>
+                    <a:bodyPr lIns="36000" rIns="36000" tIns="36000" bIns="36000" anchor="t">
+                      <a:noAutofit/>
+                    </a:bodyPr>
+                    <a:p>
+                      <a:r>
+                        <a:rPr b="1" lang="fr-FR" sz="1800" strike="noStrike" u="none">
+                          <a:solidFill>
+                            <a:srgbClr val="000000"/>
+                          </a:solidFill>
+                          <a:effectLst/>
+                          <a:uFillTx/>
+                          <a:latin typeface="Arial"/>
+                        </a:rPr>
+                        <a:t>Output Y=Parameters</a:t>
+                      </a:r>
+                      <a:endParaRPr b="1" lang="fr-FR" sz="1800" strike="noStrike" u="none">
+                        <a:solidFill>
+                          <a:srgbClr val="000000"/>
+                        </a:solidFill>
+                        <a:effectLst/>
+                        <a:uFillTx/>
+                        <a:latin typeface="Arial"/>
+                      </a:endParaRPr>
+                    </a:p>
+                  </a:txBody>
+                  <a:tcPr anchor="t" marL="36000" marR="36000">
+                    <a:lnL w="7200">
+                      <a:solidFill>
+                        <a:srgbClr val="000000"/>
+                      </a:solidFill>
+                      <a:prstDash val="solid"/>
+                    </a:lnL>
+                    <a:lnR w="7200">
+                      <a:solidFill>
+                        <a:srgbClr val="000000"/>
+                      </a:solidFill>
+                      <a:prstDash val="solid"/>
+                    </a:lnR>
+                    <a:lnT>
+                      <a:noFill/>
+                    </a:lnT>
+                    <a:lnB w="7200">
+                      <a:solidFill>
+                        <a:srgbClr val="000000"/>
+                      </a:solidFill>
+                      <a:prstDash val="solid"/>
+                    </a:lnB>
+                    <a:solidFill>
+                      <a:srgbClr val="c0c0c0"/>
+                    </a:solidFill>
+                  </a:tcPr>
+                </a:tc>
+                <a:tc>
+                  <a:txBody>
+                    <a:bodyPr lIns="36000" rIns="36000" tIns="36000" bIns="36000" anchor="t">
+                      <a:noAutofit/>
+                    </a:bodyPr>
+                    <a:p>
+                      <a:pPr algn="ctr"/>
+                      <a:r>
+                        <a:rPr b="0" lang="fr-FR" sz="1800" strike="noStrike" u="none">
+                          <a:solidFill>
+                            <a:srgbClr val="000000"/>
+                          </a:solidFill>
+                          <a:effectLst/>
+                          <a:uFillTx/>
+                          <a:latin typeface="Arial"/>
+                        </a:rPr>
+                        <a:t>Optimisation</a:t>
+                      </a:r>
+                      <a:endParaRPr b="0" lang="fr-FR" sz="1800" strike="noStrike" u="none">
+                        <a:solidFill>
+                          <a:srgbClr val="000000"/>
+                        </a:solidFill>
+                        <a:effectLst/>
+                        <a:uFillTx/>
+                        <a:latin typeface="Arial"/>
+                      </a:endParaRPr>
+                    </a:p>
+                  </a:txBody>
+                  <a:tcPr anchor="t" marL="36000" marR="36000">
+                    <a:lnL>
+                      <a:noFill/>
+                    </a:lnL>
+                    <a:lnR w="7200">
+                      <a:solidFill>
+                        <a:srgbClr val="000000"/>
+                      </a:solidFill>
+                      <a:prstDash val="solid"/>
+                    </a:lnR>
+                    <a:lnT>
+                      <a:noFill/>
+                    </a:lnT>
+                    <a:lnB w="7200">
+                      <a:solidFill>
+                        <a:srgbClr val="000000"/>
+                      </a:solidFill>
+                      <a:prstDash val="solid"/>
+                    </a:lnB>
+                    <a:noFill/>
+                  </a:tcPr>
+                </a:tc>
+                <a:tc>
+                  <a:txBody>
+                    <a:bodyPr lIns="36000" rIns="36000" tIns="36000" bIns="36000" anchor="t">
+                      <a:noAutofit/>
+                    </a:bodyPr>
+                    <a:p>
+                      <a:pPr algn="ctr"/>
+                      <a:r>
+                        <a:rPr b="0" lang="fr-FR" sz="1800" strike="noStrike" u="none">
+                          <a:solidFill>
+                            <a:srgbClr val="000000"/>
+                          </a:solidFill>
+                          <a:effectLst/>
+                          <a:uFillTx/>
+                          <a:latin typeface="Arial"/>
+                        </a:rPr>
+                        <a:t>Inverse problem</a:t>
+                      </a:r>
+                      <a:endParaRPr b="0" lang="fr-FR" sz="1800" strike="noStrike" u="none">
+                        <a:solidFill>
+                          <a:srgbClr val="000000"/>
+                        </a:solidFill>
+                        <a:effectLst/>
+                        <a:uFillTx/>
+                        <a:latin typeface="Arial"/>
+                      </a:endParaRPr>
+                    </a:p>
+                  </a:txBody>
+                  <a:tcPr anchor="t" marL="36000" marR="36000">
+                    <a:lnL w="7200">
+                      <a:solidFill>
+                        <a:srgbClr val="000000"/>
+                      </a:solidFill>
+                      <a:prstDash val="solid"/>
+                    </a:lnL>
+                    <a:lnR w="7200">
+                      <a:solidFill>
+                        <a:srgbClr val="000000"/>
+                      </a:solidFill>
+                      <a:prstDash val="solid"/>
+                    </a:lnR>
+                    <a:lnT>
+                      <a:noFill/>
+                    </a:lnT>
+                    <a:lnB w="7200">
+                      <a:solidFill>
+                        <a:srgbClr val="000000"/>
+                      </a:solidFill>
+                      <a:prstDash val="solid"/>
+                    </a:lnB>
+                    <a:noFill/>
+                  </a:tcPr>
+                </a:tc>
+              </a:tr>
+              <a:tr h="1356480">
+                <a:tc>
+                  <a:txBody>
+                    <a:bodyPr lIns="36000" rIns="36000" tIns="36000" bIns="36000" anchor="t">
+                      <a:noAutofit/>
+                    </a:bodyPr>
+                    <a:p>
+                      <a:r>
+                        <a:rPr b="1" lang="fr-FR" sz="1800" strike="noStrike" u="none">
+                          <a:solidFill>
+                            <a:srgbClr val="000000"/>
+                          </a:solidFill>
+                          <a:effectLst/>
+                          <a:uFillTx/>
+                          <a:latin typeface="Arial"/>
+                        </a:rPr>
+                        <a:t>Output Y=Measurements</a:t>
+                      </a:r>
+                      <a:endParaRPr b="1" lang="fr-FR" sz="1800" strike="noStrike" u="none">
+                        <a:solidFill>
+                          <a:srgbClr val="000000"/>
+                        </a:solidFill>
+                        <a:effectLst/>
+                        <a:uFillTx/>
+                        <a:latin typeface="Arial"/>
+                      </a:endParaRPr>
+                    </a:p>
+                  </a:txBody>
+                  <a:tcPr anchor="t" marL="36000" marR="36000">
+                    <a:lnL w="7200">
+                      <a:solidFill>
+                        <a:srgbClr val="000000"/>
+                      </a:solidFill>
+                      <a:prstDash val="solid"/>
+                    </a:lnL>
+                    <a:lnR w="7200">
+                      <a:solidFill>
+                        <a:srgbClr val="000000"/>
+                      </a:solidFill>
+                      <a:prstDash val="solid"/>
+                    </a:lnR>
+                    <a:lnT w="7200">
+                      <a:solidFill>
+                        <a:srgbClr val="000000"/>
+                      </a:solidFill>
+                      <a:prstDash val="solid"/>
+                    </a:lnT>
+                    <a:lnB w="7200">
+                      <a:solidFill>
+                        <a:srgbClr val="000000"/>
+                      </a:solidFill>
+                      <a:prstDash val="solid"/>
+                    </a:lnB>
+                    <a:solidFill>
+                      <a:srgbClr val="c0c0c0"/>
+                    </a:solidFill>
+                  </a:tcPr>
+                </a:tc>
+                <a:tc>
+                  <a:txBody>
+                    <a:bodyPr lIns="36000" rIns="36000" tIns="36000" bIns="36000" anchor="t">
+                      <a:noAutofit/>
+                    </a:bodyPr>
+                    <a:p>
+                      <a:pPr algn="ctr"/>
+                      <a:r>
+                        <a:rPr b="0" lang="fr-FR" sz="1800" strike="noStrike" u="none">
+                          <a:solidFill>
+                            <a:srgbClr val="000000"/>
+                          </a:solidFill>
+                          <a:effectLst/>
+                          <a:uFillTx/>
+                          <a:latin typeface="Arial"/>
+                        </a:rPr>
+                        <a:t>Simulation, Surrogate</a:t>
+                      </a:r>
+                      <a:endParaRPr b="0" lang="fr-FR" sz="1800" strike="noStrike" u="none">
+                        <a:solidFill>
+                          <a:srgbClr val="000000"/>
+                        </a:solidFill>
+                        <a:effectLst/>
+                        <a:uFillTx/>
+                        <a:latin typeface="Arial"/>
+                      </a:endParaRPr>
+                    </a:p>
+                  </a:txBody>
+                  <a:tcPr anchor="t" marL="36000" marR="36000">
+                    <a:lnL>
+                      <a:noFill/>
+                    </a:lnL>
+                    <a:lnR w="7200">
+                      <a:solidFill>
+                        <a:srgbClr val="000000"/>
+                      </a:solidFill>
+                      <a:prstDash val="solid"/>
+                    </a:lnR>
+                    <a:lnT w="7200">
+                      <a:solidFill>
+                        <a:srgbClr val="000000"/>
+                      </a:solidFill>
+                      <a:prstDash val="solid"/>
+                    </a:lnT>
+                    <a:lnB w="7200">
+                      <a:solidFill>
+                        <a:srgbClr val="000000"/>
+                      </a:solidFill>
+                      <a:prstDash val="solid"/>
+                    </a:lnB>
+                    <a:noFill/>
+                  </a:tcPr>
+                </a:tc>
+                <a:tc>
+                  <a:txBody>
+                    <a:bodyPr lIns="36000" rIns="36000" tIns="36000" bIns="36000" anchor="t">
+                      <a:noAutofit/>
+                    </a:bodyPr>
+                    <a:p>
+                      <a:pPr algn="ctr"/>
+                      <a:r>
+                        <a:rPr b="0" lang="fr-FR" sz="1800" strike="noStrike" u="none">
+                          <a:solidFill>
+                            <a:srgbClr val="000000"/>
+                          </a:solidFill>
+                          <a:effectLst/>
+                          <a:uFillTx/>
+                          <a:latin typeface="Arial"/>
+                        </a:rPr>
+                        <a:t>De-noising, de-convolution</a:t>
+                      </a:r>
+                      <a:endParaRPr b="0" lang="fr-FR" sz="1800" strike="noStrike" u="none">
+                        <a:solidFill>
+                          <a:srgbClr val="000000"/>
+                        </a:solidFill>
+                        <a:effectLst/>
+                        <a:uFillTx/>
+                        <a:latin typeface="Arial"/>
+                      </a:endParaRPr>
+                    </a:p>
+                  </a:txBody>
+                  <a:tcPr anchor="t" marL="36000" marR="36000">
+                    <a:lnL w="7200">
+                      <a:solidFill>
+                        <a:srgbClr val="000000"/>
+                      </a:solidFill>
+                      <a:prstDash val="solid"/>
+                    </a:lnL>
+                    <a:lnR w="7200">
+                      <a:solidFill>
+                        <a:srgbClr val="000000"/>
+                      </a:solidFill>
+                      <a:prstDash val="solid"/>
+                    </a:lnR>
+                    <a:lnT w="7200">
+                      <a:solidFill>
+                        <a:srgbClr val="000000"/>
+                      </a:solidFill>
+                      <a:prstDash val="solid"/>
+                    </a:lnT>
+                    <a:lnB w="7200">
+                      <a:solidFill>
+                        <a:srgbClr val="000000"/>
+                      </a:solidFill>
+                      <a:prstDash val="solid"/>
+                    </a:lnB>
+                    <a:noFill/>
+                  </a:tcPr>
+                </a:tc>
+              </a:tr>
+            </a:tbl>
+          </a:graphicData>
+        </a:graphic>
+      </p:graphicFrame>
     </p:spTree>
   </p:cSld>
   <mc:AlternateContent>
@@ -12299,14 +13067,14 @@
       </p:grpSpPr>
       <p:sp>
         <p:nvSpPr>
-          <p:cNvPr id="65" name="Text 28"/>
+          <p:cNvPr id="65" name="Text 24"/>
           <p:cNvSpPr/>
           <p:nvPr/>
         </p:nvSpPr>
         <p:spPr>
           <a:xfrm>
             <a:off x="548640" y="384120"/>
-            <a:ext cx="9142200" cy="290880"/>
+            <a:ext cx="9141840" cy="290520"/>
           </a:xfrm>
           <a:prstGeom prst="rect">
             <a:avLst/>
@@ -12359,14 +13127,14 @@
       </p:sp>
       <p:sp>
         <p:nvSpPr>
-          <p:cNvPr id="66" name="Text 29"/>
+          <p:cNvPr id="66" name="Text 25"/>
           <p:cNvSpPr/>
           <p:nvPr/>
         </p:nvSpPr>
         <p:spPr>
           <a:xfrm>
             <a:off x="548640" y="658440"/>
-            <a:ext cx="11062440" cy="821160"/>
+            <a:ext cx="11062080" cy="820800"/>
           </a:xfrm>
           <a:prstGeom prst="rect">
             <a:avLst/>
@@ -12425,14 +13193,14 @@
       </p:sp>
       <p:sp>
         <p:nvSpPr>
-          <p:cNvPr id="67" name="Text 30"/>
+          <p:cNvPr id="67" name="Text 26"/>
           <p:cNvSpPr/>
           <p:nvPr/>
         </p:nvSpPr>
         <p:spPr>
           <a:xfrm>
             <a:off x="11185920" y="6446520"/>
-            <a:ext cx="455400" cy="272520"/>
+            <a:ext cx="455040" cy="272160"/>
           </a:xfrm>
           <a:prstGeom prst="rect">
             <a:avLst/>
@@ -12493,7 +13261,7 @@
         <p:spPr>
           <a:xfrm>
             <a:off x="540000" y="1800000"/>
-            <a:ext cx="10978920" cy="3160080"/>
+            <a:ext cx="9475920" cy="3525840"/>
           </a:xfrm>
           <a:prstGeom prst="rect">
             <a:avLst/>
@@ -12534,7 +13302,7 @@
                 <a:uFillTx/>
                 <a:latin typeface="Calibri"/>
               </a:rPr>
-              <a:t>Surrogate Models</a:t>
+              <a:t>Inverse Problem</a:t>
             </a:r>
             <a:r>
               <a:rPr b="0" lang="fr-FR" sz="2400" strike="noStrike" u="none">
@@ -12585,7 +13353,7 @@
                 <a:uFillTx/>
                 <a:latin typeface="Calibri"/>
               </a:rPr>
-              <a:t>Purpose</a:t>
+              <a:t>Goal</a:t>
             </a:r>
             <a:r>
               <a:rPr b="0" lang="fr-FR" sz="2400" strike="noStrike" u="none">
@@ -12596,7 +13364,7 @@
                 <a:uFillTx/>
                 <a:latin typeface="Calibri"/>
               </a:rPr>
-              <a:t>: Replace slow simulations with fast AI models.</a:t>
+              <a:t>: Reconstruct input parameters from measured data.</a:t>
             </a:r>
             <a:endParaRPr b="0" lang="fr-FR" sz="2400" strike="noStrike" u="none">
               <a:solidFill>
@@ -12633,7 +13401,7 @@
                 <a:uFillTx/>
                 <a:latin typeface="Calibri"/>
               </a:rPr>
-              <a:t>Pipeline</a:t>
+              <a:t>AI Approach</a:t>
             </a:r>
             <a:r>
               <a:rPr b="0" lang="fr-FR" sz="2400" strike="noStrike" u="none">
@@ -12690,7 +13458,7 @@
                 <a:uFillTx/>
                 <a:latin typeface="Courier New"/>
               </a:rPr>
-              <a:t>Parameters → [AI Model] → Virtual "Measurement" (faster)</a:t>
+              <a:t>Measurement → [AI Algorithm] → Parameters</a:t>
             </a:r>
             <a:br>
               <a:rPr sz="2100"/>
@@ -12722,7 +13490,7 @@
               </a:tabLst>
             </a:pPr>
             <a:r>
-              <a:rPr b="1" lang="fr-FR" sz="2400" strike="noStrike" u="none">
+              <a:rPr b="0" lang="fr-FR" sz="2400" strike="noStrike" u="none">
                 <a:solidFill>
                   <a:schemeClr val="dk1"/>
                 </a:solidFill>
@@ -12730,18 +13498,7 @@
                 <a:uFillTx/>
                 <a:latin typeface="Calibri"/>
               </a:rPr>
-              <a:t>Use Case</a:t>
-            </a:r>
-            <a:r>
-              <a:rPr b="0" lang="fr-FR" sz="2400" strike="noStrike" u="none">
-                <a:solidFill>
-                  <a:schemeClr val="dk1"/>
-                </a:solidFill>
-                <a:effectLst/>
-                <a:uFillTx/>
-                <a:latin typeface="Calibri"/>
-              </a:rPr>
-              <a:t>: Fast phase-space exploration.</a:t>
+              <a:t>Example: Predict sample composition from a scattering pattern.</a:t>
             </a:r>
             <a:endParaRPr b="0" lang="fr-FR" sz="2400" strike="noStrike" u="none">
               <a:solidFill>
@@ -12793,14 +13550,14 @@
       </p:grpSpPr>
       <p:sp>
         <p:nvSpPr>
-          <p:cNvPr id="69" name="Text 31"/>
+          <p:cNvPr id="69" name="Text 28"/>
           <p:cNvSpPr/>
           <p:nvPr/>
         </p:nvSpPr>
         <p:spPr>
           <a:xfrm>
             <a:off x="548640" y="384120"/>
-            <a:ext cx="9142200" cy="290880"/>
+            <a:ext cx="9141840" cy="290520"/>
           </a:xfrm>
           <a:prstGeom prst="rect">
             <a:avLst/>
@@ -12853,14 +13610,14 @@
       </p:sp>
       <p:sp>
         <p:nvSpPr>
-          <p:cNvPr id="70" name="Text 32"/>
+          <p:cNvPr id="70" name="Text 29"/>
           <p:cNvSpPr/>
           <p:nvPr/>
         </p:nvSpPr>
         <p:spPr>
           <a:xfrm>
             <a:off x="548640" y="658440"/>
-            <a:ext cx="11062440" cy="821160"/>
+            <a:ext cx="11062080" cy="820800"/>
           </a:xfrm>
           <a:prstGeom prst="rect">
             <a:avLst/>
@@ -12919,14 +13676,14 @@
       </p:sp>
       <p:sp>
         <p:nvSpPr>
-          <p:cNvPr id="71" name="Text 33"/>
+          <p:cNvPr id="71" name="Text 30"/>
           <p:cNvSpPr/>
           <p:nvPr/>
         </p:nvSpPr>
         <p:spPr>
           <a:xfrm>
             <a:off x="11185920" y="6446520"/>
-            <a:ext cx="455400" cy="272520"/>
+            <a:ext cx="455040" cy="272160"/>
           </a:xfrm>
           <a:prstGeom prst="rect">
             <a:avLst/>
@@ -12987,7 +13744,7 @@
         <p:spPr>
           <a:xfrm>
             <a:off x="540000" y="1800000"/>
-            <a:ext cx="10978920" cy="3160080"/>
+            <a:ext cx="10978560" cy="3160080"/>
           </a:xfrm>
           <a:prstGeom prst="rect">
             <a:avLst/>
@@ -13028,7 +13785,7 @@
                 <a:uFillTx/>
                 <a:latin typeface="Calibri"/>
               </a:rPr>
-              <a:t>Model optimization</a:t>
+              <a:t>Surrogate Models</a:t>
             </a:r>
             <a:r>
               <a:rPr b="0" lang="fr-FR" sz="2400" strike="noStrike" u="none">
@@ -13090,7 +13847,7 @@
                 <a:uFillTx/>
                 <a:latin typeface="Calibri"/>
               </a:rPr>
-              <a:t>: Find best parameters to get min/max signal.</a:t>
+              <a:t>: Replace slow simulations with fast AI models.</a:t>
             </a:r>
             <a:endParaRPr b="0" lang="fr-FR" sz="2400" strike="noStrike" u="none">
               <a:solidFill>
@@ -13184,7 +13941,7 @@
                 <a:uFillTx/>
                 <a:latin typeface="Courier New"/>
               </a:rPr>
-              <a:t>Parameters → [Optimizer] → Best Parameters</a:t>
+              <a:t>Parameters → [AI Model] → Virtual "Measurement" (faster)</a:t>
             </a:r>
             <a:br>
               <a:rPr sz="2100"/>
@@ -13235,7 +13992,7 @@
                 <a:uFillTx/>
                 <a:latin typeface="Calibri"/>
               </a:rPr>
-              <a:t>: Optimization of beamline configurations.</a:t>
+              <a:t>: Fast phase-space exploration.</a:t>
             </a:r>
             <a:endParaRPr b="0" lang="fr-FR" sz="2400" strike="noStrike" u="none">
               <a:solidFill>

--- a/21_September_Monday/01_Seeking_for_AI/01_Seeking_for_AI.pptx
+++ b/21_September_Monday/01_Seeking_for_AI/01_Seeking_for_AI.pptx
@@ -78,7 +78,7 @@
           <a:p>
             <a:pPr algn="ctr"/>
             <a:r>
-              <a:rPr b="0" lang="fr-FR" sz="4400" strike="noStrike" u="none">
+              <a:rPr b="0" lang="en-US" sz="4400" strike="noStrike" u="none">
                 <a:solidFill>
                   <a:srgbClr val="000000"/>
                 </a:solidFill>
@@ -86,9 +86,9 @@
                 <a:uFillTx/>
                 <a:latin typeface="Arial"/>
               </a:rPr>
-              <a:t>Cliquez pour déplacer la diapo</a:t>
-            </a:r>
-            <a:endParaRPr b="0" lang="fr-FR" sz="4400" strike="noStrike" u="none">
+              <a:t>Click to move the slide</a:t>
+            </a:r>
+            <a:endParaRPr b="0" lang="en-US" sz="4400" strike="noStrike" u="none">
               <a:solidFill>
                 <a:srgbClr val="000000"/>
               </a:solidFill>
@@ -131,7 +131,7 @@
               <a:buNone/>
             </a:pPr>
             <a:r>
-              <a:rPr b="0" lang="fr-FR" sz="2000" strike="noStrike" u="none">
+              <a:rPr b="0" lang="en-US" sz="2000" strike="noStrike" u="none">
                 <a:solidFill>
                   <a:srgbClr val="000000"/>
                 </a:solidFill>
@@ -139,9 +139,9 @@
                 <a:uFillTx/>
                 <a:latin typeface="Arial"/>
               </a:rPr>
-              <a:t>Cliquez pour modifier le format des notes</a:t>
-            </a:r>
-            <a:endParaRPr b="0" lang="fr-FR" sz="2000" strike="noStrike" u="none">
+              <a:t>Click to edit the notes format</a:t>
+            </a:r>
+            <a:endParaRPr b="0" lang="en-US" sz="2000" strike="noStrike" u="none">
               <a:solidFill>
                 <a:srgbClr val="000000"/>
               </a:solidFill>
@@ -184,7 +184,7 @@
               <a:buNone/>
             </a:pPr>
             <a:r>
-              <a:rPr b="0" lang="fr-FR" sz="1400" strike="noStrike" u="none">
+              <a:rPr b="0" lang="en-US" sz="1400" strike="noStrike" u="none">
                 <a:solidFill>
                   <a:srgbClr val="000000"/>
                 </a:solidFill>
@@ -192,9 +192,9 @@
                 <a:uFillTx/>
                 <a:latin typeface="Times New Roman"/>
               </a:rPr>
-              <a:t>&lt;en-tête&gt;</a:t>
-            </a:r>
-            <a:endParaRPr b="0" lang="fr-FR" sz="1400" strike="noStrike" u="none">
+              <a:t>&lt;header&gt;</a:t>
+            </a:r>
+            <a:endParaRPr b="0" lang="en-US" sz="1400" strike="noStrike" u="none">
               <a:solidFill>
                 <a:srgbClr val="000000"/>
               </a:solidFill>
@@ -235,7 +235,7 @@
           <a:lstStyle>
             <a:lvl1pPr indent="0" algn="r">
               <a:buNone/>
-              <a:defRPr b="0" lang="fr-FR" sz="1400" strike="noStrike" u="none">
+              <a:defRPr b="0" lang="en-US" sz="1400" strike="noStrike" u="none">
                 <a:solidFill>
                   <a:srgbClr val="000000"/>
                 </a:solidFill>
@@ -250,7 +250,7 @@
               <a:buNone/>
             </a:pPr>
             <a:r>
-              <a:rPr b="0" lang="fr-FR" sz="1400" strike="noStrike" u="none">
+              <a:rPr b="0" lang="en-US" sz="1400" strike="noStrike" u="none">
                 <a:solidFill>
                   <a:srgbClr val="000000"/>
                 </a:solidFill>
@@ -258,9 +258,9 @@
                 <a:uFillTx/>
                 <a:latin typeface="Times New Roman"/>
               </a:rPr>
-              <a:t>&lt;date/heure&gt;</a:t>
-            </a:r>
-            <a:endParaRPr b="0" lang="fr-FR" sz="1400" strike="noStrike" u="none">
+              <a:t>&lt;date/time&gt;</a:t>
+            </a:r>
+            <a:endParaRPr b="0" lang="en-US" sz="1400" strike="noStrike" u="none">
               <a:solidFill>
                 <a:srgbClr val="000000"/>
               </a:solidFill>
@@ -301,7 +301,7 @@
           <a:lstStyle>
             <a:lvl1pPr indent="0">
               <a:buNone/>
-              <a:defRPr b="0" lang="fr-FR" sz="1400" strike="noStrike" u="none">
+              <a:defRPr b="0" lang="en-US" sz="1400" strike="noStrike" u="none">
                 <a:solidFill>
                   <a:srgbClr val="000000"/>
                 </a:solidFill>
@@ -316,7 +316,7 @@
               <a:buNone/>
             </a:pPr>
             <a:r>
-              <a:rPr b="0" lang="fr-FR" sz="1400" strike="noStrike" u="none">
+              <a:rPr b="0" lang="en-US" sz="1400" strike="noStrike" u="none">
                 <a:solidFill>
                   <a:srgbClr val="000000"/>
                 </a:solidFill>
@@ -324,9 +324,9 @@
                 <a:uFillTx/>
                 <a:latin typeface="Times New Roman"/>
               </a:rPr>
-              <a:t>&lt;pied de page&gt;</a:t>
-            </a:r>
-            <a:endParaRPr b="0" lang="fr-FR" sz="1400" strike="noStrike" u="none">
+              <a:t>&lt;footer&gt;</a:t>
+            </a:r>
+            <a:endParaRPr b="0" lang="en-US" sz="1400" strike="noStrike" u="none">
               <a:solidFill>
                 <a:srgbClr val="000000"/>
               </a:solidFill>
@@ -367,7 +367,7 @@
           <a:lstStyle>
             <a:lvl1pPr indent="0" algn="r">
               <a:buNone/>
-              <a:defRPr b="0" lang="fr-FR" sz="1400" strike="noStrike" u="none">
+              <a:defRPr b="0" lang="en-US" sz="1400" strike="noStrike" u="none">
                 <a:solidFill>
                   <a:srgbClr val="000000"/>
                 </a:solidFill>
@@ -381,8 +381,8 @@
             <a:pPr indent="0" algn="r">
               <a:buNone/>
             </a:pPr>
-            <a:fld id="{36A6B957-7FA4-4B37-AF94-8C0D0E2A218C}" type="slidenum">
-              <a:rPr b="0" lang="fr-FR" sz="1400" strike="noStrike" u="none">
+            <a:fld id="{FC9DB31D-555C-461F-9D45-BD8CD92D9C3E}" type="slidenum">
+              <a:rPr b="0" lang="en-US" sz="1400" strike="noStrike" u="none">
                 <a:solidFill>
                   <a:srgbClr val="000000"/>
                 </a:solidFill>
@@ -390,9 +390,9 @@
                 <a:uFillTx/>
                 <a:latin typeface="Times New Roman"/>
               </a:rPr>
-              <a:t>&lt;numéro&gt;</a:t>
+              <a:t>&lt;number&gt;</a:t>
             </a:fld>
-            <a:endParaRPr b="0" lang="fr-FR" sz="1400" strike="noStrike" u="none">
+            <a:endParaRPr b="0" lang="en-US" sz="1400" strike="noStrike" u="none">
               <a:solidFill>
                 <a:srgbClr val="000000"/>
               </a:solidFill>
@@ -428,7 +428,7 @@
       </p:grpSpPr>
       <p:sp>
         <p:nvSpPr>
-          <p:cNvPr id="124" name="PlaceHolder 1"/>
+          <p:cNvPr id="125" name="PlaceHolder 1"/>
           <p:cNvSpPr>
             <a:spLocks noGrp="1"/>
           </p:cNvSpPr>
@@ -451,7 +451,7 @@
       </p:sp>
       <p:sp>
         <p:nvSpPr>
-          <p:cNvPr id="125" name="PlaceHolder 2"/>
+          <p:cNvPr id="126" name="PlaceHolder 2"/>
           <p:cNvSpPr>
             <a:spLocks noGrp="1"/>
           </p:cNvSpPr>
@@ -480,7 +480,7 @@
             <a:pPr indent="0">
               <a:buNone/>
             </a:pPr>
-            <a:endParaRPr b="0" lang="fr-FR" sz="1800" strike="noStrike" u="none">
+            <a:endParaRPr b="0" lang="en-US" sz="1800" strike="noStrike" u="none">
               <a:solidFill>
                 <a:srgbClr val="000000"/>
               </a:solidFill>
@@ -493,7 +493,7 @@
       </p:sp>
       <p:sp>
         <p:nvSpPr>
-          <p:cNvPr id="126" name="PlaceHolder 3"/>
+          <p:cNvPr id="127" name="PlaceHolder 3"/>
           <p:cNvSpPr>
             <a:spLocks noGrp="1"/>
           </p:cNvSpPr>
@@ -548,7 +548,7 @@
                 <a:tab algn="l" pos="0"/>
               </a:tabLst>
             </a:pPr>
-            <a:fld id="{AD0744F6-99A8-455A-B74D-5916CC368BAD}" type="slidenum">
+            <a:fld id="{E744846D-4721-45EB-9655-55FCBE05A417}" type="slidenum">
               <a:rPr b="0" lang="en-US" sz="1800" strike="noStrike" u="none">
                 <a:solidFill>
                   <a:schemeClr val="dk1"/>
@@ -558,9 +558,9 @@
                 <a:latin typeface="+mn-lt"/>
                 <a:ea typeface="+mn-ea"/>
               </a:rPr>
-              <a:t>&lt;numéro&gt;</a:t>
+              <a:t>&lt;number&gt;</a:t>
             </a:fld>
-            <a:endParaRPr b="0" lang="fr-FR" sz="1800" strike="noStrike" u="none">
+            <a:endParaRPr b="0" lang="en-US" sz="1800" strike="noStrike" u="none">
               <a:solidFill>
                 <a:srgbClr val="000000"/>
               </a:solidFill>
@@ -595,7 +595,7 @@
       </p:grpSpPr>
       <p:sp>
         <p:nvSpPr>
-          <p:cNvPr id="148" name="PlaceHolder 1"/>
+          <p:cNvPr id="149" name="PlaceHolder 1"/>
           <p:cNvSpPr>
             <a:spLocks noGrp="1"/>
           </p:cNvSpPr>
@@ -618,7 +618,7 @@
       </p:sp>
       <p:sp>
         <p:nvSpPr>
-          <p:cNvPr id="149" name="PlaceHolder 2"/>
+          <p:cNvPr id="150" name="PlaceHolder 2"/>
           <p:cNvSpPr>
             <a:spLocks noGrp="1"/>
           </p:cNvSpPr>
@@ -647,7 +647,7 @@
             <a:pPr indent="0">
               <a:buNone/>
             </a:pPr>
-            <a:endParaRPr b="0" lang="fr-FR" sz="1800" strike="noStrike" u="none">
+            <a:endParaRPr b="0" lang="en-US" sz="1800" strike="noStrike" u="none">
               <a:solidFill>
                 <a:srgbClr val="000000"/>
               </a:solidFill>
@@ -660,7 +660,7 @@
       </p:sp>
       <p:sp>
         <p:nvSpPr>
-          <p:cNvPr id="150" name="PlaceHolder 3"/>
+          <p:cNvPr id="151" name="PlaceHolder 3"/>
           <p:cNvSpPr>
             <a:spLocks noGrp="1"/>
           </p:cNvSpPr>
@@ -715,7 +715,7 @@
                 <a:tab algn="l" pos="0"/>
               </a:tabLst>
             </a:pPr>
-            <a:fld id="{14C745CD-2591-40C7-A08C-011FCC347757}" type="slidenum">
+            <a:fld id="{1FB74336-82B5-4514-BAEC-E0A6EEFB0BDC}" type="slidenum">
               <a:rPr b="0" lang="en-US" sz="1800" strike="noStrike" u="none">
                 <a:solidFill>
                   <a:schemeClr val="dk1"/>
@@ -725,9 +725,9 @@
                 <a:latin typeface="+mn-lt"/>
                 <a:ea typeface="+mn-ea"/>
               </a:rPr>
-              <a:t>&lt;numéro&gt;</a:t>
+              <a:t>&lt;number&gt;</a:t>
             </a:fld>
-            <a:endParaRPr b="0" lang="fr-FR" sz="1800" strike="noStrike" u="none">
+            <a:endParaRPr b="0" lang="en-US" sz="1800" strike="noStrike" u="none">
               <a:solidFill>
                 <a:srgbClr val="000000"/>
               </a:solidFill>
@@ -762,7 +762,7 @@
       </p:grpSpPr>
       <p:sp>
         <p:nvSpPr>
-          <p:cNvPr id="151" name="PlaceHolder 1"/>
+          <p:cNvPr id="152" name="PlaceHolder 1"/>
           <p:cNvSpPr>
             <a:spLocks noGrp="1"/>
           </p:cNvSpPr>
@@ -785,7 +785,7 @@
       </p:sp>
       <p:sp>
         <p:nvSpPr>
-          <p:cNvPr id="152" name="PlaceHolder 2"/>
+          <p:cNvPr id="153" name="PlaceHolder 2"/>
           <p:cNvSpPr>
             <a:spLocks noGrp="1"/>
           </p:cNvSpPr>
@@ -814,7 +814,7 @@
             <a:pPr indent="0">
               <a:buNone/>
             </a:pPr>
-            <a:endParaRPr b="0" lang="fr-FR" sz="1800" strike="noStrike" u="none">
+            <a:endParaRPr b="0" lang="en-US" sz="1800" strike="noStrike" u="none">
               <a:solidFill>
                 <a:srgbClr val="000000"/>
               </a:solidFill>
@@ -827,7 +827,7 @@
       </p:sp>
       <p:sp>
         <p:nvSpPr>
-          <p:cNvPr id="153" name="PlaceHolder 3"/>
+          <p:cNvPr id="154" name="PlaceHolder 3"/>
           <p:cNvSpPr>
             <a:spLocks noGrp="1"/>
           </p:cNvSpPr>
@@ -882,7 +882,7 @@
                 <a:tab algn="l" pos="0"/>
               </a:tabLst>
             </a:pPr>
-            <a:fld id="{A4168247-6272-4E14-AD51-4092B572EE20}" type="slidenum">
+            <a:fld id="{8438EBB0-F383-424E-97BC-D47039784867}" type="slidenum">
               <a:rPr b="0" lang="en-US" sz="1800" strike="noStrike" u="none">
                 <a:solidFill>
                   <a:schemeClr val="dk1"/>
@@ -892,9 +892,9 @@
                 <a:latin typeface="+mn-lt"/>
                 <a:ea typeface="+mn-ea"/>
               </a:rPr>
-              <a:t>&lt;numéro&gt;</a:t>
+              <a:t>&lt;number&gt;</a:t>
             </a:fld>
-            <a:endParaRPr b="0" lang="fr-FR" sz="1800" strike="noStrike" u="none">
+            <a:endParaRPr b="0" lang="en-US" sz="1800" strike="noStrike" u="none">
               <a:solidFill>
                 <a:srgbClr val="000000"/>
               </a:solidFill>
@@ -929,7 +929,7 @@
       </p:grpSpPr>
       <p:sp>
         <p:nvSpPr>
-          <p:cNvPr id="127" name="PlaceHolder 1"/>
+          <p:cNvPr id="128" name="PlaceHolder 1"/>
           <p:cNvSpPr>
             <a:spLocks noGrp="1"/>
           </p:cNvSpPr>
@@ -952,7 +952,7 @@
       </p:sp>
       <p:sp>
         <p:nvSpPr>
-          <p:cNvPr id="128" name="PlaceHolder 2"/>
+          <p:cNvPr id="129" name="PlaceHolder 2"/>
           <p:cNvSpPr>
             <a:spLocks noGrp="1"/>
           </p:cNvSpPr>
@@ -981,7 +981,7 @@
             <a:pPr indent="0">
               <a:buNone/>
             </a:pPr>
-            <a:endParaRPr b="0" lang="fr-FR" sz="1800" strike="noStrike" u="none">
+            <a:endParaRPr b="0" lang="en-US" sz="1800" strike="noStrike" u="none">
               <a:solidFill>
                 <a:srgbClr val="000000"/>
               </a:solidFill>
@@ -994,7 +994,7 @@
       </p:sp>
       <p:sp>
         <p:nvSpPr>
-          <p:cNvPr id="129" name="PlaceHolder 3"/>
+          <p:cNvPr id="130" name="PlaceHolder 3"/>
           <p:cNvSpPr>
             <a:spLocks noGrp="1"/>
           </p:cNvSpPr>
@@ -1049,7 +1049,7 @@
                 <a:tab algn="l" pos="0"/>
               </a:tabLst>
             </a:pPr>
-            <a:fld id="{392C4F97-A299-416D-849B-E8A6D6342965}" type="slidenum">
+            <a:fld id="{99EFD446-17B7-4AB1-8022-B7D77CFBE562}" type="slidenum">
               <a:rPr b="0" lang="en-US" sz="1800" strike="noStrike" u="none">
                 <a:solidFill>
                   <a:schemeClr val="dk1"/>
@@ -1059,9 +1059,9 @@
                 <a:latin typeface="+mn-lt"/>
                 <a:ea typeface="+mn-ea"/>
               </a:rPr>
-              <a:t>&lt;numéro&gt;</a:t>
+              <a:t>&lt;number&gt;</a:t>
             </a:fld>
-            <a:endParaRPr b="0" lang="fr-FR" sz="1800" strike="noStrike" u="none">
+            <a:endParaRPr b="0" lang="en-US" sz="1800" strike="noStrike" u="none">
               <a:solidFill>
                 <a:srgbClr val="000000"/>
               </a:solidFill>
@@ -1096,7 +1096,7 @@
       </p:grpSpPr>
       <p:sp>
         <p:nvSpPr>
-          <p:cNvPr id="130" name="PlaceHolder 1"/>
+          <p:cNvPr id="131" name="PlaceHolder 1"/>
           <p:cNvSpPr>
             <a:spLocks noGrp="1"/>
           </p:cNvSpPr>
@@ -1119,7 +1119,7 @@
       </p:sp>
       <p:sp>
         <p:nvSpPr>
-          <p:cNvPr id="131" name="PlaceHolder 2"/>
+          <p:cNvPr id="132" name="PlaceHolder 2"/>
           <p:cNvSpPr>
             <a:spLocks noGrp="1"/>
           </p:cNvSpPr>
@@ -1148,7 +1148,7 @@
             <a:pPr indent="0">
               <a:buNone/>
             </a:pPr>
-            <a:endParaRPr b="0" lang="fr-FR" sz="1800" strike="noStrike" u="none">
+            <a:endParaRPr b="0" lang="en-US" sz="1800" strike="noStrike" u="none">
               <a:solidFill>
                 <a:srgbClr val="000000"/>
               </a:solidFill>
@@ -1161,7 +1161,7 @@
       </p:sp>
       <p:sp>
         <p:nvSpPr>
-          <p:cNvPr id="132" name="PlaceHolder 3"/>
+          <p:cNvPr id="133" name="PlaceHolder 3"/>
           <p:cNvSpPr>
             <a:spLocks noGrp="1"/>
           </p:cNvSpPr>
@@ -1216,7 +1216,7 @@
                 <a:tab algn="l" pos="0"/>
               </a:tabLst>
             </a:pPr>
-            <a:fld id="{4C363B45-95F7-497D-9430-C451829F28F7}" type="slidenum">
+            <a:fld id="{28552152-D44F-47BA-B541-F5CAB0A732FD}" type="slidenum">
               <a:rPr b="0" lang="en-US" sz="1800" strike="noStrike" u="none">
                 <a:solidFill>
                   <a:schemeClr val="dk1"/>
@@ -1226,9 +1226,9 @@
                 <a:latin typeface="+mn-lt"/>
                 <a:ea typeface="+mn-ea"/>
               </a:rPr>
-              <a:t>&lt;numéro&gt;</a:t>
+              <a:t>&lt;number&gt;</a:t>
             </a:fld>
-            <a:endParaRPr b="0" lang="fr-FR" sz="1800" strike="noStrike" u="none">
+            <a:endParaRPr b="0" lang="en-US" sz="1800" strike="noStrike" u="none">
               <a:solidFill>
                 <a:srgbClr val="000000"/>
               </a:solidFill>
@@ -1263,7 +1263,7 @@
       </p:grpSpPr>
       <p:sp>
         <p:nvSpPr>
-          <p:cNvPr id="133" name="PlaceHolder 1"/>
+          <p:cNvPr id="134" name="PlaceHolder 1"/>
           <p:cNvSpPr>
             <a:spLocks noGrp="1"/>
           </p:cNvSpPr>
@@ -1286,7 +1286,7 @@
       </p:sp>
       <p:sp>
         <p:nvSpPr>
-          <p:cNvPr id="134" name="PlaceHolder 2"/>
+          <p:cNvPr id="135" name="PlaceHolder 2"/>
           <p:cNvSpPr>
             <a:spLocks noGrp="1"/>
           </p:cNvSpPr>
@@ -1315,7 +1315,7 @@
             <a:pPr indent="0">
               <a:buNone/>
             </a:pPr>
-            <a:endParaRPr b="0" lang="fr-FR" sz="1800" strike="noStrike" u="none">
+            <a:endParaRPr b="0" lang="en-US" sz="1800" strike="noStrike" u="none">
               <a:solidFill>
                 <a:srgbClr val="000000"/>
               </a:solidFill>
@@ -1328,7 +1328,7 @@
       </p:sp>
       <p:sp>
         <p:nvSpPr>
-          <p:cNvPr id="135" name="PlaceHolder 3"/>
+          <p:cNvPr id="136" name="PlaceHolder 3"/>
           <p:cNvSpPr>
             <a:spLocks noGrp="1"/>
           </p:cNvSpPr>
@@ -1383,7 +1383,7 @@
                 <a:tab algn="l" pos="0"/>
               </a:tabLst>
             </a:pPr>
-            <a:fld id="{92834131-A786-4D1F-AD60-18D46722D9A6}" type="slidenum">
+            <a:fld id="{A95A3325-13DF-40E7-8919-AC163F616BBE}" type="slidenum">
               <a:rPr b="0" lang="en-US" sz="1800" strike="noStrike" u="none">
                 <a:solidFill>
                   <a:schemeClr val="dk1"/>
@@ -1393,9 +1393,9 @@
                 <a:latin typeface="+mn-lt"/>
                 <a:ea typeface="+mn-ea"/>
               </a:rPr>
-              <a:t>&lt;numéro&gt;</a:t>
+              <a:t>&lt;number&gt;</a:t>
             </a:fld>
-            <a:endParaRPr b="0" lang="fr-FR" sz="1800" strike="noStrike" u="none">
+            <a:endParaRPr b="0" lang="en-US" sz="1800" strike="noStrike" u="none">
               <a:solidFill>
                 <a:srgbClr val="000000"/>
               </a:solidFill>
@@ -1430,7 +1430,7 @@
       </p:grpSpPr>
       <p:sp>
         <p:nvSpPr>
-          <p:cNvPr id="136" name="PlaceHolder 1"/>
+          <p:cNvPr id="137" name="PlaceHolder 1"/>
           <p:cNvSpPr>
             <a:spLocks noGrp="1"/>
           </p:cNvSpPr>
@@ -1453,7 +1453,7 @@
       </p:sp>
       <p:sp>
         <p:nvSpPr>
-          <p:cNvPr id="137" name="PlaceHolder 2"/>
+          <p:cNvPr id="138" name="PlaceHolder 2"/>
           <p:cNvSpPr>
             <a:spLocks noGrp="1"/>
           </p:cNvSpPr>
@@ -1482,7 +1482,7 @@
             <a:pPr indent="0">
               <a:buNone/>
             </a:pPr>
-            <a:endParaRPr b="0" lang="fr-FR" sz="1800" strike="noStrike" u="none">
+            <a:endParaRPr b="0" lang="en-US" sz="1800" strike="noStrike" u="none">
               <a:solidFill>
                 <a:srgbClr val="000000"/>
               </a:solidFill>
@@ -1495,7 +1495,7 @@
       </p:sp>
       <p:sp>
         <p:nvSpPr>
-          <p:cNvPr id="138" name="PlaceHolder 3"/>
+          <p:cNvPr id="139" name="PlaceHolder 3"/>
           <p:cNvSpPr>
             <a:spLocks noGrp="1"/>
           </p:cNvSpPr>
@@ -1550,7 +1550,7 @@
                 <a:tab algn="l" pos="0"/>
               </a:tabLst>
             </a:pPr>
-            <a:fld id="{F1F391A1-C91F-4029-B3F9-0A0FC139E963}" type="slidenum">
+            <a:fld id="{7A001CBD-1396-4E51-815B-E4B38D381888}" type="slidenum">
               <a:rPr b="0" lang="en-US" sz="1800" strike="noStrike" u="none">
                 <a:solidFill>
                   <a:schemeClr val="dk1"/>
@@ -1560,9 +1560,9 @@
                 <a:latin typeface="+mn-lt"/>
                 <a:ea typeface="+mn-ea"/>
               </a:rPr>
-              <a:t>&lt;numéro&gt;</a:t>
+              <a:t>&lt;number&gt;</a:t>
             </a:fld>
-            <a:endParaRPr b="0" lang="fr-FR" sz="1800" strike="noStrike" u="none">
+            <a:endParaRPr b="0" lang="en-US" sz="1800" strike="noStrike" u="none">
               <a:solidFill>
                 <a:srgbClr val="000000"/>
               </a:solidFill>
@@ -1597,7 +1597,7 @@
       </p:grpSpPr>
       <p:sp>
         <p:nvSpPr>
-          <p:cNvPr id="139" name="PlaceHolder 1"/>
+          <p:cNvPr id="140" name="PlaceHolder 1"/>
           <p:cNvSpPr>
             <a:spLocks noGrp="1"/>
           </p:cNvSpPr>
@@ -1620,7 +1620,7 @@
       </p:sp>
       <p:sp>
         <p:nvSpPr>
-          <p:cNvPr id="140" name="PlaceHolder 2"/>
+          <p:cNvPr id="141" name="PlaceHolder 2"/>
           <p:cNvSpPr>
             <a:spLocks noGrp="1"/>
           </p:cNvSpPr>
@@ -1649,7 +1649,7 @@
             <a:pPr indent="0">
               <a:buNone/>
             </a:pPr>
-            <a:endParaRPr b="0" lang="fr-FR" sz="1800" strike="noStrike" u="none">
+            <a:endParaRPr b="0" lang="en-US" sz="1800" strike="noStrike" u="none">
               <a:solidFill>
                 <a:srgbClr val="000000"/>
               </a:solidFill>
@@ -1662,7 +1662,7 @@
       </p:sp>
       <p:sp>
         <p:nvSpPr>
-          <p:cNvPr id="141" name="PlaceHolder 3"/>
+          <p:cNvPr id="142" name="PlaceHolder 3"/>
           <p:cNvSpPr>
             <a:spLocks noGrp="1"/>
           </p:cNvSpPr>
@@ -1717,7 +1717,7 @@
                 <a:tab algn="l" pos="0"/>
               </a:tabLst>
             </a:pPr>
-            <a:fld id="{1F584802-63CD-4F18-A4D0-C5FF4B4ED0BB}" type="slidenum">
+            <a:fld id="{C077B06D-2306-49B8-9E60-475C1CD6C2D5}" type="slidenum">
               <a:rPr b="0" lang="en-US" sz="1800" strike="noStrike" u="none">
                 <a:solidFill>
                   <a:schemeClr val="dk1"/>
@@ -1727,9 +1727,9 @@
                 <a:latin typeface="+mn-lt"/>
                 <a:ea typeface="+mn-ea"/>
               </a:rPr>
-              <a:t>&lt;numéro&gt;</a:t>
+              <a:t>&lt;number&gt;</a:t>
             </a:fld>
-            <a:endParaRPr b="0" lang="fr-FR" sz="1800" strike="noStrike" u="none">
+            <a:endParaRPr b="0" lang="en-US" sz="1800" strike="noStrike" u="none">
               <a:solidFill>
                 <a:srgbClr val="000000"/>
               </a:solidFill>
@@ -1764,7 +1764,7 @@
       </p:grpSpPr>
       <p:sp>
         <p:nvSpPr>
-          <p:cNvPr id="142" name="PlaceHolder 1"/>
+          <p:cNvPr id="143" name="PlaceHolder 1"/>
           <p:cNvSpPr>
             <a:spLocks noGrp="1"/>
           </p:cNvSpPr>
@@ -1787,7 +1787,7 @@
       </p:sp>
       <p:sp>
         <p:nvSpPr>
-          <p:cNvPr id="143" name="PlaceHolder 2"/>
+          <p:cNvPr id="144" name="PlaceHolder 2"/>
           <p:cNvSpPr>
             <a:spLocks noGrp="1"/>
           </p:cNvSpPr>
@@ -1816,7 +1816,7 @@
             <a:pPr indent="0">
               <a:buNone/>
             </a:pPr>
-            <a:endParaRPr b="0" lang="fr-FR" sz="1800" strike="noStrike" u="none">
+            <a:endParaRPr b="0" lang="en-US" sz="1800" strike="noStrike" u="none">
               <a:solidFill>
                 <a:srgbClr val="000000"/>
               </a:solidFill>
@@ -1829,7 +1829,7 @@
       </p:sp>
       <p:sp>
         <p:nvSpPr>
-          <p:cNvPr id="144" name="PlaceHolder 3"/>
+          <p:cNvPr id="145" name="PlaceHolder 3"/>
           <p:cNvSpPr>
             <a:spLocks noGrp="1"/>
           </p:cNvSpPr>
@@ -1884,7 +1884,7 @@
                 <a:tab algn="l" pos="0"/>
               </a:tabLst>
             </a:pPr>
-            <a:fld id="{8558122D-F703-449A-A8A8-1C6C535E70A0}" type="slidenum">
+            <a:fld id="{43255A38-9385-41AA-89C6-6AFB0540D153}" type="slidenum">
               <a:rPr b="0" lang="en-US" sz="1800" strike="noStrike" u="none">
                 <a:solidFill>
                   <a:schemeClr val="dk1"/>
@@ -1894,9 +1894,9 @@
                 <a:latin typeface="+mn-lt"/>
                 <a:ea typeface="+mn-ea"/>
               </a:rPr>
-              <a:t>&lt;numéro&gt;</a:t>
+              <a:t>&lt;number&gt;</a:t>
             </a:fld>
-            <a:endParaRPr b="0" lang="fr-FR" sz="1800" strike="noStrike" u="none">
+            <a:endParaRPr b="0" lang="en-US" sz="1800" strike="noStrike" u="none">
               <a:solidFill>
                 <a:srgbClr val="000000"/>
               </a:solidFill>
@@ -1931,7 +1931,7 @@
       </p:grpSpPr>
       <p:sp>
         <p:nvSpPr>
-          <p:cNvPr id="145" name="PlaceHolder 1"/>
+          <p:cNvPr id="146" name="PlaceHolder 1"/>
           <p:cNvSpPr>
             <a:spLocks noGrp="1"/>
           </p:cNvSpPr>
@@ -1954,7 +1954,7 @@
       </p:sp>
       <p:sp>
         <p:nvSpPr>
-          <p:cNvPr id="146" name="PlaceHolder 2"/>
+          <p:cNvPr id="147" name="PlaceHolder 2"/>
           <p:cNvSpPr>
             <a:spLocks noGrp="1"/>
           </p:cNvSpPr>
@@ -1983,7 +1983,7 @@
             <a:pPr indent="0">
               <a:buNone/>
             </a:pPr>
-            <a:endParaRPr b="0" lang="fr-FR" sz="1800" strike="noStrike" u="none">
+            <a:endParaRPr b="0" lang="en-US" sz="1800" strike="noStrike" u="none">
               <a:solidFill>
                 <a:srgbClr val="000000"/>
               </a:solidFill>
@@ -1996,7 +1996,7 @@
       </p:sp>
       <p:sp>
         <p:nvSpPr>
-          <p:cNvPr id="147" name="PlaceHolder 3"/>
+          <p:cNvPr id="148" name="PlaceHolder 3"/>
           <p:cNvSpPr>
             <a:spLocks noGrp="1"/>
           </p:cNvSpPr>
@@ -2051,7 +2051,7 @@
                 <a:tab algn="l" pos="0"/>
               </a:tabLst>
             </a:pPr>
-            <a:fld id="{AC96F2DC-E5DC-4CCB-8F09-E5AA3CD442F2}" type="slidenum">
+            <a:fld id="{F0B194AB-85C3-40F2-8E87-F63BF88099E2}" type="slidenum">
               <a:rPr b="0" lang="en-US" sz="1800" strike="noStrike" u="none">
                 <a:solidFill>
                   <a:schemeClr val="dk1"/>
@@ -2061,9 +2061,9 @@
                 <a:latin typeface="+mn-lt"/>
                 <a:ea typeface="+mn-ea"/>
               </a:rPr>
-              <a:t>&lt;numéro&gt;</a:t>
+              <a:t>&lt;number&gt;</a:t>
             </a:fld>
-            <a:endParaRPr b="0" lang="fr-FR" sz="1800" strike="noStrike" u="none">
+            <a:endParaRPr b="0" lang="en-US" sz="1800" strike="noStrike" u="none">
               <a:solidFill>
                 <a:srgbClr val="000000"/>
               </a:solidFill>
@@ -2112,7 +2112,7 @@
         <p:spPr>
           <a:xfrm>
             <a:off x="548640" y="6446880"/>
-            <a:ext cx="6398640" cy="272160"/>
+            <a:ext cx="6398280" cy="271800"/>
           </a:xfrm>
           <a:prstGeom prst="rect">
             <a:avLst/>
@@ -2153,7 +2153,7 @@
               </a:rPr>
               <a:t>Seeking for AI</a:t>
             </a:r>
-            <a:endParaRPr b="0" lang="fr-FR" sz="900" strike="noStrike" u="none">
+            <a:endParaRPr b="0" lang="en-US" sz="900" strike="noStrike" u="none">
               <a:solidFill>
                 <a:srgbClr val="000000"/>
               </a:solidFill>
@@ -2173,7 +2173,7 @@
         <p:spPr>
           <a:xfrm>
             <a:off x="11185920" y="6446880"/>
-            <a:ext cx="455040" cy="272160"/>
+            <a:ext cx="454680" cy="271800"/>
           </a:xfrm>
           <a:prstGeom prst="rect">
             <a:avLst/>
@@ -2214,7 +2214,7 @@
               </a:rPr>
               <a:t>2</a:t>
             </a:r>
-            <a:endParaRPr b="0" lang="fr-FR" sz="900" strike="noStrike" u="none">
+            <a:endParaRPr b="0" lang="en-US" sz="900" strike="noStrike" u="none">
               <a:solidFill>
                 <a:srgbClr val="000000"/>
               </a:solidFill>
@@ -2239,7 +2239,7 @@
         <p:spPr>
           <a:xfrm>
             <a:off x="10375920" y="356040"/>
-            <a:ext cx="1267920" cy="649440"/>
+            <a:ext cx="1267560" cy="649080"/>
           </a:xfrm>
           <a:prstGeom prst="rect">
             <a:avLst/>
@@ -2263,7 +2263,7 @@
         <p:spPr>
           <a:xfrm>
             <a:off x="609480" y="273600"/>
-            <a:ext cx="10971360" cy="1143720"/>
+            <a:ext cx="10971000" cy="1143360"/>
           </a:xfrm>
           <a:prstGeom prst="rect">
             <a:avLst/>
@@ -2298,7 +2298,7 @@
               </a:rPr>
               <a:t>Click to edit the title text format</a:t>
             </a:r>
-            <a:endParaRPr b="0" lang="fr-FR" sz="4400" strike="noStrike" u="none">
+            <a:endParaRPr b="0" lang="en-US" sz="4400" strike="noStrike" u="none">
               <a:solidFill>
                 <a:srgbClr val="000000"/>
               </a:solidFill>
@@ -2322,7 +2322,7 @@
         <p:spPr>
           <a:xfrm>
             <a:off x="609480" y="1604520"/>
-            <a:ext cx="10971360" cy="3976200"/>
+            <a:ext cx="10971000" cy="3975840"/>
           </a:xfrm>
           <a:prstGeom prst="rect">
             <a:avLst/>
@@ -2362,7 +2362,7 @@
               </a:rPr>
               <a:t>Click to edit the outline text format</a:t>
             </a:r>
-            <a:endParaRPr b="0" lang="fr-FR" sz="3200" strike="noStrike" u="none">
+            <a:endParaRPr b="0" lang="en-US" sz="3200" strike="noStrike" u="none">
               <a:solidFill>
                 <a:srgbClr val="000000"/>
               </a:solidFill>
@@ -2397,7 +2397,7 @@
               </a:rPr>
               <a:t>Second Outline Level</a:t>
             </a:r>
-            <a:endParaRPr b="0" lang="fr-FR" sz="2800" strike="noStrike" u="none">
+            <a:endParaRPr b="0" lang="en-US" sz="2800" strike="noStrike" u="none">
               <a:solidFill>
                 <a:srgbClr val="000000"/>
               </a:solidFill>
@@ -2432,7 +2432,7 @@
               </a:rPr>
               <a:t>Third Outline Level</a:t>
             </a:r>
-            <a:endParaRPr b="0" lang="fr-FR" sz="2400" strike="noStrike" u="none">
+            <a:endParaRPr b="0" lang="en-US" sz="2400" strike="noStrike" u="none">
               <a:solidFill>
                 <a:srgbClr val="000000"/>
               </a:solidFill>
@@ -2467,7 +2467,7 @@
               </a:rPr>
               <a:t>Fourth Outline Level</a:t>
             </a:r>
-            <a:endParaRPr b="0" lang="fr-FR" sz="2000" strike="noStrike" u="none">
+            <a:endParaRPr b="0" lang="en-US" sz="2000" strike="noStrike" u="none">
               <a:solidFill>
                 <a:srgbClr val="000000"/>
               </a:solidFill>
@@ -2502,7 +2502,7 @@
               </a:rPr>
               <a:t>Fifth Outline Level</a:t>
             </a:r>
-            <a:endParaRPr b="0" lang="fr-FR" sz="2000" strike="noStrike" u="none">
+            <a:endParaRPr b="0" lang="en-US" sz="2000" strike="noStrike" u="none">
               <a:solidFill>
                 <a:srgbClr val="000000"/>
               </a:solidFill>
@@ -2537,7 +2537,7 @@
               </a:rPr>
               <a:t>Sixth Outline Level</a:t>
             </a:r>
-            <a:endParaRPr b="0" lang="fr-FR" sz="2000" strike="noStrike" u="none">
+            <a:endParaRPr b="0" lang="en-US" sz="2000" strike="noStrike" u="none">
               <a:solidFill>
                 <a:srgbClr val="000000"/>
               </a:solidFill>
@@ -2572,7 +2572,7 @@
               </a:rPr>
               <a:t>Seventh Outline Level</a:t>
             </a:r>
-            <a:endParaRPr b="0" lang="fr-FR" sz="2000" strike="noStrike" u="none">
+            <a:endParaRPr b="0" lang="en-US" sz="2000" strike="noStrike" u="none">
               <a:solidFill>
                 <a:srgbClr val="000000"/>
               </a:solidFill>
@@ -2621,7 +2621,7 @@
         <p:spPr>
           <a:xfrm>
             <a:off x="548640" y="6446880"/>
-            <a:ext cx="6398640" cy="272160"/>
+            <a:ext cx="6398280" cy="271800"/>
           </a:xfrm>
           <a:prstGeom prst="rect">
             <a:avLst/>
@@ -2662,7 +2662,7 @@
               </a:rPr>
               <a:t>Seeking for AI</a:t>
             </a:r>
-            <a:endParaRPr b="0" lang="fr-FR" sz="900" strike="noStrike" u="none">
+            <a:endParaRPr b="0" lang="en-US" sz="900" strike="noStrike" u="none">
               <a:solidFill>
                 <a:srgbClr val="000000"/>
               </a:solidFill>
@@ -2682,7 +2682,7 @@
         <p:spPr>
           <a:xfrm>
             <a:off x="11185920" y="6446880"/>
-            <a:ext cx="455040" cy="272160"/>
+            <a:ext cx="454680" cy="271800"/>
           </a:xfrm>
           <a:prstGeom prst="rect">
             <a:avLst/>
@@ -2723,7 +2723,7 @@
               </a:rPr>
               <a:t>2</a:t>
             </a:r>
-            <a:endParaRPr b="0" lang="fr-FR" sz="900" strike="noStrike" u="none">
+            <a:endParaRPr b="0" lang="en-US" sz="900" strike="noStrike" u="none">
               <a:solidFill>
                 <a:srgbClr val="000000"/>
               </a:solidFill>
@@ -2748,7 +2748,7 @@
         <p:spPr>
           <a:xfrm>
             <a:off x="10375920" y="356040"/>
-            <a:ext cx="1267920" cy="649440"/>
+            <a:ext cx="1267560" cy="649080"/>
           </a:xfrm>
           <a:prstGeom prst="rect">
             <a:avLst/>
@@ -2772,7 +2772,7 @@
         <p:spPr>
           <a:xfrm>
             <a:off x="609480" y="273600"/>
-            <a:ext cx="10971360" cy="1143720"/>
+            <a:ext cx="10971000" cy="1143360"/>
           </a:xfrm>
           <a:prstGeom prst="rect">
             <a:avLst/>
@@ -2807,7 +2807,7 @@
               </a:rPr>
               <a:t>Click to edit the title text format</a:t>
             </a:r>
-            <a:endParaRPr b="0" lang="fr-FR" sz="4400" strike="noStrike" u="none">
+            <a:endParaRPr b="0" lang="en-US" sz="4400" strike="noStrike" u="none">
               <a:solidFill>
                 <a:srgbClr val="000000"/>
               </a:solidFill>
@@ -2831,7 +2831,7 @@
         <p:spPr>
           <a:xfrm>
             <a:off x="609480" y="1604520"/>
-            <a:ext cx="10971360" cy="3976200"/>
+            <a:ext cx="10971000" cy="3975840"/>
           </a:xfrm>
           <a:prstGeom prst="rect">
             <a:avLst/>
@@ -2871,7 +2871,7 @@
               </a:rPr>
               <a:t>Click to edit the outline text format</a:t>
             </a:r>
-            <a:endParaRPr b="0" lang="fr-FR" sz="3200" strike="noStrike" u="none">
+            <a:endParaRPr b="0" lang="en-US" sz="3200" strike="noStrike" u="none">
               <a:solidFill>
                 <a:srgbClr val="000000"/>
               </a:solidFill>
@@ -2906,7 +2906,7 @@
               </a:rPr>
               <a:t>Second Outline Level</a:t>
             </a:r>
-            <a:endParaRPr b="0" lang="fr-FR" sz="2800" strike="noStrike" u="none">
+            <a:endParaRPr b="0" lang="en-US" sz="2800" strike="noStrike" u="none">
               <a:solidFill>
                 <a:srgbClr val="000000"/>
               </a:solidFill>
@@ -2941,7 +2941,7 @@
               </a:rPr>
               <a:t>Third Outline Level</a:t>
             </a:r>
-            <a:endParaRPr b="0" lang="fr-FR" sz="2400" strike="noStrike" u="none">
+            <a:endParaRPr b="0" lang="en-US" sz="2400" strike="noStrike" u="none">
               <a:solidFill>
                 <a:srgbClr val="000000"/>
               </a:solidFill>
@@ -2976,7 +2976,7 @@
               </a:rPr>
               <a:t>Fourth Outline Level</a:t>
             </a:r>
-            <a:endParaRPr b="0" lang="fr-FR" sz="2000" strike="noStrike" u="none">
+            <a:endParaRPr b="0" lang="en-US" sz="2000" strike="noStrike" u="none">
               <a:solidFill>
                 <a:srgbClr val="000000"/>
               </a:solidFill>
@@ -3011,7 +3011,7 @@
               </a:rPr>
               <a:t>Fifth Outline Level</a:t>
             </a:r>
-            <a:endParaRPr b="0" lang="fr-FR" sz="2000" strike="noStrike" u="none">
+            <a:endParaRPr b="0" lang="en-US" sz="2000" strike="noStrike" u="none">
               <a:solidFill>
                 <a:srgbClr val="000000"/>
               </a:solidFill>
@@ -3046,7 +3046,7 @@
               </a:rPr>
               <a:t>Sixth Outline Level</a:t>
             </a:r>
-            <a:endParaRPr b="0" lang="fr-FR" sz="2000" strike="noStrike" u="none">
+            <a:endParaRPr b="0" lang="en-US" sz="2000" strike="noStrike" u="none">
               <a:solidFill>
                 <a:srgbClr val="000000"/>
               </a:solidFill>
@@ -3081,7 +3081,7 @@
               </a:rPr>
               <a:t>Seventh Outline Level</a:t>
             </a:r>
-            <a:endParaRPr b="0" lang="fr-FR" sz="2000" strike="noStrike" u="none">
+            <a:endParaRPr b="0" lang="en-US" sz="2000" strike="noStrike" u="none">
               <a:solidFill>
                 <a:srgbClr val="000000"/>
               </a:solidFill>
@@ -3130,7 +3130,7 @@
         <p:spPr>
           <a:xfrm>
             <a:off x="548640" y="6446880"/>
-            <a:ext cx="6398640" cy="272160"/>
+            <a:ext cx="6398280" cy="271800"/>
           </a:xfrm>
           <a:prstGeom prst="rect">
             <a:avLst/>
@@ -3171,7 +3171,7 @@
               </a:rPr>
               <a:t>Seeking for AI</a:t>
             </a:r>
-            <a:endParaRPr b="0" lang="fr-FR" sz="900" strike="noStrike" u="none">
+            <a:endParaRPr b="0" lang="en-US" sz="900" strike="noStrike" u="none">
               <a:solidFill>
                 <a:srgbClr val="000000"/>
               </a:solidFill>
@@ -3191,7 +3191,7 @@
         <p:spPr>
           <a:xfrm>
             <a:off x="11185920" y="6446880"/>
-            <a:ext cx="455040" cy="272160"/>
+            <a:ext cx="454680" cy="271800"/>
           </a:xfrm>
           <a:prstGeom prst="rect">
             <a:avLst/>
@@ -3232,7 +3232,7 @@
               </a:rPr>
               <a:t>2</a:t>
             </a:r>
-            <a:endParaRPr b="0" lang="fr-FR" sz="900" strike="noStrike" u="none">
+            <a:endParaRPr b="0" lang="en-US" sz="900" strike="noStrike" u="none">
               <a:solidFill>
                 <a:srgbClr val="000000"/>
               </a:solidFill>
@@ -3257,7 +3257,7 @@
         <p:spPr>
           <a:xfrm>
             <a:off x="10375920" y="356040"/>
-            <a:ext cx="1267920" cy="649440"/>
+            <a:ext cx="1267560" cy="649080"/>
           </a:xfrm>
           <a:prstGeom prst="rect">
             <a:avLst/>
@@ -3281,7 +3281,7 @@
         <p:spPr>
           <a:xfrm>
             <a:off x="609480" y="273600"/>
-            <a:ext cx="10971360" cy="1143720"/>
+            <a:ext cx="10971000" cy="1143360"/>
           </a:xfrm>
           <a:prstGeom prst="rect">
             <a:avLst/>
@@ -3316,7 +3316,7 @@
               </a:rPr>
               <a:t>Click to edit the title text format</a:t>
             </a:r>
-            <a:endParaRPr b="0" lang="fr-FR" sz="4400" strike="noStrike" u="none">
+            <a:endParaRPr b="0" lang="en-US" sz="4400" strike="noStrike" u="none">
               <a:solidFill>
                 <a:srgbClr val="000000"/>
               </a:solidFill>
@@ -3340,7 +3340,7 @@
         <p:spPr>
           <a:xfrm>
             <a:off x="609480" y="1604520"/>
-            <a:ext cx="10971360" cy="3976200"/>
+            <a:ext cx="10971000" cy="3975840"/>
           </a:xfrm>
           <a:prstGeom prst="rect">
             <a:avLst/>
@@ -3380,7 +3380,7 @@
               </a:rPr>
               <a:t>Click to edit the outline text format</a:t>
             </a:r>
-            <a:endParaRPr b="0" lang="fr-FR" sz="3200" strike="noStrike" u="none">
+            <a:endParaRPr b="0" lang="en-US" sz="3200" strike="noStrike" u="none">
               <a:solidFill>
                 <a:srgbClr val="000000"/>
               </a:solidFill>
@@ -3415,7 +3415,7 @@
               </a:rPr>
               <a:t>Second Outline Level</a:t>
             </a:r>
-            <a:endParaRPr b="0" lang="fr-FR" sz="2800" strike="noStrike" u="none">
+            <a:endParaRPr b="0" lang="en-US" sz="2800" strike="noStrike" u="none">
               <a:solidFill>
                 <a:srgbClr val="000000"/>
               </a:solidFill>
@@ -3450,7 +3450,7 @@
               </a:rPr>
               <a:t>Third Outline Level</a:t>
             </a:r>
-            <a:endParaRPr b="0" lang="fr-FR" sz="2400" strike="noStrike" u="none">
+            <a:endParaRPr b="0" lang="en-US" sz="2400" strike="noStrike" u="none">
               <a:solidFill>
                 <a:srgbClr val="000000"/>
               </a:solidFill>
@@ -3485,7 +3485,7 @@
               </a:rPr>
               <a:t>Fourth Outline Level</a:t>
             </a:r>
-            <a:endParaRPr b="0" lang="fr-FR" sz="2000" strike="noStrike" u="none">
+            <a:endParaRPr b="0" lang="en-US" sz="2000" strike="noStrike" u="none">
               <a:solidFill>
                 <a:srgbClr val="000000"/>
               </a:solidFill>
@@ -3520,7 +3520,7 @@
               </a:rPr>
               <a:t>Fifth Outline Level</a:t>
             </a:r>
-            <a:endParaRPr b="0" lang="fr-FR" sz="2000" strike="noStrike" u="none">
+            <a:endParaRPr b="0" lang="en-US" sz="2000" strike="noStrike" u="none">
               <a:solidFill>
                 <a:srgbClr val="000000"/>
               </a:solidFill>
@@ -3555,7 +3555,7 @@
               </a:rPr>
               <a:t>Sixth Outline Level</a:t>
             </a:r>
-            <a:endParaRPr b="0" lang="fr-FR" sz="2000" strike="noStrike" u="none">
+            <a:endParaRPr b="0" lang="en-US" sz="2000" strike="noStrike" u="none">
               <a:solidFill>
                 <a:srgbClr val="000000"/>
               </a:solidFill>
@@ -3590,7 +3590,7 @@
               </a:rPr>
               <a:t>Seventh Outline Level</a:t>
             </a:r>
-            <a:endParaRPr b="0" lang="fr-FR" sz="2000" strike="noStrike" u="none">
+            <a:endParaRPr b="0" lang="en-US" sz="2000" strike="noStrike" u="none">
               <a:solidFill>
                 <a:srgbClr val="000000"/>
               </a:solidFill>
@@ -3667,7 +3667,7 @@
         <p:spPr>
           <a:xfrm>
             <a:off x="9392760" y="-1425960"/>
-            <a:ext cx="4752720" cy="4752720"/>
+            <a:ext cx="4752360" cy="4752360"/>
           </a:xfrm>
           <a:prstGeom prst="ellipse">
             <a:avLst/>
@@ -3715,7 +3715,7 @@
         <p:spPr>
           <a:xfrm>
             <a:off x="-1828800" y="4206240"/>
-            <a:ext cx="4204080" cy="4204080"/>
+            <a:ext cx="4203720" cy="4203720"/>
           </a:xfrm>
           <a:prstGeom prst="ellipse">
             <a:avLst/>
@@ -3763,7 +3763,7 @@
         <p:spPr>
           <a:xfrm>
             <a:off x="777240" y="1828800"/>
-            <a:ext cx="10513440" cy="1552320"/>
+            <a:ext cx="10513080" cy="1551960"/>
           </a:xfrm>
           <a:prstGeom prst="rect">
             <a:avLst/>
@@ -3804,7 +3804,7 @@
               </a:rPr>
               <a:t>Seeking for AI</a:t>
             </a:r>
-            <a:endParaRPr b="0" lang="fr-FR" sz="5400" strike="noStrike" u="none">
+            <a:endParaRPr b="0" lang="en-US" sz="5400" strike="noStrike" u="none">
               <a:solidFill>
                 <a:srgbClr val="ffffff"/>
               </a:solidFill>
@@ -3824,7 +3824,7 @@
         <p:spPr>
           <a:xfrm>
             <a:off x="822960" y="3246120"/>
-            <a:ext cx="6347880" cy="546480"/>
+            <a:ext cx="6347520" cy="546120"/>
           </a:xfrm>
           <a:prstGeom prst="rect">
             <a:avLst/>
@@ -3871,7 +3871,7 @@
               </a:rPr>
               <a:t>Realistic Datasets for Photons and Neutrons AI methodologies</a:t>
             </a:r>
-            <a:endParaRPr b="0" lang="fr-FR" sz="1900" strike="noStrike" u="none">
+            <a:endParaRPr b="0" lang="en-US" sz="1900" strike="noStrike" u="none">
               <a:solidFill>
                 <a:srgbClr val="ffffff"/>
               </a:solidFill>
@@ -3891,7 +3891,7 @@
         <p:spPr>
           <a:xfrm>
             <a:off x="822960" y="4160520"/>
-            <a:ext cx="1415160" cy="308880"/>
+            <a:ext cx="1414800" cy="308520"/>
           </a:xfrm>
           <a:prstGeom prst="roundRect">
             <a:avLst>
@@ -3941,7 +3941,7 @@
         <p:spPr>
           <a:xfrm>
             <a:off x="822960" y="4160520"/>
-            <a:ext cx="1415160" cy="308880"/>
+            <a:ext cx="1414800" cy="308520"/>
           </a:xfrm>
           <a:prstGeom prst="rect">
             <a:avLst/>
@@ -3982,7 +3982,7 @@
               </a:rPr>
               <a:t>McStas — neutrons</a:t>
             </a:r>
-            <a:endParaRPr b="0" lang="fr-FR" sz="1100" strike="noStrike" u="none">
+            <a:endParaRPr b="0" lang="en-US" sz="1100" strike="noStrike" u="none">
               <a:solidFill>
                 <a:srgbClr val="ffffff"/>
               </a:solidFill>
@@ -4002,7 +4002,7 @@
         <p:spPr>
           <a:xfrm>
             <a:off x="2377440" y="4160520"/>
-            <a:ext cx="1415160" cy="308880"/>
+            <a:ext cx="1414800" cy="308520"/>
           </a:xfrm>
           <a:prstGeom prst="roundRect">
             <a:avLst>
@@ -4052,7 +4052,7 @@
         <p:spPr>
           <a:xfrm>
             <a:off x="2377440" y="4160520"/>
-            <a:ext cx="1415160" cy="308880"/>
+            <a:ext cx="1414800" cy="308520"/>
           </a:xfrm>
           <a:prstGeom prst="rect">
             <a:avLst/>
@@ -4093,7 +4093,7 @@
               </a:rPr>
               <a:t>McXtrace — X-rays</a:t>
             </a:r>
-            <a:endParaRPr b="0" lang="fr-FR" sz="1100" strike="noStrike" u="none">
+            <a:endParaRPr b="0" lang="en-US" sz="1100" strike="noStrike" u="none">
               <a:solidFill>
                 <a:srgbClr val="ffffff"/>
               </a:solidFill>
@@ -4156,7 +4156,7 @@
         <p:spPr>
           <a:xfrm>
             <a:off x="822960" y="5897880"/>
-            <a:ext cx="5484240" cy="317880"/>
+            <a:ext cx="5483880" cy="317520"/>
           </a:xfrm>
           <a:prstGeom prst="rect">
             <a:avLst/>
@@ -4197,7 +4197,7 @@
               </a:rPr>
               <a:t>Emmanuel FARHI   ·   Synchrotron SOLEIL – Sept 2026</a:t>
             </a:r>
-            <a:endParaRPr b="0" lang="fr-FR" sz="1250" strike="noStrike" u="none">
+            <a:endParaRPr b="0" lang="en-US" sz="1250" strike="noStrike" u="none">
               <a:solidFill>
                 <a:srgbClr val="ffffff"/>
               </a:solidFill>
@@ -4217,7 +4217,7 @@
         <p:spPr>
           <a:xfrm>
             <a:off x="7429680" y="3759120"/>
-            <a:ext cx="3807720" cy="1496520"/>
+            <a:ext cx="3807360" cy="1496160"/>
           </a:xfrm>
           <a:prstGeom prst="roundRect">
             <a:avLst>
@@ -4275,7 +4275,7 @@
         <p:spPr>
           <a:xfrm>
             <a:off x="7429680" y="5384880"/>
-            <a:ext cx="3807720" cy="277200"/>
+            <a:ext cx="3807360" cy="276840"/>
           </a:xfrm>
           <a:prstGeom prst="rect">
             <a:avLst/>
@@ -4312,7 +4312,7 @@
               </a:rPr>
               <a:t>PaNRAID School  ·  supported by PEPR DIADEM</a:t>
             </a:r>
-            <a:endParaRPr b="0" lang="fr-FR" sz="1300" strike="noStrike" u="none">
+            <a:endParaRPr b="0" lang="en-US" sz="1300" strike="noStrike" u="none">
               <a:solidFill>
                 <a:srgbClr val="ffffff"/>
               </a:solidFill>
@@ -4337,7 +4337,7 @@
         <p:spPr>
           <a:xfrm>
             <a:off x="825480" y="457200"/>
-            <a:ext cx="1395000" cy="714960"/>
+            <a:ext cx="1394640" cy="714600"/>
           </a:xfrm>
           <a:prstGeom prst="rect">
             <a:avLst/>
@@ -4361,7 +4361,7 @@
         <p:spPr>
           <a:xfrm>
             <a:off x="7429680" y="478800"/>
-            <a:ext cx="4537440" cy="671400"/>
+            <a:ext cx="4537080" cy="671040"/>
           </a:xfrm>
           <a:prstGeom prst="rect">
             <a:avLst/>
@@ -4381,9 +4381,9 @@
         <p:grpSpPr>
           <a:xfrm>
             <a:off x="7936200" y="3847680"/>
-            <a:ext cx="2794320" cy="1319400"/>
+            <a:ext cx="2793960" cy="1319040"/>
             <a:chOff x="7936200" y="3847680"/>
-            <a:chExt cx="2794320" cy="1319400"/>
+            <a:chExt cx="2793960" cy="1319040"/>
           </a:xfrm>
         </p:grpSpPr>
         <p:grpSp>
@@ -4395,9 +4395,9 @@
           <p:grpSpPr>
             <a:xfrm>
               <a:off x="9343440" y="3847680"/>
-              <a:ext cx="1387080" cy="1256400"/>
+              <a:ext cx="1386720" cy="1256040"/>
               <a:chOff x="9343440" y="3847680"/>
-              <a:chExt cx="1387080" cy="1256400"/>
+              <a:chExt cx="1386720" cy="1256040"/>
             </a:xfrm>
           </p:grpSpPr>
           <p:pic>
@@ -4414,7 +4414,7 @@
             <p:spPr>
               <a:xfrm>
                 <a:off x="9392760" y="3847680"/>
-                <a:ext cx="1292400" cy="774000"/>
+                <a:ext cx="1292040" cy="773640"/>
               </a:xfrm>
               <a:prstGeom prst="rect">
                 <a:avLst/>
@@ -4438,7 +4438,7 @@
             <p:spPr>
               <a:xfrm>
                 <a:off x="9343440" y="4576320"/>
-                <a:ext cx="961200" cy="463320"/>
+                <a:ext cx="960840" cy="462960"/>
               </a:xfrm>
               <a:prstGeom prst="rect">
                 <a:avLst/>
@@ -4462,7 +4462,7 @@
             <p:spPr>
               <a:xfrm>
                 <a:off x="10378800" y="4584960"/>
-                <a:ext cx="351720" cy="519120"/>
+                <a:ext cx="351360" cy="518760"/>
               </a:xfrm>
               <a:prstGeom prst="rect">
                 <a:avLst/>
@@ -4487,7 +4487,7 @@
           <p:spPr>
             <a:xfrm>
               <a:off x="7936200" y="3852360"/>
-              <a:ext cx="1292400" cy="1314720"/>
+              <a:ext cx="1292040" cy="1314360"/>
             </a:xfrm>
             <a:prstGeom prst="rect">
               <a:avLst/>
@@ -4538,14 +4538,14 @@
       </p:grpSpPr>
       <p:sp>
         <p:nvSpPr>
-          <p:cNvPr id="73" name="Text 31"/>
+          <p:cNvPr id="74" name="Text 31"/>
           <p:cNvSpPr/>
           <p:nvPr/>
         </p:nvSpPr>
         <p:spPr>
           <a:xfrm>
             <a:off x="548640" y="384120"/>
-            <a:ext cx="9141840" cy="290520"/>
+            <a:ext cx="9141480" cy="290160"/>
           </a:xfrm>
           <a:prstGeom prst="rect">
             <a:avLst/>
@@ -4585,7 +4585,7 @@
               </a:rPr>
               <a:t>Realistic datasets</a:t>
             </a:r>
-            <a:endParaRPr b="0" lang="fr-FR" sz="1200" strike="noStrike" u="none">
+            <a:endParaRPr b="0" lang="en-US" sz="1200" strike="noStrike" u="none">
               <a:solidFill>
                 <a:srgbClr val="000000"/>
               </a:solidFill>
@@ -4598,14 +4598,14 @@
       </p:sp>
       <p:sp>
         <p:nvSpPr>
-          <p:cNvPr id="74" name="Text 32"/>
+          <p:cNvPr id="75" name="Text 32"/>
           <p:cNvSpPr/>
           <p:nvPr/>
         </p:nvSpPr>
         <p:spPr>
           <a:xfrm>
             <a:off x="548640" y="658440"/>
-            <a:ext cx="11062080" cy="820800"/>
+            <a:ext cx="11061720" cy="820440"/>
           </a:xfrm>
           <a:prstGeom prst="rect">
             <a:avLst/>
@@ -4651,7 +4651,7 @@
               </a:rPr>
               <a:t>Why Realistic AI Datasets?</a:t>
             </a:r>
-            <a:endParaRPr b="0" lang="fr-FR" sz="3000" strike="noStrike" u="none">
+            <a:endParaRPr b="0" lang="en-US" sz="3000" strike="noStrike" u="none">
               <a:solidFill>
                 <a:srgbClr val="000000"/>
               </a:solidFill>
@@ -4664,14 +4664,14 @@
       </p:sp>
       <p:sp>
         <p:nvSpPr>
-          <p:cNvPr id="75" name="Text 33"/>
+          <p:cNvPr id="76" name="Text 33"/>
           <p:cNvSpPr/>
           <p:nvPr/>
         </p:nvSpPr>
         <p:spPr>
           <a:xfrm>
             <a:off x="11185920" y="6446520"/>
-            <a:ext cx="455040" cy="272160"/>
+            <a:ext cx="454680" cy="271800"/>
           </a:xfrm>
           <a:prstGeom prst="rect">
             <a:avLst/>
@@ -4712,7 +4712,7 @@
               </a:rPr>
               <a:t>2</a:t>
             </a:r>
-            <a:endParaRPr b="0" lang="fr-FR" sz="900" strike="noStrike" u="none">
+            <a:endParaRPr b="0" lang="en-US" sz="900" strike="noStrike" u="none">
               <a:solidFill>
                 <a:srgbClr val="000000"/>
               </a:solidFill>
@@ -4725,14 +4725,14 @@
       </p:sp>
       <p:sp>
         <p:nvSpPr>
-          <p:cNvPr id="76" name=""/>
+          <p:cNvPr id="77" name=""/>
           <p:cNvSpPr/>
           <p:nvPr/>
         </p:nvSpPr>
         <p:spPr>
           <a:xfrm>
             <a:off x="540000" y="1800000"/>
-            <a:ext cx="10978560" cy="3160080"/>
+            <a:ext cx="10978200" cy="3160080"/>
           </a:xfrm>
           <a:prstGeom prst="rect">
             <a:avLst/>
@@ -4789,7 +4789,7 @@
             <a:br>
               <a:rPr sz="2400"/>
             </a:br>
-            <a:endParaRPr b="0" lang="fr-FR" sz="2400" strike="noStrike" u="none">
+            <a:endParaRPr b="0" lang="en-US" sz="2400" strike="noStrike" u="none">
               <a:solidFill>
                 <a:srgbClr val="000000"/>
               </a:solidFill>
@@ -4837,7 +4837,7 @@
               </a:rPr>
               <a:t>: Find best parameters to get min/max signal.</a:t>
             </a:r>
-            <a:endParaRPr b="0" lang="fr-FR" sz="2400" strike="noStrike" u="none">
+            <a:endParaRPr b="0" lang="en-US" sz="2400" strike="noStrike" u="none">
               <a:solidFill>
                 <a:srgbClr val="000000"/>
               </a:solidFill>
@@ -4899,7 +4899,7 @@
               </a:rPr>
               <a:t> </a:t>
             </a:r>
-            <a:endParaRPr b="0" lang="fr-FR" sz="2400" strike="noStrike" u="none">
+            <a:endParaRPr b="0" lang="en-US" sz="2400" strike="noStrike" u="none">
               <a:solidFill>
                 <a:srgbClr val="000000"/>
               </a:solidFill>
@@ -4934,7 +4934,7 @@
             <a:br>
               <a:rPr sz="2100"/>
             </a:br>
-            <a:endParaRPr b="0" lang="fr-FR" sz="2100" strike="noStrike" u="none">
+            <a:endParaRPr b="0" lang="en-US" sz="2100" strike="noStrike" u="none">
               <a:solidFill>
                 <a:srgbClr val="000000"/>
               </a:solidFill>
@@ -4982,7 +4982,7 @@
               </a:rPr>
               <a:t>: Optimization of beamline configurations.</a:t>
             </a:r>
-            <a:endParaRPr b="0" lang="fr-FR" sz="2400" strike="noStrike" u="none">
+            <a:endParaRPr b="0" lang="en-US" sz="2400" strike="noStrike" u="none">
               <a:solidFill>
                 <a:srgbClr val="000000"/>
               </a:solidFill>
@@ -5025,14 +5025,14 @@
       </p:grpSpPr>
       <p:sp>
         <p:nvSpPr>
-          <p:cNvPr id="77" name="Text 34"/>
+          <p:cNvPr id="78" name="Text 34"/>
           <p:cNvSpPr/>
           <p:nvPr/>
         </p:nvSpPr>
         <p:spPr>
           <a:xfrm>
             <a:off x="548640" y="384120"/>
-            <a:ext cx="9141840" cy="290520"/>
+            <a:ext cx="9141480" cy="290160"/>
           </a:xfrm>
           <a:prstGeom prst="rect">
             <a:avLst/>
@@ -5078,7 +5078,7 @@
               </a:rPr>
               <a:t>General AI Methodology</a:t>
             </a:r>
-            <a:endParaRPr b="0" lang="fr-FR" sz="1200" strike="noStrike" u="none">
+            <a:endParaRPr b="0" lang="en-US" sz="1200" strike="noStrike" u="none">
               <a:solidFill>
                 <a:srgbClr val="000000"/>
               </a:solidFill>
@@ -5091,14 +5091,14 @@
       </p:sp>
       <p:sp>
         <p:nvSpPr>
-          <p:cNvPr id="78" name="Text 35"/>
+          <p:cNvPr id="79" name="Text 35"/>
           <p:cNvSpPr/>
           <p:nvPr/>
         </p:nvSpPr>
         <p:spPr>
           <a:xfrm>
             <a:off x="548640" y="658440"/>
-            <a:ext cx="11062080" cy="820800"/>
+            <a:ext cx="11061720" cy="820440"/>
           </a:xfrm>
           <a:prstGeom prst="rect">
             <a:avLst/>
@@ -5144,7 +5144,7 @@
               </a:rPr>
               <a:t>General AI Methodology</a:t>
             </a:r>
-            <a:endParaRPr b="0" lang="fr-FR" sz="3000" strike="noStrike" u="none">
+            <a:endParaRPr b="0" lang="en-US" sz="3000" strike="noStrike" u="none">
               <a:solidFill>
                 <a:srgbClr val="000000"/>
               </a:solidFill>
@@ -5157,14 +5157,14 @@
       </p:sp>
       <p:sp>
         <p:nvSpPr>
-          <p:cNvPr id="79" name="Text 36"/>
+          <p:cNvPr id="80" name="Text 36"/>
           <p:cNvSpPr/>
           <p:nvPr/>
         </p:nvSpPr>
         <p:spPr>
           <a:xfrm>
             <a:off x="11185920" y="6446520"/>
-            <a:ext cx="455040" cy="272160"/>
+            <a:ext cx="454680" cy="271800"/>
           </a:xfrm>
           <a:prstGeom prst="rect">
             <a:avLst/>
@@ -5205,7 +5205,7 @@
               </a:rPr>
               <a:t>2</a:t>
             </a:r>
-            <a:endParaRPr b="0" lang="fr-FR" sz="900" strike="noStrike" u="none">
+            <a:endParaRPr b="0" lang="en-US" sz="900" strike="noStrike" u="none">
               <a:solidFill>
                 <a:srgbClr val="000000"/>
               </a:solidFill>
@@ -5218,14 +5218,14 @@
       </p:sp>
       <p:sp>
         <p:nvSpPr>
-          <p:cNvPr id="80" name=""/>
+          <p:cNvPr id="81" name=""/>
           <p:cNvSpPr/>
           <p:nvPr/>
         </p:nvSpPr>
         <p:spPr>
           <a:xfrm>
             <a:off x="540000" y="1800000"/>
-            <a:ext cx="10978560" cy="4604760"/>
+            <a:ext cx="10978200" cy="4604760"/>
           </a:xfrm>
           <a:prstGeom prst="rect">
             <a:avLst/>
@@ -5287,7 +5287,7 @@
               </a:rPr>
               <a:t>:</a:t>
             </a:r>
-            <a:endParaRPr b="0" lang="fr-FR" sz="2400" strike="noStrike" u="none">
+            <a:endParaRPr b="0" lang="en-US" sz="2400" strike="noStrike" u="none">
               <a:solidFill>
                 <a:srgbClr val="000000"/>
               </a:solidFill>
@@ -5335,7 +5335,7 @@
               </a:rPr>
               <a:t> </a:t>
             </a:r>
-            <a:endParaRPr b="0" lang="fr-FR" sz="2400" strike="noStrike" u="none">
+            <a:endParaRPr b="0" lang="en-US" sz="2400" strike="noStrike" u="none">
               <a:solidFill>
                 <a:srgbClr val="000000"/>
               </a:solidFill>
@@ -5367,7 +5367,7 @@
             <a:br>
               <a:rPr sz="2400"/>
             </a:br>
-            <a:endParaRPr b="0" lang="fr-FR" sz="2400" strike="noStrike" u="none">
+            <a:endParaRPr b="0" lang="en-US" sz="2400" strike="noStrike" u="none">
               <a:solidFill>
                 <a:srgbClr val="000000"/>
               </a:solidFill>
@@ -5477,7 +5477,7 @@
               </a:rPr>
               <a:t> </a:t>
             </a:r>
-            <a:endParaRPr b="0" lang="fr-FR" sz="2400" strike="noStrike" u="none">
+            <a:endParaRPr b="0" lang="en-US" sz="2400" strike="noStrike" u="none">
               <a:solidFill>
                 <a:srgbClr val="000000"/>
               </a:solidFill>
@@ -5512,7 +5512,7 @@
               </a:rPr>
               <a:t>General Behavior:</a:t>
             </a:r>
-            <a:endParaRPr b="0" lang="fr-FR" sz="2400" strike="noStrike" u="none">
+            <a:endParaRPr b="0" lang="en-US" sz="2400" strike="noStrike" u="none">
               <a:solidFill>
                 <a:srgbClr val="000000"/>
               </a:solidFill>
@@ -5547,7 +5547,7 @@
               </a:rPr>
               <a:t>All AI methods (CNNs, RNNs, SVMs) follow the same principle: map inputs to outputs via learned weights.</a:t>
             </a:r>
-            <a:endParaRPr b="0" lang="fr-FR" sz="2400" strike="noStrike" u="none">
+            <a:endParaRPr b="0" lang="en-US" sz="2400" strike="noStrike" u="none">
               <a:solidFill>
                 <a:srgbClr val="000000"/>
               </a:solidFill>
@@ -5582,7 +5582,7 @@
               </a:rPr>
               <a:t>Differences lie in architecture, training efficiency, and interpretability.</a:t>
             </a:r>
-            <a:endParaRPr b="0" lang="fr-FR" sz="2400" strike="noStrike" u="none">
+            <a:endParaRPr b="0" lang="en-US" sz="2400" strike="noStrike" u="none">
               <a:solidFill>
                 <a:srgbClr val="000000"/>
               </a:solidFill>
@@ -5625,14 +5625,14 @@
       </p:grpSpPr>
       <p:sp>
         <p:nvSpPr>
-          <p:cNvPr id="81" name="Text 37"/>
+          <p:cNvPr id="82" name="Text 37"/>
           <p:cNvSpPr/>
           <p:nvPr/>
         </p:nvSpPr>
         <p:spPr>
           <a:xfrm>
             <a:off x="548640" y="384120"/>
-            <a:ext cx="9141840" cy="290520"/>
+            <a:ext cx="9141480" cy="290160"/>
           </a:xfrm>
           <a:prstGeom prst="rect">
             <a:avLst/>
@@ -5678,7 +5678,7 @@
               </a:rPr>
               <a:t>General AI Methodology</a:t>
             </a:r>
-            <a:endParaRPr b="0" lang="fr-FR" sz="1200" strike="noStrike" u="none">
+            <a:endParaRPr b="0" lang="en-US" sz="1200" strike="noStrike" u="none">
               <a:solidFill>
                 <a:srgbClr val="000000"/>
               </a:solidFill>
@@ -5691,14 +5691,14 @@
       </p:sp>
       <p:sp>
         <p:nvSpPr>
-          <p:cNvPr id="82" name="Text 38"/>
+          <p:cNvPr id="83" name="Text 38"/>
           <p:cNvSpPr/>
           <p:nvPr/>
         </p:nvSpPr>
         <p:spPr>
           <a:xfrm>
             <a:off x="548640" y="658440"/>
-            <a:ext cx="11062080" cy="820800"/>
+            <a:ext cx="11061720" cy="820440"/>
           </a:xfrm>
           <a:prstGeom prst="rect">
             <a:avLst/>
@@ -5744,7 +5744,7 @@
               </a:rPr>
               <a:t>General AI Methodology</a:t>
             </a:r>
-            <a:endParaRPr b="0" lang="fr-FR" sz="3000" strike="noStrike" u="none">
+            <a:endParaRPr b="0" lang="en-US" sz="3000" strike="noStrike" u="none">
               <a:solidFill>
                 <a:srgbClr val="000000"/>
               </a:solidFill>
@@ -5757,14 +5757,14 @@
       </p:sp>
       <p:sp>
         <p:nvSpPr>
-          <p:cNvPr id="83" name="Text 39"/>
+          <p:cNvPr id="84" name="Text 39"/>
           <p:cNvSpPr/>
           <p:nvPr/>
         </p:nvSpPr>
         <p:spPr>
           <a:xfrm>
             <a:off x="11185920" y="6446520"/>
-            <a:ext cx="455040" cy="272160"/>
+            <a:ext cx="454680" cy="271800"/>
           </a:xfrm>
           <a:prstGeom prst="rect">
             <a:avLst/>
@@ -5805,7 +5805,7 @@
               </a:rPr>
               <a:t>2</a:t>
             </a:r>
-            <a:endParaRPr b="0" lang="fr-FR" sz="900" strike="noStrike" u="none">
+            <a:endParaRPr b="0" lang="en-US" sz="900" strike="noStrike" u="none">
               <a:solidFill>
                 <a:srgbClr val="000000"/>
               </a:solidFill>
@@ -5818,14 +5818,14 @@
       </p:sp>
       <p:sp>
         <p:nvSpPr>
-          <p:cNvPr id="84" name=""/>
+          <p:cNvPr id="85" name=""/>
           <p:cNvSpPr/>
           <p:nvPr/>
         </p:nvSpPr>
         <p:spPr>
           <a:xfrm>
             <a:off x="540000" y="1800000"/>
-            <a:ext cx="10978560" cy="4604760"/>
+            <a:ext cx="10978200" cy="4604760"/>
           </a:xfrm>
           <a:prstGeom prst="rect">
             <a:avLst/>
@@ -5890,7 +5890,7 @@
               </a:rPr>
               <a:t> </a:t>
             </a:r>
-            <a:endParaRPr b="0" lang="fr-FR" sz="2400" strike="noStrike" u="none">
+            <a:endParaRPr b="0" lang="en-US" sz="2400" strike="noStrike" u="none">
               <a:solidFill>
                 <a:srgbClr val="000000"/>
               </a:solidFill>
@@ -5937,7 +5937,7 @@
               </a:rPr>
               <a:t>: Minimize the loss function (e.g., Mean Squared Error, Cross-Entropy).</a:t>
             </a:r>
-            <a:endParaRPr b="0" lang="fr-FR" sz="2400" strike="noStrike" u="none">
+            <a:endParaRPr b="0" lang="en-US" sz="2400" strike="noStrike" u="none">
               <a:solidFill>
                 <a:srgbClr val="000000"/>
               </a:solidFill>
@@ -5972,7 +5972,7 @@
               </a:rPr>
               <a:t>Loss Function: Measures the difference between predicted and actual outputs.</a:t>
             </a:r>
-            <a:endParaRPr b="0" lang="fr-FR" sz="2400" strike="noStrike" u="none">
+            <a:endParaRPr b="0" lang="en-US" sz="2400" strike="noStrike" u="none">
               <a:solidFill>
                 <a:srgbClr val="000000"/>
               </a:solidFill>
@@ -6019,7 +6019,7 @@
               </a:rPr>
               <a:t>:</a:t>
             </a:r>
-            <a:endParaRPr b="0" lang="fr-FR" sz="2400" strike="noStrike" u="none">
+            <a:endParaRPr b="0" lang="en-US" sz="2400" strike="noStrike" u="none">
               <a:solidFill>
                 <a:srgbClr val="000000"/>
               </a:solidFill>
@@ -6054,7 +6054,7 @@
               </a:rPr>
               <a:t>Forward Pass: Compute predictions for a batch of training data.</a:t>
             </a:r>
-            <a:endParaRPr b="0" lang="fr-FR" sz="2400" strike="noStrike" u="none">
+            <a:endParaRPr b="0" lang="en-US" sz="2400" strike="noStrike" u="none">
               <a:solidFill>
                 <a:srgbClr val="000000"/>
               </a:solidFill>
@@ -6089,7 +6089,7 @@
               </a:rPr>
               <a:t>Loss Calculation: Evaluate how far predictions are from true values.</a:t>
             </a:r>
-            <a:endParaRPr b="0" lang="fr-FR" sz="2400" strike="noStrike" u="none">
+            <a:endParaRPr b="0" lang="en-US" sz="2400" strike="noStrike" u="none">
               <a:solidFill>
                 <a:srgbClr val="000000"/>
               </a:solidFill>
@@ -6124,7 +6124,7 @@
               </a:rPr>
               <a:t>Backpropagation: Compute gradients of the loss with respect to weights.</a:t>
             </a:r>
-            <a:endParaRPr b="0" lang="fr-FR" sz="2400" strike="noStrike" u="none">
+            <a:endParaRPr b="0" lang="en-US" sz="2400" strike="noStrike" u="none">
               <a:solidFill>
                 <a:srgbClr val="000000"/>
               </a:solidFill>
@@ -6159,7 +6159,7 @@
               </a:rPr>
               <a:t>Optimization: Update weights using an optimizer (e.g., Adam, SGD).</a:t>
             </a:r>
-            <a:endParaRPr b="0" lang="fr-FR" sz="2400" strike="noStrike" u="none">
+            <a:endParaRPr b="0" lang="en-US" sz="2400" strike="noStrike" u="none">
               <a:solidFill>
                 <a:srgbClr val="000000"/>
               </a:solidFill>
@@ -6177,7 +6177,7 @@
                 <a:tab algn="l" pos="0"/>
               </a:tabLst>
             </a:pPr>
-            <a:endParaRPr b="0" lang="fr-FR" sz="2400" strike="noStrike" u="none">
+            <a:endParaRPr b="0" lang="en-US" sz="2400" strike="noStrike" u="none">
               <a:solidFill>
                 <a:srgbClr val="000000"/>
               </a:solidFill>
@@ -6220,14 +6220,14 @@
       </p:grpSpPr>
       <p:sp>
         <p:nvSpPr>
-          <p:cNvPr id="85" name="Text 40"/>
+          <p:cNvPr id="86" name="Text 40"/>
           <p:cNvSpPr/>
           <p:nvPr/>
         </p:nvSpPr>
         <p:spPr>
           <a:xfrm>
             <a:off x="548640" y="383760"/>
-            <a:ext cx="9141840" cy="290520"/>
+            <a:ext cx="9141480" cy="290160"/>
           </a:xfrm>
           <a:prstGeom prst="rect">
             <a:avLst/>
@@ -6273,7 +6273,7 @@
               </a:rPr>
               <a:t>General AI Methodology</a:t>
             </a:r>
-            <a:endParaRPr b="0" lang="fr-FR" sz="1200" strike="noStrike" u="none">
+            <a:endParaRPr b="0" lang="en-US" sz="1200" strike="noStrike" u="none">
               <a:solidFill>
                 <a:srgbClr val="000000"/>
               </a:solidFill>
@@ -6286,14 +6286,14 @@
       </p:sp>
       <p:sp>
         <p:nvSpPr>
-          <p:cNvPr id="86" name="Text 41"/>
+          <p:cNvPr id="87" name="Text 41"/>
           <p:cNvSpPr/>
           <p:nvPr/>
         </p:nvSpPr>
         <p:spPr>
           <a:xfrm>
             <a:off x="548640" y="658080"/>
-            <a:ext cx="11062080" cy="820800"/>
+            <a:ext cx="11061720" cy="820440"/>
           </a:xfrm>
           <a:prstGeom prst="rect">
             <a:avLst/>
@@ -6339,7 +6339,7 @@
               </a:rPr>
               <a:t>General AI Methodology</a:t>
             </a:r>
-            <a:endParaRPr b="0" lang="fr-FR" sz="3000" strike="noStrike" u="none">
+            <a:endParaRPr b="0" lang="en-US" sz="3000" strike="noStrike" u="none">
               <a:solidFill>
                 <a:srgbClr val="000000"/>
               </a:solidFill>
@@ -6352,14 +6352,14 @@
       </p:sp>
       <p:sp>
         <p:nvSpPr>
-          <p:cNvPr id="87" name="Text 42"/>
+          <p:cNvPr id="88" name="Text 42"/>
           <p:cNvSpPr/>
           <p:nvPr/>
         </p:nvSpPr>
         <p:spPr>
           <a:xfrm>
             <a:off x="11185920" y="6446160"/>
-            <a:ext cx="455040" cy="272160"/>
+            <a:ext cx="454680" cy="271800"/>
           </a:xfrm>
           <a:prstGeom prst="rect">
             <a:avLst/>
@@ -6400,7 +6400,7 @@
               </a:rPr>
               <a:t>2</a:t>
             </a:r>
-            <a:endParaRPr b="0" lang="fr-FR" sz="900" strike="noStrike" u="none">
+            <a:endParaRPr b="0" lang="en-US" sz="900" strike="noStrike" u="none">
               <a:solidFill>
                 <a:srgbClr val="000000"/>
               </a:solidFill>
@@ -6413,14 +6413,14 @@
       </p:sp>
       <p:sp>
         <p:nvSpPr>
-          <p:cNvPr id="88" name=""/>
+          <p:cNvPr id="89" name=""/>
           <p:cNvSpPr/>
           <p:nvPr/>
         </p:nvSpPr>
         <p:spPr>
           <a:xfrm>
             <a:off x="540000" y="1799640"/>
-            <a:ext cx="10978560" cy="2775960"/>
+            <a:ext cx="10978200" cy="2775960"/>
           </a:xfrm>
           <a:prstGeom prst="rect">
             <a:avLst/>
@@ -6471,7 +6471,7 @@
               </a:rPr>
               <a:t>Training: The Core Process</a:t>
             </a:r>
-            <a:endParaRPr b="0" lang="fr-FR" sz="2400" strike="noStrike" u="none">
+            <a:endParaRPr b="0" lang="en-US" sz="2400" strike="noStrike" u="none">
               <a:solidFill>
                 <a:srgbClr val="000000"/>
               </a:solidFill>
@@ -6489,7 +6489,7 @@
                 <a:tab algn="l" pos="0"/>
               </a:tabLst>
             </a:pPr>
-            <a:endParaRPr b="0" lang="fr-FR" sz="2400" strike="noStrike" u="none">
+            <a:endParaRPr b="0" lang="en-US" sz="2400" strike="noStrike" u="none">
               <a:solidFill>
                 <a:srgbClr val="000000"/>
               </a:solidFill>
@@ -6524,7 +6524,7 @@
               </a:rPr>
               <a:t>Key Factors for Success:</a:t>
             </a:r>
-            <a:endParaRPr b="0" lang="fr-FR" sz="2400" strike="noStrike" u="none">
+            <a:endParaRPr b="0" lang="en-US" sz="2400" strike="noStrike" u="none">
               <a:solidFill>
                 <a:srgbClr val="000000"/>
               </a:solidFill>
@@ -6559,7 +6559,7 @@
               </a:rPr>
               <a:t>Data Quality: High-fidelity simulations with diverse parameters.</a:t>
             </a:r>
-            <a:endParaRPr b="0" lang="fr-FR" sz="2400" strike="noStrike" u="none">
+            <a:endParaRPr b="0" lang="en-US" sz="2400" strike="noStrike" u="none">
               <a:solidFill>
                 <a:srgbClr val="000000"/>
               </a:solidFill>
@@ -6594,7 +6594,7 @@
               </a:rPr>
               <a:t>Model Architecture: Match complexity to the problem (e.g., CNNs for images, Transformers for sequences).</a:t>
             </a:r>
-            <a:endParaRPr b="0" lang="fr-FR" sz="2400" strike="noStrike" u="none">
+            <a:endParaRPr b="0" lang="en-US" sz="2400" strike="noStrike" u="none">
               <a:solidFill>
                 <a:srgbClr val="000000"/>
               </a:solidFill>
@@ -6629,7 +6629,7 @@
               </a:rPr>
               <a:t>Hyperparameters: Learning rate, batch size, number of epochs.</a:t>
             </a:r>
-            <a:endParaRPr b="0" lang="fr-FR" sz="2400" strike="noStrike" u="none">
+            <a:endParaRPr b="0" lang="en-US" sz="2400" strike="noStrike" u="none">
               <a:solidFill>
                 <a:srgbClr val="000000"/>
               </a:solidFill>
@@ -6672,14 +6672,14 @@
       </p:grpSpPr>
       <p:sp>
         <p:nvSpPr>
-          <p:cNvPr id="89" name="Text 46"/>
+          <p:cNvPr id="90" name="Text 46"/>
           <p:cNvSpPr/>
           <p:nvPr/>
         </p:nvSpPr>
         <p:spPr>
           <a:xfrm>
             <a:off x="548640" y="383760"/>
-            <a:ext cx="9141840" cy="290520"/>
+            <a:ext cx="9141480" cy="290160"/>
           </a:xfrm>
           <a:prstGeom prst="rect">
             <a:avLst/>
@@ -6725,7 +6725,7 @@
               </a:rPr>
               <a:t>Lessons and praticals</a:t>
             </a:r>
-            <a:endParaRPr b="0" lang="fr-FR" sz="1200" strike="noStrike" u="none">
+            <a:endParaRPr b="0" lang="en-US" sz="1200" strike="noStrike" u="none">
               <a:solidFill>
                 <a:srgbClr val="000000"/>
               </a:solidFill>
@@ -6738,14 +6738,14 @@
       </p:sp>
       <p:sp>
         <p:nvSpPr>
-          <p:cNvPr id="90" name="Text 47"/>
+          <p:cNvPr id="91" name="Text 47"/>
           <p:cNvSpPr/>
           <p:nvPr/>
         </p:nvSpPr>
         <p:spPr>
           <a:xfrm>
             <a:off x="548640" y="658080"/>
-            <a:ext cx="11062080" cy="820800"/>
+            <a:ext cx="11061720" cy="820440"/>
           </a:xfrm>
           <a:prstGeom prst="rect">
             <a:avLst/>
@@ -6791,7 +6791,7 @@
               </a:rPr>
               <a:t>What You Will Learn and Practice</a:t>
             </a:r>
-            <a:endParaRPr b="0" lang="fr-FR" sz="3000" strike="noStrike" u="none">
+            <a:endParaRPr b="0" lang="en-US" sz="3000" strike="noStrike" u="none">
               <a:solidFill>
                 <a:srgbClr val="000000"/>
               </a:solidFill>
@@ -6804,14 +6804,14 @@
       </p:sp>
       <p:sp>
         <p:nvSpPr>
-          <p:cNvPr id="91" name="Text 48"/>
+          <p:cNvPr id="92" name="Text 48"/>
           <p:cNvSpPr/>
           <p:nvPr/>
         </p:nvSpPr>
         <p:spPr>
           <a:xfrm>
             <a:off x="11185920" y="6446160"/>
-            <a:ext cx="455040" cy="272160"/>
+            <a:ext cx="454680" cy="271800"/>
           </a:xfrm>
           <a:prstGeom prst="rect">
             <a:avLst/>
@@ -6852,7 +6852,7 @@
               </a:rPr>
               <a:t>2</a:t>
             </a:r>
-            <a:endParaRPr b="0" lang="fr-FR" sz="900" strike="noStrike" u="none">
+            <a:endParaRPr b="0" lang="en-US" sz="900" strike="noStrike" u="none">
               <a:solidFill>
                 <a:srgbClr val="000000"/>
               </a:solidFill>
@@ -6865,14 +6865,14 @@
       </p:sp>
       <p:sp>
         <p:nvSpPr>
-          <p:cNvPr id="92" name=""/>
+          <p:cNvPr id="93" name=""/>
           <p:cNvSpPr/>
           <p:nvPr/>
         </p:nvSpPr>
         <p:spPr>
           <a:xfrm>
             <a:off x="540000" y="1799640"/>
-            <a:ext cx="10978560" cy="4303080"/>
+            <a:ext cx="10978200" cy="4303080"/>
           </a:xfrm>
           <a:prstGeom prst="rect">
             <a:avLst/>
@@ -6923,7 +6923,7 @@
               </a:rPr>
               <a:t>Hands-on skills</a:t>
             </a:r>
-            <a:endParaRPr b="0" lang="fr-FR" sz="2400" strike="noStrike" u="none">
+            <a:endParaRPr b="0" lang="en-US" sz="2400" strike="noStrike" u="none">
               <a:solidFill>
                 <a:srgbClr val="000000"/>
               </a:solidFill>
@@ -6941,7 +6941,7 @@
                 <a:tab algn="l" pos="0"/>
               </a:tabLst>
             </a:pPr>
-            <a:endParaRPr b="0" lang="fr-FR" sz="1000" strike="noStrike" u="none">
+            <a:endParaRPr b="0" lang="en-US" sz="1000" strike="noStrike" u="none">
               <a:solidFill>
                 <a:srgbClr val="000000"/>
               </a:solidFill>
@@ -6982,7 +6982,7 @@
               </a:rPr>
               <a:t>Setting Up Simulations:</a:t>
             </a:r>
-            <a:endParaRPr b="0" lang="fr-FR" sz="2400" strike="noStrike" u="none">
+            <a:endParaRPr b="0" lang="en-US" sz="2400" strike="noStrike" u="none">
               <a:solidFill>
                 <a:srgbClr val="000000"/>
               </a:solidFill>
@@ -7017,7 +7017,7 @@
               </a:rPr>
               <a:t>Configure beamlines/instruments in McStas (neutrons) and McXtrace (X-rays).</a:t>
             </a:r>
-            <a:endParaRPr b="0" lang="fr-FR" sz="2400" strike="noStrike" u="none">
+            <a:endParaRPr b="0" lang="en-US" sz="2400" strike="noStrike" u="none">
               <a:solidFill>
                 <a:srgbClr val="000000"/>
               </a:solidFill>
@@ -7067,7 +7067,7 @@
               </a:rPr>
               <a:t> </a:t>
             </a:r>
-            <a:endParaRPr b="0" lang="fr-FR" sz="2400" strike="noStrike" u="none">
+            <a:endParaRPr b="0" lang="en-US" sz="2400" strike="noStrike" u="none">
               <a:solidFill>
                 <a:srgbClr val="000000"/>
               </a:solidFill>
@@ -7102,7 +7102,7 @@
               </a:rPr>
               <a:t>Characterizing Models:</a:t>
             </a:r>
-            <a:endParaRPr b="0" lang="fr-FR" sz="2400" strike="noStrike" u="none">
+            <a:endParaRPr b="0" lang="en-US" sz="2400" strike="noStrike" u="none">
               <a:solidFill>
                 <a:srgbClr val="000000"/>
               </a:solidFill>
@@ -7137,7 +7137,7 @@
               </a:rPr>
               <a:t>Check geometry (e.g., detector positions, slit sizes).</a:t>
             </a:r>
-            <a:endParaRPr b="0" lang="fr-FR" sz="2400" strike="noStrike" u="none">
+            <a:endParaRPr b="0" lang="en-US" sz="2400" strike="noStrike" u="none">
               <a:solidFill>
                 <a:srgbClr val="000000"/>
               </a:solidFill>
@@ -7172,7 +7172,7 @@
               </a:rPr>
               <a:t>Extract parameters (e.g., resolution, flux) and results (e.g., spectra, diffraction patterns).</a:t>
             </a:r>
-            <a:endParaRPr b="0" lang="fr-FR" sz="2400" strike="noStrike" u="none">
+            <a:endParaRPr b="0" lang="en-US" sz="2400" strike="noStrike" u="none">
               <a:solidFill>
                 <a:srgbClr val="000000"/>
               </a:solidFill>
@@ -7215,14 +7215,14 @@
       </p:grpSpPr>
       <p:sp>
         <p:nvSpPr>
-          <p:cNvPr id="93" name="Text 43"/>
+          <p:cNvPr id="94" name="Text 43"/>
           <p:cNvSpPr/>
           <p:nvPr/>
         </p:nvSpPr>
         <p:spPr>
           <a:xfrm>
             <a:off x="548640" y="383760"/>
-            <a:ext cx="9141840" cy="290520"/>
+            <a:ext cx="9141480" cy="290160"/>
           </a:xfrm>
           <a:prstGeom prst="rect">
             <a:avLst/>
@@ -7268,7 +7268,7 @@
               </a:rPr>
               <a:t>Lessons and praticals</a:t>
             </a:r>
-            <a:endParaRPr b="0" lang="fr-FR" sz="1200" strike="noStrike" u="none">
+            <a:endParaRPr b="0" lang="en-US" sz="1200" strike="noStrike" u="none">
               <a:solidFill>
                 <a:srgbClr val="000000"/>
               </a:solidFill>
@@ -7281,14 +7281,14 @@
       </p:sp>
       <p:sp>
         <p:nvSpPr>
-          <p:cNvPr id="94" name="Text 44"/>
+          <p:cNvPr id="95" name="Text 44"/>
           <p:cNvSpPr/>
           <p:nvPr/>
         </p:nvSpPr>
         <p:spPr>
           <a:xfrm>
             <a:off x="548640" y="658080"/>
-            <a:ext cx="11062080" cy="820800"/>
+            <a:ext cx="11061720" cy="820440"/>
           </a:xfrm>
           <a:prstGeom prst="rect">
             <a:avLst/>
@@ -7334,7 +7334,7 @@
               </a:rPr>
               <a:t>What You Will Learn and Practice</a:t>
             </a:r>
-            <a:endParaRPr b="0" lang="fr-FR" sz="3000" strike="noStrike" u="none">
+            <a:endParaRPr b="0" lang="en-US" sz="3000" strike="noStrike" u="none">
               <a:solidFill>
                 <a:srgbClr val="000000"/>
               </a:solidFill>
@@ -7347,14 +7347,14 @@
       </p:sp>
       <p:sp>
         <p:nvSpPr>
-          <p:cNvPr id="95" name="Text 45"/>
+          <p:cNvPr id="96" name="Text 45"/>
           <p:cNvSpPr/>
           <p:nvPr/>
         </p:nvSpPr>
         <p:spPr>
           <a:xfrm>
             <a:off x="11185920" y="6446160"/>
-            <a:ext cx="455040" cy="272160"/>
+            <a:ext cx="454680" cy="271800"/>
           </a:xfrm>
           <a:prstGeom prst="rect">
             <a:avLst/>
@@ -7395,7 +7395,7 @@
               </a:rPr>
               <a:t>2</a:t>
             </a:r>
-            <a:endParaRPr b="0" lang="fr-FR" sz="900" strike="noStrike" u="none">
+            <a:endParaRPr b="0" lang="en-US" sz="900" strike="noStrike" u="none">
               <a:solidFill>
                 <a:srgbClr val="000000"/>
               </a:solidFill>
@@ -7408,14 +7408,14 @@
       </p:sp>
       <p:sp>
         <p:nvSpPr>
-          <p:cNvPr id="96" name=""/>
+          <p:cNvPr id="97" name=""/>
           <p:cNvSpPr/>
           <p:nvPr/>
         </p:nvSpPr>
         <p:spPr>
           <a:xfrm>
             <a:off x="540000" y="1799640"/>
-            <a:ext cx="10978560" cy="4336200"/>
+            <a:ext cx="10978200" cy="4336200"/>
           </a:xfrm>
           <a:prstGeom prst="rect">
             <a:avLst/>
@@ -7466,7 +7466,7 @@
               </a:rPr>
               <a:t>Hands-on skills</a:t>
             </a:r>
-            <a:endParaRPr b="0" lang="fr-FR" sz="2400" strike="noStrike" u="none">
+            <a:endParaRPr b="0" lang="en-US" sz="2400" strike="noStrike" u="none">
               <a:solidFill>
                 <a:srgbClr val="000000"/>
               </a:solidFill>
@@ -7484,7 +7484,7 @@
                 <a:tab algn="l" pos="0"/>
               </a:tabLst>
             </a:pPr>
-            <a:endParaRPr b="0" lang="fr-FR" sz="1000" strike="noStrike" u="none">
+            <a:endParaRPr b="0" lang="en-US" sz="1000" strike="noStrike" u="none">
               <a:solidFill>
                 <a:srgbClr val="000000"/>
               </a:solidFill>
@@ -7525,7 +7525,7 @@
               </a:rPr>
               <a:t>Generating Datasets:</a:t>
             </a:r>
-            <a:endParaRPr b="0" lang="fr-FR" sz="2400" strike="noStrike" u="none">
+            <a:endParaRPr b="0" lang="en-US" sz="2400" strike="noStrike" u="none">
               <a:solidFill>
                 <a:srgbClr val="000000"/>
               </a:solidFill>
@@ -7590,7 +7590,7 @@
               </a:rPr>
               <a:t> ranges (e.g., vary samples).</a:t>
             </a:r>
-            <a:endParaRPr b="0" lang="fr-FR" sz="2400" strike="noStrike" u="none">
+            <a:endParaRPr b="0" lang="en-US" sz="2400" strike="noStrike" u="none">
               <a:solidFill>
                 <a:srgbClr val="000000"/>
               </a:solidFill>
@@ -7670,7 +7670,7 @@
               </a:rPr>
               <a:t> </a:t>
             </a:r>
-            <a:endParaRPr b="0" lang="fr-FR" sz="1000" strike="noStrike" u="none">
+            <a:endParaRPr b="0" lang="en-US" sz="1000" strike="noStrike" u="none">
               <a:solidFill>
                 <a:srgbClr val="000000"/>
               </a:solidFill>
@@ -7705,7 +7705,7 @@
               </a:rPr>
               <a:t>Apply AI :</a:t>
             </a:r>
-            <a:endParaRPr b="0" lang="fr-FR" sz="2400" strike="noStrike" u="none">
+            <a:endParaRPr b="0" lang="en-US" sz="2400" strike="noStrike" u="none">
               <a:solidFill>
                 <a:srgbClr val="000000"/>
               </a:solidFill>
@@ -7770,7 +7770,7 @@
               </a:rPr>
               <a:t> faster.</a:t>
             </a:r>
-            <a:endParaRPr b="0" lang="fr-FR" sz="2400" strike="noStrike" u="none">
+            <a:endParaRPr b="0" lang="en-US" sz="2400" strike="noStrike" u="none">
               <a:solidFill>
                 <a:srgbClr val="000000"/>
               </a:solidFill>
@@ -7847,7 +7847,7 @@
               </a:rPr>
               <a:t> measurements.</a:t>
             </a:r>
-            <a:endParaRPr b="0" lang="fr-FR" sz="2400" strike="noStrike" u="none">
+            <a:endParaRPr b="0" lang="en-US" sz="2400" strike="noStrike" u="none">
               <a:solidFill>
                 <a:srgbClr val="000000"/>
               </a:solidFill>
@@ -7900,7 +7900,7 @@
               </a:rPr>
               <a:t>parameters.</a:t>
             </a:r>
-            <a:endParaRPr b="0" lang="fr-FR" sz="2400" strike="noStrike" u="none">
+            <a:endParaRPr b="0" lang="en-US" sz="2400" strike="noStrike" u="none">
               <a:solidFill>
                 <a:srgbClr val="000000"/>
               </a:solidFill>
@@ -7943,14 +7943,14 @@
       </p:grpSpPr>
       <p:sp>
         <p:nvSpPr>
-          <p:cNvPr id="97" name="Text 49"/>
+          <p:cNvPr id="98" name="Text 49"/>
           <p:cNvSpPr/>
           <p:nvPr/>
         </p:nvSpPr>
         <p:spPr>
           <a:xfrm>
             <a:off x="548640" y="383760"/>
-            <a:ext cx="9141840" cy="290520"/>
+            <a:ext cx="9141480" cy="290160"/>
           </a:xfrm>
           <a:prstGeom prst="rect">
             <a:avLst/>
@@ -7996,7 +7996,7 @@
               </a:rPr>
               <a:t>Resources</a:t>
             </a:r>
-            <a:endParaRPr b="0" lang="fr-FR" sz="1200" strike="noStrike" u="none">
+            <a:endParaRPr b="0" lang="en-US" sz="1200" strike="noStrike" u="none">
               <a:solidFill>
                 <a:srgbClr val="000000"/>
               </a:solidFill>
@@ -8009,14 +8009,14 @@
       </p:sp>
       <p:sp>
         <p:nvSpPr>
-          <p:cNvPr id="98" name="Text 50"/>
+          <p:cNvPr id="99" name="Text 50"/>
           <p:cNvSpPr/>
           <p:nvPr/>
         </p:nvSpPr>
         <p:spPr>
           <a:xfrm>
             <a:off x="548640" y="658080"/>
-            <a:ext cx="11062080" cy="820800"/>
+            <a:ext cx="11061720" cy="820440"/>
           </a:xfrm>
           <a:prstGeom prst="rect">
             <a:avLst/>
@@ -8062,7 +8062,7 @@
               </a:rPr>
               <a:t>What You Will Use</a:t>
             </a:r>
-            <a:endParaRPr b="0" lang="fr-FR" sz="3000" strike="noStrike" u="none">
+            <a:endParaRPr b="0" lang="en-US" sz="3000" strike="noStrike" u="none">
               <a:solidFill>
                 <a:srgbClr val="000000"/>
               </a:solidFill>
@@ -8075,14 +8075,14 @@
       </p:sp>
       <p:sp>
         <p:nvSpPr>
-          <p:cNvPr id="99" name="Text 51"/>
+          <p:cNvPr id="100" name="Text 51"/>
           <p:cNvSpPr/>
           <p:nvPr/>
         </p:nvSpPr>
         <p:spPr>
           <a:xfrm>
             <a:off x="11185920" y="6446160"/>
-            <a:ext cx="455040" cy="272160"/>
+            <a:ext cx="454680" cy="271800"/>
           </a:xfrm>
           <a:prstGeom prst="rect">
             <a:avLst/>
@@ -8123,7 +8123,7 @@
               </a:rPr>
               <a:t>2</a:t>
             </a:r>
-            <a:endParaRPr b="0" lang="fr-FR" sz="900" strike="noStrike" u="none">
+            <a:endParaRPr b="0" lang="en-US" sz="900" strike="noStrike" u="none">
               <a:solidFill>
                 <a:srgbClr val="000000"/>
               </a:solidFill>
@@ -8136,14 +8136,14 @@
       </p:sp>
       <p:sp>
         <p:nvSpPr>
-          <p:cNvPr id="100" name=""/>
+          <p:cNvPr id="101" name=""/>
           <p:cNvSpPr/>
           <p:nvPr/>
         </p:nvSpPr>
         <p:spPr>
           <a:xfrm>
             <a:off x="540000" y="1799640"/>
-            <a:ext cx="10978560" cy="2713320"/>
+            <a:ext cx="10978200" cy="2713320"/>
           </a:xfrm>
           <a:prstGeom prst="rect">
             <a:avLst/>
@@ -8194,7 +8194,7 @@
               </a:rPr>
               <a:t>Your Laptop</a:t>
             </a:r>
-            <a:endParaRPr b="0" lang="fr-FR" sz="2400" strike="noStrike" u="none">
+            <a:endParaRPr b="0" lang="en-US" sz="2400" strike="noStrike" u="none">
               <a:solidFill>
                 <a:srgbClr val="000000"/>
               </a:solidFill>
@@ -8234,7 +8234,7 @@
               </a:rPr>
               <a:t>High Performance Computing (MesoNET)</a:t>
             </a:r>
-            <a:endParaRPr b="0" lang="fr-FR" sz="2400" strike="noStrike" u="none">
+            <a:endParaRPr b="0" lang="en-US" sz="2400" strike="noStrike" u="none">
               <a:solidFill>
                 <a:srgbClr val="000000"/>
               </a:solidFill>
@@ -8297,7 +8297,7 @@
               </a:rPr>
               <a:t>)</a:t>
             </a:r>
-            <a:endParaRPr b="0" lang="fr-FR" sz="2400" strike="noStrike" u="none">
+            <a:endParaRPr b="0" lang="en-US" sz="2400" strike="noStrike" u="none">
               <a:solidFill>
                 <a:srgbClr val="000000"/>
               </a:solidFill>
@@ -8337,7 +8337,7 @@
               </a:rPr>
               <a:t>Your Brain</a:t>
             </a:r>
-            <a:endParaRPr b="0" lang="fr-FR" sz="2400" strike="noStrike" u="none">
+            <a:endParaRPr b="0" lang="en-US" sz="2400" strike="noStrike" u="none">
               <a:solidFill>
                 <a:srgbClr val="000000"/>
               </a:solidFill>
@@ -8355,7 +8355,7 @@
                 <a:tab algn="l" pos="0"/>
               </a:tabLst>
             </a:pPr>
-            <a:endParaRPr b="0" lang="fr-FR" sz="1000" strike="noStrike" u="none">
+            <a:endParaRPr b="0" lang="en-US" sz="1000" strike="noStrike" u="none">
               <a:solidFill>
                 <a:srgbClr val="000000"/>
               </a:solidFill>
@@ -8405,14 +8405,14 @@
       </p:grpSpPr>
       <p:sp>
         <p:nvSpPr>
-          <p:cNvPr id="101" name="Shape 0"/>
+          <p:cNvPr id="102" name="Shape 0"/>
           <p:cNvSpPr/>
           <p:nvPr/>
         </p:nvSpPr>
         <p:spPr>
           <a:xfrm>
             <a:off x="9410040" y="-1457640"/>
-            <a:ext cx="4752720" cy="4752720"/>
+            <a:ext cx="4752360" cy="4752360"/>
           </a:xfrm>
           <a:prstGeom prst="ellipse">
             <a:avLst/>
@@ -8453,14 +8453,14 @@
       </p:sp>
       <p:sp>
         <p:nvSpPr>
-          <p:cNvPr id="102" name="Shape 1"/>
+          <p:cNvPr id="103" name="Shape 1"/>
           <p:cNvSpPr/>
           <p:nvPr/>
         </p:nvSpPr>
         <p:spPr>
           <a:xfrm>
             <a:off x="-1828800" y="4206240"/>
-            <a:ext cx="4204080" cy="4204080"/>
+            <a:ext cx="4203720" cy="4203720"/>
           </a:xfrm>
           <a:prstGeom prst="ellipse">
             <a:avLst/>
@@ -8501,14 +8501,14 @@
       </p:sp>
       <p:sp>
         <p:nvSpPr>
-          <p:cNvPr id="103" name="Text 2"/>
+          <p:cNvPr id="104" name="Text 2"/>
           <p:cNvSpPr/>
           <p:nvPr/>
         </p:nvSpPr>
         <p:spPr>
           <a:xfrm>
             <a:off x="822960" y="2286000"/>
-            <a:ext cx="9141840" cy="1095120"/>
+            <a:ext cx="9141480" cy="1094760"/>
           </a:xfrm>
           <a:prstGeom prst="rect">
             <a:avLst/>
@@ -8549,7 +8549,7 @@
               </a:rPr>
               <a:t>Thank you</a:t>
             </a:r>
-            <a:endParaRPr b="0" lang="fr-FR" sz="4800" strike="noStrike" u="none">
+            <a:endParaRPr b="0" lang="en-US" sz="4800" strike="noStrike" u="none">
               <a:solidFill>
                 <a:srgbClr val="ffffff"/>
               </a:solidFill>
@@ -8562,14 +8562,14 @@
       </p:sp>
       <p:sp>
         <p:nvSpPr>
-          <p:cNvPr id="104" name="Text 3"/>
+          <p:cNvPr id="105" name="Text 3"/>
           <p:cNvSpPr/>
           <p:nvPr/>
         </p:nvSpPr>
         <p:spPr>
           <a:xfrm>
             <a:off x="822960" y="3246120"/>
-            <a:ext cx="9141840" cy="637920"/>
+            <a:ext cx="9141480" cy="637560"/>
           </a:xfrm>
           <a:prstGeom prst="rect">
             <a:avLst/>
@@ -8610,7 +8610,7 @@
               </a:rPr>
               <a:t>Questions?</a:t>
             </a:r>
-            <a:endParaRPr b="0" lang="fr-FR" sz="2000" strike="noStrike" u="none">
+            <a:endParaRPr b="0" lang="en-US" sz="2000" strike="noStrike" u="none">
               <a:solidFill>
                 <a:srgbClr val="ffffff"/>
               </a:solidFill>
@@ -8623,14 +8623,14 @@
       </p:sp>
       <p:sp>
         <p:nvSpPr>
-          <p:cNvPr id="105" name="Shape 4"/>
+          <p:cNvPr id="106" name="Shape 4"/>
           <p:cNvSpPr/>
           <p:nvPr/>
         </p:nvSpPr>
         <p:spPr>
           <a:xfrm>
             <a:off x="822960" y="4297680"/>
-            <a:ext cx="1415160" cy="308880"/>
+            <a:ext cx="1414800" cy="308520"/>
           </a:xfrm>
           <a:prstGeom prst="roundRect">
             <a:avLst>
@@ -8673,14 +8673,14 @@
       </p:sp>
       <p:sp>
         <p:nvSpPr>
-          <p:cNvPr id="106" name="Text 5"/>
+          <p:cNvPr id="107" name="Text 5"/>
           <p:cNvSpPr/>
           <p:nvPr/>
         </p:nvSpPr>
         <p:spPr>
           <a:xfrm>
             <a:off x="822960" y="4297680"/>
-            <a:ext cx="1415160" cy="308880"/>
+            <a:ext cx="1414800" cy="308520"/>
           </a:xfrm>
           <a:prstGeom prst="rect">
             <a:avLst/>
@@ -8721,7 +8721,7 @@
               </a:rPr>
               <a:t>mcstas.org</a:t>
             </a:r>
-            <a:endParaRPr b="0" lang="fr-FR" sz="1100" strike="noStrike" u="none">
+            <a:endParaRPr b="0" lang="en-US" sz="1100" strike="noStrike" u="none">
               <a:solidFill>
                 <a:srgbClr val="ffffff"/>
               </a:solidFill>
@@ -8734,14 +8734,14 @@
       </p:sp>
       <p:sp>
         <p:nvSpPr>
-          <p:cNvPr id="107" name="Shape 6"/>
+          <p:cNvPr id="108" name="Shape 6"/>
           <p:cNvSpPr/>
           <p:nvPr/>
         </p:nvSpPr>
         <p:spPr>
           <a:xfrm>
             <a:off x="2377440" y="4297680"/>
-            <a:ext cx="1415160" cy="308880"/>
+            <a:ext cx="1414800" cy="308520"/>
           </a:xfrm>
           <a:prstGeom prst="roundRect">
             <a:avLst>
@@ -8784,14 +8784,14 @@
       </p:sp>
       <p:sp>
         <p:nvSpPr>
-          <p:cNvPr id="108" name="Text 7"/>
+          <p:cNvPr id="109" name="Text 7"/>
           <p:cNvSpPr/>
           <p:nvPr/>
         </p:nvSpPr>
         <p:spPr>
           <a:xfrm>
             <a:off x="2377440" y="4297680"/>
-            <a:ext cx="1415160" cy="308880"/>
+            <a:ext cx="1414800" cy="308520"/>
           </a:xfrm>
           <a:prstGeom prst="rect">
             <a:avLst/>
@@ -8832,7 +8832,7 @@
               </a:rPr>
               <a:t>mcxtrace.org</a:t>
             </a:r>
-            <a:endParaRPr b="0" lang="fr-FR" sz="1100" strike="noStrike" u="none">
+            <a:endParaRPr b="0" lang="en-US" sz="1100" strike="noStrike" u="none">
               <a:solidFill>
                 <a:srgbClr val="ffffff"/>
               </a:solidFill>
@@ -8845,7 +8845,7 @@
       </p:sp>
       <p:sp>
         <p:nvSpPr>
-          <p:cNvPr id="109" name="Shape 8"/>
+          <p:cNvPr id="110" name="Shape 8"/>
           <p:cNvSpPr/>
           <p:nvPr/>
         </p:nvSpPr>
@@ -8888,14 +8888,14 @@
       </p:sp>
       <p:sp>
         <p:nvSpPr>
-          <p:cNvPr id="110" name="Text 9"/>
+          <p:cNvPr id="111" name="Text 9"/>
           <p:cNvSpPr/>
           <p:nvPr/>
         </p:nvSpPr>
         <p:spPr>
           <a:xfrm>
             <a:off x="822960" y="5897880"/>
-            <a:ext cx="7313040" cy="317880"/>
+            <a:ext cx="7312680" cy="317520"/>
           </a:xfrm>
           <a:prstGeom prst="rect">
             <a:avLst/>
@@ -8936,7 +8936,7 @@
               </a:rPr>
               <a:t>Peter Willendrup   ·   pkwi@fysik.dtu.dk   ·   DTU Physics</a:t>
             </a:r>
-            <a:endParaRPr b="0" lang="fr-FR" sz="1250" strike="noStrike" u="none">
+            <a:endParaRPr b="0" lang="en-US" sz="1250" strike="noStrike" u="none">
               <a:solidFill>
                 <a:srgbClr val="ffffff"/>
               </a:solidFill>
@@ -8949,14 +8949,14 @@
       </p:sp>
       <p:sp>
         <p:nvSpPr>
-          <p:cNvPr id="111" name="Text 10"/>
+          <p:cNvPr id="112" name="Text 10"/>
           <p:cNvSpPr/>
           <p:nvPr/>
         </p:nvSpPr>
         <p:spPr>
           <a:xfrm>
             <a:off x="548640" y="6446520"/>
-            <a:ext cx="6398640" cy="272160"/>
+            <a:ext cx="6398280" cy="271800"/>
           </a:xfrm>
           <a:prstGeom prst="rect">
             <a:avLst/>
@@ -8997,7 +8997,7 @@
               </a:rPr>
               <a:t>{presentation title</a:t>
             </a:r>
-            <a:endParaRPr b="0" lang="fr-FR" sz="900" strike="noStrike" u="none">
+            <a:endParaRPr b="0" lang="en-US" sz="900" strike="noStrike" u="none">
               <a:solidFill>
                 <a:srgbClr val="ffffff"/>
               </a:solidFill>
@@ -9010,14 +9010,14 @@
       </p:sp>
       <p:sp>
         <p:nvSpPr>
-          <p:cNvPr id="112" name="Text 11"/>
+          <p:cNvPr id="113" name="Text 11"/>
           <p:cNvSpPr/>
           <p:nvPr/>
         </p:nvSpPr>
         <p:spPr>
           <a:xfrm>
             <a:off x="11185920" y="6446520"/>
-            <a:ext cx="455040" cy="272160"/>
+            <a:ext cx="454680" cy="271800"/>
           </a:xfrm>
           <a:prstGeom prst="rect">
             <a:avLst/>
@@ -9058,7 +9058,7 @@
               </a:rPr>
               <a:t>17</a:t>
             </a:r>
-            <a:endParaRPr b="0" lang="fr-FR" sz="900" strike="noStrike" u="none">
+            <a:endParaRPr b="0" lang="en-US" sz="900" strike="noStrike" u="none">
               <a:solidFill>
                 <a:srgbClr val="ffffff"/>
               </a:solidFill>
@@ -9071,14 +9071,14 @@
       </p:sp>
       <p:sp>
         <p:nvSpPr>
-          <p:cNvPr id="113" name="PartnerCard"/>
+          <p:cNvPr id="114" name="PartnerCard"/>
           <p:cNvSpPr/>
           <p:nvPr/>
         </p:nvSpPr>
         <p:spPr>
           <a:xfrm>
             <a:off x="6603840" y="4165560"/>
-            <a:ext cx="4950720" cy="1572480"/>
+            <a:ext cx="4950360" cy="1572120"/>
           </a:xfrm>
           <a:prstGeom prst="roundRect">
             <a:avLst>
@@ -9129,14 +9129,14 @@
       </p:sp>
       <p:sp>
         <p:nvSpPr>
-          <p:cNvPr id="114" name="PartnerLabel"/>
+          <p:cNvPr id="115" name="PartnerLabel"/>
           <p:cNvSpPr/>
           <p:nvPr/>
         </p:nvSpPr>
         <p:spPr>
           <a:xfrm>
             <a:off x="6921360" y="4368960"/>
-            <a:ext cx="4315680" cy="226440"/>
+            <a:ext cx="4315320" cy="226080"/>
           </a:xfrm>
           <a:prstGeom prst="rect">
             <a:avLst/>
@@ -9173,7 +9173,7 @@
               </a:rPr>
               <a:t>SUPPORTED BY</a:t>
             </a:r>
-            <a:endParaRPr b="0" lang="fr-FR" sz="1100" strike="noStrike" u="none">
+            <a:endParaRPr b="0" lang="en-US" sz="1100" strike="noStrike" u="none">
               <a:solidFill>
                 <a:srgbClr val="ffffff"/>
               </a:solidFill>
@@ -9186,7 +9186,7 @@
       </p:sp>
       <p:pic>
         <p:nvPicPr>
-          <p:cNvPr id="115" name="Picture 15" descr=""/>
+          <p:cNvPr id="116" name="Picture 15" descr=""/>
           <p:cNvPicPr/>
           <p:nvPr/>
         </p:nvPicPr>
@@ -9197,7 +9197,7 @@
         <p:spPr>
           <a:xfrm>
             <a:off x="6921360" y="4749840"/>
-            <a:ext cx="4315680" cy="638280"/>
+            <a:ext cx="4315320" cy="637920"/>
           </a:xfrm>
           <a:prstGeom prst="rect">
             <a:avLst/>
@@ -9210,7 +9210,7 @@
       </p:pic>
       <p:pic>
         <p:nvPicPr>
-          <p:cNvPr id="116" name="Copied Picture 17" descr=""/>
+          <p:cNvPr id="117" name="Copied Picture 17" descr=""/>
           <p:cNvPicPr/>
           <p:nvPr/>
         </p:nvPicPr>
@@ -9222,7 +9222,7 @@
         <p:spPr>
           <a:xfrm>
             <a:off x="10375920" y="355680"/>
-            <a:ext cx="1267920" cy="649440"/>
+            <a:ext cx="1267560" cy="649080"/>
           </a:xfrm>
           <a:prstGeom prst="rect">
             <a:avLst/>
@@ -9235,14 +9235,14 @@
       </p:pic>
       <p:sp>
         <p:nvSpPr>
-          <p:cNvPr id="117" name="LogoCard"/>
+          <p:cNvPr id="118" name="LogoCard"/>
           <p:cNvSpPr/>
           <p:nvPr/>
         </p:nvSpPr>
         <p:spPr>
           <a:xfrm>
             <a:off x="7375680" y="2105640"/>
-            <a:ext cx="3807720" cy="1496520"/>
+            <a:ext cx="3807360" cy="1496160"/>
           </a:xfrm>
           <a:prstGeom prst="roundRect">
             <a:avLst>
@@ -9293,35 +9293,35 @@
       </p:sp>
       <p:grpSp>
         <p:nvGrpSpPr>
-          <p:cNvPr id="118" name="Group 18"/>
+          <p:cNvPr id="119" name="Group 18"/>
           <p:cNvGrpSpPr/>
           <p:nvPr/>
         </p:nvGrpSpPr>
         <p:grpSpPr>
           <a:xfrm>
             <a:off x="7882560" y="2194200"/>
-            <a:ext cx="2794320" cy="1319400"/>
+            <a:ext cx="2793960" cy="1319040"/>
             <a:chOff x="7882560" y="2194200"/>
-            <a:chExt cx="2794320" cy="1319400"/>
+            <a:chExt cx="2793960" cy="1319040"/>
           </a:xfrm>
         </p:grpSpPr>
         <p:grpSp>
           <p:nvGrpSpPr>
-            <p:cNvPr id="119" name="Group 19"/>
+            <p:cNvPr id="120" name="Group 19"/>
             <p:cNvGrpSpPr/>
             <p:nvPr/>
           </p:nvGrpSpPr>
           <p:grpSpPr>
             <a:xfrm>
               <a:off x="9289440" y="2194200"/>
-              <a:ext cx="1387440" cy="1256400"/>
+              <a:ext cx="1387080" cy="1256040"/>
               <a:chOff x="9289440" y="2194200"/>
-              <a:chExt cx="1387440" cy="1256400"/>
+              <a:chExt cx="1387080" cy="1256040"/>
             </a:xfrm>
           </p:grpSpPr>
           <p:pic>
             <p:nvPicPr>
-              <p:cNvPr id="120" name="Picture 21" descr=""/>
+              <p:cNvPr id="121" name="Picture 21" descr=""/>
               <p:cNvPicPr/>
               <p:nvPr/>
             </p:nvPicPr>
@@ -9333,7 +9333,7 @@
             <p:spPr>
               <a:xfrm>
                 <a:off x="9339120" y="2194200"/>
-                <a:ext cx="1292400" cy="774000"/>
+                <a:ext cx="1292040" cy="773640"/>
               </a:xfrm>
               <a:prstGeom prst="rect">
                 <a:avLst/>
@@ -9346,7 +9346,7 @@
           </p:pic>
           <p:pic>
             <p:nvPicPr>
-              <p:cNvPr id="121" name="Picture 22" descr="Synchrotron SOLEIL"/>
+              <p:cNvPr id="122" name="Picture 22" descr="Synchrotron SOLEIL"/>
               <p:cNvPicPr/>
               <p:nvPr/>
             </p:nvPicPr>
@@ -9357,7 +9357,7 @@
             <p:spPr>
               <a:xfrm>
                 <a:off x="9289440" y="2922840"/>
-                <a:ext cx="961200" cy="463320"/>
+                <a:ext cx="960840" cy="462960"/>
               </a:xfrm>
               <a:prstGeom prst="rect">
                 <a:avLst/>
@@ -9370,7 +9370,7 @@
           </p:pic>
           <p:pic>
             <p:nvPicPr>
-              <p:cNvPr id="122" name="Picture 23" descr="DTU Physics"/>
+              <p:cNvPr id="123" name="Picture 23" descr="DTU Physics"/>
               <p:cNvPicPr/>
               <p:nvPr/>
             </p:nvPicPr>
@@ -9381,7 +9381,7 @@
             <p:spPr>
               <a:xfrm>
                 <a:off x="10325160" y="2931480"/>
-                <a:ext cx="351720" cy="519120"/>
+                <a:ext cx="351360" cy="518760"/>
               </a:xfrm>
               <a:prstGeom prst="rect">
                 <a:avLst/>
@@ -9395,7 +9395,7 @@
         </p:grpSp>
         <p:pic>
           <p:nvPicPr>
-            <p:cNvPr id="123" name="Picture 20" descr=""/>
+            <p:cNvPr id="124" name="Picture 20" descr=""/>
             <p:cNvPicPr/>
             <p:nvPr/>
           </p:nvPicPr>
@@ -9406,7 +9406,7 @@
           <p:spPr>
             <a:xfrm>
               <a:off x="7882560" y="2198880"/>
-              <a:ext cx="1292400" cy="1314720"/>
+              <a:ext cx="1292040" cy="1314360"/>
             </a:xfrm>
             <a:prstGeom prst="rect">
               <a:avLst/>
@@ -9464,7 +9464,7 @@
         <p:spPr>
           <a:xfrm>
             <a:off x="548640" y="384120"/>
-            <a:ext cx="9141840" cy="290520"/>
+            <a:ext cx="9141480" cy="290160"/>
           </a:xfrm>
           <a:prstGeom prst="rect">
             <a:avLst/>
@@ -9504,7 +9504,7 @@
               </a:rPr>
               <a:t>TARGET</a:t>
             </a:r>
-            <a:endParaRPr b="0" lang="fr-FR" sz="1200" strike="noStrike" u="none">
+            <a:endParaRPr b="0" lang="en-US" sz="1200" strike="noStrike" u="none">
               <a:solidFill>
                 <a:srgbClr val="000000"/>
               </a:solidFill>
@@ -9524,7 +9524,7 @@
         <p:spPr>
           <a:xfrm>
             <a:off x="548640" y="658440"/>
-            <a:ext cx="11062080" cy="820800"/>
+            <a:ext cx="11061720" cy="820440"/>
           </a:xfrm>
           <a:prstGeom prst="rect">
             <a:avLst/>
@@ -9570,7 +9570,7 @@
               </a:rPr>
               <a:t>This school’s objective</a:t>
             </a:r>
-            <a:endParaRPr b="0" lang="fr-FR" sz="3000" strike="noStrike" u="none">
+            <a:endParaRPr b="0" lang="en-US" sz="3000" strike="noStrike" u="none">
               <a:solidFill>
                 <a:srgbClr val="000000"/>
               </a:solidFill>
@@ -9590,7 +9590,7 @@
         <p:spPr>
           <a:xfrm>
             <a:off x="11185920" y="6446520"/>
-            <a:ext cx="455040" cy="272160"/>
+            <a:ext cx="454680" cy="271800"/>
           </a:xfrm>
           <a:prstGeom prst="rect">
             <a:avLst/>
@@ -9631,7 +9631,7 @@
               </a:rPr>
               <a:t>2</a:t>
             </a:r>
-            <a:endParaRPr b="0" lang="fr-FR" sz="900" strike="noStrike" u="none">
+            <a:endParaRPr b="0" lang="en-US" sz="900" strike="noStrike" u="none">
               <a:solidFill>
                 <a:srgbClr val="000000"/>
               </a:solidFill>
@@ -9651,7 +9651,7 @@
         <p:spPr>
           <a:xfrm>
             <a:off x="540000" y="1480680"/>
-            <a:ext cx="11518560" cy="3015000"/>
+            <a:ext cx="11518200" cy="3015000"/>
           </a:xfrm>
           <a:prstGeom prst="rect">
             <a:avLst/>
@@ -9694,7 +9694,7 @@
               </a:rPr>
               <a:t>Explore how AI can leverage simulated photon and neutron datasets to:</a:t>
             </a:r>
-            <a:endParaRPr b="0" lang="fr-FR" sz="2400" strike="noStrike" u="none">
+            <a:endParaRPr b="0" lang="en-US" sz="2400" strike="noStrike" u="none">
               <a:solidFill>
                 <a:srgbClr val="000000"/>
               </a:solidFill>
@@ -9715,7 +9715,7 @@
                 <a:tab algn="l" pos="0"/>
               </a:tabLst>
             </a:pPr>
-            <a:endParaRPr b="0" lang="fr-FR" sz="2400" strike="noStrike" u="none">
+            <a:endParaRPr b="0" lang="en-US" sz="2400" strike="noStrike" u="none">
               <a:solidFill>
                 <a:srgbClr val="000000"/>
               </a:solidFill>
@@ -9752,7 +9752,7 @@
               </a:rPr>
               <a:t>Solve inverse problems (measurement → parameters)</a:t>
             </a:r>
-            <a:endParaRPr b="0" lang="fr-FR" sz="2400" strike="noStrike" u="none">
+            <a:endParaRPr b="0" lang="en-US" sz="2400" strike="noStrike" u="none">
               <a:solidFill>
                 <a:srgbClr val="000000"/>
               </a:solidFill>
@@ -9789,7 +9789,7 @@
               </a:rPr>
               <a:t>Optimize experiments (find best parameters)</a:t>
             </a:r>
-            <a:endParaRPr b="0" lang="fr-FR" sz="2400" strike="noStrike" u="none">
+            <a:endParaRPr b="0" lang="en-US" sz="2400" strike="noStrike" u="none">
               <a:solidFill>
                 <a:srgbClr val="000000"/>
               </a:solidFill>
@@ -9826,7 +9826,7 @@
               </a:rPr>
               <a:t>Train surrogate models (parameters → measurement)</a:t>
             </a:r>
-            <a:endParaRPr b="0" lang="fr-FR" sz="2400" strike="noStrike" u="none">
+            <a:endParaRPr b="0" lang="en-US" sz="2400" strike="noStrike" u="none">
               <a:solidFill>
                 <a:srgbClr val="000000"/>
               </a:solidFill>
@@ -9847,7 +9847,7 @@
                 <a:tab algn="l" pos="0"/>
               </a:tabLst>
             </a:pPr>
-            <a:endParaRPr b="0" lang="fr-FR" sz="2400" strike="noStrike" u="none">
+            <a:endParaRPr b="0" lang="en-US" sz="2400" strike="noStrike" u="none">
               <a:solidFill>
                 <a:srgbClr val="000000"/>
               </a:solidFill>
@@ -9879,7 +9879,7 @@
               </a:rPr>
               <a:t>For all this, we encourage you to use AI chats/agents.</a:t>
             </a:r>
-            <a:endParaRPr b="0" lang="fr-FR" sz="2400" strike="noStrike" u="none">
+            <a:endParaRPr b="0" lang="en-US" sz="2400" strike="noStrike" u="none">
               <a:solidFill>
                 <a:srgbClr val="000000"/>
               </a:solidFill>
@@ -9936,7 +9936,7 @@
         <p:spPr>
           <a:xfrm>
             <a:off x="548640" y="384120"/>
-            <a:ext cx="9141840" cy="290520"/>
+            <a:ext cx="9141480" cy="290160"/>
           </a:xfrm>
           <a:prstGeom prst="rect">
             <a:avLst/>
@@ -9976,7 +9976,7 @@
               </a:rPr>
               <a:t>X/n</a:t>
             </a:r>
-            <a:endParaRPr b="0" lang="fr-FR" sz="1200" strike="noStrike" u="none">
+            <a:endParaRPr b="0" lang="en-US" sz="1200" strike="noStrike" u="none">
               <a:solidFill>
                 <a:srgbClr val="000000"/>
               </a:solidFill>
@@ -9996,7 +9996,7 @@
         <p:spPr>
           <a:xfrm>
             <a:off x="548640" y="658440"/>
-            <a:ext cx="11062080" cy="820800"/>
+            <a:ext cx="11061720" cy="820440"/>
           </a:xfrm>
           <a:prstGeom prst="rect">
             <a:avLst/>
@@ -10042,7 +10042,7 @@
               </a:rPr>
               <a:t>Why "Photons and Neutrons"?</a:t>
             </a:r>
-            <a:endParaRPr b="0" lang="fr-FR" sz="3000" strike="noStrike" u="none">
+            <a:endParaRPr b="0" lang="en-US" sz="3000" strike="noStrike" u="none">
               <a:solidFill>
                 <a:srgbClr val="000000"/>
               </a:solidFill>
@@ -10062,7 +10062,7 @@
         <p:spPr>
           <a:xfrm>
             <a:off x="11185920" y="6446520"/>
-            <a:ext cx="455040" cy="272160"/>
+            <a:ext cx="454680" cy="271800"/>
           </a:xfrm>
           <a:prstGeom prst="rect">
             <a:avLst/>
@@ -10103,7 +10103,7 @@
               </a:rPr>
               <a:t>2</a:t>
             </a:r>
-            <a:endParaRPr b="0" lang="fr-FR" sz="900" strike="noStrike" u="none">
+            <a:endParaRPr b="0" lang="en-US" sz="900" strike="noStrike" u="none">
               <a:solidFill>
                 <a:srgbClr val="000000"/>
               </a:solidFill>
@@ -10123,7 +10123,7 @@
         <p:spPr>
           <a:xfrm>
             <a:off x="476280" y="1930680"/>
-            <a:ext cx="11238120" cy="3381480"/>
+            <a:ext cx="11237760" cy="3381480"/>
           </a:xfrm>
           <a:prstGeom prst="rect">
             <a:avLst/>
@@ -10160,7 +10160,7 @@
               </a:rPr>
               <a:t>Shared X/n Physics and Simulation Capabilities</a:t>
             </a:r>
-            <a:endParaRPr b="0" lang="fr-FR" sz="2400" strike="noStrike" u="none">
+            <a:endParaRPr b="0" lang="en-US" sz="2400" strike="noStrike" u="none">
               <a:solidFill>
                 <a:srgbClr val="000000"/>
               </a:solidFill>
@@ -10175,7 +10175,7 @@
                 <a:spcPct val="100000"/>
               </a:lnSpc>
             </a:pPr>
-            <a:endParaRPr b="0" lang="fr-FR" sz="2400" strike="noStrike" u="none">
+            <a:endParaRPr b="0" lang="en-US" sz="2400" strike="noStrike" u="none">
               <a:solidFill>
                 <a:srgbClr val="000000"/>
               </a:solidFill>
@@ -10215,7 +10215,7 @@
             <a:br>
               <a:rPr sz="2400"/>
             </a:br>
-            <a:endParaRPr b="0" lang="fr-FR" sz="2400" strike="noStrike" u="none">
+            <a:endParaRPr b="0" lang="en-US" sz="2400" strike="noStrike" u="none">
               <a:solidFill>
                 <a:srgbClr val="000000"/>
               </a:solidFill>
@@ -10257,7 +10257,7 @@
               </a:rPr>
               <a:t>: Energy transfer to the material (e.g., photoelectric effect for X-rays, neutron capture).</a:t>
             </a:r>
-            <a:endParaRPr b="0" lang="fr-FR" sz="2100" strike="noStrike" u="none">
+            <a:endParaRPr b="0" lang="en-US" sz="2100" strike="noStrike" u="none">
               <a:solidFill>
                 <a:srgbClr val="000000"/>
               </a:solidFill>
@@ -10299,7 +10299,7 @@
               </a:rPr>
               <a:t>:</a:t>
             </a:r>
-            <a:endParaRPr b="0" lang="fr-FR" sz="2100" strike="noStrike" u="none">
+            <a:endParaRPr b="0" lang="en-US" sz="2100" strike="noStrike" u="none">
               <a:solidFill>
                 <a:srgbClr val="000000"/>
               </a:solidFill>
@@ -10341,7 +10341,7 @@
               </a:rPr>
               <a:t>: Structure analysis (e.g., Bragg diffraction for X-rays, neutron diffraction).</a:t>
             </a:r>
-            <a:endParaRPr b="0" lang="fr-FR" sz="1800" strike="noStrike" u="none">
+            <a:endParaRPr b="0" lang="en-US" sz="1800" strike="noStrike" u="none">
               <a:solidFill>
                 <a:srgbClr val="000000"/>
               </a:solidFill>
@@ -10383,7 +10383,7 @@
               </a:rPr>
               <a:t>: Dynamics analysis (e.g., Raman scattering for X-rays, neutron inelastic scattering).</a:t>
             </a:r>
-            <a:endParaRPr b="0" lang="fr-FR" sz="1800" strike="noStrike" u="none">
+            <a:endParaRPr b="0" lang="en-US" sz="1800" strike="noStrike" u="none">
               <a:solidFill>
                 <a:srgbClr val="000000"/>
               </a:solidFill>
@@ -10425,7 +10425,7 @@
               </a:rPr>
               <a:t>: Time-resolved studies (e.g., fluorescence, neutron activation).</a:t>
             </a:r>
-            <a:endParaRPr b="0" lang="fr-FR" sz="2100" strike="noStrike" u="none">
+            <a:endParaRPr b="0" lang="en-US" sz="2100" strike="noStrike" u="none">
               <a:solidFill>
                 <a:srgbClr val="000000"/>
               </a:solidFill>
@@ -10482,7 +10482,7 @@
         <p:spPr>
           <a:xfrm>
             <a:off x="548640" y="384120"/>
-            <a:ext cx="9141840" cy="290520"/>
+            <a:ext cx="9141480" cy="290160"/>
           </a:xfrm>
           <a:prstGeom prst="rect">
             <a:avLst/>
@@ -10522,7 +10522,7 @@
               </a:rPr>
               <a:t>X/n</a:t>
             </a:r>
-            <a:endParaRPr b="0" lang="fr-FR" sz="1200" strike="noStrike" u="none">
+            <a:endParaRPr b="0" lang="en-US" sz="1200" strike="noStrike" u="none">
               <a:solidFill>
                 <a:srgbClr val="000000"/>
               </a:solidFill>
@@ -10542,7 +10542,7 @@
         <p:spPr>
           <a:xfrm>
             <a:off x="548640" y="658440"/>
-            <a:ext cx="11062080" cy="820800"/>
+            <a:ext cx="11061720" cy="820440"/>
           </a:xfrm>
           <a:prstGeom prst="rect">
             <a:avLst/>
@@ -10588,7 +10588,7 @@
               </a:rPr>
               <a:t>Why "Photons and Neutrons"?</a:t>
             </a:r>
-            <a:endParaRPr b="0" lang="fr-FR" sz="3000" strike="noStrike" u="none">
+            <a:endParaRPr b="0" lang="en-US" sz="3000" strike="noStrike" u="none">
               <a:solidFill>
                 <a:srgbClr val="000000"/>
               </a:solidFill>
@@ -10608,7 +10608,7 @@
         <p:spPr>
           <a:xfrm>
             <a:off x="11185920" y="6446520"/>
-            <a:ext cx="455040" cy="272160"/>
+            <a:ext cx="454680" cy="271800"/>
           </a:xfrm>
           <a:prstGeom prst="rect">
             <a:avLst/>
@@ -10649,7 +10649,7 @@
               </a:rPr>
               <a:t>2</a:t>
             </a:r>
-            <a:endParaRPr b="0" lang="fr-FR" sz="900" strike="noStrike" u="none">
+            <a:endParaRPr b="0" lang="en-US" sz="900" strike="noStrike" u="none">
               <a:solidFill>
                 <a:srgbClr val="000000"/>
               </a:solidFill>
@@ -10669,7 +10669,7 @@
         <p:spPr>
           <a:xfrm>
             <a:off x="540000" y="1800000"/>
-            <a:ext cx="11117880" cy="4493880"/>
+            <a:ext cx="11117520" cy="4493880"/>
           </a:xfrm>
           <a:prstGeom prst="rect">
             <a:avLst/>
@@ -10723,7 +10723,7 @@
               </a:rPr>
               <a:t>:</a:t>
             </a:r>
-            <a:endParaRPr b="0" lang="fr-FR" sz="2400" strike="noStrike" u="none">
+            <a:endParaRPr b="0" lang="en-US" sz="2400" strike="noStrike" u="none">
               <a:solidFill>
                 <a:srgbClr val="000000"/>
               </a:solidFill>
@@ -10760,7 +10760,7 @@
               </a:rPr>
               <a:t>Parameters → [Instrument] → “Measurement”</a:t>
             </a:r>
-            <a:endParaRPr b="0" lang="fr-FR" sz="2100" strike="noStrike" u="none">
+            <a:endParaRPr b="0" lang="en-US" sz="2100" strike="noStrike" u="none">
               <a:solidFill>
                 <a:srgbClr val="000000"/>
               </a:solidFill>
@@ -10781,7 +10781,7 @@
                 <a:tab algn="l" pos="0"/>
               </a:tabLst>
             </a:pPr>
-            <a:endParaRPr b="0" lang="fr-FR" sz="2100" strike="noStrike" u="none">
+            <a:endParaRPr b="0" lang="en-US" sz="2100" strike="noStrike" u="none">
               <a:solidFill>
                 <a:srgbClr val="000000"/>
               </a:solidFill>
@@ -10821,7 +10821,7 @@
               </a:rPr>
               <a:t>:</a:t>
             </a:r>
-            <a:endParaRPr b="0" lang="fr-FR" sz="2400" strike="noStrike" u="none">
+            <a:endParaRPr b="0" lang="en-US" sz="2400" strike="noStrike" u="none">
               <a:solidFill>
                 <a:srgbClr val="000000"/>
               </a:solidFill>
@@ -10866,7 +10866,7 @@
               </a:rPr>
               <a:t>: Monte Carlo simulator for neutron scattering instruments.</a:t>
             </a:r>
-            <a:endParaRPr b="0" lang="fr-FR" sz="2100" strike="noStrike" u="none">
+            <a:endParaRPr b="0" lang="en-US" sz="2100" strike="noStrike" u="none">
               <a:solidFill>
                 <a:srgbClr val="000000"/>
               </a:solidFill>
@@ -10911,7 +10911,7 @@
               </a:rPr>
               <a:t>: Monte Carlo simulator for X-ray instruments.</a:t>
             </a:r>
-            <a:endParaRPr b="0" lang="fr-FR" sz="2100" strike="noStrike" u="none">
+            <a:endParaRPr b="0" lang="en-US" sz="2100" strike="noStrike" u="none">
               <a:solidFill>
                 <a:srgbClr val="000000"/>
               </a:solidFill>
@@ -10945,7 +10945,7 @@
               </a:rPr>
               <a:t>Both enable realistic modeling of beamlines, detectors, and sample interactions.</a:t>
             </a:r>
-            <a:endParaRPr b="0" lang="fr-FR" sz="2100" strike="noStrike" u="none">
+            <a:endParaRPr b="0" lang="en-US" sz="2100" strike="noStrike" u="none">
               <a:solidFill>
                 <a:srgbClr val="000000"/>
               </a:solidFill>
@@ -10963,7 +10963,7 @@
                 <a:tab algn="l" pos="0"/>
               </a:tabLst>
             </a:pPr>
-            <a:endParaRPr b="0" lang="fr-FR" sz="2100" strike="noStrike" u="none">
+            <a:endParaRPr b="0" lang="en-US" sz="2100" strike="noStrike" u="none">
               <a:solidFill>
                 <a:srgbClr val="000000"/>
               </a:solidFill>
@@ -11003,7 +11003,7 @@
               </a:rPr>
               <a:t>:</a:t>
             </a:r>
-            <a:endParaRPr b="0" lang="fr-FR" sz="2400" strike="noStrike" u="none">
+            <a:endParaRPr b="0" lang="en-US" sz="2400" strike="noStrike" u="none">
               <a:solidFill>
                 <a:srgbClr val="000000"/>
               </a:solidFill>
@@ -11048,7 +11048,7 @@
               </a:rPr>
               <a:t>: Capture complex instrument geometries and material responses.</a:t>
             </a:r>
-            <a:endParaRPr b="0" lang="fr-FR" sz="2100" strike="noStrike" u="none">
+            <a:endParaRPr b="0" lang="en-US" sz="2100" strike="noStrike" u="none">
               <a:solidFill>
                 <a:srgbClr val="000000"/>
               </a:solidFill>
@@ -11093,7 +11093,7 @@
               </a:rPr>
               <a:t>: Test hypothetical setups.</a:t>
             </a:r>
-            <a:endParaRPr b="0" lang="fr-FR" sz="2100" strike="noStrike" u="none">
+            <a:endParaRPr b="0" lang="en-US" sz="2100" strike="noStrike" u="none">
               <a:solidFill>
                 <a:srgbClr val="000000"/>
               </a:solidFill>
@@ -11138,7 +11138,7 @@
               </a:rPr>
               <a:t>: Avoid expensive trial-and-error on real instruments/BL.</a:t>
             </a:r>
-            <a:endParaRPr b="0" lang="fr-FR" sz="2100" strike="noStrike" u="none">
+            <a:endParaRPr b="0" lang="en-US" sz="2100" strike="noStrike" u="none">
               <a:solidFill>
                 <a:srgbClr val="000000"/>
               </a:solidFill>
@@ -11156,7 +11156,7 @@
                 <a:tab algn="l" pos="0"/>
               </a:tabLst>
             </a:pPr>
-            <a:endParaRPr b="0" lang="fr-FR" sz="2100" strike="noStrike" u="none">
+            <a:endParaRPr b="0" lang="en-US" sz="2100" strike="noStrike" u="none">
               <a:solidFill>
                 <a:srgbClr val="000000"/>
               </a:solidFill>
@@ -11213,7 +11213,7 @@
         <p:spPr>
           <a:xfrm>
             <a:off x="548640" y="384120"/>
-            <a:ext cx="9141840" cy="290520"/>
+            <a:ext cx="9141480" cy="290160"/>
           </a:xfrm>
           <a:prstGeom prst="rect">
             <a:avLst/>
@@ -11253,7 +11253,7 @@
               </a:rPr>
               <a:t>Realistic datasets</a:t>
             </a:r>
-            <a:endParaRPr b="0" lang="fr-FR" sz="1200" strike="noStrike" u="none">
+            <a:endParaRPr b="0" lang="en-US" sz="1200" strike="noStrike" u="none">
               <a:solidFill>
                 <a:srgbClr val="000000"/>
               </a:solidFill>
@@ -11273,7 +11273,7 @@
         <p:spPr>
           <a:xfrm>
             <a:off x="548640" y="658440"/>
-            <a:ext cx="11062080" cy="820800"/>
+            <a:ext cx="11061720" cy="820440"/>
           </a:xfrm>
           <a:prstGeom prst="rect">
             <a:avLst/>
@@ -11319,7 +11319,7 @@
               </a:rPr>
               <a:t>Why Realistic AI Datasets?</a:t>
             </a:r>
-            <a:endParaRPr b="0" lang="fr-FR" sz="3000" strike="noStrike" u="none">
+            <a:endParaRPr b="0" lang="en-US" sz="3000" strike="noStrike" u="none">
               <a:solidFill>
                 <a:srgbClr val="000000"/>
               </a:solidFill>
@@ -11339,7 +11339,7 @@
         <p:spPr>
           <a:xfrm>
             <a:off x="11185920" y="6446520"/>
-            <a:ext cx="455040" cy="272160"/>
+            <a:ext cx="454680" cy="271800"/>
           </a:xfrm>
           <a:prstGeom prst="rect">
             <a:avLst/>
@@ -11380,7 +11380,7 @@
               </a:rPr>
               <a:t>2</a:t>
             </a:r>
-            <a:endParaRPr b="0" lang="fr-FR" sz="900" strike="noStrike" u="none">
+            <a:endParaRPr b="0" lang="en-US" sz="900" strike="noStrike" u="none">
               <a:solidFill>
                 <a:srgbClr val="000000"/>
               </a:solidFill>
@@ -11400,7 +11400,7 @@
         <p:spPr>
           <a:xfrm>
             <a:off x="540000" y="1800000"/>
-            <a:ext cx="10660680" cy="3807720"/>
+            <a:ext cx="10660320" cy="3807720"/>
           </a:xfrm>
           <a:prstGeom prst="rect">
             <a:avLst/>
@@ -11446,7 +11446,7 @@
             <a:br>
               <a:rPr sz="2400"/>
             </a:br>
-            <a:endParaRPr b="0" lang="fr-FR" sz="2400" strike="noStrike" u="none">
+            <a:endParaRPr b="0" lang="en-US" sz="2400" strike="noStrike" u="none">
               <a:solidFill>
                 <a:srgbClr val="000000"/>
               </a:solidFill>
@@ -11494,7 +11494,7 @@
               </a:rPr>
               <a:t>:</a:t>
             </a:r>
-            <a:endParaRPr b="0" lang="fr-FR" sz="2400" strike="noStrike" u="none">
+            <a:endParaRPr b="0" lang="en-US" sz="2400" strike="noStrike" u="none">
               <a:solidFill>
                 <a:srgbClr val="000000"/>
               </a:solidFill>
@@ -11531,7 +11531,7 @@
               </a:rPr>
               <a:t>Raw data often lacks metadata (e.g., sample composition, instrument settings).</a:t>
             </a:r>
-            <a:endParaRPr b="0" lang="fr-FR" sz="2100" strike="noStrike" u="none">
+            <a:endParaRPr b="0" lang="en-US" sz="2100" strike="noStrike" u="none">
               <a:solidFill>
                 <a:srgbClr val="000000"/>
               </a:solidFill>
@@ -11582,7 +11582,7 @@
               </a:rPr>
               <a:t> </a:t>
             </a:r>
-            <a:endParaRPr b="0" lang="fr-FR" sz="2100" strike="noStrike" u="none">
+            <a:endParaRPr b="0" lang="en-US" sz="2100" strike="noStrike" u="none">
               <a:solidFill>
                 <a:srgbClr val="000000"/>
               </a:solidFill>
@@ -11630,7 +11630,7 @@
               </a:rPr>
               <a:t>:</a:t>
             </a:r>
-            <a:endParaRPr b="0" lang="fr-FR" sz="2400" strike="noStrike" u="none">
+            <a:endParaRPr b="0" lang="en-US" sz="2400" strike="noStrike" u="none">
               <a:solidFill>
                 <a:srgbClr val="000000"/>
               </a:solidFill>
@@ -11667,7 +11667,7 @@
               </a:rPr>
               <a:t>Publications describe experimental conditions, but formats vary widely.</a:t>
             </a:r>
-            <a:endParaRPr b="0" lang="fr-FR" sz="2100" strike="noStrike" u="none">
+            <a:endParaRPr b="0" lang="en-US" sz="2100" strike="noStrike" u="none">
               <a:solidFill>
                 <a:srgbClr val="000000"/>
               </a:solidFill>
@@ -11704,7 +11704,7 @@
               </a:rPr>
               <a:t>Not machine-readable or standardized for AI training.</a:t>
             </a:r>
-            <a:endParaRPr b="0" lang="fr-FR" sz="2100" strike="noStrike" u="none">
+            <a:endParaRPr b="0" lang="en-US" sz="2100" strike="noStrike" u="none">
               <a:solidFill>
                 <a:srgbClr val="000000"/>
               </a:solidFill>
@@ -11761,7 +11761,7 @@
         <p:spPr>
           <a:xfrm>
             <a:off x="548640" y="384120"/>
-            <a:ext cx="9141840" cy="290520"/>
+            <a:ext cx="9141480" cy="290160"/>
           </a:xfrm>
           <a:prstGeom prst="rect">
             <a:avLst/>
@@ -11801,7 +11801,7 @@
               </a:rPr>
               <a:t>Realistic datasets</a:t>
             </a:r>
-            <a:endParaRPr b="0" lang="fr-FR" sz="1200" strike="noStrike" u="none">
+            <a:endParaRPr b="0" lang="en-US" sz="1200" strike="noStrike" u="none">
               <a:solidFill>
                 <a:srgbClr val="000000"/>
               </a:solidFill>
@@ -11821,7 +11821,7 @@
         <p:spPr>
           <a:xfrm>
             <a:off x="548640" y="658440"/>
-            <a:ext cx="11062080" cy="820800"/>
+            <a:ext cx="11061720" cy="820440"/>
           </a:xfrm>
           <a:prstGeom prst="rect">
             <a:avLst/>
@@ -11867,7 +11867,7 @@
               </a:rPr>
               <a:t>Why Realistic AI Datasets?</a:t>
             </a:r>
-            <a:endParaRPr b="0" lang="fr-FR" sz="3000" strike="noStrike" u="none">
+            <a:endParaRPr b="0" lang="en-US" sz="3000" strike="noStrike" u="none">
               <a:solidFill>
                 <a:srgbClr val="000000"/>
               </a:solidFill>
@@ -11887,7 +11887,7 @@
         <p:spPr>
           <a:xfrm>
             <a:off x="11185920" y="6446520"/>
-            <a:ext cx="455040" cy="272160"/>
+            <a:ext cx="454680" cy="271800"/>
           </a:xfrm>
           <a:prstGeom prst="rect">
             <a:avLst/>
@@ -11928,7 +11928,7 @@
               </a:rPr>
               <a:t>2</a:t>
             </a:r>
-            <a:endParaRPr b="0" lang="fr-FR" sz="900" strike="noStrike" u="none">
+            <a:endParaRPr b="0" lang="en-US" sz="900" strike="noStrike" u="none">
               <a:solidFill>
                 <a:srgbClr val="000000"/>
               </a:solidFill>
@@ -11948,7 +11948,7 @@
         <p:spPr>
           <a:xfrm>
             <a:off x="540000" y="1800000"/>
-            <a:ext cx="9475920" cy="4660920"/>
+            <a:ext cx="9475560" cy="4660920"/>
           </a:xfrm>
           <a:prstGeom prst="rect">
             <a:avLst/>
@@ -11994,7 +11994,7 @@
             <a:br>
               <a:rPr sz="2400"/>
             </a:br>
-            <a:endParaRPr b="0" lang="fr-FR" sz="2400" strike="noStrike" u="none">
+            <a:endParaRPr b="0" lang="en-US" sz="2400" strike="noStrike" u="none">
               <a:solidFill>
                 <a:srgbClr val="000000"/>
               </a:solidFill>
@@ -12042,7 +12042,7 @@
               </a:rPr>
               <a:t>:</a:t>
             </a:r>
-            <a:endParaRPr b="0" lang="fr-FR" sz="2400" strike="noStrike" u="none">
+            <a:endParaRPr b="0" lang="en-US" sz="2400" strike="noStrike" u="none">
               <a:solidFill>
                 <a:srgbClr val="000000"/>
               </a:solidFill>
@@ -12079,7 +12079,7 @@
               </a:rPr>
               <a:t>Every input (e.g., sample thickness, detector angle) is known and adjustable.</a:t>
             </a:r>
-            <a:endParaRPr b="0" lang="fr-FR" sz="2100" strike="noStrike" u="none">
+            <a:endParaRPr b="0" lang="en-US" sz="2100" strike="noStrike" u="none">
               <a:solidFill>
                 <a:srgbClr val="000000"/>
               </a:solidFill>
@@ -12116,7 +12116,7 @@
               </a:rPr>
               <a:t>Outputs (e.g., scattering patterns, spectra) are directly linked to inputs.</a:t>
             </a:r>
-            <a:endParaRPr b="0" lang="fr-FR" sz="2100" strike="noStrike" u="none">
+            <a:endParaRPr b="0" lang="en-US" sz="2100" strike="noStrike" u="none">
               <a:solidFill>
                 <a:srgbClr val="000000"/>
               </a:solidFill>
@@ -12164,7 +12164,7 @@
               </a:rPr>
               <a:t>:</a:t>
             </a:r>
-            <a:endParaRPr b="0" lang="fr-FR" sz="2400" strike="noStrike" u="none">
+            <a:endParaRPr b="0" lang="en-US" sz="2400" strike="noStrike" u="none">
               <a:solidFill>
                 <a:srgbClr val="000000"/>
               </a:solidFill>
@@ -12185,7 +12185,7 @@
                 <a:tab algn="l" pos="0"/>
               </a:tabLst>
             </a:pPr>
-            <a:endParaRPr b="0" lang="fr-FR" sz="2400" strike="noStrike" u="none">
+            <a:endParaRPr b="0" lang="en-US" sz="2400" strike="noStrike" u="none">
               <a:solidFill>
                 <a:srgbClr val="000000"/>
               </a:solidFill>
@@ -12222,7 +12222,7 @@
               </a:rPr>
               <a:t>Parameters → [Simulation] → Virtual “Measurement”</a:t>
             </a:r>
-            <a:endParaRPr b="0" lang="fr-FR" sz="2100" strike="noStrike" u="none">
+            <a:endParaRPr b="0" lang="en-US" sz="2100" strike="noStrike" u="none">
               <a:solidFill>
                 <a:srgbClr val="000000"/>
               </a:solidFill>
@@ -12243,7 +12243,7 @@
                 <a:tab algn="l" pos="0"/>
               </a:tabLst>
             </a:pPr>
-            <a:endParaRPr b="0" lang="fr-FR" sz="2100" strike="noStrike" u="none">
+            <a:endParaRPr b="0" lang="en-US" sz="2100" strike="noStrike" u="none">
               <a:solidFill>
                 <a:srgbClr val="000000"/>
               </a:solidFill>
@@ -12291,7 +12291,7 @@
               </a:rPr>
               <a:t> </a:t>
             </a:r>
-            <a:endParaRPr b="0" lang="fr-FR" sz="2400" strike="noStrike" u="none">
+            <a:endParaRPr b="0" lang="en-US" sz="2400" strike="noStrike" u="none">
               <a:solidFill>
                 <a:srgbClr val="000000"/>
               </a:solidFill>
@@ -12341,7 +12341,7 @@
         <p:spPr>
           <a:xfrm>
             <a:off x="548640" y="384120"/>
-            <a:ext cx="9141840" cy="290520"/>
+            <a:ext cx="9141480" cy="290160"/>
           </a:xfrm>
           <a:prstGeom prst="rect">
             <a:avLst/>
@@ -12381,7 +12381,7 @@
               </a:rPr>
               <a:t>Realistic datasets</a:t>
             </a:r>
-            <a:endParaRPr b="0" lang="fr-FR" sz="1200" strike="noStrike" u="none">
+            <a:endParaRPr b="0" lang="en-US" sz="1200" strike="noStrike" u="none">
               <a:solidFill>
                 <a:srgbClr val="000000"/>
               </a:solidFill>
@@ -12401,7 +12401,7 @@
         <p:spPr>
           <a:xfrm>
             <a:off x="548640" y="658440"/>
-            <a:ext cx="11062080" cy="820800"/>
+            <a:ext cx="11061720" cy="820440"/>
           </a:xfrm>
           <a:prstGeom prst="rect">
             <a:avLst/>
@@ -12447,7 +12447,7 @@
               </a:rPr>
               <a:t>Why Realistic AI Datasets?</a:t>
             </a:r>
-            <a:endParaRPr b="0" lang="fr-FR" sz="3000" strike="noStrike" u="none">
+            <a:endParaRPr b="0" lang="en-US" sz="3000" strike="noStrike" u="none">
               <a:solidFill>
                 <a:srgbClr val="000000"/>
               </a:solidFill>
@@ -12467,7 +12467,7 @@
         <p:spPr>
           <a:xfrm>
             <a:off x="11185920" y="6446520"/>
-            <a:ext cx="455040" cy="272160"/>
+            <a:ext cx="454680" cy="271800"/>
           </a:xfrm>
           <a:prstGeom prst="rect">
             <a:avLst/>
@@ -12508,7 +12508,7 @@
               </a:rPr>
               <a:t>2</a:t>
             </a:r>
-            <a:endParaRPr b="0" lang="fr-FR" sz="900" strike="noStrike" u="none">
+            <a:endParaRPr b="0" lang="en-US" sz="900" strike="noStrike" u="none">
               <a:solidFill>
                 <a:srgbClr val="000000"/>
               </a:solidFill>
@@ -12526,22 +12526,22 @@
           <p:nvPr/>
         </p:nvGraphicFramePr>
         <p:xfrm>
-          <a:off x="2736000" y="2052000"/>
-          <a:ext cx="5364000" cy="4068000"/>
+          <a:off x="2971800" y="2610360"/>
+          <a:ext cx="8878680" cy="4067640"/>
         </p:xfrm>
         <a:graphic>
           <a:graphicData uri="http://schemas.openxmlformats.org/drawingml/2006/table">
             <a:tbl>
               <a:tblPr/>
               <a:tblGrid>
-                <a:gridCol w="1788120"/>
-                <a:gridCol w="1788120"/>
-                <a:gridCol w="1787760"/>
+                <a:gridCol w="2959200"/>
+                <a:gridCol w="2959200"/>
+                <a:gridCol w="2960280"/>
               </a:tblGrid>
               <a:tr h="1355760">
                 <a:tc>
                   <a:txBody>
-                    <a:bodyPr lIns="36000" rIns="36000" tIns="36000" bIns="36000" anchor="t">
+                    <a:bodyPr lIns="36000" rIns="36000" anchor="t">
                       <a:noAutofit/>
                     </a:bodyPr>
                     <a:p>
@@ -12587,10 +12587,15 @@
                 </a:tc>
                 <a:tc>
                   <a:txBody>
-                    <a:bodyPr lIns="36000" rIns="36000" tIns="36000" bIns="36000" anchor="t">
+                    <a:bodyPr lIns="36000" rIns="36000" anchor="t">
                       <a:noAutofit/>
                     </a:bodyPr>
                     <a:p>
+                      <a:pPr>
+                        <a:lnSpc>
+                          <a:spcPct val="100000"/>
+                        </a:lnSpc>
+                      </a:pPr>
                       <a:r>
                         <a:rPr b="1" lang="fr-FR" sz="1800" strike="noStrike" u="none">
                           <a:solidFill>
@@ -12602,7 +12607,7 @@
                         </a:rPr>
                         <a:t>Input X=Parameters</a:t>
                       </a:r>
-                      <a:endParaRPr b="1" lang="fr-FR" sz="1800" strike="noStrike" u="none">
+                      <a:endParaRPr b="0" lang="en-US" sz="1800" strike="noStrike" u="none">
                         <a:solidFill>
                           <a:srgbClr val="000000"/>
                         </a:solidFill>
@@ -12613,8 +12618,9 @@
                     </a:p>
                   </a:txBody>
                   <a:tcPr anchor="t" marL="36000" marR="36000">
-                    <a:lnL>
+                    <a:lnL w="12240">
                       <a:noFill/>
+                      <a:prstDash val="solid"/>
                     </a:lnL>
                     <a:lnR w="7200">
                       <a:solidFill>
@@ -12641,10 +12647,15 @@
                 </a:tc>
                 <a:tc>
                   <a:txBody>
-                    <a:bodyPr lIns="36000" rIns="36000" tIns="36000" bIns="36000" anchor="t">
+                    <a:bodyPr lIns="36000" rIns="36000" anchor="t">
                       <a:noAutofit/>
                     </a:bodyPr>
                     <a:p>
+                      <a:pPr>
+                        <a:lnSpc>
+                          <a:spcPct val="100000"/>
+                        </a:lnSpc>
+                      </a:pPr>
                       <a:r>
                         <a:rPr b="1" lang="fr-FR" sz="1800" strike="noStrike" u="none">
                           <a:solidFill>
@@ -12656,7 +12667,7 @@
                         </a:rPr>
                         <a:t>Input X=Measurements</a:t>
                       </a:r>
-                      <a:endParaRPr b="1" lang="fr-FR" sz="1800" strike="noStrike" u="none">
+                      <a:endParaRPr b="0" lang="en-US" sz="1800" strike="noStrike" u="none">
                         <a:solidFill>
                           <a:srgbClr val="000000"/>
                         </a:solidFill>
@@ -12700,10 +12711,15 @@
               <a:tr h="1355760">
                 <a:tc>
                   <a:txBody>
-                    <a:bodyPr lIns="36000" rIns="36000" tIns="36000" bIns="36000" anchor="t">
+                    <a:bodyPr lIns="36000" rIns="36000" anchor="t">
                       <a:noAutofit/>
                     </a:bodyPr>
                     <a:p>
+                      <a:pPr>
+                        <a:lnSpc>
+                          <a:spcPct val="100000"/>
+                        </a:lnSpc>
+                      </a:pPr>
                       <a:r>
                         <a:rPr b="1" lang="fr-FR" sz="1800" strike="noStrike" u="none">
                           <a:solidFill>
@@ -12715,7 +12731,7 @@
                         </a:rPr>
                         <a:t>Output Y=Parameters</a:t>
                       </a:r>
-                      <a:endParaRPr b="1" lang="fr-FR" sz="1800" strike="noStrike" u="none">
+                      <a:endParaRPr b="0" lang="en-US" sz="1800" strike="noStrike" u="none">
                         <a:solidFill>
                           <a:srgbClr val="000000"/>
                         </a:solidFill>
@@ -12738,8 +12754,9 @@
                       </a:solidFill>
                       <a:prstDash val="solid"/>
                     </a:lnR>
-                    <a:lnT>
+                    <a:lnT w="12240">
                       <a:noFill/>
+                      <a:prstDash val="solid"/>
                     </a:lnT>
                     <a:lnB w="7200">
                       <a:solidFill>
@@ -12754,11 +12771,15 @@
                 </a:tc>
                 <a:tc>
                   <a:txBody>
-                    <a:bodyPr lIns="36000" rIns="36000" tIns="36000" bIns="36000" anchor="t">
+                    <a:bodyPr lIns="36000" rIns="36000" anchor="t">
                       <a:noAutofit/>
                     </a:bodyPr>
                     <a:p>
-                      <a:pPr algn="ctr"/>
+                      <a:pPr algn="ctr">
+                        <a:lnSpc>
+                          <a:spcPct val="100000"/>
+                        </a:lnSpc>
+                      </a:pPr>
                       <a:r>
                         <a:rPr b="0" lang="fr-FR" sz="1800" strike="noStrike" u="none">
                           <a:solidFill>
@@ -12770,7 +12791,7 @@
                         </a:rPr>
                         <a:t>Optimisation</a:t>
                       </a:r>
-                      <a:endParaRPr b="0" lang="fr-FR" sz="1800" strike="noStrike" u="none">
+                      <a:endParaRPr b="0" lang="en-US" sz="1800" strike="noStrike" u="none">
                         <a:solidFill>
                           <a:srgbClr val="000000"/>
                         </a:solidFill>
@@ -12781,8 +12802,9 @@
                     </a:p>
                   </a:txBody>
                   <a:tcPr anchor="t" marL="36000" marR="36000">
-                    <a:lnL>
+                    <a:lnL w="12240">
                       <a:noFill/>
+                      <a:prstDash val="solid"/>
                     </a:lnL>
                     <a:lnR w="7200">
                       <a:solidFill>
@@ -12790,8 +12812,9 @@
                       </a:solidFill>
                       <a:prstDash val="solid"/>
                     </a:lnR>
-                    <a:lnT>
+                    <a:lnT w="12240">
                       <a:noFill/>
+                      <a:prstDash val="solid"/>
                     </a:lnT>
                     <a:lnB w="7200">
                       <a:solidFill>
@@ -12804,11 +12827,15 @@
                 </a:tc>
                 <a:tc>
                   <a:txBody>
-                    <a:bodyPr lIns="36000" rIns="36000" tIns="36000" bIns="36000" anchor="t">
+                    <a:bodyPr lIns="36000" rIns="36000" anchor="t">
                       <a:noAutofit/>
                     </a:bodyPr>
                     <a:p>
-                      <a:pPr algn="ctr"/>
+                      <a:pPr algn="ctr">
+                        <a:lnSpc>
+                          <a:spcPct val="100000"/>
+                        </a:lnSpc>
+                      </a:pPr>
                       <a:r>
                         <a:rPr b="0" lang="fr-FR" sz="1800" strike="noStrike" u="none">
                           <a:solidFill>
@@ -12820,7 +12847,7 @@
                         </a:rPr>
                         <a:t>Inverse problem</a:t>
                       </a:r>
-                      <a:endParaRPr b="0" lang="fr-FR" sz="1800" strike="noStrike" u="none">
+                      <a:endParaRPr b="0" lang="en-US" sz="1800" strike="noStrike" u="none">
                         <a:solidFill>
                           <a:srgbClr val="000000"/>
                         </a:solidFill>
@@ -12843,8 +12870,9 @@
                       </a:solidFill>
                       <a:prstDash val="solid"/>
                     </a:lnR>
-                    <a:lnT>
+                    <a:lnT w="12240">
                       <a:noFill/>
+                      <a:prstDash val="solid"/>
                     </a:lnT>
                     <a:lnB w="7200">
                       <a:solidFill>
@@ -12859,10 +12887,15 @@
               <a:tr h="1356480">
                 <a:tc>
                   <a:txBody>
-                    <a:bodyPr lIns="36000" rIns="36000" tIns="36000" bIns="36000" anchor="t">
+                    <a:bodyPr lIns="36000" rIns="36000" anchor="t">
                       <a:noAutofit/>
                     </a:bodyPr>
                     <a:p>
+                      <a:pPr>
+                        <a:lnSpc>
+                          <a:spcPct val="100000"/>
+                        </a:lnSpc>
+                      </a:pPr>
                       <a:r>
                         <a:rPr b="1" lang="fr-FR" sz="1800" strike="noStrike" u="none">
                           <a:solidFill>
@@ -12874,7 +12907,7 @@
                         </a:rPr>
                         <a:t>Output Y=Measurements</a:t>
                       </a:r>
-                      <a:endParaRPr b="1" lang="fr-FR" sz="1800" strike="noStrike" u="none">
+                      <a:endParaRPr b="0" lang="en-US" sz="1800" strike="noStrike" u="none">
                         <a:solidFill>
                           <a:srgbClr val="000000"/>
                         </a:solidFill>
@@ -12916,11 +12949,15 @@
                 </a:tc>
                 <a:tc>
                   <a:txBody>
-                    <a:bodyPr lIns="36000" rIns="36000" tIns="36000" bIns="36000" anchor="t">
+                    <a:bodyPr lIns="36000" rIns="36000" anchor="t">
                       <a:noAutofit/>
                     </a:bodyPr>
                     <a:p>
-                      <a:pPr algn="ctr"/>
+                      <a:pPr algn="ctr">
+                        <a:lnSpc>
+                          <a:spcPct val="100000"/>
+                        </a:lnSpc>
+                      </a:pPr>
                       <a:r>
                         <a:rPr b="0" lang="fr-FR" sz="1800" strike="noStrike" u="none">
                           <a:solidFill>
@@ -12932,7 +12969,7 @@
                         </a:rPr>
                         <a:t>Simulation, Surrogate</a:t>
                       </a:r>
-                      <a:endParaRPr b="0" lang="fr-FR" sz="1800" strike="noStrike" u="none">
+                      <a:endParaRPr b="0" lang="en-US" sz="1800" strike="noStrike" u="none">
                         <a:solidFill>
                           <a:srgbClr val="000000"/>
                         </a:solidFill>
@@ -12943,8 +12980,9 @@
                     </a:p>
                   </a:txBody>
                   <a:tcPr anchor="t" marL="36000" marR="36000">
-                    <a:lnL>
+                    <a:lnL w="12240">
                       <a:noFill/>
+                      <a:prstDash val="solid"/>
                     </a:lnL>
                     <a:lnR w="7200">
                       <a:solidFill>
@@ -12969,11 +13007,15 @@
                 </a:tc>
                 <a:tc>
                   <a:txBody>
-                    <a:bodyPr lIns="36000" rIns="36000" tIns="36000" bIns="36000" anchor="t">
+                    <a:bodyPr lIns="36000" rIns="36000" anchor="t">
                       <a:noAutofit/>
                     </a:bodyPr>
                     <a:p>
-                      <a:pPr algn="ctr"/>
+                      <a:pPr algn="ctr">
+                        <a:lnSpc>
+                          <a:spcPct val="100000"/>
+                        </a:lnSpc>
+                      </a:pPr>
                       <a:r>
                         <a:rPr b="0" lang="fr-FR" sz="1800" strike="noStrike" u="none">
                           <a:solidFill>
@@ -12983,9 +13025,9 @@
                           <a:uFillTx/>
                           <a:latin typeface="Arial"/>
                         </a:rPr>
-                        <a:t>De-noising, de-convolution</a:t>
+                        <a:t>De-noising, de-convolution, segmentation</a:t>
                       </a:r>
-                      <a:endParaRPr b="0" lang="fr-FR" sz="1800" strike="noStrike" u="none">
+                      <a:endParaRPr b="0" lang="en-US" sz="1800" strike="noStrike" u="none">
                         <a:solidFill>
                           <a:srgbClr val="000000"/>
                         </a:solidFill>
@@ -13028,6 +13070,113 @@
           </a:graphicData>
         </a:graphic>
       </p:graphicFrame>
+      <p:sp>
+        <p:nvSpPr>
+          <p:cNvPr id="65" name=""/>
+          <p:cNvSpPr/>
+          <p:nvPr/>
+        </p:nvSpPr>
+        <p:spPr>
+          <a:xfrm>
+            <a:off x="540000" y="1800000"/>
+            <a:ext cx="9475560" cy="1111320"/>
+          </a:xfrm>
+          <a:prstGeom prst="rect">
+            <a:avLst/>
+          </a:prstGeom>
+          <a:noFill/>
+          <a:ln w="0">
+            <a:noFill/>
+          </a:ln>
+        </p:spPr>
+        <p:style>
+          <a:lnRef idx="0"/>
+          <a:fillRef idx="0"/>
+          <a:effectRef idx="0"/>
+          <a:fontRef idx="minor"/>
+        </p:style>
+        <p:txBody>
+          <a:bodyPr lIns="90000" rIns="90000" tIns="45000" bIns="45000" anchor="t">
+            <a:spAutoFit/>
+          </a:bodyPr>
+          <a:p>
+            <a:pPr defTabSz="343080">
+              <a:lnSpc>
+                <a:spcPct val="100000"/>
+              </a:lnSpc>
+              <a:spcBef>
+                <a:spcPts val="2999"/>
+              </a:spcBef>
+              <a:tabLst>
+                <a:tab algn="l" pos="0"/>
+              </a:tabLst>
+            </a:pPr>
+            <a:r>
+              <a:rPr b="1" lang="fr-FR" sz="2100" strike="noStrike" u="none">
+                <a:solidFill>
+                  <a:srgbClr val="ff00ff"/>
+                </a:solidFill>
+                <a:effectLst/>
+                <a:uFillTx/>
+                <a:latin typeface="Courier New"/>
+              </a:rPr>
+              <a:t>Parameters → [Simulation] → Virtual “Measurement”</a:t>
+            </a:r>
+            <a:endParaRPr b="0" lang="en-US" sz="2100" strike="noStrike" u="none">
+              <a:solidFill>
+                <a:srgbClr val="000000"/>
+              </a:solidFill>
+              <a:effectLst/>
+              <a:uFillTx/>
+              <a:latin typeface="Arial"/>
+            </a:endParaRPr>
+          </a:p>
+          <a:p>
+            <a:pPr defTabSz="343080">
+              <a:lnSpc>
+                <a:spcPct val="100000"/>
+              </a:lnSpc>
+              <a:spcBef>
+                <a:spcPts val="2999"/>
+              </a:spcBef>
+              <a:tabLst>
+                <a:tab algn="l" pos="0"/>
+              </a:tabLst>
+            </a:pPr>
+            <a:r>
+              <a:rPr b="0" lang="fr-FR" sz="2100" strike="noStrike" u="none">
+                <a:solidFill>
+                  <a:srgbClr val="ff00ff"/>
+                </a:solidFill>
+                <a:effectLst/>
+                <a:uFillTx/>
+                <a:latin typeface="Arial"/>
+                <a:ea typeface="Unifont"/>
+              </a:rPr>
+              <a:t>X </a:t>
+            </a:r>
+            <a:r>
+              <a:rPr b="1" lang="fr-FR" sz="2100" strike="noStrike" u="none">
+                <a:solidFill>
+                  <a:srgbClr val="ff00ff"/>
+                </a:solidFill>
+                <a:effectLst/>
+                <a:uFillTx/>
+                <a:latin typeface="Courier New"/>
+              </a:rPr>
+              <a:t>→ [AI] → Y</a:t>
+            </a:r>
+            <a:endParaRPr b="0" lang="en-US" sz="2100" strike="noStrike" u="none">
+              <a:solidFill>
+                <a:srgbClr val="000000"/>
+              </a:solidFill>
+              <a:effectLst/>
+              <a:uFillTx/>
+              <a:latin typeface="Arial"/>
+            </a:endParaRPr>
+          </a:p>
+        </p:txBody>
+      </p:sp>
     </p:spTree>
   </p:cSld>
   <mc:AlternateContent>
@@ -13067,14 +13216,14 @@
       </p:grpSpPr>
       <p:sp>
         <p:nvSpPr>
-          <p:cNvPr id="65" name="Text 24"/>
+          <p:cNvPr id="66" name="Text 24"/>
           <p:cNvSpPr/>
           <p:nvPr/>
         </p:nvSpPr>
         <p:spPr>
           <a:xfrm>
             <a:off x="548640" y="384120"/>
-            <a:ext cx="9141840" cy="290520"/>
+            <a:ext cx="9141480" cy="290160"/>
           </a:xfrm>
           <a:prstGeom prst="rect">
             <a:avLst/>
@@ -13114,7 +13263,7 @@
               </a:rPr>
               <a:t>Realistic datasets</a:t>
             </a:r>
-            <a:endParaRPr b="0" lang="fr-FR" sz="1200" strike="noStrike" u="none">
+            <a:endParaRPr b="0" lang="en-US" sz="1200" strike="noStrike" u="none">
               <a:solidFill>
                 <a:srgbClr val="000000"/>
               </a:solidFill>
@@ -13127,14 +13276,14 @@
       </p:sp>
       <p:sp>
         <p:nvSpPr>
-          <p:cNvPr id="66" name="Text 25"/>
+          <p:cNvPr id="67" name="Text 25"/>
           <p:cNvSpPr/>
           <p:nvPr/>
         </p:nvSpPr>
         <p:spPr>
           <a:xfrm>
             <a:off x="548640" y="658440"/>
-            <a:ext cx="11062080" cy="820800"/>
+            <a:ext cx="11061720" cy="820440"/>
           </a:xfrm>
           <a:prstGeom prst="rect">
             <a:avLst/>
@@ -13180,7 +13329,7 @@
               </a:rPr>
               <a:t>Why Realistic AI Datasets?</a:t>
             </a:r>
-            <a:endParaRPr b="0" lang="fr-FR" sz="3000" strike="noStrike" u="none">
+            <a:endParaRPr b="0" lang="en-US" sz="3000" strike="noStrike" u="none">
               <a:solidFill>
                 <a:srgbClr val="000000"/>
               </a:solidFill>
@@ -13193,14 +13342,14 @@
       </p:sp>
       <p:sp>
         <p:nvSpPr>
-          <p:cNvPr id="67" name="Text 26"/>
+          <p:cNvPr id="68" name="Text 26"/>
           <p:cNvSpPr/>
           <p:nvPr/>
         </p:nvSpPr>
         <p:spPr>
           <a:xfrm>
             <a:off x="11185920" y="6446520"/>
-            <a:ext cx="455040" cy="272160"/>
+            <a:ext cx="454680" cy="271800"/>
           </a:xfrm>
           <a:prstGeom prst="rect">
             <a:avLst/>
@@ -13241,7 +13390,7 @@
               </a:rPr>
               <a:t>2</a:t>
             </a:r>
-            <a:endParaRPr b="0" lang="fr-FR" sz="900" strike="noStrike" u="none">
+            <a:endParaRPr b="0" lang="en-US" sz="900" strike="noStrike" u="none">
               <a:solidFill>
                 <a:srgbClr val="000000"/>
               </a:solidFill>
@@ -13254,14 +13403,14 @@
       </p:sp>
       <p:sp>
         <p:nvSpPr>
-          <p:cNvPr id="68" name=""/>
+          <p:cNvPr id="69" name=""/>
           <p:cNvSpPr/>
           <p:nvPr/>
         </p:nvSpPr>
         <p:spPr>
           <a:xfrm>
             <a:off x="540000" y="1800000"/>
-            <a:ext cx="9475920" cy="3525840"/>
+            <a:ext cx="9475560" cy="3525840"/>
           </a:xfrm>
           <a:prstGeom prst="rect">
             <a:avLst/>
@@ -13318,7 +13467,7 @@
             <a:br>
               <a:rPr sz="2400"/>
             </a:br>
-            <a:endParaRPr b="0" lang="fr-FR" sz="2400" strike="noStrike" u="none">
+            <a:endParaRPr b="0" lang="en-US" sz="2400" strike="noStrike" u="none">
               <a:solidFill>
                 <a:srgbClr val="000000"/>
               </a:solidFill>
@@ -13366,7 +13515,7 @@
               </a:rPr>
               <a:t>: Reconstruct input parameters from measured data.</a:t>
             </a:r>
-            <a:endParaRPr b="0" lang="fr-FR" sz="2400" strike="noStrike" u="none">
+            <a:endParaRPr b="0" lang="en-US" sz="2400" strike="noStrike" u="none">
               <a:solidFill>
                 <a:srgbClr val="000000"/>
               </a:solidFill>
@@ -13428,7 +13577,7 @@
               </a:rPr>
               <a:t> </a:t>
             </a:r>
-            <a:endParaRPr b="0" lang="fr-FR" sz="2400" strike="noStrike" u="none">
+            <a:endParaRPr b="0" lang="en-US" sz="2400" strike="noStrike" u="none">
               <a:solidFill>
                 <a:srgbClr val="000000"/>
               </a:solidFill>
@@ -13463,7 +13612,7 @@
             <a:br>
               <a:rPr sz="2100"/>
             </a:br>
-            <a:endParaRPr b="0" lang="fr-FR" sz="2100" strike="noStrike" u="none">
+            <a:endParaRPr b="0" lang="en-US" sz="2100" strike="noStrike" u="none">
               <a:solidFill>
                 <a:srgbClr val="000000"/>
               </a:solidFill>
@@ -13500,7 +13649,7 @@
               </a:rPr>
               <a:t>Example: Predict sample composition from a scattering pattern.</a:t>
             </a:r>
-            <a:endParaRPr b="0" lang="fr-FR" sz="2400" strike="noStrike" u="none">
+            <a:endParaRPr b="0" lang="en-US" sz="2400" strike="noStrike" u="none">
               <a:solidFill>
                 <a:srgbClr val="000000"/>
               </a:solidFill>
@@ -13550,14 +13699,14 @@
       </p:grpSpPr>
       <p:sp>
         <p:nvSpPr>
-          <p:cNvPr id="69" name="Text 28"/>
+          <p:cNvPr id="70" name="Text 28"/>
           <p:cNvSpPr/>
           <p:nvPr/>
         </p:nvSpPr>
         <p:spPr>
           <a:xfrm>
             <a:off x="548640" y="384120"/>
-            <a:ext cx="9141840" cy="290520"/>
+            <a:ext cx="9141480" cy="290160"/>
           </a:xfrm>
           <a:prstGeom prst="rect">
             <a:avLst/>
@@ -13597,7 +13746,7 @@
               </a:rPr>
               <a:t>Realistic datasets</a:t>
             </a:r>
-            <a:endParaRPr b="0" lang="fr-FR" sz="1200" strike="noStrike" u="none">
+            <a:endParaRPr b="0" lang="en-US" sz="1200" strike="noStrike" u="none">
               <a:solidFill>
                 <a:srgbClr val="000000"/>
               </a:solidFill>
@@ -13610,14 +13759,14 @@
       </p:sp>
       <p:sp>
         <p:nvSpPr>
-          <p:cNvPr id="70" name="Text 29"/>
+          <p:cNvPr id="71" name="Text 29"/>
           <p:cNvSpPr/>
           <p:nvPr/>
         </p:nvSpPr>
         <p:spPr>
           <a:xfrm>
             <a:off x="548640" y="658440"/>
-            <a:ext cx="11062080" cy="820800"/>
+            <a:ext cx="11061720" cy="820440"/>
           </a:xfrm>
           <a:prstGeom prst="rect">
             <a:avLst/>
@@ -13663,7 +13812,7 @@
               </a:rPr>
               <a:t>Why Realistic AI Datasets?</a:t>
             </a:r>
-            <a:endParaRPr b="0" lang="fr-FR" sz="3000" strike="noStrike" u="none">
+            <a:endParaRPr b="0" lang="en-US" sz="3000" strike="noStrike" u="none">
               <a:solidFill>
                 <a:srgbClr val="000000"/>
               </a:solidFill>
@@ -13676,14 +13825,14 @@
       </p:sp>
       <p:sp>
         <p:nvSpPr>
-          <p:cNvPr id="71" name="Text 30"/>
+          <p:cNvPr id="72" name="Text 30"/>
           <p:cNvSpPr/>
           <p:nvPr/>
         </p:nvSpPr>
         <p:spPr>
           <a:xfrm>
             <a:off x="11185920" y="6446520"/>
-            <a:ext cx="455040" cy="272160"/>
+            <a:ext cx="454680" cy="271800"/>
           </a:xfrm>
           <a:prstGeom prst="rect">
             <a:avLst/>
@@ -13724,7 +13873,7 @@
               </a:rPr>
               <a:t>2</a:t>
             </a:r>
-            <a:endParaRPr b="0" lang="fr-FR" sz="900" strike="noStrike" u="none">
+            <a:endParaRPr b="0" lang="en-US" sz="900" strike="noStrike" u="none">
               <a:solidFill>
                 <a:srgbClr val="000000"/>
               </a:solidFill>
@@ -13737,14 +13886,14 @@
       </p:sp>
       <p:sp>
         <p:nvSpPr>
-          <p:cNvPr id="72" name=""/>
+          <p:cNvPr id="73" name=""/>
           <p:cNvSpPr/>
           <p:nvPr/>
         </p:nvSpPr>
         <p:spPr>
           <a:xfrm>
             <a:off x="540000" y="1800000"/>
-            <a:ext cx="10978560" cy="3160080"/>
+            <a:ext cx="10978200" cy="3160080"/>
           </a:xfrm>
           <a:prstGeom prst="rect">
             <a:avLst/>
@@ -13801,7 +13950,7 @@
             <a:br>
               <a:rPr sz="2400"/>
             </a:br>
-            <a:endParaRPr b="0" lang="fr-FR" sz="2400" strike="noStrike" u="none">
+            <a:endParaRPr b="0" lang="en-US" sz="2400" strike="noStrike" u="none">
               <a:solidFill>
                 <a:srgbClr val="000000"/>
               </a:solidFill>
@@ -13849,7 +13998,7 @@
               </a:rPr>
               <a:t>: Replace slow simulations with fast AI models.</a:t>
             </a:r>
-            <a:endParaRPr b="0" lang="fr-FR" sz="2400" strike="noStrike" u="none">
+            <a:endParaRPr b="0" lang="en-US" sz="2400" strike="noStrike" u="none">
               <a:solidFill>
                 <a:srgbClr val="000000"/>
               </a:solidFill>
@@ -13911,7 +14060,7 @@
               </a:rPr>
               <a:t> </a:t>
             </a:r>
-            <a:endParaRPr b="0" lang="fr-FR" sz="2400" strike="noStrike" u="none">
+            <a:endParaRPr b="0" lang="en-US" sz="2400" strike="noStrike" u="none">
               <a:solidFill>
                 <a:srgbClr val="000000"/>
               </a:solidFill>
@@ -13946,7 +14095,7 @@
             <a:br>
               <a:rPr sz="2100"/>
             </a:br>
-            <a:endParaRPr b="0" lang="fr-FR" sz="2100" strike="noStrike" u="none">
+            <a:endParaRPr b="0" lang="en-US" sz="2100" strike="noStrike" u="none">
               <a:solidFill>
                 <a:srgbClr val="000000"/>
               </a:solidFill>
@@ -13994,7 +14143,7 @@
               </a:rPr>
               <a:t>: Fast phase-space exploration.</a:t>
             </a:r>
-            <a:endParaRPr b="0" lang="fr-FR" sz="2400" strike="noStrike" u="none">
+            <a:endParaRPr b="0" lang="en-US" sz="2400" strike="noStrike" u="none">
               <a:solidFill>
                 <a:srgbClr val="000000"/>
               </a:solidFill>

--- a/21_September_Monday/01_Seeking_for_AI/01_Seeking_for_AI.pptx
+++ b/21_September_Monday/01_Seeking_for_AI/01_Seeking_for_AI.pptx
@@ -86,7 +86,227 @@
                 <a:uFillTx/>
                 <a:latin typeface="Arial"/>
               </a:rPr>
-              <a:t>Click to move the slide</a:t>
+              <a:t>C</a:t>
+            </a:r>
+            <a:r>
+              <a:rPr b="0" lang="en-US" sz="4400" strike="noStrike" u="none">
+                <a:solidFill>
+                  <a:srgbClr val="000000"/>
+                </a:solidFill>
+                <a:effectLst/>
+                <a:uFillTx/>
+                <a:latin typeface="Arial"/>
+              </a:rPr>
+              <a:t>li</a:t>
+            </a:r>
+            <a:r>
+              <a:rPr b="0" lang="en-US" sz="4400" strike="noStrike" u="none">
+                <a:solidFill>
+                  <a:srgbClr val="000000"/>
+                </a:solidFill>
+                <a:effectLst/>
+                <a:uFillTx/>
+                <a:latin typeface="Arial"/>
+              </a:rPr>
+              <a:t>c</a:t>
+            </a:r>
+            <a:r>
+              <a:rPr b="0" lang="en-US" sz="4400" strike="noStrike" u="none">
+                <a:solidFill>
+                  <a:srgbClr val="000000"/>
+                </a:solidFill>
+                <a:effectLst/>
+                <a:uFillTx/>
+                <a:latin typeface="Arial"/>
+              </a:rPr>
+              <a:t>k</a:t>
+            </a:r>
+            <a:r>
+              <a:rPr b="0" lang="en-US" sz="4400" strike="noStrike" u="none">
+                <a:solidFill>
+                  <a:srgbClr val="000000"/>
+                </a:solidFill>
+                <a:effectLst/>
+                <a:uFillTx/>
+                <a:latin typeface="Arial"/>
+              </a:rPr>
+              <a:t> </a:t>
+            </a:r>
+            <a:r>
+              <a:rPr b="0" lang="en-US" sz="4400" strike="noStrike" u="none">
+                <a:solidFill>
+                  <a:srgbClr val="000000"/>
+                </a:solidFill>
+                <a:effectLst/>
+                <a:uFillTx/>
+                <a:latin typeface="Arial"/>
+              </a:rPr>
+              <a:t>t</a:t>
+            </a:r>
+            <a:r>
+              <a:rPr b="0" lang="en-US" sz="4400" strike="noStrike" u="none">
+                <a:solidFill>
+                  <a:srgbClr val="000000"/>
+                </a:solidFill>
+                <a:effectLst/>
+                <a:uFillTx/>
+                <a:latin typeface="Arial"/>
+              </a:rPr>
+              <a:t>o</a:t>
+            </a:r>
+            <a:r>
+              <a:rPr b="0" lang="en-US" sz="4400" strike="noStrike" u="none">
+                <a:solidFill>
+                  <a:srgbClr val="000000"/>
+                </a:solidFill>
+                <a:effectLst/>
+                <a:uFillTx/>
+                <a:latin typeface="Arial"/>
+              </a:rPr>
+              <a:t> </a:t>
+            </a:r>
+            <a:r>
+              <a:rPr b="0" lang="en-US" sz="4400" strike="noStrike" u="none">
+                <a:solidFill>
+                  <a:srgbClr val="000000"/>
+                </a:solidFill>
+                <a:effectLst/>
+                <a:uFillTx/>
+                <a:latin typeface="Arial"/>
+              </a:rPr>
+              <a:t>m</a:t>
+            </a:r>
+            <a:r>
+              <a:rPr b="0" lang="en-US" sz="4400" strike="noStrike" u="none">
+                <a:solidFill>
+                  <a:srgbClr val="000000"/>
+                </a:solidFill>
+                <a:effectLst/>
+                <a:uFillTx/>
+                <a:latin typeface="Arial"/>
+              </a:rPr>
+              <a:t>o</a:t>
+            </a:r>
+            <a:r>
+              <a:rPr b="0" lang="en-US" sz="4400" strike="noStrike" u="none">
+                <a:solidFill>
+                  <a:srgbClr val="000000"/>
+                </a:solidFill>
+                <a:effectLst/>
+                <a:uFillTx/>
+                <a:latin typeface="Arial"/>
+              </a:rPr>
+              <a:t>v</a:t>
+            </a:r>
+            <a:r>
+              <a:rPr b="0" lang="en-US" sz="4400" strike="noStrike" u="none">
+                <a:solidFill>
+                  <a:srgbClr val="000000"/>
+                </a:solidFill>
+                <a:effectLst/>
+                <a:uFillTx/>
+                <a:latin typeface="Arial"/>
+              </a:rPr>
+              <a:t>e</a:t>
+            </a:r>
+            <a:r>
+              <a:rPr b="0" lang="en-US" sz="4400" strike="noStrike" u="none">
+                <a:solidFill>
+                  <a:srgbClr val="000000"/>
+                </a:solidFill>
+                <a:effectLst/>
+                <a:uFillTx/>
+                <a:latin typeface="Arial"/>
+              </a:rPr>
+              <a:t> </a:t>
+            </a:r>
+            <a:r>
+              <a:rPr b="0" lang="en-US" sz="4400" strike="noStrike" u="none">
+                <a:solidFill>
+                  <a:srgbClr val="000000"/>
+                </a:solidFill>
+                <a:effectLst/>
+                <a:uFillTx/>
+                <a:latin typeface="Arial"/>
+              </a:rPr>
+              <a:t>t</a:t>
+            </a:r>
+            <a:r>
+              <a:rPr b="0" lang="en-US" sz="4400" strike="noStrike" u="none">
+                <a:solidFill>
+                  <a:srgbClr val="000000"/>
+                </a:solidFill>
+                <a:effectLst/>
+                <a:uFillTx/>
+                <a:latin typeface="Arial"/>
+              </a:rPr>
+              <a:t>h</a:t>
+            </a:r>
+            <a:r>
+              <a:rPr b="0" lang="en-US" sz="4400" strike="noStrike" u="none">
+                <a:solidFill>
+                  <a:srgbClr val="000000"/>
+                </a:solidFill>
+                <a:effectLst/>
+                <a:uFillTx/>
+                <a:latin typeface="Arial"/>
+              </a:rPr>
+              <a:t>e</a:t>
+            </a:r>
+            <a:r>
+              <a:rPr b="0" lang="en-US" sz="4400" strike="noStrike" u="none">
+                <a:solidFill>
+                  <a:srgbClr val="000000"/>
+                </a:solidFill>
+                <a:effectLst/>
+                <a:uFillTx/>
+                <a:latin typeface="Arial"/>
+              </a:rPr>
+              <a:t> </a:t>
+            </a:r>
+            <a:r>
+              <a:rPr b="0" lang="en-US" sz="4400" strike="noStrike" u="none">
+                <a:solidFill>
+                  <a:srgbClr val="000000"/>
+                </a:solidFill>
+                <a:effectLst/>
+                <a:uFillTx/>
+                <a:latin typeface="Arial"/>
+              </a:rPr>
+              <a:t>s</a:t>
+            </a:r>
+            <a:r>
+              <a:rPr b="0" lang="en-US" sz="4400" strike="noStrike" u="none">
+                <a:solidFill>
+                  <a:srgbClr val="000000"/>
+                </a:solidFill>
+                <a:effectLst/>
+                <a:uFillTx/>
+                <a:latin typeface="Arial"/>
+              </a:rPr>
+              <a:t>li</a:t>
+            </a:r>
+            <a:r>
+              <a:rPr b="0" lang="en-US" sz="4400" strike="noStrike" u="none">
+                <a:solidFill>
+                  <a:srgbClr val="000000"/>
+                </a:solidFill>
+                <a:effectLst/>
+                <a:uFillTx/>
+                <a:latin typeface="Arial"/>
+              </a:rPr>
+              <a:t>d</a:t>
+            </a:r>
+            <a:r>
+              <a:rPr b="0" lang="en-US" sz="4400" strike="noStrike" u="none">
+                <a:solidFill>
+                  <a:srgbClr val="000000"/>
+                </a:solidFill>
+                <a:effectLst/>
+                <a:uFillTx/>
+                <a:latin typeface="Arial"/>
+              </a:rPr>
+              <a:t>e</a:t>
             </a:r>
             <a:endParaRPr b="0" lang="en-US" sz="4400" strike="noStrike" u="none">
               <a:solidFill>
@@ -381,7 +601,7 @@
             <a:pPr indent="0" algn="r">
               <a:buNone/>
             </a:pPr>
-            <a:fld id="{FC9DB31D-555C-461F-9D45-BD8CD92D9C3E}" type="slidenum">
+            <a:fld id="{5F995BE8-B528-4282-8B7C-869B171C3BF5}" type="slidenum">
               <a:rPr b="0" lang="en-US" sz="1400" strike="noStrike" u="none">
                 <a:solidFill>
                   <a:srgbClr val="000000"/>
@@ -548,7 +768,7 @@
                 <a:tab algn="l" pos="0"/>
               </a:tabLst>
             </a:pPr>
-            <a:fld id="{E744846D-4721-45EB-9655-55FCBE05A417}" type="slidenum">
+            <a:fld id="{FBF83150-C22C-4A09-A537-DEC7245341F1}" type="slidenum">
               <a:rPr b="0" lang="en-US" sz="1800" strike="noStrike" u="none">
                 <a:solidFill>
                   <a:schemeClr val="dk1"/>
@@ -577,6 +797,173 @@
 </file>
 
 <file path=ppt/notesSlides/notesSlide10.xml><?xml version="1.0" encoding="utf-8"?>
+<p:notes xmlns:a="http://schemas.openxmlformats.org/drawingml/2006/main" xmlns:p="http://schemas.openxmlformats.org/presentationml/2006/main" xmlns:r="http://schemas.openxmlformats.org/officeDocument/2006/relationships" xmlns:p14="http://schemas.microsoft.com/office/powerpoint/2010/main" xmlns:p15="http://schemas.microsoft.com/office/powerpoint/2012/main" xmlns:mc="http://schemas.openxmlformats.org/markup-compatibility/2006">
+  <p:cSld>
+    <p:spTree>
+      <p:nvGrpSpPr>
+        <p:cNvPr id="1" name=""/>
+        <p:cNvGrpSpPr/>
+        <p:nvPr/>
+      </p:nvGrpSpPr>
+      <p:grpSpPr>
+        <a:xfrm>
+          <a:off x="0" y="0"/>
+          <a:ext cx="0" cy="0"/>
+          <a:chOff x="0" y="0"/>
+          <a:chExt cx="0" cy="0"/>
+        </a:xfrm>
+      </p:grpSpPr>
+      <p:sp>
+        <p:nvSpPr>
+          <p:cNvPr id="146" name="PlaceHolder 1"/>
+          <p:cNvSpPr>
+            <a:spLocks noGrp="1"/>
+          </p:cNvSpPr>
+          <p:nvPr>
+            <p:ph type="sldImg"/>
+          </p:nvPr>
+        </p:nvSpPr>
+        <p:spPr>
+          <a:xfrm>
+            <a:off x="-360" y="-360"/>
+            <a:ext cx="0" cy="0"/>
+          </a:xfrm>
+          <a:prstGeom prst="rect">
+            <a:avLst/>
+          </a:prstGeom>
+          <a:ln w="0">
+            <a:noFill/>
+          </a:ln>
+        </p:spPr>
+      </p:sp>
+      <p:sp>
+        <p:nvSpPr>
+          <p:cNvPr id="147" name="PlaceHolder 2"/>
+          <p:cNvSpPr>
+            <a:spLocks noGrp="1"/>
+          </p:cNvSpPr>
+          <p:nvPr>
+            <p:ph type="body"/>
+          </p:nvPr>
+        </p:nvSpPr>
+        <p:spPr>
+          <a:xfrm>
+            <a:off x="0" y="0"/>
+            <a:ext cx="0" cy="0"/>
+          </a:xfrm>
+          <a:prstGeom prst="rect">
+            <a:avLst/>
+          </a:prstGeom>
+          <a:noFill/>
+          <a:ln w="0">
+            <a:noFill/>
+          </a:ln>
+        </p:spPr>
+        <p:txBody>
+          <a:bodyPr lIns="90000" rIns="90000" tIns="-45000" bIns="-45000" anchor="t">
+            <a:noAutofit/>
+          </a:bodyPr>
+          <a:p>
+            <a:pPr indent="0">
+              <a:buNone/>
+            </a:pPr>
+            <a:endParaRPr b="0" lang="en-US" sz="1800" strike="noStrike" u="none">
+              <a:solidFill>
+                <a:srgbClr val="000000"/>
+              </a:solidFill>
+              <a:effectLst/>
+              <a:uFillTx/>
+              <a:latin typeface="Arial"/>
+            </a:endParaRPr>
+          </a:p>
+        </p:txBody>
+      </p:sp>
+      <p:sp>
+        <p:nvSpPr>
+          <p:cNvPr id="148" name="PlaceHolder 3"/>
+          <p:cNvSpPr>
+            <a:spLocks noGrp="1"/>
+          </p:cNvSpPr>
+          <p:nvPr>
+            <p:ph type="sldNum" idx="11"/>
+          </p:nvPr>
+        </p:nvSpPr>
+        <p:spPr>
+          <a:xfrm>
+            <a:off x="0" y="0"/>
+            <a:ext cx="0" cy="0"/>
+          </a:xfrm>
+          <a:prstGeom prst="rect">
+            <a:avLst/>
+          </a:prstGeom>
+          <a:noFill/>
+          <a:ln w="0">
+            <a:noFill/>
+          </a:ln>
+        </p:spPr>
+        <p:txBody>
+          <a:bodyPr lIns="90000" rIns="90000" tIns="-45000" bIns="-45000" anchor="t">
+            <a:noAutofit/>
+          </a:bodyPr>
+          <a:lstStyle>
+            <a:lvl1pPr indent="0" algn="r" defTabSz="914400">
+              <a:lnSpc>
+                <a:spcPct val="100000"/>
+              </a:lnSpc>
+              <a:buNone/>
+              <a:tabLst>
+                <a:tab algn="l" pos="0"/>
+              </a:tabLst>
+              <a:defRPr b="0" lang="en-US" sz="1800" strike="noStrike" u="none">
+                <a:solidFill>
+                  <a:schemeClr val="dk1"/>
+                </a:solidFill>
+                <a:effectLst/>
+                <a:uFillTx/>
+                <a:latin typeface="+mn-lt"/>
+                <a:ea typeface="+mn-ea"/>
+              </a:defRPr>
+            </a:lvl1pPr>
+          </a:lstStyle>
+          <a:p>
+            <a:pPr indent="0" algn="r" defTabSz="914400">
+              <a:lnSpc>
+                <a:spcPct val="100000"/>
+              </a:lnSpc>
+              <a:buNone/>
+              <a:tabLst>
+                <a:tab algn="l" pos="0"/>
+              </a:tabLst>
+            </a:pPr>
+            <a:fld id="{E0040A6D-C9CB-4103-89A2-16D2B0343026}" type="slidenum">
+              <a:rPr b="0" lang="en-US" sz="1800" strike="noStrike" u="none">
+                <a:solidFill>
+                  <a:schemeClr val="dk1"/>
+                </a:solidFill>
+                <a:effectLst/>
+                <a:uFillTx/>
+                <a:latin typeface="+mn-lt"/>
+                <a:ea typeface="+mn-ea"/>
+              </a:rPr>
+              <a:t>&lt;number&gt;</a:t>
+            </a:fld>
+            <a:endParaRPr b="0" lang="en-US" sz="1800" strike="noStrike" u="none">
+              <a:solidFill>
+                <a:srgbClr val="000000"/>
+              </a:solidFill>
+              <a:effectLst/>
+              <a:uFillTx/>
+              <a:latin typeface="Times New Roman"/>
+            </a:endParaRPr>
+          </a:p>
+        </p:txBody>
+      </p:sp>
+    </p:spTree>
+  </p:cSld>
+</p:notes>
+</file>
+
+<file path=ppt/notesSlides/notesSlide11.xml><?xml version="1.0" encoding="utf-8"?>
 <p:notes xmlns:a="http://schemas.openxmlformats.org/drawingml/2006/main" xmlns:p="http://schemas.openxmlformats.org/presentationml/2006/main" xmlns:r="http://schemas.openxmlformats.org/officeDocument/2006/relationships" xmlns:p14="http://schemas.microsoft.com/office/powerpoint/2010/main" xmlns:p15="http://schemas.microsoft.com/office/powerpoint/2012/main" xmlns:mc="http://schemas.openxmlformats.org/markup-compatibility/2006">
   <p:cSld>
     <p:spTree>
@@ -715,7 +1102,7 @@
                 <a:tab algn="l" pos="0"/>
               </a:tabLst>
             </a:pPr>
-            <a:fld id="{1FB74336-82B5-4514-BAEC-E0A6EEFB0BDC}" type="slidenum">
+            <a:fld id="{F5110A74-B3D0-4670-A1EC-2CC850767035}" type="slidenum">
               <a:rPr b="0" lang="en-US" sz="1800" strike="noStrike" u="none">
                 <a:solidFill>
                   <a:schemeClr val="dk1"/>
@@ -743,7 +1130,7 @@
 </p:notes>
 </file>
 
-<file path=ppt/notesSlides/notesSlide17.xml><?xml version="1.0" encoding="utf-8"?>
+<file path=ppt/notesSlides/notesSlide12.xml><?xml version="1.0" encoding="utf-8"?>
 <p:notes xmlns:a="http://schemas.openxmlformats.org/drawingml/2006/main" xmlns:p="http://schemas.openxmlformats.org/presentationml/2006/main" xmlns:r="http://schemas.openxmlformats.org/officeDocument/2006/relationships" xmlns:p14="http://schemas.microsoft.com/office/powerpoint/2010/main" xmlns:p15="http://schemas.microsoft.com/office/powerpoint/2012/main" xmlns:mc="http://schemas.openxmlformats.org/markup-compatibility/2006">
   <p:cSld>
     <p:spTree>
@@ -772,8 +1159,8 @@
         </p:nvSpPr>
         <p:spPr>
           <a:xfrm>
-            <a:off x="0" y="0"/>
-            <a:ext cx="0" cy="0"/>
+            <a:off x="-720" y="-720"/>
+            <a:ext cx="720" cy="720"/>
           </a:xfrm>
           <a:prstGeom prst="rect">
             <a:avLst/>
@@ -882,7 +1269,174 @@
                 <a:tab algn="l" pos="0"/>
               </a:tabLst>
             </a:pPr>
-            <a:fld id="{8438EBB0-F383-424E-97BC-D47039784867}" type="slidenum">
+            <a:fld id="{D0887AEF-C24E-496B-97FD-8CD36D274F38}" type="slidenum">
+              <a:rPr b="0" lang="en-US" sz="1800" strike="noStrike" u="none">
+                <a:solidFill>
+                  <a:schemeClr val="dk1"/>
+                </a:solidFill>
+                <a:effectLst/>
+                <a:uFillTx/>
+                <a:latin typeface="+mn-lt"/>
+                <a:ea typeface="+mn-ea"/>
+              </a:rPr>
+              <a:t>&lt;number&gt;</a:t>
+            </a:fld>
+            <a:endParaRPr b="0" lang="en-US" sz="1800" strike="noStrike" u="none">
+              <a:solidFill>
+                <a:srgbClr val="000000"/>
+              </a:solidFill>
+              <a:effectLst/>
+              <a:uFillTx/>
+              <a:latin typeface="Times New Roman"/>
+            </a:endParaRPr>
+          </a:p>
+        </p:txBody>
+      </p:sp>
+    </p:spTree>
+  </p:cSld>
+</p:notes>
+</file>
+
+<file path=ppt/notesSlides/notesSlide17.xml><?xml version="1.0" encoding="utf-8"?>
+<p:notes xmlns:a="http://schemas.openxmlformats.org/drawingml/2006/main" xmlns:p="http://schemas.openxmlformats.org/presentationml/2006/main" xmlns:r="http://schemas.openxmlformats.org/officeDocument/2006/relationships" xmlns:p14="http://schemas.microsoft.com/office/powerpoint/2010/main" xmlns:p15="http://schemas.microsoft.com/office/powerpoint/2012/main" xmlns:mc="http://schemas.openxmlformats.org/markup-compatibility/2006">
+  <p:cSld>
+    <p:spTree>
+      <p:nvGrpSpPr>
+        <p:cNvPr id="1" name=""/>
+        <p:cNvGrpSpPr/>
+        <p:nvPr/>
+      </p:nvGrpSpPr>
+      <p:grpSpPr>
+        <a:xfrm>
+          <a:off x="0" y="0"/>
+          <a:ext cx="0" cy="0"/>
+          <a:chOff x="0" y="0"/>
+          <a:chExt cx="0" cy="0"/>
+        </a:xfrm>
+      </p:grpSpPr>
+      <p:sp>
+        <p:nvSpPr>
+          <p:cNvPr id="155" name="PlaceHolder 1"/>
+          <p:cNvSpPr>
+            <a:spLocks noGrp="1"/>
+          </p:cNvSpPr>
+          <p:nvPr>
+            <p:ph type="sldImg"/>
+          </p:nvPr>
+        </p:nvSpPr>
+        <p:spPr>
+          <a:xfrm>
+            <a:off x="0" y="0"/>
+            <a:ext cx="0" cy="0"/>
+          </a:xfrm>
+          <a:prstGeom prst="rect">
+            <a:avLst/>
+          </a:prstGeom>
+          <a:ln w="0">
+            <a:noFill/>
+          </a:ln>
+        </p:spPr>
+      </p:sp>
+      <p:sp>
+        <p:nvSpPr>
+          <p:cNvPr id="156" name="PlaceHolder 2"/>
+          <p:cNvSpPr>
+            <a:spLocks noGrp="1"/>
+          </p:cNvSpPr>
+          <p:nvPr>
+            <p:ph type="body"/>
+          </p:nvPr>
+        </p:nvSpPr>
+        <p:spPr>
+          <a:xfrm>
+            <a:off x="0" y="0"/>
+            <a:ext cx="0" cy="0"/>
+          </a:xfrm>
+          <a:prstGeom prst="rect">
+            <a:avLst/>
+          </a:prstGeom>
+          <a:noFill/>
+          <a:ln w="0">
+            <a:noFill/>
+          </a:ln>
+        </p:spPr>
+        <p:txBody>
+          <a:bodyPr lIns="90000" rIns="90000" tIns="-45000" bIns="-45000" anchor="t">
+            <a:noAutofit/>
+          </a:bodyPr>
+          <a:p>
+            <a:pPr indent="0">
+              <a:buNone/>
+            </a:pPr>
+            <a:endParaRPr b="0" lang="en-US" sz="1800" strike="noStrike" u="none">
+              <a:solidFill>
+                <a:srgbClr val="000000"/>
+              </a:solidFill>
+              <a:effectLst/>
+              <a:uFillTx/>
+              <a:latin typeface="Arial"/>
+            </a:endParaRPr>
+          </a:p>
+        </p:txBody>
+      </p:sp>
+      <p:sp>
+        <p:nvSpPr>
+          <p:cNvPr id="157" name="PlaceHolder 3"/>
+          <p:cNvSpPr>
+            <a:spLocks noGrp="1"/>
+          </p:cNvSpPr>
+          <p:nvPr>
+            <p:ph type="sldNum" idx="14"/>
+          </p:nvPr>
+        </p:nvSpPr>
+        <p:spPr>
+          <a:xfrm>
+            <a:off x="0" y="0"/>
+            <a:ext cx="0" cy="0"/>
+          </a:xfrm>
+          <a:prstGeom prst="rect">
+            <a:avLst/>
+          </a:prstGeom>
+          <a:noFill/>
+          <a:ln w="0">
+            <a:noFill/>
+          </a:ln>
+        </p:spPr>
+        <p:txBody>
+          <a:bodyPr lIns="90000" rIns="90000" tIns="-45000" bIns="-45000" anchor="t">
+            <a:noAutofit/>
+          </a:bodyPr>
+          <a:lstStyle>
+            <a:lvl1pPr indent="0" algn="r" defTabSz="914400">
+              <a:lnSpc>
+                <a:spcPct val="100000"/>
+              </a:lnSpc>
+              <a:buNone/>
+              <a:tabLst>
+                <a:tab algn="l" pos="0"/>
+              </a:tabLst>
+              <a:defRPr b="0" lang="en-US" sz="1800" strike="noStrike" u="none">
+                <a:solidFill>
+                  <a:schemeClr val="dk1"/>
+                </a:solidFill>
+                <a:effectLst/>
+                <a:uFillTx/>
+                <a:latin typeface="+mn-lt"/>
+                <a:ea typeface="+mn-ea"/>
+              </a:defRPr>
+            </a:lvl1pPr>
+          </a:lstStyle>
+          <a:p>
+            <a:pPr indent="0" algn="r" defTabSz="914400">
+              <a:lnSpc>
+                <a:spcPct val="100000"/>
+              </a:lnSpc>
+              <a:buNone/>
+              <a:tabLst>
+                <a:tab algn="l" pos="0"/>
+              </a:tabLst>
+            </a:pPr>
+            <a:fld id="{449F13BA-4CB3-4457-B00F-3469ABC1D983}" type="slidenum">
               <a:rPr b="0" lang="en-US" sz="1800" strike="noStrike" u="none">
                 <a:solidFill>
                   <a:schemeClr val="dk1"/>
@@ -1049,7 +1603,7 @@
                 <a:tab algn="l" pos="0"/>
               </a:tabLst>
             </a:pPr>
-            <a:fld id="{99EFD446-17B7-4AB1-8022-B7D77CFBE562}" type="slidenum">
+            <a:fld id="{ABEF3CED-0B16-4DF7-AF13-2DB3EDF07EDC}" type="slidenum">
               <a:rPr b="0" lang="en-US" sz="1800" strike="noStrike" u="none">
                 <a:solidFill>
                   <a:schemeClr val="dk1"/>
@@ -1216,7 +1770,7 @@
                 <a:tab algn="l" pos="0"/>
               </a:tabLst>
             </a:pPr>
-            <a:fld id="{28552152-D44F-47BA-B541-F5CAB0A732FD}" type="slidenum">
+            <a:fld id="{85627BA7-BEEC-488D-B887-12C9D2ADDA71}" type="slidenum">
               <a:rPr b="0" lang="en-US" sz="1800" strike="noStrike" u="none">
                 <a:solidFill>
                   <a:schemeClr val="dk1"/>
@@ -1383,7 +1937,7 @@
                 <a:tab algn="l" pos="0"/>
               </a:tabLst>
             </a:pPr>
-            <a:fld id="{A95A3325-13DF-40E7-8919-AC163F616BBE}" type="slidenum">
+            <a:fld id="{427D2AC8-2FDF-459A-9000-BAABA3E4DFAA}" type="slidenum">
               <a:rPr b="0" lang="en-US" sz="1800" strike="noStrike" u="none">
                 <a:solidFill>
                   <a:schemeClr val="dk1"/>
@@ -1550,7 +2104,7 @@
                 <a:tab algn="l" pos="0"/>
               </a:tabLst>
             </a:pPr>
-            <a:fld id="{7A001CBD-1396-4E51-815B-E4B38D381888}" type="slidenum">
+            <a:fld id="{88620420-CDDB-4682-9260-73B376803C27}" type="slidenum">
               <a:rPr b="0" lang="en-US" sz="1800" strike="noStrike" u="none">
                 <a:solidFill>
                   <a:schemeClr val="dk1"/>
@@ -1717,7 +2271,7 @@
                 <a:tab algn="l" pos="0"/>
               </a:tabLst>
             </a:pPr>
-            <a:fld id="{C077B06D-2306-49B8-9E60-475C1CD6C2D5}" type="slidenum">
+            <a:fld id="{4CD20ABC-F516-438E-A830-88E79E905F32}" type="slidenum">
               <a:rPr b="0" lang="en-US" sz="1800" strike="noStrike" u="none">
                 <a:solidFill>
                   <a:schemeClr val="dk1"/>
@@ -1745,7 +2299,7 @@
 </p:notes>
 </file>
 
-<file path=ppt/notesSlides/notesSlide8.xml><?xml version="1.0" encoding="utf-8"?>
+<file path=ppt/notesSlides/notesSlide9.xml><?xml version="1.0" encoding="utf-8"?>
 <p:notes xmlns:a="http://schemas.openxmlformats.org/drawingml/2006/main" xmlns:p="http://schemas.openxmlformats.org/presentationml/2006/main" xmlns:r="http://schemas.openxmlformats.org/officeDocument/2006/relationships" xmlns:p14="http://schemas.microsoft.com/office/powerpoint/2010/main" xmlns:p15="http://schemas.microsoft.com/office/powerpoint/2012/main" xmlns:mc="http://schemas.openxmlformats.org/markup-compatibility/2006">
   <p:cSld>
     <p:spTree>
@@ -1884,174 +2438,7 @@
                 <a:tab algn="l" pos="0"/>
               </a:tabLst>
             </a:pPr>
-            <a:fld id="{43255A38-9385-41AA-89C6-6AFB0540D153}" type="slidenum">
-              <a:rPr b="0" lang="en-US" sz="1800" strike="noStrike" u="none">
-                <a:solidFill>
-                  <a:schemeClr val="dk1"/>
-                </a:solidFill>
-                <a:effectLst/>
-                <a:uFillTx/>
-                <a:latin typeface="+mn-lt"/>
-                <a:ea typeface="+mn-ea"/>
-              </a:rPr>
-              <a:t>&lt;number&gt;</a:t>
-            </a:fld>
-            <a:endParaRPr b="0" lang="en-US" sz="1800" strike="noStrike" u="none">
-              <a:solidFill>
-                <a:srgbClr val="000000"/>
-              </a:solidFill>
-              <a:effectLst/>
-              <a:uFillTx/>
-              <a:latin typeface="Times New Roman"/>
-            </a:endParaRPr>
-          </a:p>
-        </p:txBody>
-      </p:sp>
-    </p:spTree>
-  </p:cSld>
-</p:notes>
-</file>
-
-<file path=ppt/notesSlides/notesSlide9.xml><?xml version="1.0" encoding="utf-8"?>
-<p:notes xmlns:a="http://schemas.openxmlformats.org/drawingml/2006/main" xmlns:p="http://schemas.openxmlformats.org/presentationml/2006/main" xmlns:r="http://schemas.openxmlformats.org/officeDocument/2006/relationships" xmlns:p14="http://schemas.microsoft.com/office/powerpoint/2010/main" xmlns:p15="http://schemas.microsoft.com/office/powerpoint/2012/main" xmlns:mc="http://schemas.openxmlformats.org/markup-compatibility/2006">
-  <p:cSld>
-    <p:spTree>
-      <p:nvGrpSpPr>
-        <p:cNvPr id="1" name=""/>
-        <p:cNvGrpSpPr/>
-        <p:nvPr/>
-      </p:nvGrpSpPr>
-      <p:grpSpPr>
-        <a:xfrm>
-          <a:off x="0" y="0"/>
-          <a:ext cx="0" cy="0"/>
-          <a:chOff x="0" y="0"/>
-          <a:chExt cx="0" cy="0"/>
-        </a:xfrm>
-      </p:grpSpPr>
-      <p:sp>
-        <p:nvSpPr>
-          <p:cNvPr id="146" name="PlaceHolder 1"/>
-          <p:cNvSpPr>
-            <a:spLocks noGrp="1"/>
-          </p:cNvSpPr>
-          <p:nvPr>
-            <p:ph type="sldImg"/>
-          </p:nvPr>
-        </p:nvSpPr>
-        <p:spPr>
-          <a:xfrm>
-            <a:off x="-360" y="-360"/>
-            <a:ext cx="0" cy="0"/>
-          </a:xfrm>
-          <a:prstGeom prst="rect">
-            <a:avLst/>
-          </a:prstGeom>
-          <a:ln w="0">
-            <a:noFill/>
-          </a:ln>
-        </p:spPr>
-      </p:sp>
-      <p:sp>
-        <p:nvSpPr>
-          <p:cNvPr id="147" name="PlaceHolder 2"/>
-          <p:cNvSpPr>
-            <a:spLocks noGrp="1"/>
-          </p:cNvSpPr>
-          <p:nvPr>
-            <p:ph type="body"/>
-          </p:nvPr>
-        </p:nvSpPr>
-        <p:spPr>
-          <a:xfrm>
-            <a:off x="0" y="0"/>
-            <a:ext cx="0" cy="0"/>
-          </a:xfrm>
-          <a:prstGeom prst="rect">
-            <a:avLst/>
-          </a:prstGeom>
-          <a:noFill/>
-          <a:ln w="0">
-            <a:noFill/>
-          </a:ln>
-        </p:spPr>
-        <p:txBody>
-          <a:bodyPr lIns="90000" rIns="90000" tIns="-45000" bIns="-45000" anchor="t">
-            <a:noAutofit/>
-          </a:bodyPr>
-          <a:p>
-            <a:pPr indent="0">
-              <a:buNone/>
-            </a:pPr>
-            <a:endParaRPr b="0" lang="en-US" sz="1800" strike="noStrike" u="none">
-              <a:solidFill>
-                <a:srgbClr val="000000"/>
-              </a:solidFill>
-              <a:effectLst/>
-              <a:uFillTx/>
-              <a:latin typeface="Arial"/>
-            </a:endParaRPr>
-          </a:p>
-        </p:txBody>
-      </p:sp>
-      <p:sp>
-        <p:nvSpPr>
-          <p:cNvPr id="148" name="PlaceHolder 3"/>
-          <p:cNvSpPr>
-            <a:spLocks noGrp="1"/>
-          </p:cNvSpPr>
-          <p:nvPr>
-            <p:ph type="sldNum" idx="11"/>
-          </p:nvPr>
-        </p:nvSpPr>
-        <p:spPr>
-          <a:xfrm>
-            <a:off x="0" y="0"/>
-            <a:ext cx="0" cy="0"/>
-          </a:xfrm>
-          <a:prstGeom prst="rect">
-            <a:avLst/>
-          </a:prstGeom>
-          <a:noFill/>
-          <a:ln w="0">
-            <a:noFill/>
-          </a:ln>
-        </p:spPr>
-        <p:txBody>
-          <a:bodyPr lIns="90000" rIns="90000" tIns="-45000" bIns="-45000" anchor="t">
-            <a:noAutofit/>
-          </a:bodyPr>
-          <a:lstStyle>
-            <a:lvl1pPr indent="0" algn="r" defTabSz="914400">
-              <a:lnSpc>
-                <a:spcPct val="100000"/>
-              </a:lnSpc>
-              <a:buNone/>
-              <a:tabLst>
-                <a:tab algn="l" pos="0"/>
-              </a:tabLst>
-              <a:defRPr b="0" lang="en-US" sz="1800" strike="noStrike" u="none">
-                <a:solidFill>
-                  <a:schemeClr val="dk1"/>
-                </a:solidFill>
-                <a:effectLst/>
-                <a:uFillTx/>
-                <a:latin typeface="+mn-lt"/>
-                <a:ea typeface="+mn-ea"/>
-              </a:defRPr>
-            </a:lvl1pPr>
-          </a:lstStyle>
-          <a:p>
-            <a:pPr indent="0" algn="r" defTabSz="914400">
-              <a:lnSpc>
-                <a:spcPct val="100000"/>
-              </a:lnSpc>
-              <a:buNone/>
-              <a:tabLst>
-                <a:tab algn="l" pos="0"/>
-              </a:tabLst>
-            </a:pPr>
-            <a:fld id="{F0B194AB-85C3-40F2-8E87-F63BF88099E2}" type="slidenum">
+            <a:fld id="{BEF22BCD-8E94-4EAF-AE21-DD67E45DD5F8}" type="slidenum">
               <a:rPr b="0" lang="en-US" sz="1800" strike="noStrike" u="none">
                 <a:solidFill>
                   <a:schemeClr val="dk1"/>
@@ -2112,7 +2499,7 @@
         <p:spPr>
           <a:xfrm>
             <a:off x="548640" y="6446880"/>
-            <a:ext cx="6398280" cy="271800"/>
+            <a:ext cx="6397920" cy="271440"/>
           </a:xfrm>
           <a:prstGeom prst="rect">
             <a:avLst/>
@@ -2173,7 +2560,7 @@
         <p:spPr>
           <a:xfrm>
             <a:off x="11185920" y="6446880"/>
-            <a:ext cx="454680" cy="271800"/>
+            <a:ext cx="454320" cy="271440"/>
           </a:xfrm>
           <a:prstGeom prst="rect">
             <a:avLst/>
@@ -2239,7 +2626,7 @@
         <p:spPr>
           <a:xfrm>
             <a:off x="10375920" y="356040"/>
-            <a:ext cx="1267560" cy="649080"/>
+            <a:ext cx="1267200" cy="648720"/>
           </a:xfrm>
           <a:prstGeom prst="rect">
             <a:avLst/>
@@ -2263,7 +2650,7 @@
         <p:spPr>
           <a:xfrm>
             <a:off x="609480" y="273600"/>
-            <a:ext cx="10971000" cy="1143360"/>
+            <a:ext cx="10970640" cy="1143000"/>
           </a:xfrm>
           <a:prstGeom prst="rect">
             <a:avLst/>
@@ -2296,7 +2683,29 @@
                 <a:uFillTx/>
                 <a:latin typeface="Arial"/>
               </a:rPr>
-              <a:t>Click to edit the title text format</a:t>
+              <a:t>Click to </a:t>
+            </a:r>
+            <a:r>
+              <a:rPr b="0" lang="en-US" sz="4400" strike="noStrike" u="none">
+                <a:solidFill>
+                  <a:srgbClr val="000000"/>
+                </a:solidFill>
+                <a:effectLst/>
+                <a:uFillTx/>
+                <a:latin typeface="Arial"/>
+              </a:rPr>
+              <a:t>edit the title </a:t>
+            </a:r>
+            <a:r>
+              <a:rPr b="0" lang="en-US" sz="4400" strike="noStrike" u="none">
+                <a:solidFill>
+                  <a:srgbClr val="000000"/>
+                </a:solidFill>
+                <a:effectLst/>
+                <a:uFillTx/>
+                <a:latin typeface="Arial"/>
+              </a:rPr>
+              <a:t>text format</a:t>
             </a:r>
             <a:endParaRPr b="0" lang="en-US" sz="4400" strike="noStrike" u="none">
               <a:solidFill>
@@ -2322,7 +2731,7 @@
         <p:spPr>
           <a:xfrm>
             <a:off x="609480" y="1604520"/>
-            <a:ext cx="10971000" cy="3975840"/>
+            <a:ext cx="10970640" cy="3975480"/>
           </a:xfrm>
           <a:prstGeom prst="rect">
             <a:avLst/>
@@ -2621,7 +3030,7 @@
         <p:spPr>
           <a:xfrm>
             <a:off x="548640" y="6446880"/>
-            <a:ext cx="6398280" cy="271800"/>
+            <a:ext cx="6397920" cy="271440"/>
           </a:xfrm>
           <a:prstGeom prst="rect">
             <a:avLst/>
@@ -2682,7 +3091,7 @@
         <p:spPr>
           <a:xfrm>
             <a:off x="11185920" y="6446880"/>
-            <a:ext cx="454680" cy="271800"/>
+            <a:ext cx="454320" cy="271440"/>
           </a:xfrm>
           <a:prstGeom prst="rect">
             <a:avLst/>
@@ -2748,7 +3157,7 @@
         <p:spPr>
           <a:xfrm>
             <a:off x="10375920" y="356040"/>
-            <a:ext cx="1267560" cy="649080"/>
+            <a:ext cx="1267200" cy="648720"/>
           </a:xfrm>
           <a:prstGeom prst="rect">
             <a:avLst/>
@@ -2772,7 +3181,7 @@
         <p:spPr>
           <a:xfrm>
             <a:off x="609480" y="273600"/>
-            <a:ext cx="10971000" cy="1143360"/>
+            <a:ext cx="10970640" cy="1143000"/>
           </a:xfrm>
           <a:prstGeom prst="rect">
             <a:avLst/>
@@ -2805,7 +3214,29 @@
                 <a:uFillTx/>
                 <a:latin typeface="Arial"/>
               </a:rPr>
-              <a:t>Click to edit the title text format</a:t>
+              <a:t>Click to </a:t>
+            </a:r>
+            <a:r>
+              <a:rPr b="0" lang="en-US" sz="4400" strike="noStrike" u="none">
+                <a:solidFill>
+                  <a:srgbClr val="000000"/>
+                </a:solidFill>
+                <a:effectLst/>
+                <a:uFillTx/>
+                <a:latin typeface="Arial"/>
+              </a:rPr>
+              <a:t>edit the title </a:t>
+            </a:r>
+            <a:r>
+              <a:rPr b="0" lang="en-US" sz="4400" strike="noStrike" u="none">
+                <a:solidFill>
+                  <a:srgbClr val="000000"/>
+                </a:solidFill>
+                <a:effectLst/>
+                <a:uFillTx/>
+                <a:latin typeface="Arial"/>
+              </a:rPr>
+              <a:t>text format</a:t>
             </a:r>
             <a:endParaRPr b="0" lang="en-US" sz="4400" strike="noStrike" u="none">
               <a:solidFill>
@@ -2831,7 +3262,7 @@
         <p:spPr>
           <a:xfrm>
             <a:off x="609480" y="1604520"/>
-            <a:ext cx="10971000" cy="3975840"/>
+            <a:ext cx="10970640" cy="3975480"/>
           </a:xfrm>
           <a:prstGeom prst="rect">
             <a:avLst/>
@@ -3130,7 +3561,7 @@
         <p:spPr>
           <a:xfrm>
             <a:off x="548640" y="6446880"/>
-            <a:ext cx="6398280" cy="271800"/>
+            <a:ext cx="6397920" cy="271440"/>
           </a:xfrm>
           <a:prstGeom prst="rect">
             <a:avLst/>
@@ -3191,7 +3622,7 @@
         <p:spPr>
           <a:xfrm>
             <a:off x="11185920" y="6446880"/>
-            <a:ext cx="454680" cy="271800"/>
+            <a:ext cx="454320" cy="271440"/>
           </a:xfrm>
           <a:prstGeom prst="rect">
             <a:avLst/>
@@ -3257,7 +3688,7 @@
         <p:spPr>
           <a:xfrm>
             <a:off x="10375920" y="356040"/>
-            <a:ext cx="1267560" cy="649080"/>
+            <a:ext cx="1267200" cy="648720"/>
           </a:xfrm>
           <a:prstGeom prst="rect">
             <a:avLst/>
@@ -3281,7 +3712,7 @@
         <p:spPr>
           <a:xfrm>
             <a:off x="609480" y="273600"/>
-            <a:ext cx="10971000" cy="1143360"/>
+            <a:ext cx="10970640" cy="1143000"/>
           </a:xfrm>
           <a:prstGeom prst="rect">
             <a:avLst/>
@@ -3314,7 +3745,29 @@
                 <a:uFillTx/>
                 <a:latin typeface="Arial"/>
               </a:rPr>
-              <a:t>Click to edit the title text format</a:t>
+              <a:t>Click to </a:t>
+            </a:r>
+            <a:r>
+              <a:rPr b="0" lang="en-US" sz="4400" strike="noStrike" u="none">
+                <a:solidFill>
+                  <a:srgbClr val="000000"/>
+                </a:solidFill>
+                <a:effectLst/>
+                <a:uFillTx/>
+                <a:latin typeface="Arial"/>
+              </a:rPr>
+              <a:t>edit the title </a:t>
+            </a:r>
+            <a:r>
+              <a:rPr b="0" lang="en-US" sz="4400" strike="noStrike" u="none">
+                <a:solidFill>
+                  <a:srgbClr val="000000"/>
+                </a:solidFill>
+                <a:effectLst/>
+                <a:uFillTx/>
+                <a:latin typeface="Arial"/>
+              </a:rPr>
+              <a:t>text format</a:t>
             </a:r>
             <a:endParaRPr b="0" lang="en-US" sz="4400" strike="noStrike" u="none">
               <a:solidFill>
@@ -3340,7 +3793,7 @@
         <p:spPr>
           <a:xfrm>
             <a:off x="609480" y="1604520"/>
-            <a:ext cx="10971000" cy="3975840"/>
+            <a:ext cx="10970640" cy="3975480"/>
           </a:xfrm>
           <a:prstGeom prst="rect">
             <a:avLst/>
@@ -3667,7 +4120,7 @@
         <p:spPr>
           <a:xfrm>
             <a:off x="9392760" y="-1425960"/>
-            <a:ext cx="4752360" cy="4752360"/>
+            <a:ext cx="4752000" cy="4752000"/>
           </a:xfrm>
           <a:prstGeom prst="ellipse">
             <a:avLst/>
@@ -3695,7 +4148,7 @@
                 <a:spcPct val="100000"/>
               </a:lnSpc>
             </a:pPr>
-            <a:endParaRPr b="0" lang="en-DK" sz="1800" strike="noStrike" u="none">
+            <a:endParaRPr b="0" lang="en-US" sz="1800" strike="noStrike" u="none">
               <a:solidFill>
                 <a:schemeClr val="dk1"/>
               </a:solidFill>
@@ -3715,7 +4168,7 @@
         <p:spPr>
           <a:xfrm>
             <a:off x="-1828800" y="4206240"/>
-            <a:ext cx="4203720" cy="4203720"/>
+            <a:ext cx="4203360" cy="4203360"/>
           </a:xfrm>
           <a:prstGeom prst="ellipse">
             <a:avLst/>
@@ -3743,7 +4196,7 @@
                 <a:spcPct val="100000"/>
               </a:lnSpc>
             </a:pPr>
-            <a:endParaRPr b="0" lang="en-DK" sz="1800" strike="noStrike" u="none">
+            <a:endParaRPr b="0" lang="en-US" sz="1800" strike="noStrike" u="none">
               <a:solidFill>
                 <a:schemeClr val="dk1"/>
               </a:solidFill>
@@ -3763,7 +4216,7 @@
         <p:spPr>
           <a:xfrm>
             <a:off x="777240" y="1828800"/>
-            <a:ext cx="10513080" cy="1551960"/>
+            <a:ext cx="10512720" cy="1551600"/>
           </a:xfrm>
           <a:prstGeom prst="rect">
             <a:avLst/>
@@ -3824,7 +4277,7 @@
         <p:spPr>
           <a:xfrm>
             <a:off x="822960" y="3246120"/>
-            <a:ext cx="6347520" cy="546120"/>
+            <a:ext cx="6347160" cy="545760"/>
           </a:xfrm>
           <a:prstGeom prst="rect">
             <a:avLst/>
@@ -3891,7 +4344,7 @@
         <p:spPr>
           <a:xfrm>
             <a:off x="822960" y="4160520"/>
-            <a:ext cx="1414800" cy="308520"/>
+            <a:ext cx="1414440" cy="308160"/>
           </a:xfrm>
           <a:prstGeom prst="roundRect">
             <a:avLst>
@@ -3921,7 +4374,7 @@
                 <a:spcPct val="100000"/>
               </a:lnSpc>
             </a:pPr>
-            <a:endParaRPr b="0" lang="en-DK" sz="1800" strike="noStrike" u="none">
+            <a:endParaRPr b="0" lang="en-US" sz="1800" strike="noStrike" u="none">
               <a:solidFill>
                 <a:schemeClr val="dk1"/>
               </a:solidFill>
@@ -3941,7 +4394,7 @@
         <p:spPr>
           <a:xfrm>
             <a:off x="822960" y="4160520"/>
-            <a:ext cx="1414800" cy="308520"/>
+            <a:ext cx="1414440" cy="308160"/>
           </a:xfrm>
           <a:prstGeom prst="rect">
             <a:avLst/>
@@ -4002,7 +4455,7 @@
         <p:spPr>
           <a:xfrm>
             <a:off x="2377440" y="4160520"/>
-            <a:ext cx="1414800" cy="308520"/>
+            <a:ext cx="1414440" cy="308160"/>
           </a:xfrm>
           <a:prstGeom prst="roundRect">
             <a:avLst>
@@ -4032,7 +4485,7 @@
                 <a:spcPct val="100000"/>
               </a:lnSpc>
             </a:pPr>
-            <a:endParaRPr b="0" lang="en-DK" sz="1800" strike="noStrike" u="none">
+            <a:endParaRPr b="0" lang="en-US" sz="1800" strike="noStrike" u="none">
               <a:solidFill>
                 <a:schemeClr val="dk1"/>
               </a:solidFill>
@@ -4052,7 +4505,7 @@
         <p:spPr>
           <a:xfrm>
             <a:off x="2377440" y="4160520"/>
-            <a:ext cx="1414800" cy="308520"/>
+            <a:ext cx="1414440" cy="308160"/>
           </a:xfrm>
           <a:prstGeom prst="rect">
             <a:avLst/>
@@ -4136,7 +4589,7 @@
             <a:noAutofit/>
           </a:bodyPr>
           <a:p>
-            <a:endParaRPr b="0" lang="en-DK" sz="1800" strike="noStrike" u="none">
+            <a:endParaRPr b="0" lang="en-US" sz="1800" strike="noStrike" u="none">
               <a:solidFill>
                 <a:schemeClr val="dk1"/>
               </a:solidFill>
@@ -4156,7 +4609,7 @@
         <p:spPr>
           <a:xfrm>
             <a:off x="822960" y="5897880"/>
-            <a:ext cx="5483880" cy="317520"/>
+            <a:ext cx="5483520" cy="317160"/>
           </a:xfrm>
           <a:prstGeom prst="rect">
             <a:avLst/>
@@ -4217,7 +4670,7 @@
         <p:spPr>
           <a:xfrm>
             <a:off x="7429680" y="3759120"/>
-            <a:ext cx="3807360" cy="1496160"/>
+            <a:ext cx="3807000" cy="1495800"/>
           </a:xfrm>
           <a:prstGeom prst="roundRect">
             <a:avLst>
@@ -4255,7 +4708,7 @@
                 <a:spcPct val="100000"/>
               </a:lnSpc>
             </a:pPr>
-            <a:endParaRPr b="0" lang="en-DK" sz="1800" strike="noStrike" u="none">
+            <a:endParaRPr b="0" lang="en-US" sz="1800" strike="noStrike" u="none">
               <a:solidFill>
                 <a:schemeClr val="lt1"/>
               </a:solidFill>
@@ -4275,7 +4728,7 @@
         <p:spPr>
           <a:xfrm>
             <a:off x="7429680" y="5384880"/>
-            <a:ext cx="3807360" cy="276840"/>
+            <a:ext cx="3807000" cy="276480"/>
           </a:xfrm>
           <a:prstGeom prst="rect">
             <a:avLst/>
@@ -4337,7 +4790,7 @@
         <p:spPr>
           <a:xfrm>
             <a:off x="825480" y="457200"/>
-            <a:ext cx="1394640" cy="714600"/>
+            <a:ext cx="1394280" cy="714240"/>
           </a:xfrm>
           <a:prstGeom prst="rect">
             <a:avLst/>
@@ -4361,7 +4814,7 @@
         <p:spPr>
           <a:xfrm>
             <a:off x="7429680" y="478800"/>
-            <a:ext cx="4537080" cy="671040"/>
+            <a:ext cx="4536720" cy="670680"/>
           </a:xfrm>
           <a:prstGeom prst="rect">
             <a:avLst/>
@@ -4381,9 +4834,9 @@
         <p:grpSpPr>
           <a:xfrm>
             <a:off x="7936200" y="3847680"/>
-            <a:ext cx="2793960" cy="1319040"/>
+            <a:ext cx="2793600" cy="1318680"/>
             <a:chOff x="7936200" y="3847680"/>
-            <a:chExt cx="2793960" cy="1319040"/>
+            <a:chExt cx="2793600" cy="1318680"/>
           </a:xfrm>
         </p:grpSpPr>
         <p:grpSp>
@@ -4395,9 +4848,9 @@
           <p:grpSpPr>
             <a:xfrm>
               <a:off x="9343440" y="3847680"/>
-              <a:ext cx="1386720" cy="1256040"/>
+              <a:ext cx="1386360" cy="1255680"/>
               <a:chOff x="9343440" y="3847680"/>
-              <a:chExt cx="1386720" cy="1256040"/>
+              <a:chExt cx="1386360" cy="1255680"/>
             </a:xfrm>
           </p:grpSpPr>
           <p:pic>
@@ -4414,7 +4867,7 @@
             <p:spPr>
               <a:xfrm>
                 <a:off x="9392760" y="3847680"/>
-                <a:ext cx="1292040" cy="773640"/>
+                <a:ext cx="1291680" cy="773280"/>
               </a:xfrm>
               <a:prstGeom prst="rect">
                 <a:avLst/>
@@ -4438,7 +4891,7 @@
             <p:spPr>
               <a:xfrm>
                 <a:off x="9343440" y="4576320"/>
-                <a:ext cx="960840" cy="462960"/>
+                <a:ext cx="960480" cy="462600"/>
               </a:xfrm>
               <a:prstGeom prst="rect">
                 <a:avLst/>
@@ -4462,7 +4915,7 @@
             <p:spPr>
               <a:xfrm>
                 <a:off x="10378800" y="4584960"/>
-                <a:ext cx="351360" cy="518760"/>
+                <a:ext cx="351000" cy="518400"/>
               </a:xfrm>
               <a:prstGeom prst="rect">
                 <a:avLst/>
@@ -4487,7 +4940,7 @@
           <p:spPr>
             <a:xfrm>
               <a:off x="7936200" y="3852360"/>
-              <a:ext cx="1292040" cy="1314360"/>
+              <a:ext cx="1291680" cy="1314000"/>
             </a:xfrm>
             <a:prstGeom prst="rect">
               <a:avLst/>
@@ -4538,14 +4991,14 @@
       </p:grpSpPr>
       <p:sp>
         <p:nvSpPr>
-          <p:cNvPr id="74" name="Text 31"/>
+          <p:cNvPr id="74" name="Text 28"/>
           <p:cNvSpPr/>
           <p:nvPr/>
         </p:nvSpPr>
         <p:spPr>
           <a:xfrm>
             <a:off x="548640" y="384120"/>
-            <a:ext cx="9141480" cy="290160"/>
+            <a:ext cx="9141120" cy="289800"/>
           </a:xfrm>
           <a:prstGeom prst="rect">
             <a:avLst/>
@@ -4570,6 +5023,12 @@
               <a:lnSpc>
                 <a:spcPct val="100000"/>
               </a:lnSpc>
+              <a:spcBef>
+                <a:spcPts val="1191"/>
+              </a:spcBef>
+              <a:spcAft>
+                <a:spcPts val="992"/>
+              </a:spcAft>
               <a:tabLst>
                 <a:tab algn="l" pos="0"/>
               </a:tabLst>
@@ -4583,7 +5042,7 @@
                 <a:uFillTx/>
                 <a:latin typeface="Calibri"/>
               </a:rPr>
-              <a:t>Realistic datasets</a:t>
+              <a:t>AI Methodology</a:t>
             </a:r>
             <a:endParaRPr b="0" lang="en-US" sz="1200" strike="noStrike" u="none">
               <a:solidFill>
@@ -4598,14 +5057,14 @@
       </p:sp>
       <p:sp>
         <p:nvSpPr>
-          <p:cNvPr id="75" name="Text 32"/>
+          <p:cNvPr id="75" name="Text 29"/>
           <p:cNvSpPr/>
           <p:nvPr/>
         </p:nvSpPr>
         <p:spPr>
           <a:xfrm>
             <a:off x="548640" y="658440"/>
-            <a:ext cx="11061720" cy="820440"/>
+            <a:ext cx="11061360" cy="820080"/>
           </a:xfrm>
           <a:prstGeom prst="rect">
             <a:avLst/>
@@ -4641,7 +5100,7 @@
               </a:tabLst>
             </a:pPr>
             <a:r>
-              <a:rPr b="1" lang="en-GB" sz="3000" strike="noStrike" u="none">
+              <a:rPr b="1" lang="en-US" sz="3000" strike="noStrike" u="none">
                 <a:solidFill>
                   <a:srgbClr val="20242b"/>
                 </a:solidFill>
@@ -4649,7 +5108,7 @@
                 <a:uFillTx/>
                 <a:latin typeface="Cambria"/>
               </a:rPr>
-              <a:t>Why Realistic AI Datasets?</a:t>
+              <a:t>AI algorithm types</a:t>
             </a:r>
             <a:endParaRPr b="0" lang="en-US" sz="3000" strike="noStrike" u="none">
               <a:solidFill>
@@ -4664,14 +5123,14 @@
       </p:sp>
       <p:sp>
         <p:nvSpPr>
-          <p:cNvPr id="76" name="Text 33"/>
+          <p:cNvPr id="76" name="Text 30"/>
           <p:cNvSpPr/>
           <p:nvPr/>
         </p:nvSpPr>
         <p:spPr>
           <a:xfrm>
             <a:off x="11185920" y="6446520"/>
-            <a:ext cx="454680" cy="271800"/>
+            <a:ext cx="454320" cy="271440"/>
           </a:xfrm>
           <a:prstGeom prst="rect">
             <a:avLst/>
@@ -4732,7 +5191,7 @@
         <p:spPr>
           <a:xfrm>
             <a:off x="540000" y="1800000"/>
-            <a:ext cx="10978200" cy="3160080"/>
+            <a:ext cx="10977840" cy="3160080"/>
           </a:xfrm>
           <a:prstGeom prst="rect">
             <a:avLst/>
@@ -4765,7 +5224,7 @@
               </a:tabLst>
             </a:pPr>
             <a:r>
-              <a:rPr b="1" lang="fr-FR" sz="2400" strike="noStrike" u="none">
+              <a:rPr b="1" lang="en-US" sz="2400" strike="noStrike" u="none">
                 <a:solidFill>
                   <a:srgbClr val="0000ff"/>
                 </a:solidFill>
@@ -4773,10 +5232,10 @@
                 <a:uFillTx/>
                 <a:latin typeface="Calibri"/>
               </a:rPr>
-              <a:t>Model optimization</a:t>
-            </a:r>
-            <a:r>
-              <a:rPr b="0" lang="fr-FR" sz="2400" strike="noStrike" u="none">
+              <a:t>Surrogate Models</a:t>
+            </a:r>
+            <a:r>
+              <a:rPr b="0" lang="en-US" sz="2400" strike="noStrike" u="none">
                 <a:solidFill>
                   <a:srgbClr val="0000ff"/>
                 </a:solidFill>
@@ -4816,7 +5275,7 @@
               </a:tabLst>
             </a:pPr>
             <a:r>
-              <a:rPr b="1" lang="fr-FR" sz="2400" strike="noStrike" u="none">
+              <a:rPr b="1" lang="en-US" sz="2400" strike="noStrike" u="none">
                 <a:solidFill>
                   <a:schemeClr val="dk1"/>
                 </a:solidFill>
@@ -4827,7 +5286,7 @@
               <a:t>Purpose</a:t>
             </a:r>
             <a:r>
-              <a:rPr b="0" lang="fr-FR" sz="2400" strike="noStrike" u="none">
+              <a:rPr b="0" lang="en-US" sz="2400" strike="noStrike" u="none">
                 <a:solidFill>
                   <a:schemeClr val="dk1"/>
                 </a:solidFill>
@@ -4835,7 +5294,7 @@
                 <a:uFillTx/>
                 <a:latin typeface="Calibri"/>
               </a:rPr>
-              <a:t>: Find best parameters to get min/max signal.</a:t>
+              <a:t>: Replace slow simulations with fast AI models.</a:t>
             </a:r>
             <a:endParaRPr b="0" lang="en-US" sz="2400" strike="noStrike" u="none">
               <a:solidFill>
@@ -4864,7 +5323,7 @@
               </a:tabLst>
             </a:pPr>
             <a:r>
-              <a:rPr b="1" lang="fr-FR" sz="2400" strike="noStrike" u="none">
+              <a:rPr b="1" lang="en-US" sz="2400" strike="noStrike" u="none">
                 <a:solidFill>
                   <a:schemeClr val="dk1"/>
                 </a:solidFill>
@@ -4875,7 +5334,7 @@
               <a:t>Pipeline</a:t>
             </a:r>
             <a:r>
-              <a:rPr b="0" lang="fr-FR" sz="2400" strike="noStrike" u="none">
+              <a:rPr b="0" lang="en-US" sz="2400" strike="noStrike" u="none">
                 <a:solidFill>
                   <a:schemeClr val="dk1"/>
                 </a:solidFill>
@@ -4889,7 +5348,7 @@
               <a:rPr sz="2400"/>
             </a:br>
             <a:r>
-              <a:rPr b="0" lang="fr-FR" sz="2400" strike="noStrike" u="none">
+              <a:rPr b="0" lang="en-US" sz="2400" strike="noStrike" u="none">
                 <a:solidFill>
                   <a:schemeClr val="dk1"/>
                 </a:solidFill>
@@ -4921,7 +5380,7 @@
               </a:tabLst>
             </a:pPr>
             <a:r>
-              <a:rPr b="1" lang="fr-FR" sz="2100" strike="noStrike" u="none">
+              <a:rPr b="1" lang="en-US" sz="2100" strike="noStrike" u="none">
                 <a:solidFill>
                   <a:srgbClr val="ff00ff"/>
                 </a:solidFill>
@@ -4929,7 +5388,7 @@
                 <a:uFillTx/>
                 <a:latin typeface="Courier New"/>
               </a:rPr>
-              <a:t>Parameters → [Optimizer] → Best Parameters</a:t>
+              <a:t>X=Parameters → [AI Model] → Y="Measurement" (faster)</a:t>
             </a:r>
             <a:br>
               <a:rPr sz="2100"/>
@@ -4961,7 +5420,7 @@
               </a:tabLst>
             </a:pPr>
             <a:r>
-              <a:rPr b="1" lang="fr-FR" sz="2400" strike="noStrike" u="none">
+              <a:rPr b="1" lang="en-US" sz="2400" strike="noStrike" u="none">
                 <a:solidFill>
                   <a:schemeClr val="dk1"/>
                 </a:solidFill>
@@ -4972,7 +5431,7 @@
               <a:t>Use Case</a:t>
             </a:r>
             <a:r>
-              <a:rPr b="0" lang="fr-FR" sz="2400" strike="noStrike" u="none">
+              <a:rPr b="0" lang="en-US" sz="2400" strike="noStrike" u="none">
                 <a:solidFill>
                   <a:schemeClr val="dk1"/>
                 </a:solidFill>
@@ -4980,7 +5439,7 @@
                 <a:uFillTx/>
                 <a:latin typeface="Calibri"/>
               </a:rPr>
-              <a:t>: Optimization of beamline configurations.</a:t>
+              <a:t>: Fast phase-space exploration, Bayesian analysis.</a:t>
             </a:r>
             <a:endParaRPr b="0" lang="en-US" sz="2400" strike="noStrike" u="none">
               <a:solidFill>
@@ -5009,6 +5468,13 @@
 <file path=ppt/slides/slide11.xml><?xml version="1.0" encoding="utf-8"?>
 <p:sld xmlns:a="http://schemas.openxmlformats.org/drawingml/2006/main" xmlns:p="http://schemas.openxmlformats.org/presentationml/2006/main" xmlns:r="http://schemas.openxmlformats.org/officeDocument/2006/relationships" xmlns:p14="http://schemas.microsoft.com/office/powerpoint/2010/main" xmlns:p15="http://schemas.microsoft.com/office/powerpoint/2012/main" xmlns:mc="http://schemas.openxmlformats.org/markup-compatibility/2006">
   <p:cSld>
+    <p:bg>
+      <p:bgPr>
+        <a:solidFill>
+          <a:srgbClr val="ffffff"/>
+        </a:solidFill>
+      </p:bgPr>
+    </p:bg>
     <p:spTree>
       <p:nvGrpSpPr>
         <p:cNvPr id="1" name=""/>
@@ -5025,14 +5491,14 @@
       </p:grpSpPr>
       <p:sp>
         <p:nvSpPr>
-          <p:cNvPr id="78" name="Text 34"/>
+          <p:cNvPr id="78" name="Text 31"/>
           <p:cNvSpPr/>
           <p:nvPr/>
         </p:nvSpPr>
         <p:spPr>
           <a:xfrm>
             <a:off x="548640" y="384120"/>
-            <a:ext cx="9141480" cy="290160"/>
+            <a:ext cx="9141120" cy="289800"/>
           </a:xfrm>
           <a:prstGeom prst="rect">
             <a:avLst/>
@@ -5076,7 +5542,7 @@
                 <a:uFillTx/>
                 <a:latin typeface="Calibri"/>
               </a:rPr>
-              <a:t>General AI Methodology</a:t>
+              <a:t>AI Methodology</a:t>
             </a:r>
             <a:endParaRPr b="0" lang="en-US" sz="1200" strike="noStrike" u="none">
               <a:solidFill>
@@ -5091,14 +5557,14 @@
       </p:sp>
       <p:sp>
         <p:nvSpPr>
-          <p:cNvPr id="79" name="Text 35"/>
+          <p:cNvPr id="79" name="Text 32"/>
           <p:cNvSpPr/>
           <p:nvPr/>
         </p:nvSpPr>
         <p:spPr>
           <a:xfrm>
             <a:off x="548640" y="658440"/>
-            <a:ext cx="11061720" cy="820440"/>
+            <a:ext cx="11061360" cy="820080"/>
           </a:xfrm>
           <a:prstGeom prst="rect">
             <a:avLst/>
@@ -5134,7 +5600,7 @@
               </a:tabLst>
             </a:pPr>
             <a:r>
-              <a:rPr b="1" lang="en-GB" sz="3000" strike="noStrike" u="none">
+              <a:rPr b="1" lang="en-US" sz="3000" strike="noStrike" u="none">
                 <a:solidFill>
                   <a:srgbClr val="20242b"/>
                 </a:solidFill>
@@ -5142,7 +5608,7 @@
                 <a:uFillTx/>
                 <a:latin typeface="Cambria"/>
               </a:rPr>
-              <a:t>General AI Methodology</a:t>
+              <a:t>AI algorithm types</a:t>
             </a:r>
             <a:endParaRPr b="0" lang="en-US" sz="3000" strike="noStrike" u="none">
               <a:solidFill>
@@ -5157,14 +5623,14 @@
       </p:sp>
       <p:sp>
         <p:nvSpPr>
-          <p:cNvPr id="80" name="Text 36"/>
+          <p:cNvPr id="80" name="Text 33"/>
           <p:cNvSpPr/>
           <p:nvPr/>
         </p:nvSpPr>
         <p:spPr>
           <a:xfrm>
             <a:off x="11185920" y="6446520"/>
-            <a:ext cx="454680" cy="271800"/>
+            <a:ext cx="454320" cy="271440"/>
           </a:xfrm>
           <a:prstGeom prst="rect">
             <a:avLst/>
@@ -5225,7 +5691,7 @@
         <p:spPr>
           <a:xfrm>
             <a:off x="540000" y="1800000"/>
-            <a:ext cx="10978200" cy="4604760"/>
+            <a:ext cx="10977840" cy="3160080"/>
           </a:xfrm>
           <a:prstGeom prst="rect">
             <a:avLst/>
@@ -5246,21 +5712,13 @@
             <a:spAutoFit/>
           </a:bodyPr>
           <a:p>
-            <a:pPr marL="343080" indent="-343080" defTabSz="343080">
+            <a:pPr defTabSz="343080">
               <a:lnSpc>
                 <a:spcPct val="100000"/>
               </a:lnSpc>
               <a:spcBef>
-                <a:spcPts val="1191"/>
+                <a:spcPts val="479"/>
               </a:spcBef>
-              <a:spcAft>
-                <a:spcPts val="992"/>
-              </a:spcAft>
-              <a:buClr>
-                <a:srgbClr val="000000"/>
-              </a:buClr>
-              <a:buFont typeface="Arial"/>
-              <a:buChar char="•"/>
               <a:tabLst>
                 <a:tab algn="l" pos="0"/>
               </a:tabLst>
@@ -5274,7 +5732,7 @@
                 <a:uFillTx/>
                 <a:latin typeface="Calibri"/>
               </a:rPr>
-              <a:t>AI as a Universal Function Approximator</a:t>
+              <a:t>Model optimization</a:t>
             </a:r>
             <a:r>
               <a:rPr b="0" lang="fr-FR" sz="2400" strike="noStrike" u="none">
@@ -5286,83 +5744,6 @@
                 <a:latin typeface="Calibri"/>
               </a:rPr>
               <a:t>:</a:t>
-            </a:r>
-            <a:endParaRPr b="0" lang="en-US" sz="2400" strike="noStrike" u="none">
-              <a:solidFill>
-                <a:srgbClr val="000000"/>
-              </a:solidFill>
-              <a:effectLst/>
-              <a:uFillTx/>
-              <a:latin typeface="Arial"/>
-            </a:endParaRPr>
-          </a:p>
-          <a:p>
-            <a:pPr marL="343080" indent="-343080" defTabSz="343080">
-              <a:lnSpc>
-                <a:spcPct val="100000"/>
-              </a:lnSpc>
-              <a:buClr>
-                <a:srgbClr val="000000"/>
-              </a:buClr>
-              <a:buFont typeface="Arial"/>
-              <a:buChar char="•"/>
-              <a:tabLst>
-                <a:tab algn="l" pos="0"/>
-              </a:tabLst>
-            </a:pPr>
-            <a:r>
-              <a:rPr b="1" lang="fr-FR" sz="2400" strike="noStrike" u="none">
-                <a:solidFill>
-                  <a:srgbClr val="000000"/>
-                </a:solidFill>
-                <a:effectLst/>
-                <a:uFillTx/>
-                <a:latin typeface="Calibri"/>
-              </a:rPr>
-              <a:t>Black Box Concept:</a:t>
-            </a:r>
-            <a:br>
-              <a:rPr sz="2400"/>
-            </a:br>
-            <a:r>
-              <a:rPr b="1" lang="fr-FR" sz="2400" strike="noStrike" u="none">
-                <a:solidFill>
-                  <a:srgbClr val="000000"/>
-                </a:solidFill>
-                <a:effectLst/>
-                <a:uFillTx/>
-                <a:latin typeface="Calibri"/>
-              </a:rPr>
-              <a:t> </a:t>
-            </a:r>
-            <a:endParaRPr b="0" lang="en-US" sz="2400" strike="noStrike" u="none">
-              <a:solidFill>
-                <a:srgbClr val="000000"/>
-              </a:solidFill>
-              <a:effectLst/>
-              <a:uFillTx/>
-              <a:latin typeface="Arial"/>
-            </a:endParaRPr>
-          </a:p>
-          <a:p>
-            <a:pPr marL="720000" defTabSz="343080">
-              <a:lnSpc>
-                <a:spcPct val="100000"/>
-              </a:lnSpc>
-              <a:tabLst>
-                <a:tab algn="l" pos="0"/>
-              </a:tabLst>
-            </a:pPr>
-            <a:r>
-              <a:rPr b="1" lang="fr-FR" sz="2400" strike="noStrike" u="none">
-                <a:solidFill>
-                  <a:srgbClr val="ff00ff"/>
-                </a:solidFill>
-                <a:effectLst/>
-                <a:uFillTx/>
-                <a:latin typeface="FreeMono"/>
-              </a:rPr>
-              <a:t>Input → [AI Model] → Output</a:t>
             </a:r>
             <a:br>
               <a:rPr sz="2400"/>
@@ -5381,6 +5762,9 @@
               <a:lnSpc>
                 <a:spcPct val="100000"/>
               </a:lnSpc>
+              <a:spcBef>
+                <a:spcPts val="479"/>
+              </a:spcBef>
               <a:buClr>
                 <a:srgbClr val="000000"/>
               </a:buClr>
@@ -5393,74 +5777,72 @@
             <a:r>
               <a:rPr b="1" lang="fr-FR" sz="2400" strike="noStrike" u="none">
                 <a:solidFill>
-                  <a:srgbClr val="000000"/>
-                </a:solidFill>
-                <a:effectLst/>
-                <a:uFillTx/>
-                <a:latin typeface="Calibri"/>
-                <a:ea typeface="Unifont"/>
-              </a:rPr>
-              <a:t>Universal Approximation Theorem</a:t>
+                  <a:schemeClr val="dk1"/>
+                </a:solidFill>
+                <a:effectLst/>
+                <a:uFillTx/>
+                <a:latin typeface="Calibri"/>
+              </a:rPr>
+              <a:t>Purpose</a:t>
             </a:r>
             <a:r>
               <a:rPr b="0" lang="fr-FR" sz="2400" strike="noStrike" u="none">
                 <a:solidFill>
-                  <a:srgbClr val="000000"/>
-                </a:solidFill>
-                <a:effectLst/>
-                <a:uFillTx/>
-                <a:latin typeface="Calibri"/>
-                <a:ea typeface="Unifont"/>
-              </a:rPr>
-              <a:t>: A neural network can </a:t>
+                  <a:schemeClr val="dk1"/>
+                </a:solidFill>
+                <a:effectLst/>
+                <a:uFillTx/>
+                <a:latin typeface="Calibri"/>
+              </a:rPr>
+              <a:t>: Find best parameters to get min/max signal.</a:t>
+            </a:r>
+            <a:endParaRPr b="0" lang="en-US" sz="2400" strike="noStrike" u="none">
+              <a:solidFill>
+                <a:srgbClr val="000000"/>
+              </a:solidFill>
+              <a:effectLst/>
+              <a:uFillTx/>
+              <a:latin typeface="Arial"/>
+            </a:endParaRPr>
+          </a:p>
+          <a:p>
+            <a:pPr marL="343080" indent="-343080" defTabSz="343080">
+              <a:lnSpc>
+                <a:spcPct val="100000"/>
+              </a:lnSpc>
+              <a:spcBef>
+                <a:spcPts val="479"/>
+              </a:spcBef>
+              <a:buClr>
+                <a:srgbClr val="000000"/>
+              </a:buClr>
+              <a:buFont typeface="Arial"/>
+              <a:buChar char="•"/>
+              <a:tabLst>
+                <a:tab algn="l" pos="0"/>
+              </a:tabLst>
+            </a:pPr>
+            <a:r>
+              <a:rPr b="1" lang="fr-FR" sz="2400" strike="noStrike" u="none">
+                <a:solidFill>
+                  <a:schemeClr val="dk1"/>
+                </a:solidFill>
+                <a:effectLst/>
+                <a:uFillTx/>
+                <a:latin typeface="Calibri"/>
+              </a:rPr>
+              <a:t>Pipeline</a:t>
             </a:r>
             <a:r>
               <a:rPr b="0" lang="fr-FR" sz="2400" strike="noStrike" u="none">
                 <a:solidFill>
-                  <a:srgbClr val="008000"/>
-                </a:solidFill>
-                <a:effectLst/>
-                <a:uFillTx/>
-                <a:latin typeface="Calibri"/>
-                <a:ea typeface="Unifont"/>
-              </a:rPr>
-              <a:t>approximate</a:t>
-            </a:r>
-            <a:r>
-              <a:rPr b="0" lang="fr-FR" sz="2400" strike="noStrike" u="none">
-                <a:solidFill>
-                  <a:srgbClr val="000000"/>
-                </a:solidFill>
-                <a:effectLst/>
-                <a:uFillTx/>
-                <a:latin typeface="Calibri"/>
-                <a:ea typeface="Unifont"/>
-              </a:rPr>
-              <a:t> </a:t>
-            </a:r>
-            <a:r>
-              <a:rPr b="0" lang="fr-FR" sz="2400" strike="noStrike" u="none">
-                <a:solidFill>
-                  <a:srgbClr val="008000"/>
-                </a:solidFill>
-                <a:effectLst/>
-                <a:uFillTx/>
-                <a:latin typeface="Calibri"/>
-                <a:ea typeface="Unifont"/>
-              </a:rPr>
-              <a:t>any continuous function</a:t>
-            </a:r>
-            <a:r>
-              <a:rPr b="0" lang="fr-FR" sz="2400" strike="noStrike" u="none">
-                <a:solidFill>
-                  <a:srgbClr val="000000"/>
-                </a:solidFill>
-                <a:effectLst/>
-                <a:uFillTx/>
-                <a:latin typeface="Calibri"/>
-                <a:ea typeface="Unifont"/>
-              </a:rPr>
-              <a:t> given sufficient data and complexity.</a:t>
+                  <a:schemeClr val="dk1"/>
+                </a:solidFill>
+                <a:effectLst/>
+                <a:uFillTx/>
+                <a:latin typeface="Calibri"/>
+              </a:rPr>
+              <a:t>:</a:t>
             </a:r>
             <a:br>
               <a:rPr sz="2400"/>
@@ -5468,12 +5850,11 @@
             <a:r>
               <a:rPr b="0" lang="fr-FR" sz="2400" strike="noStrike" u="none">
                 <a:solidFill>
-                  <a:srgbClr val="000000"/>
-                </a:solidFill>
-                <a:effectLst/>
-                <a:uFillTx/>
-                <a:latin typeface="Calibri"/>
-                <a:ea typeface="Unifont"/>
+                  <a:schemeClr val="dk1"/>
+                </a:solidFill>
+                <a:effectLst/>
+                <a:uFillTx/>
+                <a:latin typeface="Calibri"/>
               </a:rPr>
               <a:t> </a:t>
             </a:r>
@@ -5487,10 +5868,48 @@
             </a:endParaRPr>
           </a:p>
           <a:p>
+            <a:pPr marL="685800" defTabSz="343080">
+              <a:lnSpc>
+                <a:spcPct val="100000"/>
+              </a:lnSpc>
+              <a:spcBef>
+                <a:spcPts val="420"/>
+              </a:spcBef>
+              <a:tabLst>
+                <a:tab algn="l" pos="0"/>
+              </a:tabLst>
+            </a:pPr>
+            <a:r>
+              <a:rPr b="1" lang="fr-FR" sz="2100" strike="noStrike" u="none">
+                <a:solidFill>
+                  <a:srgbClr val="ff00ff"/>
+                </a:solidFill>
+                <a:effectLst/>
+                <a:uFillTx/>
+                <a:latin typeface="Courier New"/>
+              </a:rPr>
+              <a:t>X=Parameters → [Optimizer] → Y=Best Parameters</a:t>
+            </a:r>
+            <a:br>
+              <a:rPr sz="2100"/>
+            </a:br>
+            <a:endParaRPr b="0" lang="en-US" sz="2100" strike="noStrike" u="none">
+              <a:solidFill>
+                <a:srgbClr val="000000"/>
+              </a:solidFill>
+              <a:effectLst/>
+              <a:uFillTx/>
+              <a:latin typeface="Arial"/>
+            </a:endParaRPr>
+          </a:p>
+          <a:p>
             <a:pPr marL="343080" indent="-343080" defTabSz="343080">
               <a:lnSpc>
                 <a:spcPct val="100000"/>
               </a:lnSpc>
+              <a:spcBef>
+                <a:spcPts val="479"/>
+              </a:spcBef>
               <a:buClr>
                 <a:srgbClr val="000000"/>
               </a:buClr>
@@ -5503,84 +5922,24 @@
             <a:r>
               <a:rPr b="1" lang="fr-FR" sz="2400" strike="noStrike" u="none">
                 <a:solidFill>
-                  <a:srgbClr val="000000"/>
-                </a:solidFill>
-                <a:effectLst/>
-                <a:uFillTx/>
-                <a:latin typeface="Calibri"/>
-                <a:ea typeface="Unifont"/>
-              </a:rPr>
-              <a:t>General Behavior:</a:t>
-            </a:r>
-            <a:endParaRPr b="0" lang="en-US" sz="2400" strike="noStrike" u="none">
-              <a:solidFill>
-                <a:srgbClr val="000000"/>
-              </a:solidFill>
-              <a:effectLst/>
-              <a:uFillTx/>
-              <a:latin typeface="Arial"/>
-            </a:endParaRPr>
-          </a:p>
-          <a:p>
-            <a:pPr marL="360000" indent="-343080" defTabSz="343080">
-              <a:lnSpc>
-                <a:spcPct val="100000"/>
-              </a:lnSpc>
-              <a:buClr>
-                <a:srgbClr val="000000"/>
-              </a:buClr>
-              <a:buFont typeface="OpenSymbol"/>
-              <a:buChar char="►"/>
-              <a:tabLst>
-                <a:tab algn="l" pos="0"/>
-              </a:tabLst>
-            </a:pPr>
+                  <a:schemeClr val="dk1"/>
+                </a:solidFill>
+                <a:effectLst/>
+                <a:uFillTx/>
+                <a:latin typeface="Calibri"/>
+              </a:rPr>
+              <a:t>Use Case</a:t>
+            </a:r>
             <a:r>
               <a:rPr b="0" lang="fr-FR" sz="2400" strike="noStrike" u="none">
                 <a:solidFill>
-                  <a:srgbClr val="000000"/>
-                </a:solidFill>
-                <a:effectLst/>
-                <a:uFillTx/>
-                <a:latin typeface="Calibri"/>
-                <a:ea typeface="Unifont"/>
-              </a:rPr>
-              <a:t>All AI methods (CNNs, RNNs, SVMs) follow the same principle: map inputs to outputs via learned weights.</a:t>
-            </a:r>
-            <a:endParaRPr b="0" lang="en-US" sz="2400" strike="noStrike" u="none">
-              <a:solidFill>
-                <a:srgbClr val="000000"/>
-              </a:solidFill>
-              <a:effectLst/>
-              <a:uFillTx/>
-              <a:latin typeface="Arial"/>
-            </a:endParaRPr>
-          </a:p>
-          <a:p>
-            <a:pPr marL="360000" indent="-343080" defTabSz="343080">
-              <a:lnSpc>
-                <a:spcPct val="100000"/>
-              </a:lnSpc>
-              <a:buClr>
-                <a:srgbClr val="000000"/>
-              </a:buClr>
-              <a:buFont typeface="OpenSymbol"/>
-              <a:buChar char="►"/>
-              <a:tabLst>
-                <a:tab algn="l" pos="0"/>
-              </a:tabLst>
-            </a:pPr>
-            <a:r>
-              <a:rPr b="0" lang="fr-FR" sz="2400" strike="noStrike" u="none">
-                <a:solidFill>
-                  <a:srgbClr val="000000"/>
-                </a:solidFill>
-                <a:effectLst/>
-                <a:uFillTx/>
-                <a:latin typeface="Calibri"/>
-                <a:ea typeface="Unifont"/>
-              </a:rPr>
-              <a:t>Differences lie in architecture, training efficiency, and interpretability.</a:t>
+                  <a:schemeClr val="dk1"/>
+                </a:solidFill>
+                <a:effectLst/>
+                <a:uFillTx/>
+                <a:latin typeface="Calibri"/>
+              </a:rPr>
+              <a:t>: Optimization of beamline configurations.</a:t>
             </a:r>
             <a:endParaRPr b="0" lang="en-US" sz="2400" strike="noStrike" u="none">
               <a:solidFill>
@@ -5609,6 +5968,13 @@
 <file path=ppt/slides/slide12.xml><?xml version="1.0" encoding="utf-8"?>
 <p:sld xmlns:a="http://schemas.openxmlformats.org/drawingml/2006/main" xmlns:p="http://schemas.openxmlformats.org/presentationml/2006/main" xmlns:r="http://schemas.openxmlformats.org/officeDocument/2006/relationships" xmlns:p14="http://schemas.microsoft.com/office/powerpoint/2010/main" xmlns:p15="http://schemas.microsoft.com/office/powerpoint/2012/main" xmlns:mc="http://schemas.openxmlformats.org/markup-compatibility/2006">
   <p:cSld>
+    <p:bg>
+      <p:bgPr>
+        <a:solidFill>
+          <a:srgbClr val="ffffff"/>
+        </a:solidFill>
+      </p:bgPr>
+    </p:bg>
     <p:spTree>
       <p:nvGrpSpPr>
         <p:cNvPr id="1" name=""/>
@@ -5625,14 +5991,14 @@
       </p:grpSpPr>
       <p:sp>
         <p:nvSpPr>
-          <p:cNvPr id="82" name="Text 37"/>
+          <p:cNvPr id="82" name="Text 55"/>
           <p:cNvSpPr/>
           <p:nvPr/>
         </p:nvSpPr>
         <p:spPr>
           <a:xfrm>
             <a:off x="548640" y="384120"/>
-            <a:ext cx="9141480" cy="290160"/>
+            <a:ext cx="9141120" cy="289800"/>
           </a:xfrm>
           <a:prstGeom prst="rect">
             <a:avLst/>
@@ -5676,7 +6042,7 @@
                 <a:uFillTx/>
                 <a:latin typeface="Calibri"/>
               </a:rPr>
-              <a:t>General AI Methodology</a:t>
+              <a:t>AI Methodology</a:t>
             </a:r>
             <a:endParaRPr b="0" lang="en-US" sz="1200" strike="noStrike" u="none">
               <a:solidFill>
@@ -5691,14 +6057,14 @@
       </p:sp>
       <p:sp>
         <p:nvSpPr>
-          <p:cNvPr id="83" name="Text 38"/>
+          <p:cNvPr id="83" name="Text 56"/>
           <p:cNvSpPr/>
           <p:nvPr/>
         </p:nvSpPr>
         <p:spPr>
           <a:xfrm>
             <a:off x="548640" y="658440"/>
-            <a:ext cx="11061720" cy="820440"/>
+            <a:ext cx="11061360" cy="820080"/>
           </a:xfrm>
           <a:prstGeom prst="rect">
             <a:avLst/>
@@ -5734,7 +6100,7 @@
               </a:tabLst>
             </a:pPr>
             <a:r>
-              <a:rPr b="1" lang="en-GB" sz="3000" strike="noStrike" u="none">
+              <a:rPr b="1" lang="en-US" sz="3000" strike="noStrike" u="none">
                 <a:solidFill>
                   <a:srgbClr val="20242b"/>
                 </a:solidFill>
@@ -5742,7 +6108,7 @@
                 <a:uFillTx/>
                 <a:latin typeface="Cambria"/>
               </a:rPr>
-              <a:t>General AI Methodology</a:t>
+              <a:t>AI algorithm types</a:t>
             </a:r>
             <a:endParaRPr b="0" lang="en-US" sz="3000" strike="noStrike" u="none">
               <a:solidFill>
@@ -5757,14 +6123,14 @@
       </p:sp>
       <p:sp>
         <p:nvSpPr>
-          <p:cNvPr id="84" name="Text 39"/>
+          <p:cNvPr id="84" name="Text 57"/>
           <p:cNvSpPr/>
           <p:nvPr/>
         </p:nvSpPr>
         <p:spPr>
           <a:xfrm>
             <a:off x="11185920" y="6446520"/>
-            <a:ext cx="454680" cy="271800"/>
+            <a:ext cx="454320" cy="271440"/>
           </a:xfrm>
           <a:prstGeom prst="rect">
             <a:avLst/>
@@ -5825,7 +6191,7 @@
         <p:spPr>
           <a:xfrm>
             <a:off x="540000" y="1800000"/>
-            <a:ext cx="10978200" cy="4604760"/>
+            <a:ext cx="9475200" cy="3160800"/>
           </a:xfrm>
           <a:prstGeom prst="rect">
             <a:avLst/>
@@ -5846,16 +6212,59 @@
             <a:spAutoFit/>
           </a:bodyPr>
           <a:p>
+            <a:pPr defTabSz="343080">
+              <a:lnSpc>
+                <a:spcPct val="100000"/>
+              </a:lnSpc>
+              <a:spcBef>
+                <a:spcPts val="479"/>
+              </a:spcBef>
+              <a:tabLst>
+                <a:tab algn="l" pos="0"/>
+              </a:tabLst>
+            </a:pPr>
+            <a:r>
+              <a:rPr b="1" lang="en-US" sz="2400" strike="noStrike" u="none">
+                <a:solidFill>
+                  <a:srgbClr val="0000ff"/>
+                </a:solidFill>
+                <a:effectLst/>
+                <a:uFillTx/>
+                <a:latin typeface="Calibri"/>
+              </a:rPr>
+              <a:t>Data Processing</a:t>
+            </a:r>
+            <a:r>
+              <a:rPr b="0" lang="en-US" sz="2400" strike="noStrike" u="none">
+                <a:solidFill>
+                  <a:srgbClr val="0000ff"/>
+                </a:solidFill>
+                <a:effectLst/>
+                <a:uFillTx/>
+                <a:latin typeface="Calibri"/>
+              </a:rPr>
+              <a:t>:</a:t>
+            </a:r>
+            <a:br>
+              <a:rPr sz="2400"/>
+            </a:br>
+            <a:endParaRPr b="0" lang="en-US" sz="2400" strike="noStrike" u="none">
+              <a:solidFill>
+                <a:srgbClr val="000000"/>
+              </a:solidFill>
+              <a:effectLst/>
+              <a:uFillTx/>
+              <a:latin typeface="Arial"/>
+            </a:endParaRPr>
+          </a:p>
+          <a:p>
             <a:pPr marL="343080" indent="-343080" defTabSz="343080">
               <a:lnSpc>
                 <a:spcPct val="100000"/>
               </a:lnSpc>
               <a:spcBef>
-                <a:spcPts val="1191"/>
+                <a:spcPts val="479"/>
               </a:spcBef>
-              <a:spcAft>
-                <a:spcPts val="992"/>
-              </a:spcAft>
               <a:buClr>
                 <a:srgbClr val="000000"/>
               </a:buClr>
@@ -5866,15 +6275,74 @@
               </a:tabLst>
             </a:pPr>
             <a:r>
-              <a:rPr b="1" lang="fr-FR" sz="2400" strike="noStrike" u="none">
-                <a:solidFill>
-                  <a:srgbClr val="0000ff"/>
-                </a:solidFill>
-                <a:effectLst/>
-                <a:uFillTx/>
-                <a:latin typeface="Calibri"/>
-              </a:rPr>
-              <a:t>Training: The Core Process</a:t>
+              <a:rPr b="1" lang="en-US" sz="2400" strike="noStrike" u="none">
+                <a:solidFill>
+                  <a:schemeClr val="dk1"/>
+                </a:solidFill>
+                <a:effectLst/>
+                <a:uFillTx/>
+                <a:latin typeface="Calibri"/>
+              </a:rPr>
+              <a:t>Goal</a:t>
+            </a:r>
+            <a:r>
+              <a:rPr b="0" lang="en-US" sz="2400" strike="noStrike" u="none">
+                <a:solidFill>
+                  <a:schemeClr val="dk1"/>
+                </a:solidFill>
+                <a:effectLst/>
+                <a:uFillTx/>
+                <a:latin typeface="Calibri"/>
+              </a:rPr>
+              <a:t>: process measured data.</a:t>
+            </a:r>
+            <a:endParaRPr b="0" lang="en-US" sz="2400" strike="noStrike" u="none">
+              <a:solidFill>
+                <a:srgbClr val="000000"/>
+              </a:solidFill>
+              <a:effectLst/>
+              <a:uFillTx/>
+              <a:latin typeface="Arial"/>
+            </a:endParaRPr>
+          </a:p>
+          <a:p>
+            <a:pPr marL="343080" indent="-343080" defTabSz="343080">
+              <a:lnSpc>
+                <a:spcPct val="100000"/>
+              </a:lnSpc>
+              <a:spcBef>
+                <a:spcPts val="479"/>
+              </a:spcBef>
+              <a:buClr>
+                <a:srgbClr val="000000"/>
+              </a:buClr>
+              <a:buFont typeface="Arial"/>
+              <a:buChar char="•"/>
+              <a:tabLst>
+                <a:tab algn="l" pos="0"/>
+              </a:tabLst>
+            </a:pPr>
+            <a:r>
+              <a:rPr b="1" lang="en-US" sz="2400" strike="noStrike" u="none">
+                <a:solidFill>
+                  <a:schemeClr val="dk1"/>
+                </a:solidFill>
+                <a:effectLst/>
+                <a:uFillTx/>
+                <a:latin typeface="Calibri"/>
+              </a:rPr>
+              <a:t>AI Approach</a:t>
+            </a:r>
+            <a:r>
+              <a:rPr b="0" lang="en-US" sz="2400" strike="noStrike" u="none">
+                <a:solidFill>
+                  <a:schemeClr val="dk1"/>
+                </a:solidFill>
+                <a:effectLst/>
+                <a:uFillTx/>
+                <a:latin typeface="Calibri"/>
+              </a:rPr>
+              <a:t>:</a:t>
             </a:r>
             <a:br>
               <a:rPr sz="2400"/>
@@ -5882,11 +6350,11 @@
             <a:r>
               <a:rPr b="0" lang="en-US" sz="2400" strike="noStrike" u="none">
                 <a:solidFill>
-                  <a:srgbClr val="000000"/>
-                </a:solidFill>
-                <a:effectLst/>
-                <a:uFillTx/>
-                <a:latin typeface="Arial"/>
+                  <a:schemeClr val="dk1"/>
+                </a:solidFill>
+                <a:effectLst/>
+                <a:uFillTx/>
+                <a:latin typeface="Calibri"/>
               </a:rPr>
               <a:t> </a:t>
             </a:r>
@@ -5900,10 +6368,60 @@
             </a:endParaRPr>
           </a:p>
           <a:p>
+            <a:pPr marL="685800" defTabSz="343080">
+              <a:lnSpc>
+                <a:spcPct val="100000"/>
+              </a:lnSpc>
+              <a:spcBef>
+                <a:spcPts val="420"/>
+              </a:spcBef>
+              <a:tabLst>
+                <a:tab algn="l" pos="0"/>
+              </a:tabLst>
+            </a:pPr>
+            <a:r>
+              <a:rPr b="1" lang="en-US" sz="2100" strike="noStrike" u="none">
+                <a:solidFill>
+                  <a:srgbClr val="ff00ff"/>
+                </a:solidFill>
+                <a:effectLst/>
+                <a:uFillTx/>
+                <a:latin typeface="Courier New"/>
+                <a:ea typeface="Unifont"/>
+              </a:rPr>
+              <a:t>X=Measurement → [AI Algorithm] → Y=</a:t>
+            </a:r>
+            <a:r>
+              <a:rPr b="1" lang="en-US" sz="2100" strike="noStrike" u="none">
+                <a:solidFill>
+                  <a:srgbClr val="ff00ff"/>
+                </a:solidFill>
+                <a:effectLst/>
+                <a:uFillTx/>
+                <a:latin typeface="Courier New"/>
+              </a:rPr>
+              <a:t>Measurement</a:t>
+            </a:r>
+            <a:br>
+              <a:rPr sz="2100"/>
+            </a:br>
+            <a:endParaRPr b="0" lang="en-US" sz="2100" strike="noStrike" u="none">
+              <a:solidFill>
+                <a:srgbClr val="000000"/>
+              </a:solidFill>
+              <a:effectLst/>
+              <a:uFillTx/>
+              <a:latin typeface="Arial"/>
+            </a:endParaRPr>
+          </a:p>
+          <a:p>
             <a:pPr marL="343080" indent="-343080" defTabSz="343080">
               <a:lnSpc>
                 <a:spcPct val="100000"/>
               </a:lnSpc>
+              <a:spcBef>
+                <a:spcPts val="479"/>
+              </a:spcBef>
               <a:buClr>
                 <a:srgbClr val="000000"/>
               </a:buClr>
@@ -5914,269 +6432,27 @@
               </a:tabLst>
             </a:pPr>
             <a:r>
-              <a:rPr b="1" lang="fr-FR" sz="2400" strike="noStrike" u="none">
-                <a:solidFill>
-                  <a:srgbClr val="000000"/>
-                </a:solidFill>
-                <a:effectLst/>
-                <a:uFillTx/>
-                <a:latin typeface="Arial"/>
-                <a:ea typeface="Unifont"/>
-              </a:rPr>
-              <a:t>Objective</a:t>
-            </a:r>
-            <a:r>
-              <a:rPr b="0" lang="fr-FR" sz="2400" strike="noStrike" u="none">
-                <a:solidFill>
-                  <a:srgbClr val="000000"/>
-                </a:solidFill>
-                <a:effectLst/>
-                <a:uFillTx/>
-                <a:latin typeface="Arial"/>
-                <a:ea typeface="Unifont"/>
-              </a:rPr>
-              <a:t>: Minimize the loss function (e.g., Mean Squared Error, Cross-Entropy).</a:t>
-            </a:r>
-            <a:endParaRPr b="0" lang="en-US" sz="2400" strike="noStrike" u="none">
-              <a:solidFill>
-                <a:srgbClr val="000000"/>
-              </a:solidFill>
-              <a:effectLst/>
-              <a:uFillTx/>
-              <a:latin typeface="Arial"/>
-            </a:endParaRPr>
-          </a:p>
-          <a:p>
-            <a:pPr marL="360000" indent="-343080" defTabSz="343080">
-              <a:lnSpc>
-                <a:spcPct val="100000"/>
-              </a:lnSpc>
-              <a:buClr>
-                <a:srgbClr val="000000"/>
-              </a:buClr>
-              <a:buFont typeface="Arial"/>
-              <a:buChar char="•"/>
-              <a:tabLst>
-                <a:tab algn="l" pos="0"/>
-              </a:tabLst>
-            </a:pPr>
-            <a:r>
-              <a:rPr b="0" lang="fr-FR" sz="2400" strike="noStrike" u="none">
-                <a:solidFill>
-                  <a:srgbClr val="000000"/>
-                </a:solidFill>
-                <a:effectLst/>
-                <a:uFillTx/>
-                <a:latin typeface="Arial"/>
-                <a:ea typeface="Unifont"/>
-              </a:rPr>
-              <a:t>Loss Function: Measures the difference between predicted and actual outputs.</a:t>
-            </a:r>
-            <a:endParaRPr b="0" lang="en-US" sz="2400" strike="noStrike" u="none">
-              <a:solidFill>
-                <a:srgbClr val="000000"/>
-              </a:solidFill>
-              <a:effectLst/>
-              <a:uFillTx/>
-              <a:latin typeface="Arial"/>
-            </a:endParaRPr>
-          </a:p>
-          <a:p>
-            <a:pPr marL="343080" indent="-343080" defTabSz="343080">
-              <a:lnSpc>
-                <a:spcPct val="100000"/>
-              </a:lnSpc>
-              <a:buClr>
-                <a:srgbClr val="000000"/>
-              </a:buClr>
-              <a:buFont typeface="Arial"/>
-              <a:buChar char="•"/>
-              <a:tabLst>
-                <a:tab algn="l" pos="0"/>
-              </a:tabLst>
-            </a:pPr>
-            <a:r>
-              <a:rPr b="1" lang="fr-FR" sz="2400" strike="noStrike" u="none">
-                <a:solidFill>
-                  <a:srgbClr val="000000"/>
-                </a:solidFill>
-                <a:effectLst/>
-                <a:uFillTx/>
-                <a:latin typeface="Arial"/>
-                <a:ea typeface="Unifont"/>
-              </a:rPr>
-              <a:t>Steps</a:t>
-            </a:r>
-            <a:r>
-              <a:rPr b="0" lang="fr-FR" sz="2400" strike="noStrike" u="none">
-                <a:solidFill>
-                  <a:srgbClr val="000000"/>
-                </a:solidFill>
-                <a:effectLst/>
-                <a:uFillTx/>
-                <a:latin typeface="Arial"/>
-                <a:ea typeface="Unifont"/>
-              </a:rPr>
-              <a:t>:</a:t>
-            </a:r>
-            <a:endParaRPr b="0" lang="en-US" sz="2400" strike="noStrike" u="none">
-              <a:solidFill>
-                <a:srgbClr val="000000"/>
-              </a:solidFill>
-              <a:effectLst/>
-              <a:uFillTx/>
-              <a:latin typeface="Arial"/>
-            </a:endParaRPr>
-          </a:p>
-          <a:p>
-            <a:pPr marL="360000" indent="-343080" defTabSz="343080">
-              <a:lnSpc>
-                <a:spcPct val="100000"/>
-              </a:lnSpc>
-              <a:buClr>
-                <a:srgbClr val="000000"/>
-              </a:buClr>
-              <a:buFont typeface="Arial"/>
-              <a:buChar char="•"/>
-              <a:tabLst>
-                <a:tab algn="l" pos="0"/>
-              </a:tabLst>
-            </a:pPr>
-            <a:r>
-              <a:rPr b="0" lang="fr-FR" sz="2400" strike="noStrike" u="none">
-                <a:solidFill>
-                  <a:srgbClr val="000000"/>
-                </a:solidFill>
-                <a:effectLst/>
-                <a:uFillTx/>
-                <a:latin typeface="Arial"/>
-                <a:ea typeface="Unifont"/>
-              </a:rPr>
-              <a:t>Forward Pass: Compute predictions for a batch of training data.</a:t>
-            </a:r>
-            <a:endParaRPr b="0" lang="en-US" sz="2400" strike="noStrike" u="none">
-              <a:solidFill>
-                <a:srgbClr val="000000"/>
-              </a:solidFill>
-              <a:effectLst/>
-              <a:uFillTx/>
-              <a:latin typeface="Arial"/>
-            </a:endParaRPr>
-          </a:p>
-          <a:p>
-            <a:pPr marL="360000" indent="-343080" defTabSz="343080">
-              <a:lnSpc>
-                <a:spcPct val="100000"/>
-              </a:lnSpc>
-              <a:buClr>
-                <a:srgbClr val="000000"/>
-              </a:buClr>
-              <a:buFont typeface="Arial"/>
-              <a:buChar char="•"/>
-              <a:tabLst>
-                <a:tab algn="l" pos="0"/>
-              </a:tabLst>
-            </a:pPr>
-            <a:r>
-              <a:rPr b="0" lang="fr-FR" sz="2400" strike="noStrike" u="none">
-                <a:solidFill>
-                  <a:srgbClr val="000000"/>
-                </a:solidFill>
-                <a:effectLst/>
-                <a:uFillTx/>
-                <a:latin typeface="Arial"/>
-                <a:ea typeface="Unifont"/>
-              </a:rPr>
-              <a:t>Loss Calculation: Evaluate how far predictions are from true values.</a:t>
-            </a:r>
-            <a:endParaRPr b="0" lang="en-US" sz="2400" strike="noStrike" u="none">
-              <a:solidFill>
-                <a:srgbClr val="000000"/>
-              </a:solidFill>
-              <a:effectLst/>
-              <a:uFillTx/>
-              <a:latin typeface="Arial"/>
-            </a:endParaRPr>
-          </a:p>
-          <a:p>
-            <a:pPr marL="360000" indent="-343080" defTabSz="343080">
-              <a:lnSpc>
-                <a:spcPct val="100000"/>
-              </a:lnSpc>
-              <a:buClr>
-                <a:srgbClr val="000000"/>
-              </a:buClr>
-              <a:buFont typeface="Arial"/>
-              <a:buChar char="•"/>
-              <a:tabLst>
-                <a:tab algn="l" pos="0"/>
-              </a:tabLst>
-            </a:pPr>
-            <a:r>
-              <a:rPr b="0" lang="fr-FR" sz="2400" strike="noStrike" u="none">
-                <a:solidFill>
-                  <a:srgbClr val="000000"/>
-                </a:solidFill>
-                <a:effectLst/>
-                <a:uFillTx/>
-                <a:latin typeface="Arial"/>
-                <a:ea typeface="Unifont"/>
-              </a:rPr>
-              <a:t>Backpropagation: Compute gradients of the loss with respect to weights.</a:t>
-            </a:r>
-            <a:endParaRPr b="0" lang="en-US" sz="2400" strike="noStrike" u="none">
-              <a:solidFill>
-                <a:srgbClr val="000000"/>
-              </a:solidFill>
-              <a:effectLst/>
-              <a:uFillTx/>
-              <a:latin typeface="Arial"/>
-            </a:endParaRPr>
-          </a:p>
-          <a:p>
-            <a:pPr marL="360000" indent="-343080" defTabSz="343080">
-              <a:lnSpc>
-                <a:spcPct val="100000"/>
-              </a:lnSpc>
-              <a:buClr>
-                <a:srgbClr val="000000"/>
-              </a:buClr>
-              <a:buFont typeface="Arial"/>
-              <a:buChar char="•"/>
-              <a:tabLst>
-                <a:tab algn="l" pos="0"/>
-              </a:tabLst>
-            </a:pPr>
-            <a:r>
-              <a:rPr b="0" lang="fr-FR" sz="2400" strike="noStrike" u="none">
-                <a:solidFill>
-                  <a:srgbClr val="000000"/>
-                </a:solidFill>
-                <a:effectLst/>
-                <a:uFillTx/>
-                <a:latin typeface="Arial"/>
-                <a:ea typeface="Unifont"/>
-              </a:rPr>
-              <a:t>Optimization: Update weights using an optimizer (e.g., Adam, SGD).</a:t>
-            </a:r>
-            <a:endParaRPr b="0" lang="en-US" sz="2400" strike="noStrike" u="none">
-              <a:solidFill>
-                <a:srgbClr val="000000"/>
-              </a:solidFill>
-              <a:effectLst/>
-              <a:uFillTx/>
-              <a:latin typeface="Arial"/>
-            </a:endParaRPr>
-          </a:p>
-          <a:p>
-            <a:pPr defTabSz="343080">
-              <a:lnSpc>
-                <a:spcPct val="100000"/>
-              </a:lnSpc>
-              <a:tabLst>
-                <a:tab algn="l" pos="0"/>
-              </a:tabLst>
-            </a:pPr>
+              <a:rPr b="0" lang="en-US" sz="2400" strike="noStrike" u="sng">
+                <a:solidFill>
+                  <a:schemeClr val="dk1"/>
+                </a:solidFill>
+                <a:effectLst/>
+                <a:uFillTx/>
+                <a:latin typeface="Calibri"/>
+              </a:rPr>
+              <a:t>Example</a:t>
+            </a:r>
+            <a:r>
+              <a:rPr b="0" lang="en-US" sz="2400" strike="noStrike" u="none">
+                <a:solidFill>
+                  <a:schemeClr val="dk1"/>
+                </a:solidFill>
+                <a:effectLst/>
+                <a:uFillTx/>
+                <a:latin typeface="Calibri"/>
+              </a:rPr>
+              <a:t>: filter noise, super-resolution, segmentation.</a:t>
+            </a:r>
             <a:endParaRPr b="0" lang="en-US" sz="2400" strike="noStrike" u="none">
               <a:solidFill>
                 <a:srgbClr val="000000"/>
@@ -6220,14 +6496,14 @@
       </p:grpSpPr>
       <p:sp>
         <p:nvSpPr>
-          <p:cNvPr id="86" name="Text 40"/>
+          <p:cNvPr id="86" name="Text 37"/>
           <p:cNvSpPr/>
           <p:nvPr/>
         </p:nvSpPr>
         <p:spPr>
           <a:xfrm>
-            <a:off x="548640" y="383760"/>
-            <a:ext cx="9141480" cy="290160"/>
+            <a:off x="548640" y="384120"/>
+            <a:ext cx="9141120" cy="289800"/>
           </a:xfrm>
           <a:prstGeom prst="rect">
             <a:avLst/>
@@ -6286,14 +6562,14 @@
       </p:sp>
       <p:sp>
         <p:nvSpPr>
-          <p:cNvPr id="87" name="Text 41"/>
+          <p:cNvPr id="87" name="Text 38"/>
           <p:cNvSpPr/>
           <p:nvPr/>
         </p:nvSpPr>
         <p:spPr>
           <a:xfrm>
-            <a:off x="548640" y="658080"/>
-            <a:ext cx="11061720" cy="820440"/>
+            <a:off x="548640" y="658440"/>
+            <a:ext cx="11061360" cy="820080"/>
           </a:xfrm>
           <a:prstGeom prst="rect">
             <a:avLst/>
@@ -6352,14 +6628,14 @@
       </p:sp>
       <p:sp>
         <p:nvSpPr>
-          <p:cNvPr id="88" name="Text 42"/>
+          <p:cNvPr id="88" name="Text 39"/>
           <p:cNvSpPr/>
           <p:nvPr/>
         </p:nvSpPr>
         <p:spPr>
           <a:xfrm>
-            <a:off x="11185920" y="6446160"/>
-            <a:ext cx="454680" cy="271800"/>
+            <a:off x="11185920" y="6446520"/>
+            <a:ext cx="454320" cy="271440"/>
           </a:xfrm>
           <a:prstGeom prst="rect">
             <a:avLst/>
@@ -6419,8 +6695,8 @@
         </p:nvSpPr>
         <p:spPr>
           <a:xfrm>
-            <a:off x="540000" y="1799640"/>
-            <a:ext cx="10978200" cy="2775960"/>
+            <a:off x="540000" y="1800000"/>
+            <a:ext cx="10977840" cy="4604760"/>
           </a:xfrm>
           <a:prstGeom prst="rect">
             <a:avLst/>
@@ -6471,24 +6747,20 @@
               </a:rPr>
               <a:t>Training: The Core Process</a:t>
             </a:r>
-            <a:endParaRPr b="0" lang="en-US" sz="2400" strike="noStrike" u="none">
-              <a:solidFill>
-                <a:srgbClr val="000000"/>
-              </a:solidFill>
-              <a:effectLst/>
-              <a:uFillTx/>
-              <a:latin typeface="Arial"/>
-            </a:endParaRPr>
-          </a:p>
-          <a:p>
-            <a:pPr defTabSz="343080">
-              <a:lnSpc>
-                <a:spcPct val="100000"/>
-              </a:lnSpc>
-              <a:tabLst>
-                <a:tab algn="l" pos="0"/>
-              </a:tabLst>
-            </a:pPr>
+            <a:br>
+              <a:rPr sz="2400"/>
+            </a:br>
+            <a:r>
+              <a:rPr b="0" lang="en-US" sz="2400" strike="noStrike" u="none">
+                <a:solidFill>
+                  <a:srgbClr val="000000"/>
+                </a:solidFill>
+                <a:effectLst/>
+                <a:uFillTx/>
+                <a:latin typeface="Arial"/>
+              </a:rPr>
+              <a:t> </a:t>
+            </a:r>
             <a:endParaRPr b="0" lang="en-US" sz="2400" strike="noStrike" u="none">
               <a:solidFill>
                 <a:srgbClr val="000000"/>
@@ -6522,7 +6794,19 @@
                 <a:latin typeface="Arial"/>
                 <a:ea typeface="Unifont"/>
               </a:rPr>
-              <a:t>Key Factors for Success:</a:t>
+              <a:t>Objective</a:t>
+            </a:r>
+            <a:r>
+              <a:rPr b="0" lang="fr-FR" sz="2400" strike="noStrike" u="none">
+                <a:solidFill>
+                  <a:srgbClr val="000000"/>
+                </a:solidFill>
+                <a:effectLst/>
+                <a:uFillTx/>
+                <a:latin typeface="Arial"/>
+                <a:ea typeface="Unifont"/>
+              </a:rPr>
+              <a:t>: Minimize the loss function (e.g., Mean Squared Error, Cross-Entropy).</a:t>
             </a:r>
             <a:endParaRPr b="0" lang="en-US" sz="2400" strike="noStrike" u="none">
               <a:solidFill>
@@ -6534,7 +6818,43 @@
             </a:endParaRPr>
           </a:p>
           <a:p>
-            <a:pPr marL="360000" indent="-343080" defTabSz="343080">
+            <a:pPr lvl="1" marL="432000" indent="-216000" defTabSz="343080">
+              <a:lnSpc>
+                <a:spcPct val="100000"/>
+              </a:lnSpc>
+              <a:buClr>
+                <a:srgbClr val="000000"/>
+              </a:buClr>
+              <a:buSzPct val="45000"/>
+              <a:buFont typeface="OpenSymbol"/>
+              <a:buChar char="►"/>
+              <a:tabLst>
+                <a:tab algn="l" pos="0"/>
+              </a:tabLst>
+            </a:pPr>
+            <a:r>
+              <a:rPr b="0" lang="fr-FR" sz="2400" strike="noStrike" u="none">
+                <a:solidFill>
+                  <a:srgbClr val="000000"/>
+                </a:solidFill>
+                <a:effectLst/>
+                <a:uFillTx/>
+                <a:latin typeface="Arial"/>
+                <a:ea typeface="Unifont"/>
+              </a:rPr>
+              <a:t>Loss Function: Measures the difference between predicted and actual outputs.</a:t>
+            </a:r>
+            <a:endParaRPr b="0" lang="en-US" sz="2400" strike="noStrike" u="none">
+              <a:solidFill>
+                <a:srgbClr val="000000"/>
+              </a:solidFill>
+              <a:effectLst/>
+              <a:uFillTx/>
+              <a:latin typeface="Arial"/>
+            </a:endParaRPr>
+          </a:p>
+          <a:p>
+            <a:pPr marL="343080" indent="-343080" defTabSz="343080">
               <a:lnSpc>
                 <a:spcPct val="100000"/>
               </a:lnSpc>
@@ -6548,7 +6868,7 @@
               </a:tabLst>
             </a:pPr>
             <a:r>
-              <a:rPr b="0" lang="fr-FR" sz="2400" strike="noStrike" u="none">
+              <a:rPr b="1" lang="fr-FR" sz="2400" strike="noStrike" u="none">
                 <a:solidFill>
                   <a:srgbClr val="000000"/>
                 </a:solidFill>
@@ -6557,31 +6877,8 @@
                 <a:latin typeface="Arial"/>
                 <a:ea typeface="Unifont"/>
               </a:rPr>
-              <a:t>Data Quality: High-fidelity simulations with diverse parameters.</a:t>
-            </a:r>
-            <a:endParaRPr b="0" lang="en-US" sz="2400" strike="noStrike" u="none">
-              <a:solidFill>
-                <a:srgbClr val="000000"/>
-              </a:solidFill>
-              <a:effectLst/>
-              <a:uFillTx/>
-              <a:latin typeface="Arial"/>
-            </a:endParaRPr>
-          </a:p>
-          <a:p>
-            <a:pPr marL="360000" indent="-343080" defTabSz="343080">
-              <a:lnSpc>
-                <a:spcPct val="100000"/>
-              </a:lnSpc>
-              <a:buClr>
-                <a:srgbClr val="000000"/>
-              </a:buClr>
-              <a:buFont typeface="Arial"/>
-              <a:buChar char="•"/>
-              <a:tabLst>
-                <a:tab algn="l" pos="0"/>
-              </a:tabLst>
-            </a:pPr>
+              <a:t>Steps</a:t>
+            </a:r>
             <a:r>
               <a:rPr b="0" lang="fr-FR" sz="2400" strike="noStrike" u="none">
                 <a:solidFill>
@@ -6592,7 +6889,7 @@
                 <a:latin typeface="Arial"/>
                 <a:ea typeface="Unifont"/>
               </a:rPr>
-              <a:t>Model Architecture: Match complexity to the problem (e.g., CNNs for images, Transformers for sequences).</a:t>
+              <a:t>:</a:t>
             </a:r>
             <a:endParaRPr b="0" lang="en-US" sz="2400" strike="noStrike" u="none">
               <a:solidFill>
@@ -6604,15 +6901,16 @@
             </a:endParaRPr>
           </a:p>
           <a:p>
-            <a:pPr marL="360000" indent="-343080" defTabSz="343080">
+            <a:pPr lvl="1" marL="432000" indent="-216000" defTabSz="343080">
               <a:lnSpc>
                 <a:spcPct val="100000"/>
               </a:lnSpc>
               <a:buClr>
                 <a:srgbClr val="000000"/>
               </a:buClr>
-              <a:buFont typeface="Arial"/>
-              <a:buChar char="•"/>
+              <a:buSzPct val="45000"/>
+              <a:buFont typeface="OpenSymbol"/>
+              <a:buChar char="►"/>
               <a:tabLst>
                 <a:tab algn="l" pos="0"/>
               </a:tabLst>
@@ -6627,8 +6925,134 @@
                 <a:latin typeface="Arial"/>
                 <a:ea typeface="Unifont"/>
               </a:rPr>
-              <a:t>Hyperparameters: Learning rate, batch size, number of epochs.</a:t>
-            </a:r>
+              <a:t>Forward Pass: Compute predictions for a batch of training data.</a:t>
+            </a:r>
+            <a:endParaRPr b="0" lang="en-US" sz="2400" strike="noStrike" u="none">
+              <a:solidFill>
+                <a:srgbClr val="000000"/>
+              </a:solidFill>
+              <a:effectLst/>
+              <a:uFillTx/>
+              <a:latin typeface="Arial"/>
+            </a:endParaRPr>
+          </a:p>
+          <a:p>
+            <a:pPr lvl="1" marL="432000" indent="-216000" defTabSz="343080">
+              <a:lnSpc>
+                <a:spcPct val="100000"/>
+              </a:lnSpc>
+              <a:buClr>
+                <a:srgbClr val="000000"/>
+              </a:buClr>
+              <a:buSzPct val="45000"/>
+              <a:buFont typeface="OpenSymbol"/>
+              <a:buChar char="►"/>
+              <a:tabLst>
+                <a:tab algn="l" pos="0"/>
+              </a:tabLst>
+            </a:pPr>
+            <a:r>
+              <a:rPr b="0" lang="fr-FR" sz="2400" strike="noStrike" u="none">
+                <a:solidFill>
+                  <a:srgbClr val="000000"/>
+                </a:solidFill>
+                <a:effectLst/>
+                <a:uFillTx/>
+                <a:latin typeface="Arial"/>
+                <a:ea typeface="Unifont"/>
+              </a:rPr>
+              <a:t>Loss Calculation: Evaluate how far predictions are from true values.</a:t>
+            </a:r>
+            <a:endParaRPr b="0" lang="en-US" sz="2400" strike="noStrike" u="none">
+              <a:solidFill>
+                <a:srgbClr val="000000"/>
+              </a:solidFill>
+              <a:effectLst/>
+              <a:uFillTx/>
+              <a:latin typeface="Arial"/>
+            </a:endParaRPr>
+          </a:p>
+          <a:p>
+            <a:pPr lvl="1" marL="432000" indent="-216000" defTabSz="343080">
+              <a:lnSpc>
+                <a:spcPct val="100000"/>
+              </a:lnSpc>
+              <a:buClr>
+                <a:srgbClr val="000000"/>
+              </a:buClr>
+              <a:buSzPct val="45000"/>
+              <a:buFont typeface="OpenSymbol"/>
+              <a:buChar char="►"/>
+              <a:tabLst>
+                <a:tab algn="l" pos="0"/>
+              </a:tabLst>
+            </a:pPr>
+            <a:r>
+              <a:rPr b="0" lang="fr-FR" sz="2400" strike="noStrike" u="none">
+                <a:solidFill>
+                  <a:srgbClr val="000000"/>
+                </a:solidFill>
+                <a:effectLst/>
+                <a:uFillTx/>
+                <a:latin typeface="Arial"/>
+                <a:ea typeface="Unifont"/>
+              </a:rPr>
+              <a:t>Backpropagation: Compute gradients of the loss with respect to weights.</a:t>
+            </a:r>
+            <a:endParaRPr b="0" lang="en-US" sz="2400" strike="noStrike" u="none">
+              <a:solidFill>
+                <a:srgbClr val="000000"/>
+              </a:solidFill>
+              <a:effectLst/>
+              <a:uFillTx/>
+              <a:latin typeface="Arial"/>
+            </a:endParaRPr>
+          </a:p>
+          <a:p>
+            <a:pPr lvl="1" marL="432000" indent="-216000" defTabSz="343080">
+              <a:lnSpc>
+                <a:spcPct val="100000"/>
+              </a:lnSpc>
+              <a:buClr>
+                <a:srgbClr val="000000"/>
+              </a:buClr>
+              <a:buSzPct val="45000"/>
+              <a:buFont typeface="OpenSymbol"/>
+              <a:buChar char="►"/>
+              <a:tabLst>
+                <a:tab algn="l" pos="0"/>
+              </a:tabLst>
+            </a:pPr>
+            <a:r>
+              <a:rPr b="0" lang="fr-FR" sz="2400" strike="noStrike" u="none">
+                <a:solidFill>
+                  <a:srgbClr val="000000"/>
+                </a:solidFill>
+                <a:effectLst/>
+                <a:uFillTx/>
+                <a:latin typeface="Arial"/>
+                <a:ea typeface="Unifont"/>
+              </a:rPr>
+              <a:t>Optimization: Update weights using an optimizer (e.g., Adam, SGD).</a:t>
+            </a:r>
+            <a:endParaRPr b="0" lang="en-US" sz="2400" strike="noStrike" u="none">
+              <a:solidFill>
+                <a:srgbClr val="000000"/>
+              </a:solidFill>
+              <a:effectLst/>
+              <a:uFillTx/>
+              <a:latin typeface="Arial"/>
+            </a:endParaRPr>
+          </a:p>
+          <a:p>
+            <a:pPr defTabSz="343080">
+              <a:lnSpc>
+                <a:spcPct val="100000"/>
+              </a:lnSpc>
+              <a:tabLst>
+                <a:tab algn="l" pos="0"/>
+              </a:tabLst>
+            </a:pPr>
             <a:endParaRPr b="0" lang="en-US" sz="2400" strike="noStrike" u="none">
               <a:solidFill>
                 <a:srgbClr val="000000"/>
@@ -6672,14 +7096,14 @@
       </p:grpSpPr>
       <p:sp>
         <p:nvSpPr>
-          <p:cNvPr id="90" name="Text 46"/>
+          <p:cNvPr id="90" name="Text 40"/>
           <p:cNvSpPr/>
           <p:nvPr/>
         </p:nvSpPr>
         <p:spPr>
           <a:xfrm>
             <a:off x="548640" y="383760"/>
-            <a:ext cx="9141480" cy="290160"/>
+            <a:ext cx="9141120" cy="289800"/>
           </a:xfrm>
           <a:prstGeom prst="rect">
             <a:avLst/>
@@ -6723,7 +7147,7 @@
                 <a:uFillTx/>
                 <a:latin typeface="Calibri"/>
               </a:rPr>
-              <a:t>Lessons and praticals</a:t>
+              <a:t>General AI Methodology</a:t>
             </a:r>
             <a:endParaRPr b="0" lang="en-US" sz="1200" strike="noStrike" u="none">
               <a:solidFill>
@@ -6738,14 +7162,14 @@
       </p:sp>
       <p:sp>
         <p:nvSpPr>
-          <p:cNvPr id="91" name="Text 47"/>
+          <p:cNvPr id="91" name="Text 41"/>
           <p:cNvSpPr/>
           <p:nvPr/>
         </p:nvSpPr>
         <p:spPr>
           <a:xfrm>
             <a:off x="548640" y="658080"/>
-            <a:ext cx="11061720" cy="820440"/>
+            <a:ext cx="11061360" cy="820080"/>
           </a:xfrm>
           <a:prstGeom prst="rect">
             <a:avLst/>
@@ -6789,7 +7213,7 @@
                 <a:uFillTx/>
                 <a:latin typeface="Cambria"/>
               </a:rPr>
-              <a:t>What You Will Learn and Practice</a:t>
+              <a:t>General AI Methodology</a:t>
             </a:r>
             <a:endParaRPr b="0" lang="en-US" sz="3000" strike="noStrike" u="none">
               <a:solidFill>
@@ -6804,14 +7228,14 @@
       </p:sp>
       <p:sp>
         <p:nvSpPr>
-          <p:cNvPr id="92" name="Text 48"/>
+          <p:cNvPr id="92" name="Text 42"/>
           <p:cNvSpPr/>
           <p:nvPr/>
         </p:nvSpPr>
         <p:spPr>
           <a:xfrm>
             <a:off x="11185920" y="6446160"/>
-            <a:ext cx="454680" cy="271800"/>
+            <a:ext cx="454320" cy="271440"/>
           </a:xfrm>
           <a:prstGeom prst="rect">
             <a:avLst/>
@@ -6872,7 +7296,7 @@
         <p:spPr>
           <a:xfrm>
             <a:off x="540000" y="1799640"/>
-            <a:ext cx="10978200" cy="4303080"/>
+            <a:ext cx="10977840" cy="2775960"/>
           </a:xfrm>
           <a:prstGeom prst="rect">
             <a:avLst/>
@@ -6921,7 +7345,7 @@
                 <a:uFillTx/>
                 <a:latin typeface="Calibri"/>
               </a:rPr>
-              <a:t>Hands-on skills</a:t>
+              <a:t>Training: The Core Process</a:t>
             </a:r>
             <a:endParaRPr b="0" lang="en-US" sz="2400" strike="noStrike" u="none">
               <a:solidFill>
@@ -6941,7 +7365,7 @@
                 <a:tab algn="l" pos="0"/>
               </a:tabLst>
             </a:pPr>
-            <a:endParaRPr b="0" lang="en-US" sz="1000" strike="noStrike" u="none">
+            <a:endParaRPr b="0" lang="en-US" sz="2400" strike="noStrike" u="none">
               <a:solidFill>
                 <a:srgbClr val="000000"/>
               </a:solidFill>
@@ -6955,12 +7379,6 @@
               <a:lnSpc>
                 <a:spcPct val="100000"/>
               </a:lnSpc>
-              <a:spcBef>
-                <a:spcPts val="1191"/>
-              </a:spcBef>
-              <a:spcAft>
-                <a:spcPts val="992"/>
-              </a:spcAft>
               <a:buClr>
                 <a:srgbClr val="000000"/>
               </a:buClr>
@@ -6980,7 +7398,7 @@
                 <a:latin typeface="Arial"/>
                 <a:ea typeface="Unifont"/>
               </a:rPr>
-              <a:t>Setting Up Simulations:</a:t>
+              <a:t>Key Factors for Success:</a:t>
             </a:r>
             <a:endParaRPr b="0" lang="en-US" sz="2400" strike="noStrike" u="none">
               <a:solidFill>
@@ -7015,7 +7433,7 @@
                 <a:latin typeface="Arial"/>
                 <a:ea typeface="Unifont"/>
               </a:rPr>
-              <a:t>Configure beamlines/instruments in McStas (neutrons) and McXtrace (X-rays).</a:t>
+              <a:t>Data Quality: High-fidelity simulations with diverse parameters.</a:t>
             </a:r>
             <a:endParaRPr b="0" lang="en-US" sz="2400" strike="noStrike" u="none">
               <a:solidFill>
@@ -7050,22 +7468,7 @@
                 <a:latin typeface="Arial"/>
                 <a:ea typeface="Unifont"/>
               </a:rPr>
-              <a:t>Define sample properties (e.g., crystal structure, composition).</a:t>
-            </a:r>
-            <a:br>
-              <a:rPr sz="2400"/>
-            </a:br>
-            <a:r>
-              <a:rPr b="0" lang="fr-FR" sz="2400" strike="noStrike" u="none">
-                <a:solidFill>
-                  <a:srgbClr val="000000"/>
-                </a:solidFill>
-                <a:effectLst/>
-                <a:uFillTx/>
-                <a:latin typeface="Arial"/>
-                <a:ea typeface="Unifont"/>
-              </a:rPr>
-              <a:t> </a:t>
+              <a:t>Model Architecture: Match complexity to the problem (e.g., CNNs for images, Transformers for sequences, trees for classification).</a:t>
             </a:r>
             <a:endParaRPr b="0" lang="en-US" sz="2400" strike="noStrike" u="none">
               <a:solidFill>
@@ -7077,7 +7480,7 @@
             </a:endParaRPr>
           </a:p>
           <a:p>
-            <a:pPr marL="343080" indent="-343080" defTabSz="343080">
+            <a:pPr marL="360000" indent="-343080" defTabSz="343080">
               <a:lnSpc>
                 <a:spcPct val="100000"/>
               </a:lnSpc>
@@ -7091,7 +7494,7 @@
               </a:tabLst>
             </a:pPr>
             <a:r>
-              <a:rPr b="1" lang="fr-FR" sz="2400" strike="noStrike" u="none">
+              <a:rPr b="0" lang="fr-FR" sz="2400" strike="noStrike" u="none">
                 <a:solidFill>
                   <a:srgbClr val="000000"/>
                 </a:solidFill>
@@ -7100,77 +7503,7 @@
                 <a:latin typeface="Arial"/>
                 <a:ea typeface="Unifont"/>
               </a:rPr>
-              <a:t>Characterizing Models:</a:t>
-            </a:r>
-            <a:endParaRPr b="0" lang="en-US" sz="2400" strike="noStrike" u="none">
-              <a:solidFill>
-                <a:srgbClr val="000000"/>
-              </a:solidFill>
-              <a:effectLst/>
-              <a:uFillTx/>
-              <a:latin typeface="Arial"/>
-            </a:endParaRPr>
-          </a:p>
-          <a:p>
-            <a:pPr marL="360000" indent="-343080" defTabSz="343080">
-              <a:lnSpc>
-                <a:spcPct val="100000"/>
-              </a:lnSpc>
-              <a:buClr>
-                <a:srgbClr val="000000"/>
-              </a:buClr>
-              <a:buFont typeface="Arial"/>
-              <a:buChar char="•"/>
-              <a:tabLst>
-                <a:tab algn="l" pos="0"/>
-              </a:tabLst>
-            </a:pPr>
-            <a:r>
-              <a:rPr b="0" lang="fr-FR" sz="2400" strike="noStrike" u="none">
-                <a:solidFill>
-                  <a:srgbClr val="000000"/>
-                </a:solidFill>
-                <a:effectLst/>
-                <a:uFillTx/>
-                <a:latin typeface="Arial"/>
-                <a:ea typeface="Unifont"/>
-              </a:rPr>
-              <a:t>Check geometry (e.g., detector positions, slit sizes).</a:t>
-            </a:r>
-            <a:endParaRPr b="0" lang="en-US" sz="2400" strike="noStrike" u="none">
-              <a:solidFill>
-                <a:srgbClr val="000000"/>
-              </a:solidFill>
-              <a:effectLst/>
-              <a:uFillTx/>
-              <a:latin typeface="Arial"/>
-            </a:endParaRPr>
-          </a:p>
-          <a:p>
-            <a:pPr marL="360000" indent="-343080" defTabSz="343080">
-              <a:lnSpc>
-                <a:spcPct val="100000"/>
-              </a:lnSpc>
-              <a:buClr>
-                <a:srgbClr val="000000"/>
-              </a:buClr>
-              <a:buFont typeface="Arial"/>
-              <a:buChar char="•"/>
-              <a:tabLst>
-                <a:tab algn="l" pos="0"/>
-              </a:tabLst>
-            </a:pPr>
-            <a:r>
-              <a:rPr b="0" lang="fr-FR" sz="2400" strike="noStrike" u="none">
-                <a:solidFill>
-                  <a:srgbClr val="000000"/>
-                </a:solidFill>
-                <a:effectLst/>
-                <a:uFillTx/>
-                <a:latin typeface="Arial"/>
-                <a:ea typeface="Unifont"/>
-              </a:rPr>
-              <a:t>Extract parameters (e.g., resolution, flux) and results (e.g., spectra, diffraction patterns).</a:t>
+              <a:t>Hyperparameters: Learning rate, batch size, number of epochs.</a:t>
             </a:r>
             <a:endParaRPr b="0" lang="en-US" sz="2400" strike="noStrike" u="none">
               <a:solidFill>
@@ -7215,14 +7548,14 @@
       </p:grpSpPr>
       <p:sp>
         <p:nvSpPr>
-          <p:cNvPr id="94" name="Text 43"/>
+          <p:cNvPr id="94" name="Text 46"/>
           <p:cNvSpPr/>
           <p:nvPr/>
         </p:nvSpPr>
         <p:spPr>
           <a:xfrm>
             <a:off x="548640" y="383760"/>
-            <a:ext cx="9141480" cy="290160"/>
+            <a:ext cx="9141120" cy="289800"/>
           </a:xfrm>
           <a:prstGeom prst="rect">
             <a:avLst/>
@@ -7281,14 +7614,14 @@
       </p:sp>
       <p:sp>
         <p:nvSpPr>
-          <p:cNvPr id="95" name="Text 44"/>
+          <p:cNvPr id="95" name="Text 47"/>
           <p:cNvSpPr/>
           <p:nvPr/>
         </p:nvSpPr>
         <p:spPr>
           <a:xfrm>
             <a:off x="548640" y="658080"/>
-            <a:ext cx="11061720" cy="820440"/>
+            <a:ext cx="11061360" cy="820080"/>
           </a:xfrm>
           <a:prstGeom prst="rect">
             <a:avLst/>
@@ -7347,14 +7680,14 @@
       </p:sp>
       <p:sp>
         <p:nvSpPr>
-          <p:cNvPr id="96" name="Text 45"/>
+          <p:cNvPr id="96" name="Text 48"/>
           <p:cNvSpPr/>
           <p:nvPr/>
         </p:nvSpPr>
         <p:spPr>
           <a:xfrm>
             <a:off x="11185920" y="6446160"/>
-            <a:ext cx="454680" cy="271800"/>
+            <a:ext cx="454320" cy="271440"/>
           </a:xfrm>
           <a:prstGeom prst="rect">
             <a:avLst/>
@@ -7415,7 +7748,7 @@
         <p:spPr>
           <a:xfrm>
             <a:off x="540000" y="1799640"/>
-            <a:ext cx="10978200" cy="4336200"/>
+            <a:ext cx="10977840" cy="4303080"/>
           </a:xfrm>
           <a:prstGeom prst="rect">
             <a:avLst/>
@@ -7523,7 +7856,7 @@
                 <a:latin typeface="Arial"/>
                 <a:ea typeface="Unifont"/>
               </a:rPr>
-              <a:t>Generating Datasets:</a:t>
+              <a:t>Setting Up Simulations:</a:t>
             </a:r>
             <a:endParaRPr b="0" lang="en-US" sz="2400" strike="noStrike" u="none">
               <a:solidFill>
@@ -7535,16 +7868,97 @@
             </a:endParaRPr>
           </a:p>
           <a:p>
-            <a:pPr marL="360000" indent="-343080" defTabSz="343080">
-              <a:lnSpc>
-                <a:spcPct val="100000"/>
-              </a:lnSpc>
-              <a:spcBef>
-                <a:spcPts val="624"/>
-              </a:spcBef>
-              <a:spcAft>
-                <a:spcPts val="425"/>
-              </a:spcAft>
+            <a:pPr lvl="1" marL="432000" indent="-216000" defTabSz="343080">
+              <a:lnSpc>
+                <a:spcPct val="100000"/>
+              </a:lnSpc>
+              <a:buClr>
+                <a:srgbClr val="000000"/>
+              </a:buClr>
+              <a:buSzPct val="45000"/>
+              <a:buFont typeface="OpenSymbol"/>
+              <a:buChar char="►"/>
+              <a:tabLst>
+                <a:tab algn="l" pos="0"/>
+              </a:tabLst>
+            </a:pPr>
+            <a:r>
+              <a:rPr b="0" lang="fr-FR" sz="2400" strike="noStrike" u="none">
+                <a:solidFill>
+                  <a:srgbClr val="000000"/>
+                </a:solidFill>
+                <a:effectLst/>
+                <a:uFillTx/>
+                <a:latin typeface="Arial"/>
+                <a:ea typeface="Unifont"/>
+              </a:rPr>
+              <a:t>Configure beamlines/instruments in McStas (neutrons) and McXtrace (X-rays).</a:t>
+            </a:r>
+            <a:endParaRPr b="0" lang="en-US" sz="2400" strike="noStrike" u="none">
+              <a:solidFill>
+                <a:srgbClr val="000000"/>
+              </a:solidFill>
+              <a:effectLst/>
+              <a:uFillTx/>
+              <a:latin typeface="Arial"/>
+            </a:endParaRPr>
+          </a:p>
+          <a:p>
+            <a:pPr lvl="1" marL="432000" indent="-216000" defTabSz="343080">
+              <a:lnSpc>
+                <a:spcPct val="100000"/>
+              </a:lnSpc>
+              <a:buClr>
+                <a:srgbClr val="000000"/>
+              </a:buClr>
+              <a:buSzPct val="45000"/>
+              <a:buFont typeface="OpenSymbol"/>
+              <a:buChar char="►"/>
+              <a:tabLst>
+                <a:tab algn="l" pos="0"/>
+              </a:tabLst>
+            </a:pPr>
+            <a:r>
+              <a:rPr b="0" lang="fr-FR" sz="2400" strike="noStrike" u="none">
+                <a:solidFill>
+                  <a:srgbClr val="000000"/>
+                </a:solidFill>
+                <a:effectLst/>
+                <a:uFillTx/>
+                <a:latin typeface="Arial"/>
+                <a:ea typeface="Unifont"/>
+              </a:rPr>
+              <a:t>Define sample properties (e.g., crystal structure, composition).</a:t>
+            </a:r>
+            <a:br>
+              <a:rPr sz="2400"/>
+            </a:br>
+            <a:r>
+              <a:rPr b="0" lang="fr-FR" sz="2400" strike="noStrike" u="none">
+                <a:solidFill>
+                  <a:srgbClr val="000000"/>
+                </a:solidFill>
+                <a:effectLst/>
+                <a:uFillTx/>
+                <a:latin typeface="Arial"/>
+                <a:ea typeface="Unifont"/>
+              </a:rPr>
+              <a:t> </a:t>
+            </a:r>
+            <a:endParaRPr b="0" lang="en-US" sz="2400" strike="noStrike" u="none">
+              <a:solidFill>
+                <a:srgbClr val="000000"/>
+              </a:solidFill>
+              <a:effectLst/>
+              <a:uFillTx/>
+              <a:latin typeface="Arial"/>
+            </a:endParaRPr>
+          </a:p>
+          <a:p>
+            <a:pPr marL="343080" indent="-343080" defTabSz="343080">
+              <a:lnSpc>
+                <a:spcPct val="100000"/>
+              </a:lnSpc>
               <a:buClr>
                 <a:srgbClr val="000000"/>
               </a:buClr>
@@ -7555,7 +7969,7 @@
               </a:tabLst>
             </a:pPr>
             <a:r>
-              <a:rPr b="0" lang="fr-FR" sz="2400" strike="noStrike" u="none">
+              <a:rPr b="1" lang="fr-FR" sz="2400" strike="noStrike" u="none">
                 <a:solidFill>
                   <a:srgbClr val="000000"/>
                 </a:solidFill>
@@ -7564,10 +7978,34 @@
                 <a:latin typeface="Arial"/>
                 <a:ea typeface="Unifont"/>
               </a:rPr>
-              <a:t>Automate simulations across </a:t>
-            </a:r>
-            <a:r>
-              <a:rPr b="0" i="1" lang="fr-FR" sz="2400" strike="noStrike" u="none">
+              <a:t>Characterizing Models:</a:t>
+            </a:r>
+            <a:endParaRPr b="0" lang="en-US" sz="2400" strike="noStrike" u="none">
+              <a:solidFill>
+                <a:srgbClr val="000000"/>
+              </a:solidFill>
+              <a:effectLst/>
+              <a:uFillTx/>
+              <a:latin typeface="Arial"/>
+            </a:endParaRPr>
+          </a:p>
+          <a:p>
+            <a:pPr lvl="1" marL="432000" indent="-216000" defTabSz="343080">
+              <a:lnSpc>
+                <a:spcPct val="100000"/>
+              </a:lnSpc>
+              <a:buClr>
+                <a:srgbClr val="000000"/>
+              </a:buClr>
+              <a:buSzPct val="45000"/>
+              <a:buFont typeface="OpenSymbol"/>
+              <a:buChar char="►"/>
+              <a:tabLst>
+                <a:tab algn="l" pos="0"/>
+              </a:tabLst>
+            </a:pPr>
+            <a:r>
+              <a:rPr b="0" lang="fr-FR" sz="2400" strike="noStrike" u="none">
                 <a:solidFill>
                   <a:srgbClr val="000000"/>
                 </a:solidFill>
@@ -7576,8 +8014,32 @@
                 <a:latin typeface="Arial"/>
                 <a:ea typeface="Unifont"/>
               </a:rPr>
-              <a:t>parameter</a:t>
-            </a:r>
+              <a:t>Check geometry (e.g., detector positions, slit sizes).</a:t>
+            </a:r>
+            <a:endParaRPr b="0" lang="en-US" sz="2400" strike="noStrike" u="none">
+              <a:solidFill>
+                <a:srgbClr val="000000"/>
+              </a:solidFill>
+              <a:effectLst/>
+              <a:uFillTx/>
+              <a:latin typeface="Arial"/>
+            </a:endParaRPr>
+          </a:p>
+          <a:p>
+            <a:pPr lvl="1" marL="432000" indent="-216000" defTabSz="343080">
+              <a:lnSpc>
+                <a:spcPct val="100000"/>
+              </a:lnSpc>
+              <a:buClr>
+                <a:srgbClr val="000000"/>
+              </a:buClr>
+              <a:buSzPct val="45000"/>
+              <a:buFont typeface="OpenSymbol"/>
+              <a:buChar char="►"/>
+              <a:tabLst>
+                <a:tab algn="l" pos="0"/>
+              </a:tabLst>
+            </a:pPr>
             <a:r>
               <a:rPr b="0" lang="fr-FR" sz="2400" strike="noStrike" u="none">
                 <a:solidFill>
@@ -7588,317 +8050,7 @@
                 <a:latin typeface="Arial"/>
                 <a:ea typeface="Unifont"/>
               </a:rPr>
-              <a:t> ranges (e.g., vary samples).</a:t>
-            </a:r>
-            <a:endParaRPr b="0" lang="en-US" sz="2400" strike="noStrike" u="none">
-              <a:solidFill>
-                <a:srgbClr val="000000"/>
-              </a:solidFill>
-              <a:effectLst/>
-              <a:uFillTx/>
-              <a:latin typeface="Arial"/>
-            </a:endParaRPr>
-          </a:p>
-          <a:p>
-            <a:pPr marL="360000" indent="-343080" defTabSz="343080">
-              <a:lnSpc>
-                <a:spcPct val="100000"/>
-              </a:lnSpc>
-              <a:spcBef>
-                <a:spcPts val="624"/>
-              </a:spcBef>
-              <a:spcAft>
-                <a:spcPts val="425"/>
-              </a:spcAft>
-              <a:buClr>
-                <a:srgbClr val="000000"/>
-              </a:buClr>
-              <a:buFont typeface="Arial"/>
-              <a:buChar char="•"/>
-              <a:tabLst>
-                <a:tab algn="l" pos="0"/>
-              </a:tabLst>
-            </a:pPr>
-            <a:r>
-              <a:rPr b="0" lang="fr-FR" sz="2400" strike="noStrike" u="none">
-                <a:solidFill>
-                  <a:srgbClr val="000000"/>
-                </a:solidFill>
-                <a:effectLst/>
-                <a:uFillTx/>
-                <a:latin typeface="Arial"/>
-                <a:ea typeface="Unifont"/>
-              </a:rPr>
-              <a:t>Output: Labeled datasets of [</a:t>
-            </a:r>
-            <a:r>
-              <a:rPr b="0" i="1" lang="fr-FR" sz="2400" strike="noStrike" u="none">
-                <a:solidFill>
-                  <a:srgbClr val="000000"/>
-                </a:solidFill>
-                <a:effectLst/>
-                <a:uFillTx/>
-                <a:latin typeface="Arial"/>
-                <a:ea typeface="Unifont"/>
-              </a:rPr>
-              <a:t>parameters, virtual_measurements</a:t>
-            </a:r>
-            <a:r>
-              <a:rPr b="0" lang="fr-FR" sz="2400" strike="noStrike" u="none">
-                <a:solidFill>
-                  <a:srgbClr val="000000"/>
-                </a:solidFill>
-                <a:effectLst/>
-                <a:uFillTx/>
-                <a:latin typeface="Arial"/>
-                <a:ea typeface="Unifont"/>
-              </a:rPr>
-              <a:t>].</a:t>
-            </a:r>
-            <a:br>
-              <a:rPr sz="1000"/>
-            </a:br>
-            <a:r>
-              <a:rPr b="0" lang="fr-FR" sz="1000" strike="noStrike" u="none">
-                <a:solidFill>
-                  <a:srgbClr val="000000"/>
-                </a:solidFill>
-                <a:effectLst/>
-                <a:uFillTx/>
-                <a:latin typeface="Arial"/>
-                <a:ea typeface="Unifont"/>
-              </a:rPr>
-              <a:t> </a:t>
-            </a:r>
-            <a:endParaRPr b="0" lang="en-US" sz="1000" strike="noStrike" u="none">
-              <a:solidFill>
-                <a:srgbClr val="000000"/>
-              </a:solidFill>
-              <a:effectLst/>
-              <a:uFillTx/>
-              <a:latin typeface="Arial"/>
-            </a:endParaRPr>
-          </a:p>
-          <a:p>
-            <a:pPr marL="343080" indent="-343080" defTabSz="343080">
-              <a:lnSpc>
-                <a:spcPct val="100000"/>
-              </a:lnSpc>
-              <a:buClr>
-                <a:srgbClr val="000000"/>
-              </a:buClr>
-              <a:buFont typeface="Arial"/>
-              <a:buChar char="•"/>
-              <a:tabLst>
-                <a:tab algn="l" pos="0"/>
-              </a:tabLst>
-            </a:pPr>
-            <a:r>
-              <a:rPr b="1" lang="fr-FR" sz="2400" strike="noStrike" u="none">
-                <a:solidFill>
-                  <a:srgbClr val="000000"/>
-                </a:solidFill>
-                <a:effectLst/>
-                <a:uFillTx/>
-                <a:latin typeface="Arial"/>
-                <a:ea typeface="Unifont"/>
-              </a:rPr>
-              <a:t>Apply AI :</a:t>
-            </a:r>
-            <a:endParaRPr b="0" lang="en-US" sz="2400" strike="noStrike" u="none">
-              <a:solidFill>
-                <a:srgbClr val="000000"/>
-              </a:solidFill>
-              <a:effectLst/>
-              <a:uFillTx/>
-              <a:latin typeface="Arial"/>
-            </a:endParaRPr>
-          </a:p>
-          <a:p>
-            <a:pPr marL="360000" indent="-343080" defTabSz="343080">
-              <a:lnSpc>
-                <a:spcPct val="100000"/>
-              </a:lnSpc>
-              <a:spcBef>
-                <a:spcPts val="624"/>
-              </a:spcBef>
-              <a:spcAft>
-                <a:spcPts val="425"/>
-              </a:spcAft>
-              <a:buClr>
-                <a:srgbClr val="000000"/>
-              </a:buClr>
-              <a:buFont typeface="Arial"/>
-              <a:buChar char="•"/>
-              <a:tabLst>
-                <a:tab algn="l" pos="0"/>
-              </a:tabLst>
-            </a:pPr>
-            <a:r>
-              <a:rPr b="0" lang="fr-FR" sz="2400" strike="noStrike" u="none">
-                <a:solidFill>
-                  <a:srgbClr val="000000"/>
-                </a:solidFill>
-                <a:effectLst/>
-                <a:uFillTx/>
-                <a:latin typeface="Arial"/>
-                <a:ea typeface="Unifont"/>
-              </a:rPr>
-              <a:t>Surrogate Modeling: generate </a:t>
-            </a:r>
-            <a:r>
-              <a:rPr b="0" i="1" lang="fr-FR" sz="2400" strike="noStrike" u="none">
-                <a:solidFill>
-                  <a:srgbClr val="000000"/>
-                </a:solidFill>
-                <a:effectLst/>
-                <a:uFillTx/>
-                <a:latin typeface="Arial"/>
-                <a:ea typeface="Unifont"/>
-              </a:rPr>
-              <a:t>virtual_measurements</a:t>
-            </a:r>
-            <a:r>
-              <a:rPr b="0" lang="fr-FR" sz="2400" strike="noStrike" u="none">
-                <a:solidFill>
-                  <a:srgbClr val="000000"/>
-                </a:solidFill>
-                <a:effectLst/>
-                <a:uFillTx/>
-                <a:latin typeface="Arial"/>
-                <a:ea typeface="Unifont"/>
-              </a:rPr>
-              <a:t> faster.</a:t>
-            </a:r>
-            <a:endParaRPr b="0" lang="en-US" sz="2400" strike="noStrike" u="none">
-              <a:solidFill>
-                <a:srgbClr val="000000"/>
-              </a:solidFill>
-              <a:effectLst/>
-              <a:uFillTx/>
-              <a:latin typeface="Arial"/>
-            </a:endParaRPr>
-          </a:p>
-          <a:p>
-            <a:pPr marL="360000" indent="-343080" defTabSz="343080">
-              <a:lnSpc>
-                <a:spcPct val="100000"/>
-              </a:lnSpc>
-              <a:spcBef>
-                <a:spcPts val="624"/>
-              </a:spcBef>
-              <a:spcAft>
-                <a:spcPts val="425"/>
-              </a:spcAft>
-              <a:buClr>
-                <a:srgbClr val="000000"/>
-              </a:buClr>
-              <a:buFont typeface="Arial"/>
-              <a:buChar char="•"/>
-              <a:tabLst>
-                <a:tab algn="l" pos="0"/>
-              </a:tabLst>
-            </a:pPr>
-            <a:r>
-              <a:rPr b="0" lang="fr-FR" sz="2400" strike="noStrike" u="none">
-                <a:solidFill>
-                  <a:srgbClr val="000000"/>
-                </a:solidFill>
-                <a:effectLst/>
-                <a:uFillTx/>
-                <a:latin typeface="Arial"/>
-                <a:ea typeface="Unifont"/>
-              </a:rPr>
-              <a:t>Solving Inverse Problems: get </a:t>
-            </a:r>
-            <a:r>
-              <a:rPr b="0" i="1" lang="fr-FR" sz="2400" strike="noStrike" u="none">
-                <a:solidFill>
-                  <a:srgbClr val="000000"/>
-                </a:solidFill>
-                <a:effectLst/>
-                <a:uFillTx/>
-                <a:latin typeface="Arial"/>
-                <a:ea typeface="Unifont"/>
-              </a:rPr>
-              <a:t>parameters </a:t>
-            </a:r>
-            <a:r>
-              <a:rPr b="0" lang="fr-FR" sz="2400" strike="noStrike" u="none">
-                <a:solidFill>
-                  <a:srgbClr val="000000"/>
-                </a:solidFill>
-                <a:effectLst/>
-                <a:uFillTx/>
-                <a:latin typeface="Arial"/>
-                <a:ea typeface="Unifont"/>
-              </a:rPr>
-              <a:t>from</a:t>
-            </a:r>
-            <a:r>
-              <a:rPr b="0" i="1" lang="fr-FR" sz="2400" strike="noStrike" u="none">
-                <a:solidFill>
-                  <a:srgbClr val="000000"/>
-                </a:solidFill>
-                <a:effectLst/>
-                <a:uFillTx/>
-                <a:latin typeface="Arial"/>
-                <a:ea typeface="Unifont"/>
-              </a:rPr>
-              <a:t> measurements.</a:t>
-            </a:r>
-            <a:endParaRPr b="0" lang="en-US" sz="2400" strike="noStrike" u="none">
-              <a:solidFill>
-                <a:srgbClr val="000000"/>
-              </a:solidFill>
-              <a:effectLst/>
-              <a:uFillTx/>
-              <a:latin typeface="Arial"/>
-            </a:endParaRPr>
-          </a:p>
-          <a:p>
-            <a:pPr marL="360000" indent="-343080" defTabSz="343080">
-              <a:lnSpc>
-                <a:spcPct val="100000"/>
-              </a:lnSpc>
-              <a:spcBef>
-                <a:spcPts val="624"/>
-              </a:spcBef>
-              <a:spcAft>
-                <a:spcPts val="425"/>
-              </a:spcAft>
-              <a:buClr>
-                <a:srgbClr val="000000"/>
-              </a:buClr>
-              <a:buFont typeface="Arial"/>
-              <a:buChar char="•"/>
-              <a:tabLst>
-                <a:tab algn="l" pos="0"/>
-              </a:tabLst>
-            </a:pPr>
-            <a:r>
-              <a:rPr b="0" lang="fr-FR" sz="2400" strike="noStrike" u="none">
-                <a:solidFill>
-                  <a:srgbClr val="000000"/>
-                </a:solidFill>
-                <a:effectLst/>
-                <a:uFillTx/>
-                <a:latin typeface="Arial"/>
-                <a:ea typeface="Unifont"/>
-              </a:rPr>
-              <a:t>Optimization: search fpr best </a:t>
-            </a:r>
-            <a:r>
-              <a:rPr b="0" i="1" lang="fr-FR" sz="2400" strike="noStrike" u="none">
-                <a:solidFill>
-                  <a:srgbClr val="000000"/>
-                </a:solidFill>
-                <a:effectLst/>
-                <a:uFillTx/>
-                <a:latin typeface="Arial"/>
-                <a:ea typeface="Unifont"/>
-              </a:rPr>
-              <a:t>parameters.</a:t>
+              <a:t>Extract parameters (e.g., resolution, flux) and results (e.g., spectra, diffraction patterns).</a:t>
             </a:r>
             <a:endParaRPr b="0" lang="en-US" sz="2400" strike="noStrike" u="none">
               <a:solidFill>
@@ -7950,7 +8102,7 @@
         <p:spPr>
           <a:xfrm>
             <a:off x="548640" y="383760"/>
-            <a:ext cx="9141480" cy="290160"/>
+            <a:ext cx="9141120" cy="289800"/>
           </a:xfrm>
           <a:prstGeom prst="rect">
             <a:avLst/>
@@ -8016,7 +8168,7 @@
         <p:spPr>
           <a:xfrm>
             <a:off x="548640" y="658080"/>
-            <a:ext cx="11061720" cy="820440"/>
+            <a:ext cx="11061360" cy="820080"/>
           </a:xfrm>
           <a:prstGeom prst="rect">
             <a:avLst/>
@@ -8082,7 +8234,7 @@
         <p:spPr>
           <a:xfrm>
             <a:off x="11185920" y="6446160"/>
-            <a:ext cx="454680" cy="271800"/>
+            <a:ext cx="454320" cy="271440"/>
           </a:xfrm>
           <a:prstGeom prst="rect">
             <a:avLst/>
@@ -8143,7 +8295,7 @@
         <p:spPr>
           <a:xfrm>
             <a:off x="540000" y="1799640"/>
-            <a:ext cx="10978200" cy="2713320"/>
+            <a:ext cx="10977840" cy="2988360"/>
           </a:xfrm>
           <a:prstGeom prst="rect">
             <a:avLst/>
@@ -8298,6 +8450,92 @@
               <a:t>)</a:t>
             </a:r>
             <a:endParaRPr b="0" lang="en-US" sz="2400" strike="noStrike" u="none">
+              <a:solidFill>
+                <a:srgbClr val="000000"/>
+              </a:solidFill>
+              <a:effectLst/>
+              <a:uFillTx/>
+              <a:latin typeface="Arial"/>
+            </a:endParaRPr>
+          </a:p>
+          <a:p>
+            <a:pPr lvl="1" marL="432000" indent="-216000">
+              <a:buClr>
+                <a:srgbClr val="000000"/>
+              </a:buClr>
+              <a:buSzPct val="45000"/>
+              <a:buFont typeface="Wingdings" charset="2"/>
+              <a:buChar char=""/>
+            </a:pPr>
+            <a:r>
+              <a:rPr b="0" lang="en-US" sz="1800" strike="noStrike" u="none">
+                <a:solidFill>
+                  <a:srgbClr val="000000"/>
+                </a:solidFill>
+                <a:effectLst/>
+                <a:uFillTx/>
+                <a:latin typeface="Arial"/>
+                <a:hlinkClick r:id="rId2"/>
+              </a:rPr>
+              <a:t>https://data-analysis.synchrotron-soleil.fr</a:t>
+            </a:r>
+            <a:r>
+              <a:rPr b="0" lang="en-US" sz="1800" strike="noStrike" u="none">
+                <a:solidFill>
+                  <a:srgbClr val="000000"/>
+                </a:solidFill>
+                <a:effectLst/>
+                <a:uFillTx/>
+                <a:latin typeface="Arial"/>
+              </a:rPr>
+              <a:t> (</a:t>
+            </a:r>
+            <a:r>
+              <a:rPr b="0" lang="en-US" sz="1800" strike="noStrike" u="none">
+                <a:solidFill>
+                  <a:srgbClr val="000000"/>
+                </a:solidFill>
+                <a:effectLst/>
+                <a:uFillTx/>
+                <a:latin typeface="FreeMono"/>
+              </a:rPr>
+              <a:t>herculesd/Synchrotron-S</a:t>
+            </a:r>
+            <a:r>
+              <a:rPr b="0" lang="en-US" sz="1800" strike="noStrike" u="none">
+                <a:solidFill>
+                  <a:srgbClr val="000000"/>
+                </a:solidFill>
+                <a:effectLst/>
+                <a:uFillTx/>
+                <a:latin typeface="FreeMono"/>
+                <a:ea typeface="FreeMono"/>
+              </a:rPr>
+              <a:t>Ø</a:t>
+            </a:r>
+            <a:r>
+              <a:rPr b="0" lang="en-US" sz="1800" strike="noStrike" u="none">
+                <a:solidFill>
+                  <a:srgbClr val="000000"/>
+                </a:solidFill>
+                <a:effectLst/>
+                <a:uFillTx/>
+                <a:latin typeface="FreeMono"/>
+              </a:rPr>
+              <a:t>LEIL</a:t>
+            </a:r>
+            <a:r>
+              <a:rPr b="0" lang="en-US" sz="1800" strike="noStrike" u="none">
+                <a:solidFill>
+                  <a:srgbClr val="000000"/>
+                </a:solidFill>
+                <a:effectLst/>
+                <a:uFillTx/>
+                <a:latin typeface="Arial"/>
+              </a:rPr>
+              <a:t>)</a:t>
+            </a:r>
+            <a:endParaRPr b="0" lang="en-US" sz="1800" strike="noStrike" u="none">
               <a:solidFill>
                 <a:srgbClr val="000000"/>
               </a:solidFill>
@@ -8412,7 +8650,7 @@
         <p:spPr>
           <a:xfrm>
             <a:off x="9410040" y="-1457640"/>
-            <a:ext cx="4752360" cy="4752360"/>
+            <a:ext cx="4752000" cy="4752000"/>
           </a:xfrm>
           <a:prstGeom prst="ellipse">
             <a:avLst/>
@@ -8440,7 +8678,7 @@
                 <a:spcPct val="100000"/>
               </a:lnSpc>
             </a:pPr>
-            <a:endParaRPr b="0" lang="en-DK" sz="1800" strike="noStrike" u="none">
+            <a:endParaRPr b="0" lang="en-US" sz="1800" strike="noStrike" u="none">
               <a:solidFill>
                 <a:schemeClr val="dk1"/>
               </a:solidFill>
@@ -8460,7 +8698,7 @@
         <p:spPr>
           <a:xfrm>
             <a:off x="-1828800" y="4206240"/>
-            <a:ext cx="4203720" cy="4203720"/>
+            <a:ext cx="4203360" cy="4203360"/>
           </a:xfrm>
           <a:prstGeom prst="ellipse">
             <a:avLst/>
@@ -8488,7 +8726,7 @@
                 <a:spcPct val="100000"/>
               </a:lnSpc>
             </a:pPr>
-            <a:endParaRPr b="0" lang="en-DK" sz="1800" strike="noStrike" u="none">
+            <a:endParaRPr b="0" lang="en-US" sz="1800" strike="noStrike" u="none">
               <a:solidFill>
                 <a:schemeClr val="dk1"/>
               </a:solidFill>
@@ -8508,7 +8746,7 @@
         <p:spPr>
           <a:xfrm>
             <a:off x="822960" y="2286000"/>
-            <a:ext cx="9141480" cy="1094760"/>
+            <a:ext cx="9141120" cy="1094400"/>
           </a:xfrm>
           <a:prstGeom prst="rect">
             <a:avLst/>
@@ -8569,7 +8807,7 @@
         <p:spPr>
           <a:xfrm>
             <a:off x="822960" y="3246120"/>
-            <a:ext cx="9141480" cy="637560"/>
+            <a:ext cx="9141120" cy="637200"/>
           </a:xfrm>
           <a:prstGeom prst="rect">
             <a:avLst/>
@@ -8630,7 +8868,7 @@
         <p:spPr>
           <a:xfrm>
             <a:off x="822960" y="4297680"/>
-            <a:ext cx="1414800" cy="308520"/>
+            <a:ext cx="1414440" cy="308160"/>
           </a:xfrm>
           <a:prstGeom prst="roundRect">
             <a:avLst>
@@ -8660,7 +8898,7 @@
                 <a:spcPct val="100000"/>
               </a:lnSpc>
             </a:pPr>
-            <a:endParaRPr b="0" lang="en-DK" sz="1800" strike="noStrike" u="none">
+            <a:endParaRPr b="0" lang="en-US" sz="1800" strike="noStrike" u="none">
               <a:solidFill>
                 <a:schemeClr val="dk1"/>
               </a:solidFill>
@@ -8680,7 +8918,7 @@
         <p:spPr>
           <a:xfrm>
             <a:off x="822960" y="4297680"/>
-            <a:ext cx="1414800" cy="308520"/>
+            <a:ext cx="1414440" cy="308160"/>
           </a:xfrm>
           <a:prstGeom prst="rect">
             <a:avLst/>
@@ -8741,7 +8979,7 @@
         <p:spPr>
           <a:xfrm>
             <a:off x="2377440" y="4297680"/>
-            <a:ext cx="1414800" cy="308520"/>
+            <a:ext cx="1414440" cy="308160"/>
           </a:xfrm>
           <a:prstGeom prst="roundRect">
             <a:avLst>
@@ -8771,7 +9009,7 @@
                 <a:spcPct val="100000"/>
               </a:lnSpc>
             </a:pPr>
-            <a:endParaRPr b="0" lang="en-DK" sz="1800" strike="noStrike" u="none">
+            <a:endParaRPr b="0" lang="en-US" sz="1800" strike="noStrike" u="none">
               <a:solidFill>
                 <a:schemeClr val="dk1"/>
               </a:solidFill>
@@ -8791,7 +9029,7 @@
         <p:spPr>
           <a:xfrm>
             <a:off x="2377440" y="4297680"/>
-            <a:ext cx="1414800" cy="308520"/>
+            <a:ext cx="1414440" cy="308160"/>
           </a:xfrm>
           <a:prstGeom prst="rect">
             <a:avLst/>
@@ -8875,7 +9113,7 @@
             <a:noAutofit/>
           </a:bodyPr>
           <a:p>
-            <a:endParaRPr b="0" lang="en-DK" sz="1800" strike="noStrike" u="none">
+            <a:endParaRPr b="0" lang="en-US" sz="1800" strike="noStrike" u="none">
               <a:solidFill>
                 <a:schemeClr val="dk1"/>
               </a:solidFill>
@@ -8895,7 +9133,7 @@
         <p:spPr>
           <a:xfrm>
             <a:off x="822960" y="5897880"/>
-            <a:ext cx="7312680" cy="317520"/>
+            <a:ext cx="7312320" cy="317160"/>
           </a:xfrm>
           <a:prstGeom prst="rect">
             <a:avLst/>
@@ -8934,7 +9172,7 @@
                 <a:latin typeface="Calibri"/>
                 <a:ea typeface="Calibri"/>
               </a:rPr>
-              <a:t>Peter Willendrup   ·   pkwi@fysik.dtu.dk   ·   DTU Physics</a:t>
+              <a:t>Emmanuel Farhi – Synchrotron SOLEIL – PaNRAID Sept 2026</a:t>
             </a:r>
             <a:endParaRPr b="0" lang="en-US" sz="1250" strike="noStrike" u="none">
               <a:solidFill>
@@ -8956,7 +9194,7 @@
         <p:spPr>
           <a:xfrm>
             <a:off x="548640" y="6446520"/>
-            <a:ext cx="6398280" cy="271800"/>
+            <a:ext cx="6397920" cy="271440"/>
           </a:xfrm>
           <a:prstGeom prst="rect">
             <a:avLst/>
@@ -9017,7 +9255,7 @@
         <p:spPr>
           <a:xfrm>
             <a:off x="11185920" y="6446520"/>
-            <a:ext cx="454680" cy="271800"/>
+            <a:ext cx="454320" cy="271440"/>
           </a:xfrm>
           <a:prstGeom prst="rect">
             <a:avLst/>
@@ -9078,7 +9316,7 @@
         <p:spPr>
           <a:xfrm>
             <a:off x="6603840" y="4165560"/>
-            <a:ext cx="4950360" cy="1572120"/>
+            <a:ext cx="4950000" cy="1571760"/>
           </a:xfrm>
           <a:prstGeom prst="roundRect">
             <a:avLst>
@@ -9116,7 +9354,7 @@
                 <a:spcPct val="100000"/>
               </a:lnSpc>
             </a:pPr>
-            <a:endParaRPr b="0" lang="en-DK" sz="1800" strike="noStrike" u="none">
+            <a:endParaRPr b="0" lang="en-US" sz="1800" strike="noStrike" u="none">
               <a:solidFill>
                 <a:schemeClr val="lt1"/>
               </a:solidFill>
@@ -9136,7 +9374,7 @@
         <p:spPr>
           <a:xfrm>
             <a:off x="6921360" y="4368960"/>
-            <a:ext cx="4315320" cy="226080"/>
+            <a:ext cx="4314960" cy="225720"/>
           </a:xfrm>
           <a:prstGeom prst="rect">
             <a:avLst/>
@@ -9197,7 +9435,7 @@
         <p:spPr>
           <a:xfrm>
             <a:off x="6921360" y="4749840"/>
-            <a:ext cx="4315320" cy="637920"/>
+            <a:ext cx="4314960" cy="637560"/>
           </a:xfrm>
           <a:prstGeom prst="rect">
             <a:avLst/>
@@ -9222,7 +9460,7 @@
         <p:spPr>
           <a:xfrm>
             <a:off x="10375920" y="355680"/>
-            <a:ext cx="1267560" cy="649080"/>
+            <a:ext cx="1267200" cy="648720"/>
           </a:xfrm>
           <a:prstGeom prst="rect">
             <a:avLst/>
@@ -9242,7 +9480,7 @@
         <p:spPr>
           <a:xfrm>
             <a:off x="7375680" y="2105640"/>
-            <a:ext cx="3807360" cy="1496160"/>
+            <a:ext cx="3807000" cy="1495800"/>
           </a:xfrm>
           <a:prstGeom prst="roundRect">
             <a:avLst>
@@ -9280,7 +9518,7 @@
                 <a:spcPct val="100000"/>
               </a:lnSpc>
             </a:pPr>
-            <a:endParaRPr b="0" lang="en-DK" sz="1800" strike="noStrike" u="none">
+            <a:endParaRPr b="0" lang="en-US" sz="1800" strike="noStrike" u="none">
               <a:solidFill>
                 <a:schemeClr val="lt1"/>
               </a:solidFill>
@@ -9300,9 +9538,9 @@
         <p:grpSpPr>
           <a:xfrm>
             <a:off x="7882560" y="2194200"/>
-            <a:ext cx="2793960" cy="1319040"/>
+            <a:ext cx="2793600" cy="1318680"/>
             <a:chOff x="7882560" y="2194200"/>
-            <a:chExt cx="2793960" cy="1319040"/>
+            <a:chExt cx="2793600" cy="1318680"/>
           </a:xfrm>
         </p:grpSpPr>
         <p:grpSp>
@@ -9314,9 +9552,9 @@
           <p:grpSpPr>
             <a:xfrm>
               <a:off x="9289440" y="2194200"/>
-              <a:ext cx="1387080" cy="1256040"/>
+              <a:ext cx="1386720" cy="1255680"/>
               <a:chOff x="9289440" y="2194200"/>
-              <a:chExt cx="1387080" cy="1256040"/>
+              <a:chExt cx="1386720" cy="1255680"/>
             </a:xfrm>
           </p:grpSpPr>
           <p:pic>
@@ -9333,7 +9571,7 @@
             <p:spPr>
               <a:xfrm>
                 <a:off x="9339120" y="2194200"/>
-                <a:ext cx="1292040" cy="773640"/>
+                <a:ext cx="1291680" cy="773280"/>
               </a:xfrm>
               <a:prstGeom prst="rect">
                 <a:avLst/>
@@ -9357,7 +9595,7 @@
             <p:spPr>
               <a:xfrm>
                 <a:off x="9289440" y="2922840"/>
-                <a:ext cx="960840" cy="462960"/>
+                <a:ext cx="960480" cy="462600"/>
               </a:xfrm>
               <a:prstGeom prst="rect">
                 <a:avLst/>
@@ -9381,7 +9619,7 @@
             <p:spPr>
               <a:xfrm>
                 <a:off x="10325160" y="2931480"/>
-                <a:ext cx="351360" cy="518760"/>
+                <a:ext cx="351000" cy="518400"/>
               </a:xfrm>
               <a:prstGeom prst="rect">
                 <a:avLst/>
@@ -9406,7 +9644,7 @@
           <p:spPr>
             <a:xfrm>
               <a:off x="7882560" y="2198880"/>
-              <a:ext cx="1292040" cy="1314360"/>
+              <a:ext cx="1291680" cy="1314000"/>
             </a:xfrm>
             <a:prstGeom prst="rect">
               <a:avLst/>
@@ -9464,7 +9702,7 @@
         <p:spPr>
           <a:xfrm>
             <a:off x="548640" y="384120"/>
-            <a:ext cx="9141480" cy="290160"/>
+            <a:ext cx="9141120" cy="289800"/>
           </a:xfrm>
           <a:prstGeom prst="rect">
             <a:avLst/>
@@ -9524,7 +9762,7 @@
         <p:spPr>
           <a:xfrm>
             <a:off x="548640" y="658440"/>
-            <a:ext cx="11061720" cy="820440"/>
+            <a:ext cx="11061360" cy="820080"/>
           </a:xfrm>
           <a:prstGeom prst="rect">
             <a:avLst/>
@@ -9590,7 +9828,7 @@
         <p:spPr>
           <a:xfrm>
             <a:off x="11185920" y="6446520"/>
-            <a:ext cx="454680" cy="271800"/>
+            <a:ext cx="454320" cy="271440"/>
           </a:xfrm>
           <a:prstGeom prst="rect">
             <a:avLst/>
@@ -9651,7 +9889,7 @@
         <p:spPr>
           <a:xfrm>
             <a:off x="540000" y="1480680"/>
-            <a:ext cx="11518200" cy="3015000"/>
+            <a:ext cx="11517840" cy="3015000"/>
           </a:xfrm>
           <a:prstGeom prst="rect">
             <a:avLst/>
@@ -9936,7 +10174,7 @@
         <p:spPr>
           <a:xfrm>
             <a:off x="548640" y="384120"/>
-            <a:ext cx="9141480" cy="290160"/>
+            <a:ext cx="9141120" cy="289800"/>
           </a:xfrm>
           <a:prstGeom prst="rect">
             <a:avLst/>
@@ -9996,7 +10234,7 @@
         <p:spPr>
           <a:xfrm>
             <a:off x="548640" y="658440"/>
-            <a:ext cx="11061720" cy="820440"/>
+            <a:ext cx="11061360" cy="820080"/>
           </a:xfrm>
           <a:prstGeom prst="rect">
             <a:avLst/>
@@ -10062,7 +10300,7 @@
         <p:spPr>
           <a:xfrm>
             <a:off x="11185920" y="6446520"/>
-            <a:ext cx="454680" cy="271800"/>
+            <a:ext cx="454320" cy="271440"/>
           </a:xfrm>
           <a:prstGeom prst="rect">
             <a:avLst/>
@@ -10123,7 +10361,7 @@
         <p:spPr>
           <a:xfrm>
             <a:off x="476280" y="1930680"/>
-            <a:ext cx="11237760" cy="3381480"/>
+            <a:ext cx="11237400" cy="3381480"/>
           </a:xfrm>
           <a:prstGeom prst="rect">
             <a:avLst/>
@@ -10482,7 +10720,7 @@
         <p:spPr>
           <a:xfrm>
             <a:off x="548640" y="384120"/>
-            <a:ext cx="9141480" cy="290160"/>
+            <a:ext cx="9141120" cy="289800"/>
           </a:xfrm>
           <a:prstGeom prst="rect">
             <a:avLst/>
@@ -10542,7 +10780,7 @@
         <p:spPr>
           <a:xfrm>
             <a:off x="548640" y="658440"/>
-            <a:ext cx="11061720" cy="820440"/>
+            <a:ext cx="11061360" cy="820080"/>
           </a:xfrm>
           <a:prstGeom prst="rect">
             <a:avLst/>
@@ -10608,7 +10846,7 @@
         <p:spPr>
           <a:xfrm>
             <a:off x="11185920" y="6446520"/>
-            <a:ext cx="454680" cy="271800"/>
+            <a:ext cx="454320" cy="271440"/>
           </a:xfrm>
           <a:prstGeom prst="rect">
             <a:avLst/>
@@ -10669,7 +10907,7 @@
         <p:spPr>
           <a:xfrm>
             <a:off x="540000" y="1800000"/>
-            <a:ext cx="11117520" cy="4493880"/>
+            <a:ext cx="11117160" cy="4493880"/>
           </a:xfrm>
           <a:prstGeom prst="rect">
             <a:avLst/>
@@ -11213,7 +11451,7 @@
         <p:spPr>
           <a:xfrm>
             <a:off x="548640" y="384120"/>
-            <a:ext cx="9141480" cy="290160"/>
+            <a:ext cx="9141120" cy="289800"/>
           </a:xfrm>
           <a:prstGeom prst="rect">
             <a:avLst/>
@@ -11273,7 +11511,7 @@
         <p:spPr>
           <a:xfrm>
             <a:off x="548640" y="658440"/>
-            <a:ext cx="11061720" cy="820440"/>
+            <a:ext cx="11061360" cy="820080"/>
           </a:xfrm>
           <a:prstGeom prst="rect">
             <a:avLst/>
@@ -11339,7 +11577,7 @@
         <p:spPr>
           <a:xfrm>
             <a:off x="11185920" y="6446520"/>
-            <a:ext cx="454680" cy="271800"/>
+            <a:ext cx="454320" cy="271440"/>
           </a:xfrm>
           <a:prstGeom prst="rect">
             <a:avLst/>
@@ -11400,7 +11638,7 @@
         <p:spPr>
           <a:xfrm>
             <a:off x="540000" y="1800000"/>
-            <a:ext cx="10660320" cy="3807720"/>
+            <a:ext cx="10659960" cy="3807720"/>
           </a:xfrm>
           <a:prstGeom prst="rect">
             <a:avLst/>
@@ -11761,7 +11999,7 @@
         <p:spPr>
           <a:xfrm>
             <a:off x="548640" y="384120"/>
-            <a:ext cx="9141480" cy="290160"/>
+            <a:ext cx="9141120" cy="289800"/>
           </a:xfrm>
           <a:prstGeom prst="rect">
             <a:avLst/>
@@ -11821,7 +12059,7 @@
         <p:spPr>
           <a:xfrm>
             <a:off x="548640" y="658440"/>
-            <a:ext cx="11061720" cy="820440"/>
+            <a:ext cx="11061360" cy="820080"/>
           </a:xfrm>
           <a:prstGeom prst="rect">
             <a:avLst/>
@@ -11887,7 +12125,7 @@
         <p:spPr>
           <a:xfrm>
             <a:off x="11185920" y="6446520"/>
-            <a:ext cx="454680" cy="271800"/>
+            <a:ext cx="454320" cy="271440"/>
           </a:xfrm>
           <a:prstGeom prst="rect">
             <a:avLst/>
@@ -11948,7 +12186,7 @@
         <p:spPr>
           <a:xfrm>
             <a:off x="540000" y="1800000"/>
-            <a:ext cx="9475560" cy="4660920"/>
+            <a:ext cx="9475200" cy="4660920"/>
           </a:xfrm>
           <a:prstGeom prst="rect">
             <a:avLst/>
@@ -12334,14 +12572,14 @@
       </p:grpSpPr>
       <p:sp>
         <p:nvSpPr>
-          <p:cNvPr id="61" name="Text 52"/>
+          <p:cNvPr id="61" name="Text 34"/>
           <p:cNvSpPr/>
           <p:nvPr/>
         </p:nvSpPr>
         <p:spPr>
           <a:xfrm>
             <a:off x="548640" y="384120"/>
-            <a:ext cx="9141480" cy="290160"/>
+            <a:ext cx="9141120" cy="289800"/>
           </a:xfrm>
           <a:prstGeom prst="rect">
             <a:avLst/>
@@ -12366,6 +12604,12 @@
               <a:lnSpc>
                 <a:spcPct val="100000"/>
               </a:lnSpc>
+              <a:spcBef>
+                <a:spcPts val="1191"/>
+              </a:spcBef>
+              <a:spcAft>
+                <a:spcPts val="992"/>
+              </a:spcAft>
               <a:tabLst>
                 <a:tab algn="l" pos="0"/>
               </a:tabLst>
@@ -12379,7 +12623,7 @@
                 <a:uFillTx/>
                 <a:latin typeface="Calibri"/>
               </a:rPr>
-              <a:t>Realistic datasets</a:t>
+              <a:t>General AI Methodology</a:t>
             </a:r>
             <a:endParaRPr b="0" lang="en-US" sz="1200" strike="noStrike" u="none">
               <a:solidFill>
@@ -12394,14 +12638,14 @@
       </p:sp>
       <p:sp>
         <p:nvSpPr>
-          <p:cNvPr id="62" name="Text 53"/>
+          <p:cNvPr id="62" name="Text 35"/>
           <p:cNvSpPr/>
           <p:nvPr/>
         </p:nvSpPr>
         <p:spPr>
           <a:xfrm>
             <a:off x="548640" y="658440"/>
-            <a:ext cx="11061720" cy="820440"/>
+            <a:ext cx="11061360" cy="820080"/>
           </a:xfrm>
           <a:prstGeom prst="rect">
             <a:avLst/>
@@ -12445,7 +12689,7 @@
                 <a:uFillTx/>
                 <a:latin typeface="Cambria"/>
               </a:rPr>
-              <a:t>Why Realistic AI Datasets?</a:t>
+              <a:t>General AI Methodology</a:t>
             </a:r>
             <a:endParaRPr b="0" lang="en-US" sz="3000" strike="noStrike" u="none">
               <a:solidFill>
@@ -12460,14 +12704,14 @@
       </p:sp>
       <p:sp>
         <p:nvSpPr>
-          <p:cNvPr id="63" name="Text 54"/>
+          <p:cNvPr id="63" name="Text 36"/>
           <p:cNvSpPr/>
           <p:nvPr/>
         </p:nvSpPr>
         <p:spPr>
           <a:xfrm>
             <a:off x="11185920" y="6446520"/>
-            <a:ext cx="454680" cy="271800"/>
+            <a:ext cx="454320" cy="271440"/>
           </a:xfrm>
           <a:prstGeom prst="rect">
             <a:avLst/>
@@ -12519,15 +12763,617 @@
           </a:p>
         </p:txBody>
       </p:sp>
+      <p:sp>
+        <p:nvSpPr>
+          <p:cNvPr id="64" name=""/>
+          <p:cNvSpPr/>
+          <p:nvPr/>
+        </p:nvSpPr>
+        <p:spPr>
+          <a:xfrm>
+            <a:off x="540000" y="1800000"/>
+            <a:ext cx="10977840" cy="4604760"/>
+          </a:xfrm>
+          <a:prstGeom prst="rect">
+            <a:avLst/>
+          </a:prstGeom>
+          <a:noFill/>
+          <a:ln w="0">
+            <a:noFill/>
+          </a:ln>
+        </p:spPr>
+        <p:style>
+          <a:lnRef idx="0"/>
+          <a:fillRef idx="0"/>
+          <a:effectRef idx="0"/>
+          <a:fontRef idx="minor"/>
+        </p:style>
+        <p:txBody>
+          <a:bodyPr lIns="90000" rIns="90000" tIns="45000" bIns="45000" anchor="t">
+            <a:spAutoFit/>
+          </a:bodyPr>
+          <a:p>
+            <a:pPr marL="343080" indent="-343080" defTabSz="343080">
+              <a:lnSpc>
+                <a:spcPct val="100000"/>
+              </a:lnSpc>
+              <a:spcBef>
+                <a:spcPts val="1191"/>
+              </a:spcBef>
+              <a:spcAft>
+                <a:spcPts val="992"/>
+              </a:spcAft>
+              <a:buClr>
+                <a:srgbClr val="000000"/>
+              </a:buClr>
+              <a:buFont typeface="Arial"/>
+              <a:buChar char="•"/>
+              <a:tabLst>
+                <a:tab algn="l" pos="0"/>
+              </a:tabLst>
+            </a:pPr>
+            <a:r>
+              <a:rPr b="1" lang="fr-FR" sz="2400" strike="noStrike" u="none">
+                <a:solidFill>
+                  <a:srgbClr val="0000ff"/>
+                </a:solidFill>
+                <a:effectLst/>
+                <a:uFillTx/>
+                <a:latin typeface="Calibri"/>
+              </a:rPr>
+              <a:t>AI as a Universal Function Approximator</a:t>
+            </a:r>
+            <a:r>
+              <a:rPr b="0" lang="fr-FR" sz="2400" strike="noStrike" u="none">
+                <a:solidFill>
+                  <a:srgbClr val="0000ff"/>
+                </a:solidFill>
+                <a:effectLst/>
+                <a:uFillTx/>
+                <a:latin typeface="Calibri"/>
+              </a:rPr>
+              <a:t>:</a:t>
+            </a:r>
+            <a:endParaRPr b="0" lang="en-US" sz="2400" strike="noStrike" u="none">
+              <a:solidFill>
+                <a:srgbClr val="000000"/>
+              </a:solidFill>
+              <a:effectLst/>
+              <a:uFillTx/>
+              <a:latin typeface="Arial"/>
+            </a:endParaRPr>
+          </a:p>
+          <a:p>
+            <a:pPr marL="343080" indent="-343080" defTabSz="343080">
+              <a:lnSpc>
+                <a:spcPct val="100000"/>
+              </a:lnSpc>
+              <a:buClr>
+                <a:srgbClr val="000000"/>
+              </a:buClr>
+              <a:buFont typeface="Arial"/>
+              <a:buChar char="•"/>
+              <a:tabLst>
+                <a:tab algn="l" pos="0"/>
+              </a:tabLst>
+            </a:pPr>
+            <a:r>
+              <a:rPr b="1" lang="fr-FR" sz="2400" strike="noStrike" u="none">
+                <a:solidFill>
+                  <a:srgbClr val="000000"/>
+                </a:solidFill>
+                <a:effectLst/>
+                <a:uFillTx/>
+                <a:latin typeface="Calibri"/>
+              </a:rPr>
+              <a:t>Black Box Concept:</a:t>
+            </a:r>
+            <a:br>
+              <a:rPr sz="2400"/>
+            </a:br>
+            <a:r>
+              <a:rPr b="1" lang="fr-FR" sz="2400" strike="noStrike" u="none">
+                <a:solidFill>
+                  <a:srgbClr val="000000"/>
+                </a:solidFill>
+                <a:effectLst/>
+                <a:uFillTx/>
+                <a:latin typeface="Calibri"/>
+              </a:rPr>
+              <a:t> </a:t>
+            </a:r>
+            <a:endParaRPr b="0" lang="en-US" sz="2400" strike="noStrike" u="none">
+              <a:solidFill>
+                <a:srgbClr val="000000"/>
+              </a:solidFill>
+              <a:effectLst/>
+              <a:uFillTx/>
+              <a:latin typeface="Arial"/>
+            </a:endParaRPr>
+          </a:p>
+          <a:p>
+            <a:pPr marL="720000" defTabSz="343080">
+              <a:lnSpc>
+                <a:spcPct val="100000"/>
+              </a:lnSpc>
+              <a:tabLst>
+                <a:tab algn="l" pos="0"/>
+              </a:tabLst>
+            </a:pPr>
+            <a:r>
+              <a:rPr b="1" lang="fr-FR" sz="2400" strike="noStrike" u="none">
+                <a:solidFill>
+                  <a:srgbClr val="ff00ff"/>
+                </a:solidFill>
+                <a:effectLst/>
+                <a:uFillTx/>
+                <a:latin typeface="FreeMono"/>
+              </a:rPr>
+              <a:t>X=Input → [AI Model] → Y=Output</a:t>
+            </a:r>
+            <a:br>
+              <a:rPr sz="2400"/>
+            </a:br>
+            <a:endParaRPr b="0" lang="en-US" sz="2400" strike="noStrike" u="none">
+              <a:solidFill>
+                <a:srgbClr val="000000"/>
+              </a:solidFill>
+              <a:effectLst/>
+              <a:uFillTx/>
+              <a:latin typeface="Arial"/>
+            </a:endParaRPr>
+          </a:p>
+          <a:p>
+            <a:pPr marL="343080" indent="-343080" defTabSz="343080">
+              <a:lnSpc>
+                <a:spcPct val="100000"/>
+              </a:lnSpc>
+              <a:buClr>
+                <a:srgbClr val="000000"/>
+              </a:buClr>
+              <a:buFont typeface="Arial"/>
+              <a:buChar char="•"/>
+              <a:tabLst>
+                <a:tab algn="l" pos="0"/>
+              </a:tabLst>
+            </a:pPr>
+            <a:r>
+              <a:rPr b="1" lang="fr-FR" sz="2400" strike="noStrike" u="none">
+                <a:solidFill>
+                  <a:srgbClr val="000000"/>
+                </a:solidFill>
+                <a:effectLst/>
+                <a:uFillTx/>
+                <a:latin typeface="Calibri"/>
+                <a:ea typeface="Unifont"/>
+              </a:rPr>
+              <a:t>Universal Approximation Theorem</a:t>
+            </a:r>
+            <a:r>
+              <a:rPr b="0" lang="fr-FR" sz="2400" strike="noStrike" u="none">
+                <a:solidFill>
+                  <a:srgbClr val="000000"/>
+                </a:solidFill>
+                <a:effectLst/>
+                <a:uFillTx/>
+                <a:latin typeface="Calibri"/>
+                <a:ea typeface="Unifont"/>
+              </a:rPr>
+              <a:t>: A neural network can </a:t>
+            </a:r>
+            <a:r>
+              <a:rPr b="0" lang="fr-FR" sz="2400" strike="noStrike" u="none">
+                <a:solidFill>
+                  <a:srgbClr val="008000"/>
+                </a:solidFill>
+                <a:effectLst/>
+                <a:uFillTx/>
+                <a:latin typeface="Calibri"/>
+                <a:ea typeface="Unifont"/>
+              </a:rPr>
+              <a:t>approximate</a:t>
+            </a:r>
+            <a:r>
+              <a:rPr b="0" lang="fr-FR" sz="2400" strike="noStrike" u="none">
+                <a:solidFill>
+                  <a:srgbClr val="000000"/>
+                </a:solidFill>
+                <a:effectLst/>
+                <a:uFillTx/>
+                <a:latin typeface="Calibri"/>
+                <a:ea typeface="Unifont"/>
+              </a:rPr>
+              <a:t> </a:t>
+            </a:r>
+            <a:r>
+              <a:rPr b="0" lang="fr-FR" sz="2400" strike="noStrike" u="none">
+                <a:solidFill>
+                  <a:srgbClr val="008000"/>
+                </a:solidFill>
+                <a:effectLst/>
+                <a:uFillTx/>
+                <a:latin typeface="Calibri"/>
+                <a:ea typeface="Unifont"/>
+              </a:rPr>
+              <a:t>any continuous function</a:t>
+            </a:r>
+            <a:r>
+              <a:rPr b="0" lang="fr-FR" sz="2400" strike="noStrike" u="none">
+                <a:solidFill>
+                  <a:srgbClr val="000000"/>
+                </a:solidFill>
+                <a:effectLst/>
+                <a:uFillTx/>
+                <a:latin typeface="Calibri"/>
+                <a:ea typeface="Unifont"/>
+              </a:rPr>
+              <a:t> given sufficient data and complexity.</a:t>
+            </a:r>
+            <a:br>
+              <a:rPr sz="2400"/>
+            </a:br>
+            <a:r>
+              <a:rPr b="0" lang="fr-FR" sz="2400" strike="noStrike" u="none">
+                <a:solidFill>
+                  <a:srgbClr val="000000"/>
+                </a:solidFill>
+                <a:effectLst/>
+                <a:uFillTx/>
+                <a:latin typeface="Calibri"/>
+                <a:ea typeface="Unifont"/>
+              </a:rPr>
+              <a:t> </a:t>
+            </a:r>
+            <a:endParaRPr b="0" lang="en-US" sz="2400" strike="noStrike" u="none">
+              <a:solidFill>
+                <a:srgbClr val="000000"/>
+              </a:solidFill>
+              <a:effectLst/>
+              <a:uFillTx/>
+              <a:latin typeface="Arial"/>
+            </a:endParaRPr>
+          </a:p>
+          <a:p>
+            <a:pPr marL="343080" indent="-343080" defTabSz="343080">
+              <a:lnSpc>
+                <a:spcPct val="100000"/>
+              </a:lnSpc>
+              <a:buClr>
+                <a:srgbClr val="000000"/>
+              </a:buClr>
+              <a:buFont typeface="Arial"/>
+              <a:buChar char="•"/>
+              <a:tabLst>
+                <a:tab algn="l" pos="0"/>
+              </a:tabLst>
+            </a:pPr>
+            <a:r>
+              <a:rPr b="1" lang="fr-FR" sz="2400" strike="noStrike" u="none">
+                <a:solidFill>
+                  <a:srgbClr val="000000"/>
+                </a:solidFill>
+                <a:effectLst/>
+                <a:uFillTx/>
+                <a:latin typeface="Calibri"/>
+                <a:ea typeface="Unifont"/>
+              </a:rPr>
+              <a:t>General Behavior:</a:t>
+            </a:r>
+            <a:endParaRPr b="0" lang="en-US" sz="2400" strike="noStrike" u="none">
+              <a:solidFill>
+                <a:srgbClr val="000000"/>
+              </a:solidFill>
+              <a:effectLst/>
+              <a:uFillTx/>
+              <a:latin typeface="Arial"/>
+            </a:endParaRPr>
+          </a:p>
+          <a:p>
+            <a:pPr lvl="1" marL="432000" indent="-216000" defTabSz="343080">
+              <a:lnSpc>
+                <a:spcPct val="100000"/>
+              </a:lnSpc>
+              <a:buClr>
+                <a:srgbClr val="000000"/>
+              </a:buClr>
+              <a:buSzPct val="45000"/>
+              <a:buFont typeface="OpenSymbol"/>
+              <a:buChar char="►"/>
+              <a:tabLst>
+                <a:tab algn="l" pos="0"/>
+              </a:tabLst>
+            </a:pPr>
+            <a:r>
+              <a:rPr b="0" lang="fr-FR" sz="2400" strike="noStrike" u="none">
+                <a:solidFill>
+                  <a:srgbClr val="000000"/>
+                </a:solidFill>
+                <a:effectLst/>
+                <a:uFillTx/>
+                <a:latin typeface="Calibri"/>
+                <a:ea typeface="Unifont"/>
+              </a:rPr>
+              <a:t>All AI methods (CNNs, RNNs, SVMs) follow the same principle: map inputs to outputs via learned weights.</a:t>
+            </a:r>
+            <a:endParaRPr b="0" lang="en-US" sz="2400" strike="noStrike" u="none">
+              <a:solidFill>
+                <a:srgbClr val="000000"/>
+              </a:solidFill>
+              <a:effectLst/>
+              <a:uFillTx/>
+              <a:latin typeface="Arial"/>
+            </a:endParaRPr>
+          </a:p>
+          <a:p>
+            <a:pPr lvl="1" marL="432000" indent="-216000" defTabSz="343080">
+              <a:lnSpc>
+                <a:spcPct val="100000"/>
+              </a:lnSpc>
+              <a:buClr>
+                <a:srgbClr val="000000"/>
+              </a:buClr>
+              <a:buSzPct val="45000"/>
+              <a:buFont typeface="OpenSymbol"/>
+              <a:buChar char="►"/>
+              <a:tabLst>
+                <a:tab algn="l" pos="0"/>
+              </a:tabLst>
+            </a:pPr>
+            <a:r>
+              <a:rPr b="0" lang="fr-FR" sz="2400" strike="noStrike" u="none">
+                <a:solidFill>
+                  <a:srgbClr val="000000"/>
+                </a:solidFill>
+                <a:effectLst/>
+                <a:uFillTx/>
+                <a:latin typeface="Calibri"/>
+                <a:ea typeface="Unifont"/>
+              </a:rPr>
+              <a:t>Differences lie in architecture, training efficiency, and interpretability.</a:t>
+            </a:r>
+            <a:endParaRPr b="0" lang="en-US" sz="2400" strike="noStrike" u="none">
+              <a:solidFill>
+                <a:srgbClr val="000000"/>
+              </a:solidFill>
+              <a:effectLst/>
+              <a:uFillTx/>
+              <a:latin typeface="Arial"/>
+            </a:endParaRPr>
+          </a:p>
+        </p:txBody>
+      </p:sp>
+    </p:spTree>
+  </p:cSld>
+  <mc:AlternateContent>
+    <mc:Choice Requires="p14">
+      <p:transition spd="slow" p14:dur="2000"/>
+    </mc:Choice>
+    <mc:Fallback>
+      <p:transition spd="slow"/>
+    </mc:Fallback>
+  </mc:AlternateContent>
+</p:sld>
+</file>
+
+<file path=ppt/slides/slide8.xml><?xml version="1.0" encoding="utf-8"?>
+<p:sld xmlns:a="http://schemas.openxmlformats.org/drawingml/2006/main" xmlns:p="http://schemas.openxmlformats.org/presentationml/2006/main" xmlns:r="http://schemas.openxmlformats.org/officeDocument/2006/relationships" xmlns:p14="http://schemas.microsoft.com/office/powerpoint/2010/main" xmlns:p15="http://schemas.microsoft.com/office/powerpoint/2012/main" xmlns:mc="http://schemas.openxmlformats.org/markup-compatibility/2006">
+  <p:cSld>
+    <p:spTree>
+      <p:nvGrpSpPr>
+        <p:cNvPr id="1" name=""/>
+        <p:cNvGrpSpPr/>
+        <p:nvPr/>
+      </p:nvGrpSpPr>
+      <p:grpSpPr>
+        <a:xfrm>
+          <a:off x="0" y="0"/>
+          <a:ext cx="0" cy="0"/>
+          <a:chOff x="0" y="0"/>
+          <a:chExt cx="0" cy="0"/>
+        </a:xfrm>
+      </p:grpSpPr>
+      <p:sp>
+        <p:nvSpPr>
+          <p:cNvPr id="65" name="Text 52"/>
+          <p:cNvSpPr/>
+          <p:nvPr/>
+        </p:nvSpPr>
+        <p:spPr>
+          <a:xfrm>
+            <a:off x="548640" y="384120"/>
+            <a:ext cx="9141120" cy="289800"/>
+          </a:xfrm>
+          <a:prstGeom prst="rect">
+            <a:avLst/>
+          </a:prstGeom>
+          <a:noFill/>
+          <a:ln w="0">
+            <a:noFill/>
+          </a:ln>
+        </p:spPr>
+        <p:style>
+          <a:lnRef idx="0"/>
+          <a:fillRef idx="0"/>
+          <a:effectRef idx="0"/>
+          <a:fontRef idx="minor"/>
+        </p:style>
+        <p:txBody>
+          <a:bodyPr lIns="90000" rIns="90000" tIns="45000" bIns="45000" anchor="ctr">
+            <a:noAutofit/>
+          </a:bodyPr>
+          <a:p>
+            <a:pPr defTabSz="914400">
+              <a:lnSpc>
+                <a:spcPct val="100000"/>
+              </a:lnSpc>
+              <a:spcBef>
+                <a:spcPts val="1191"/>
+              </a:spcBef>
+              <a:spcAft>
+                <a:spcPts val="992"/>
+              </a:spcAft>
+              <a:tabLst>
+                <a:tab algn="l" pos="0"/>
+              </a:tabLst>
+            </a:pPr>
+            <a:r>
+              <a:rPr b="1" lang="en-GB" sz="1200" spc="201" strike="noStrike" u="none">
+                <a:solidFill>
+                  <a:srgbClr val="1c7293"/>
+                </a:solidFill>
+                <a:effectLst/>
+                <a:uFillTx/>
+                <a:latin typeface="Calibri"/>
+              </a:rPr>
+              <a:t>General AI Methodology</a:t>
+            </a:r>
+            <a:endParaRPr b="0" lang="en-US" sz="1200" strike="noStrike" u="none">
+              <a:solidFill>
+                <a:srgbClr val="000000"/>
+              </a:solidFill>
+              <a:effectLst/>
+              <a:uFillTx/>
+              <a:latin typeface="Arial"/>
+            </a:endParaRPr>
+          </a:p>
+        </p:txBody>
+      </p:sp>
+      <p:sp>
+        <p:nvSpPr>
+          <p:cNvPr id="66" name="Text 53"/>
+          <p:cNvSpPr/>
+          <p:nvPr/>
+        </p:nvSpPr>
+        <p:spPr>
+          <a:xfrm>
+            <a:off x="548640" y="658440"/>
+            <a:ext cx="11061360" cy="820080"/>
+          </a:xfrm>
+          <a:prstGeom prst="rect">
+            <a:avLst/>
+          </a:prstGeom>
+          <a:noFill/>
+          <a:ln w="0">
+            <a:noFill/>
+          </a:ln>
+        </p:spPr>
+        <p:style>
+          <a:lnRef idx="0"/>
+          <a:fillRef idx="0"/>
+          <a:effectRef idx="0"/>
+          <a:fontRef idx="minor"/>
+        </p:style>
+        <p:txBody>
+          <a:bodyPr lIns="90000" rIns="90000" tIns="45000" bIns="45000" anchor="ctr">
+            <a:noAutofit/>
+          </a:bodyPr>
+          <a:p>
+            <a:pPr defTabSz="914400">
+              <a:lnSpc>
+                <a:spcPct val="100000"/>
+              </a:lnSpc>
+              <a:spcBef>
+                <a:spcPts val="1191"/>
+              </a:spcBef>
+              <a:spcAft>
+                <a:spcPts val="992"/>
+              </a:spcAft>
+              <a:tabLst>
+                <a:tab algn="l" pos="0"/>
+              </a:tabLst>
+            </a:pPr>
+            <a:r>
+              <a:rPr b="1" lang="en-GB" sz="3000" strike="noStrike" u="none">
+                <a:solidFill>
+                  <a:srgbClr val="20242b"/>
+                </a:solidFill>
+                <a:effectLst/>
+                <a:uFillTx/>
+                <a:latin typeface="Cambria"/>
+              </a:rPr>
+              <a:t>General AI Methodology</a:t>
+            </a:r>
+            <a:endParaRPr b="0" lang="en-US" sz="3000" strike="noStrike" u="none">
+              <a:solidFill>
+                <a:srgbClr val="000000"/>
+              </a:solidFill>
+              <a:effectLst/>
+              <a:uFillTx/>
+              <a:latin typeface="Arial"/>
+            </a:endParaRPr>
+          </a:p>
+        </p:txBody>
+      </p:sp>
+      <p:sp>
+        <p:nvSpPr>
+          <p:cNvPr id="67" name="Text 54"/>
+          <p:cNvSpPr/>
+          <p:nvPr/>
+        </p:nvSpPr>
+        <p:spPr>
+          <a:xfrm>
+            <a:off x="11185920" y="6446520"/>
+            <a:ext cx="454320" cy="271440"/>
+          </a:xfrm>
+          <a:prstGeom prst="rect">
+            <a:avLst/>
+          </a:prstGeom>
+          <a:noFill/>
+          <a:ln w="0">
+            <a:noFill/>
+          </a:ln>
+        </p:spPr>
+        <p:style>
+          <a:lnRef idx="0"/>
+          <a:fillRef idx="0"/>
+          <a:effectRef idx="0"/>
+          <a:fontRef idx="minor"/>
+        </p:style>
+        <p:txBody>
+          <a:bodyPr lIns="90000" rIns="90000" tIns="45000" bIns="45000" anchor="ctr">
+            <a:noAutofit/>
+          </a:bodyPr>
+          <a:p>
+            <a:pPr algn="r" defTabSz="914400">
+              <a:lnSpc>
+                <a:spcPct val="100000"/>
+              </a:lnSpc>
+              <a:tabLst>
+                <a:tab algn="l" pos="0"/>
+              </a:tabLst>
+            </a:pPr>
+            <a:r>
+              <a:rPr b="0" lang="en-US" sz="900" strike="noStrike" u="none">
+                <a:solidFill>
+                  <a:srgbClr val="6e7580"/>
+                </a:solidFill>
+                <a:effectLst/>
+                <a:uFillTx/>
+                <a:latin typeface="Calibri"/>
+                <a:ea typeface="Calibri"/>
+              </a:rPr>
+              <a:t>2</a:t>
+            </a:r>
+            <a:endParaRPr b="0" lang="en-US" sz="900" strike="noStrike" u="none">
+              <a:solidFill>
+                <a:srgbClr val="000000"/>
+              </a:solidFill>
+              <a:effectLst/>
+              <a:uFillTx/>
+              <a:latin typeface="Arial"/>
+            </a:endParaRPr>
+          </a:p>
+        </p:txBody>
+      </p:sp>
       <p:graphicFrame>
         <p:nvGraphicFramePr>
-          <p:cNvPr id="64" name=""/>
+          <p:cNvPr id="68" name=""/>
           <p:cNvGraphicFramePr/>
           <p:nvPr/>
         </p:nvGraphicFramePr>
         <p:xfrm>
           <a:off x="2971800" y="2610360"/>
-          <a:ext cx="8878680" cy="4067640"/>
+          <a:ext cx="8878320" cy="4068000"/>
         </p:xfrm>
         <a:graphic>
           <a:graphicData uri="http://schemas.openxmlformats.org/drawingml/2006/table">
@@ -12580,9 +13426,7 @@
                       </a:solidFill>
                       <a:prstDash val="solid"/>
                     </a:lnB>
-                    <a:solidFill>
-                      <a:srgbClr val="c0c0c0"/>
-                    </a:solidFill>
+                    <a:noFill/>
                   </a:tcPr>
                 </a:tc>
                 <a:tc>
@@ -12822,7 +13666,9 @@
                       </a:solidFill>
                       <a:prstDash val="solid"/>
                     </a:lnB>
-                    <a:noFill/>
+                    <a:solidFill>
+                      <a:srgbClr val="dee6ef"/>
+                    </a:solidFill>
                   </a:tcPr>
                 </a:tc>
                 <a:tc>
@@ -12845,7 +13691,7 @@
                           <a:uFillTx/>
                           <a:latin typeface="Arial"/>
                         </a:rPr>
-                        <a:t>Inverse problem</a:t>
+                        <a:t>Inverse problem : classification, regression</a:t>
                       </a:r>
                       <a:endParaRPr b="0" lang="en-US" sz="1800" strike="noStrike" u="none">
                         <a:solidFill>
@@ -12880,7 +13726,9 @@
                       </a:solidFill>
                       <a:prstDash val="solid"/>
                     </a:lnB>
-                    <a:noFill/>
+                    <a:solidFill>
+                      <a:srgbClr val="dee6ef"/>
+                    </a:solidFill>
                   </a:tcPr>
                 </a:tc>
               </a:tr>
@@ -13002,7 +13850,9 @@
                       </a:solidFill>
                       <a:prstDash val="solid"/>
                     </a:lnB>
-                    <a:noFill/>
+                    <a:solidFill>
+                      <a:srgbClr val="dee6ef"/>
+                    </a:solidFill>
                   </a:tcPr>
                 </a:tc>
                 <a:tc>
@@ -13062,7 +13912,9 @@
                       </a:solidFill>
                       <a:prstDash val="solid"/>
                     </a:lnB>
-                    <a:noFill/>
+                    <a:solidFill>
+                      <a:srgbClr val="dee6ef"/>
+                    </a:solidFill>
                   </a:tcPr>
                 </a:tc>
               </a:tr>
@@ -13072,14 +13924,14 @@
       </p:graphicFrame>
       <p:sp>
         <p:nvSpPr>
-          <p:cNvPr id="65" name=""/>
+          <p:cNvPr id="69" name=""/>
           <p:cNvSpPr/>
           <p:nvPr/>
         </p:nvSpPr>
         <p:spPr>
           <a:xfrm>
             <a:off x="540000" y="1800000"/>
-            <a:ext cx="9475560" cy="1111320"/>
+            <a:ext cx="9475200" cy="1110600"/>
           </a:xfrm>
           <a:prstGeom prst="rect">
             <a:avLst/>
@@ -13163,493 +14015,11 @@
                 <a:effectLst/>
                 <a:uFillTx/>
                 <a:latin typeface="Courier New"/>
+                <a:ea typeface="Unifont"/>
               </a:rPr>
               <a:t>→ [AI] → Y</a:t>
             </a:r>
             <a:endParaRPr b="0" lang="en-US" sz="2100" strike="noStrike" u="none">
-              <a:solidFill>
-                <a:srgbClr val="000000"/>
-              </a:solidFill>
-              <a:effectLst/>
-              <a:uFillTx/>
-              <a:latin typeface="Arial"/>
-            </a:endParaRPr>
-          </a:p>
-        </p:txBody>
-      </p:sp>
-    </p:spTree>
-  </p:cSld>
-  <mc:AlternateContent>
-    <mc:Choice Requires="p14">
-      <p:transition spd="slow" p14:dur="2000"/>
-    </mc:Choice>
-    <mc:Fallback>
-      <p:transition spd="slow"/>
-    </mc:Fallback>
-  </mc:AlternateContent>
-</p:sld>
-</file>
-
-<file path=ppt/slides/slide8.xml><?xml version="1.0" encoding="utf-8"?>
-<p:sld xmlns:a="http://schemas.openxmlformats.org/drawingml/2006/main" xmlns:p="http://schemas.openxmlformats.org/presentationml/2006/main" xmlns:r="http://schemas.openxmlformats.org/officeDocument/2006/relationships" xmlns:p14="http://schemas.microsoft.com/office/powerpoint/2010/main" xmlns:p15="http://schemas.microsoft.com/office/powerpoint/2012/main" xmlns:mc="http://schemas.openxmlformats.org/markup-compatibility/2006">
-  <p:cSld>
-    <p:bg>
-      <p:bgPr>
-        <a:solidFill>
-          <a:srgbClr val="ffffff"/>
-        </a:solidFill>
-      </p:bgPr>
-    </p:bg>
-    <p:spTree>
-      <p:nvGrpSpPr>
-        <p:cNvPr id="1" name=""/>
-        <p:cNvGrpSpPr/>
-        <p:nvPr/>
-      </p:nvGrpSpPr>
-      <p:grpSpPr>
-        <a:xfrm>
-          <a:off x="0" y="0"/>
-          <a:ext cx="0" cy="0"/>
-          <a:chOff x="0" y="0"/>
-          <a:chExt cx="0" cy="0"/>
-        </a:xfrm>
-      </p:grpSpPr>
-      <p:sp>
-        <p:nvSpPr>
-          <p:cNvPr id="66" name="Text 24"/>
-          <p:cNvSpPr/>
-          <p:nvPr/>
-        </p:nvSpPr>
-        <p:spPr>
-          <a:xfrm>
-            <a:off x="548640" y="384120"/>
-            <a:ext cx="9141480" cy="290160"/>
-          </a:xfrm>
-          <a:prstGeom prst="rect">
-            <a:avLst/>
-          </a:prstGeom>
-          <a:noFill/>
-          <a:ln w="0">
-            <a:noFill/>
-          </a:ln>
-        </p:spPr>
-        <p:style>
-          <a:lnRef idx="0"/>
-          <a:fillRef idx="0"/>
-          <a:effectRef idx="0"/>
-          <a:fontRef idx="minor"/>
-        </p:style>
-        <p:txBody>
-          <a:bodyPr lIns="90000" rIns="90000" tIns="45000" bIns="45000" anchor="ctr">
-            <a:noAutofit/>
-          </a:bodyPr>
-          <a:p>
-            <a:pPr defTabSz="914400">
-              <a:lnSpc>
-                <a:spcPct val="100000"/>
-              </a:lnSpc>
-              <a:tabLst>
-                <a:tab algn="l" pos="0"/>
-              </a:tabLst>
-            </a:pPr>
-            <a:r>
-              <a:rPr b="1" lang="en-GB" sz="1200" spc="201" strike="noStrike" u="none">
-                <a:solidFill>
-                  <a:srgbClr val="1c7293"/>
-                </a:solidFill>
-                <a:effectLst/>
-                <a:uFillTx/>
-                <a:latin typeface="Calibri"/>
-              </a:rPr>
-              <a:t>Realistic datasets</a:t>
-            </a:r>
-            <a:endParaRPr b="0" lang="en-US" sz="1200" strike="noStrike" u="none">
-              <a:solidFill>
-                <a:srgbClr val="000000"/>
-              </a:solidFill>
-              <a:effectLst/>
-              <a:uFillTx/>
-              <a:latin typeface="Arial"/>
-            </a:endParaRPr>
-          </a:p>
-        </p:txBody>
-      </p:sp>
-      <p:sp>
-        <p:nvSpPr>
-          <p:cNvPr id="67" name="Text 25"/>
-          <p:cNvSpPr/>
-          <p:nvPr/>
-        </p:nvSpPr>
-        <p:spPr>
-          <a:xfrm>
-            <a:off x="548640" y="658440"/>
-            <a:ext cx="11061720" cy="820440"/>
-          </a:xfrm>
-          <a:prstGeom prst="rect">
-            <a:avLst/>
-          </a:prstGeom>
-          <a:noFill/>
-          <a:ln w="0">
-            <a:noFill/>
-          </a:ln>
-        </p:spPr>
-        <p:style>
-          <a:lnRef idx="0"/>
-          <a:fillRef idx="0"/>
-          <a:effectRef idx="0"/>
-          <a:fontRef idx="minor"/>
-        </p:style>
-        <p:txBody>
-          <a:bodyPr lIns="90000" rIns="90000" tIns="45000" bIns="45000" anchor="ctr">
-            <a:noAutofit/>
-          </a:bodyPr>
-          <a:p>
-            <a:pPr defTabSz="914400">
-              <a:lnSpc>
-                <a:spcPct val="100000"/>
-              </a:lnSpc>
-              <a:spcBef>
-                <a:spcPts val="1191"/>
-              </a:spcBef>
-              <a:spcAft>
-                <a:spcPts val="992"/>
-              </a:spcAft>
-              <a:tabLst>
-                <a:tab algn="l" pos="0"/>
-              </a:tabLst>
-            </a:pPr>
-            <a:r>
-              <a:rPr b="1" lang="en-GB" sz="3000" strike="noStrike" u="none">
-                <a:solidFill>
-                  <a:srgbClr val="20242b"/>
-                </a:solidFill>
-                <a:effectLst/>
-                <a:uFillTx/>
-                <a:latin typeface="Cambria"/>
-              </a:rPr>
-              <a:t>Why Realistic AI Datasets?</a:t>
-            </a:r>
-            <a:endParaRPr b="0" lang="en-US" sz="3000" strike="noStrike" u="none">
-              <a:solidFill>
-                <a:srgbClr val="000000"/>
-              </a:solidFill>
-              <a:effectLst/>
-              <a:uFillTx/>
-              <a:latin typeface="Arial"/>
-            </a:endParaRPr>
-          </a:p>
-        </p:txBody>
-      </p:sp>
-      <p:sp>
-        <p:nvSpPr>
-          <p:cNvPr id="68" name="Text 26"/>
-          <p:cNvSpPr/>
-          <p:nvPr/>
-        </p:nvSpPr>
-        <p:spPr>
-          <a:xfrm>
-            <a:off x="11185920" y="6446520"/>
-            <a:ext cx="454680" cy="271800"/>
-          </a:xfrm>
-          <a:prstGeom prst="rect">
-            <a:avLst/>
-          </a:prstGeom>
-          <a:noFill/>
-          <a:ln w="0">
-            <a:noFill/>
-          </a:ln>
-        </p:spPr>
-        <p:style>
-          <a:lnRef idx="0"/>
-          <a:fillRef idx="0"/>
-          <a:effectRef idx="0"/>
-          <a:fontRef idx="minor"/>
-        </p:style>
-        <p:txBody>
-          <a:bodyPr lIns="90000" rIns="90000" tIns="45000" bIns="45000" anchor="ctr">
-            <a:noAutofit/>
-          </a:bodyPr>
-          <a:p>
-            <a:pPr algn="r" defTabSz="914400">
-              <a:lnSpc>
-                <a:spcPct val="100000"/>
-              </a:lnSpc>
-              <a:tabLst>
-                <a:tab algn="l" pos="0"/>
-              </a:tabLst>
-            </a:pPr>
-            <a:r>
-              <a:rPr b="0" lang="en-US" sz="900" strike="noStrike" u="none">
-                <a:solidFill>
-                  <a:srgbClr val="6e7580"/>
-                </a:solidFill>
-                <a:effectLst/>
-                <a:uFillTx/>
-                <a:latin typeface="Calibri"/>
-                <a:ea typeface="Calibri"/>
-              </a:rPr>
-              <a:t>2</a:t>
-            </a:r>
-            <a:endParaRPr b="0" lang="en-US" sz="900" strike="noStrike" u="none">
-              <a:solidFill>
-                <a:srgbClr val="000000"/>
-              </a:solidFill>
-              <a:effectLst/>
-              <a:uFillTx/>
-              <a:latin typeface="Arial"/>
-            </a:endParaRPr>
-          </a:p>
-        </p:txBody>
-      </p:sp>
-      <p:sp>
-        <p:nvSpPr>
-          <p:cNvPr id="69" name=""/>
-          <p:cNvSpPr/>
-          <p:nvPr/>
-        </p:nvSpPr>
-        <p:spPr>
-          <a:xfrm>
-            <a:off x="540000" y="1800000"/>
-            <a:ext cx="9475560" cy="3525840"/>
-          </a:xfrm>
-          <a:prstGeom prst="rect">
-            <a:avLst/>
-          </a:prstGeom>
-          <a:noFill/>
-          <a:ln w="0">
-            <a:noFill/>
-          </a:ln>
-        </p:spPr>
-        <p:style>
-          <a:lnRef idx="0"/>
-          <a:fillRef idx="0"/>
-          <a:effectRef idx="0"/>
-          <a:fontRef idx="minor"/>
-        </p:style>
-        <p:txBody>
-          <a:bodyPr lIns="90000" rIns="90000" tIns="45000" bIns="45000" anchor="t">
-            <a:spAutoFit/>
-          </a:bodyPr>
-          <a:p>
-            <a:pPr defTabSz="343080">
-              <a:lnSpc>
-                <a:spcPct val="100000"/>
-              </a:lnSpc>
-              <a:spcBef>
-                <a:spcPts val="479"/>
-              </a:spcBef>
-              <a:tabLst>
-                <a:tab algn="l" pos="0"/>
-              </a:tabLst>
-            </a:pPr>
-            <a:r>
-              <a:rPr b="1" lang="fr-FR" sz="2400" strike="noStrike" u="none">
-                <a:solidFill>
-                  <a:srgbClr val="0000ff"/>
-                </a:solidFill>
-                <a:effectLst/>
-                <a:uFillTx/>
-                <a:latin typeface="Calibri"/>
-              </a:rPr>
-              <a:t>Inverse Problem</a:t>
-            </a:r>
-            <a:r>
-              <a:rPr b="0" lang="fr-FR" sz="2400" strike="noStrike" u="none">
-                <a:solidFill>
-                  <a:srgbClr val="0000ff"/>
-                </a:solidFill>
-                <a:effectLst/>
-                <a:uFillTx/>
-                <a:latin typeface="Calibri"/>
-              </a:rPr>
-              <a:t>:</a:t>
-            </a:r>
-            <a:br>
-              <a:rPr sz="2400"/>
-            </a:br>
-            <a:endParaRPr b="0" lang="en-US" sz="2400" strike="noStrike" u="none">
-              <a:solidFill>
-                <a:srgbClr val="000000"/>
-              </a:solidFill>
-              <a:effectLst/>
-              <a:uFillTx/>
-              <a:latin typeface="Arial"/>
-            </a:endParaRPr>
-          </a:p>
-          <a:p>
-            <a:pPr marL="343080" indent="-343080" defTabSz="343080">
-              <a:lnSpc>
-                <a:spcPct val="100000"/>
-              </a:lnSpc>
-              <a:spcBef>
-                <a:spcPts val="479"/>
-              </a:spcBef>
-              <a:buClr>
-                <a:srgbClr val="000000"/>
-              </a:buClr>
-              <a:buFont typeface="Arial"/>
-              <a:buChar char="•"/>
-              <a:tabLst>
-                <a:tab algn="l" pos="0"/>
-              </a:tabLst>
-            </a:pPr>
-            <a:r>
-              <a:rPr b="1" lang="fr-FR" sz="2400" strike="noStrike" u="none">
-                <a:solidFill>
-                  <a:schemeClr val="dk1"/>
-                </a:solidFill>
-                <a:effectLst/>
-                <a:uFillTx/>
-                <a:latin typeface="Calibri"/>
-              </a:rPr>
-              <a:t>Goal</a:t>
-            </a:r>
-            <a:r>
-              <a:rPr b="0" lang="fr-FR" sz="2400" strike="noStrike" u="none">
-                <a:solidFill>
-                  <a:schemeClr val="dk1"/>
-                </a:solidFill>
-                <a:effectLst/>
-                <a:uFillTx/>
-                <a:latin typeface="Calibri"/>
-              </a:rPr>
-              <a:t>: Reconstruct input parameters from measured data.</a:t>
-            </a:r>
-            <a:endParaRPr b="0" lang="en-US" sz="2400" strike="noStrike" u="none">
-              <a:solidFill>
-                <a:srgbClr val="000000"/>
-              </a:solidFill>
-              <a:effectLst/>
-              <a:uFillTx/>
-              <a:latin typeface="Arial"/>
-            </a:endParaRPr>
-          </a:p>
-          <a:p>
-            <a:pPr marL="343080" indent="-343080" defTabSz="343080">
-              <a:lnSpc>
-                <a:spcPct val="100000"/>
-              </a:lnSpc>
-              <a:spcBef>
-                <a:spcPts val="479"/>
-              </a:spcBef>
-              <a:buClr>
-                <a:srgbClr val="000000"/>
-              </a:buClr>
-              <a:buFont typeface="Arial"/>
-              <a:buChar char="•"/>
-              <a:tabLst>
-                <a:tab algn="l" pos="0"/>
-              </a:tabLst>
-            </a:pPr>
-            <a:r>
-              <a:rPr b="1" lang="fr-FR" sz="2400" strike="noStrike" u="none">
-                <a:solidFill>
-                  <a:schemeClr val="dk1"/>
-                </a:solidFill>
-                <a:effectLst/>
-                <a:uFillTx/>
-                <a:latin typeface="Calibri"/>
-              </a:rPr>
-              <a:t>AI Approach</a:t>
-            </a:r>
-            <a:r>
-              <a:rPr b="0" lang="fr-FR" sz="2400" strike="noStrike" u="none">
-                <a:solidFill>
-                  <a:schemeClr val="dk1"/>
-                </a:solidFill>
-                <a:effectLst/>
-                <a:uFillTx/>
-                <a:latin typeface="Calibri"/>
-              </a:rPr>
-              <a:t>:</a:t>
-            </a:r>
-            <a:br>
-              <a:rPr sz="2400"/>
-            </a:br>
-            <a:r>
-              <a:rPr b="0" lang="fr-FR" sz="2400" strike="noStrike" u="none">
-                <a:solidFill>
-                  <a:schemeClr val="dk1"/>
-                </a:solidFill>
-                <a:effectLst/>
-                <a:uFillTx/>
-                <a:latin typeface="Calibri"/>
-              </a:rPr>
-              <a:t> </a:t>
-            </a:r>
-            <a:endParaRPr b="0" lang="en-US" sz="2400" strike="noStrike" u="none">
-              <a:solidFill>
-                <a:srgbClr val="000000"/>
-              </a:solidFill>
-              <a:effectLst/>
-              <a:uFillTx/>
-              <a:latin typeface="Arial"/>
-            </a:endParaRPr>
-          </a:p>
-          <a:p>
-            <a:pPr marL="685800" defTabSz="343080">
-              <a:lnSpc>
-                <a:spcPct val="100000"/>
-              </a:lnSpc>
-              <a:spcBef>
-                <a:spcPts val="420"/>
-              </a:spcBef>
-              <a:tabLst>
-                <a:tab algn="l" pos="0"/>
-              </a:tabLst>
-            </a:pPr>
-            <a:r>
-              <a:rPr b="1" lang="fr-FR" sz="2100" strike="noStrike" u="none">
-                <a:solidFill>
-                  <a:srgbClr val="ff00ff"/>
-                </a:solidFill>
-                <a:effectLst/>
-                <a:uFillTx/>
-                <a:latin typeface="Courier New"/>
-              </a:rPr>
-              <a:t>Measurement → [AI Algorithm] → Parameters</a:t>
-            </a:r>
-            <a:br>
-              <a:rPr sz="2100"/>
-            </a:br>
-            <a:endParaRPr b="0" lang="en-US" sz="2100" strike="noStrike" u="none">
-              <a:solidFill>
-                <a:srgbClr val="000000"/>
-              </a:solidFill>
-              <a:effectLst/>
-              <a:uFillTx/>
-              <a:latin typeface="Arial"/>
-            </a:endParaRPr>
-          </a:p>
-          <a:p>
-            <a:pPr marL="343080" indent="-343080" defTabSz="343080">
-              <a:lnSpc>
-                <a:spcPct val="100000"/>
-              </a:lnSpc>
-              <a:spcBef>
-                <a:spcPts val="479"/>
-              </a:spcBef>
-              <a:buClr>
-                <a:srgbClr val="000000"/>
-              </a:buClr>
-              <a:buFont typeface="Arial"/>
-              <a:buChar char="•"/>
-              <a:tabLst>
-                <a:tab algn="l" pos="0"/>
-              </a:tabLst>
-            </a:pPr>
-            <a:r>
-              <a:rPr b="0" lang="fr-FR" sz="2400" strike="noStrike" u="none">
-                <a:solidFill>
-                  <a:schemeClr val="dk1"/>
-                </a:solidFill>
-                <a:effectLst/>
-                <a:uFillTx/>
-                <a:latin typeface="Calibri"/>
-              </a:rPr>
-              <a:t>Example: Predict sample composition from a scattering pattern.</a:t>
-            </a:r>
-            <a:endParaRPr b="0" lang="en-US" sz="2400" strike="noStrike" u="none">
               <a:solidFill>
                 <a:srgbClr val="000000"/>
               </a:solidFill>
@@ -13699,14 +14069,14 @@
       </p:grpSpPr>
       <p:sp>
         <p:nvSpPr>
-          <p:cNvPr id="70" name="Text 28"/>
+          <p:cNvPr id="70" name="Text 24"/>
           <p:cNvSpPr/>
           <p:nvPr/>
         </p:nvSpPr>
         <p:spPr>
           <a:xfrm>
             <a:off x="548640" y="384120"/>
-            <a:ext cx="9141480" cy="290160"/>
+            <a:ext cx="9141120" cy="289800"/>
           </a:xfrm>
           <a:prstGeom prst="rect">
             <a:avLst/>
@@ -13731,6 +14101,12 @@
               <a:lnSpc>
                 <a:spcPct val="100000"/>
               </a:lnSpc>
+              <a:spcBef>
+                <a:spcPts val="1191"/>
+              </a:spcBef>
+              <a:spcAft>
+                <a:spcPts val="992"/>
+              </a:spcAft>
               <a:tabLst>
                 <a:tab algn="l" pos="0"/>
               </a:tabLst>
@@ -13744,7 +14120,7 @@
                 <a:uFillTx/>
                 <a:latin typeface="Calibri"/>
               </a:rPr>
-              <a:t>Realistic datasets</a:t>
+              <a:t>AI Methodology</a:t>
             </a:r>
             <a:endParaRPr b="0" lang="en-US" sz="1200" strike="noStrike" u="none">
               <a:solidFill>
@@ -13759,14 +14135,14 @@
       </p:sp>
       <p:sp>
         <p:nvSpPr>
-          <p:cNvPr id="71" name="Text 29"/>
+          <p:cNvPr id="71" name="Text 25"/>
           <p:cNvSpPr/>
           <p:nvPr/>
         </p:nvSpPr>
         <p:spPr>
           <a:xfrm>
             <a:off x="548640" y="658440"/>
-            <a:ext cx="11061720" cy="820440"/>
+            <a:ext cx="11061360" cy="820080"/>
           </a:xfrm>
           <a:prstGeom prst="rect">
             <a:avLst/>
@@ -13802,7 +14178,7 @@
               </a:tabLst>
             </a:pPr>
             <a:r>
-              <a:rPr b="1" lang="en-GB" sz="3000" strike="noStrike" u="none">
+              <a:rPr b="1" lang="en-US" sz="3000" strike="noStrike" u="none">
                 <a:solidFill>
                   <a:srgbClr val="20242b"/>
                 </a:solidFill>
@@ -13810,7 +14186,7 @@
                 <a:uFillTx/>
                 <a:latin typeface="Cambria"/>
               </a:rPr>
-              <a:t>Why Realistic AI Datasets?</a:t>
+              <a:t>AI algorithm types</a:t>
             </a:r>
             <a:endParaRPr b="0" lang="en-US" sz="3000" strike="noStrike" u="none">
               <a:solidFill>
@@ -13825,14 +14201,14 @@
       </p:sp>
       <p:sp>
         <p:nvSpPr>
-          <p:cNvPr id="72" name="Text 30"/>
+          <p:cNvPr id="72" name="Text 26"/>
           <p:cNvSpPr/>
           <p:nvPr/>
         </p:nvSpPr>
         <p:spPr>
           <a:xfrm>
             <a:off x="11185920" y="6446520"/>
-            <a:ext cx="454680" cy="271800"/>
+            <a:ext cx="454320" cy="271440"/>
           </a:xfrm>
           <a:prstGeom prst="rect">
             <a:avLst/>
@@ -13893,7 +14269,7 @@
         <p:spPr>
           <a:xfrm>
             <a:off x="540000" y="1800000"/>
-            <a:ext cx="10978200" cy="3160080"/>
+            <a:ext cx="9475200" cy="4318200"/>
           </a:xfrm>
           <a:prstGeom prst="rect">
             <a:avLst/>
@@ -13934,7 +14310,7 @@
                 <a:uFillTx/>
                 <a:latin typeface="Calibri"/>
               </a:rPr>
-              <a:t>Surrogate Models</a:t>
+              <a:t>Inverse Problem</a:t>
             </a:r>
             <a:r>
               <a:rPr b="0" lang="fr-FR" sz="2400" strike="noStrike" u="none">
@@ -13977,7 +14353,7 @@
               </a:tabLst>
             </a:pPr>
             <a:r>
-              <a:rPr b="1" lang="fr-FR" sz="2400" strike="noStrike" u="none">
+              <a:rPr b="1" sz="2400" strike="noStrike" u="none">
                 <a:solidFill>
                   <a:schemeClr val="dk1"/>
                 </a:solidFill>
@@ -13985,10 +14361,10 @@
                 <a:uFillTx/>
                 <a:latin typeface="Calibri"/>
               </a:rPr>
-              <a:t>Purpose</a:t>
-            </a:r>
-            <a:r>
-              <a:rPr b="0" lang="fr-FR" sz="2400" strike="noStrike" u="none">
+              <a:t>Goal</a:t>
+            </a:r>
+            <a:r>
+              <a:rPr b="0" sz="2400" strike="noStrike" u="none">
                 <a:solidFill>
                   <a:schemeClr val="dk1"/>
                 </a:solidFill>
@@ -13996,7 +14372,7 @@
                 <a:uFillTx/>
                 <a:latin typeface="Calibri"/>
               </a:rPr>
-              <a:t>: Replace slow simulations with fast AI models.</a:t>
+              <a:t>: Reconstruct input parameters from measured data.</a:t>
             </a:r>
             <a:endParaRPr b="0" lang="en-US" sz="2400" strike="noStrike" u="none">
               <a:solidFill>
@@ -14025,7 +14401,7 @@
               </a:tabLst>
             </a:pPr>
             <a:r>
-              <a:rPr b="1" lang="fr-FR" sz="2400" strike="noStrike" u="none">
+              <a:rPr b="1" sz="2400" strike="noStrike" u="none">
                 <a:solidFill>
                   <a:schemeClr val="dk1"/>
                 </a:solidFill>
@@ -14033,10 +14409,10 @@
                 <a:uFillTx/>
                 <a:latin typeface="Calibri"/>
               </a:rPr>
-              <a:t>Pipeline</a:t>
-            </a:r>
-            <a:r>
-              <a:rPr b="0" lang="fr-FR" sz="2400" strike="noStrike" u="none">
+              <a:t>AI Approach</a:t>
+            </a:r>
+            <a:r>
+              <a:rPr b="0" sz="2400" strike="noStrike" u="none">
                 <a:solidFill>
                   <a:schemeClr val="dk1"/>
                 </a:solidFill>
@@ -14050,7 +14426,7 @@
               <a:rPr sz="2400"/>
             </a:br>
             <a:r>
-              <a:rPr b="0" lang="fr-FR" sz="2400" strike="noStrike" u="none">
+              <a:rPr b="0" sz="2400" strike="noStrike" u="none">
                 <a:solidFill>
                   <a:schemeClr val="dk1"/>
                 </a:solidFill>
@@ -14082,7 +14458,7 @@
               </a:tabLst>
             </a:pPr>
             <a:r>
-              <a:rPr b="1" lang="fr-FR" sz="2100" strike="noStrike" u="none">
+              <a:rPr b="1" sz="2100" strike="noStrike" u="none">
                 <a:solidFill>
                   <a:srgbClr val="ff00ff"/>
                 </a:solidFill>
@@ -14090,7 +14466,7 @@
                 <a:uFillTx/>
                 <a:latin typeface="Courier New"/>
               </a:rPr>
-              <a:t>Parameters → [AI Model] → Virtual "Measurement" (faster)</a:t>
+              <a:t>X=Measurement → [AI Algorithm] → Y=Parameters</a:t>
             </a:r>
             <a:br>
               <a:rPr sz="2100"/>
@@ -14122,7 +14498,7 @@
               </a:tabLst>
             </a:pPr>
             <a:r>
-              <a:rPr b="1" lang="fr-FR" sz="2400" strike="noStrike" u="none">
+              <a:rPr b="0" sz="2400" strike="noStrike" u="none">
                 <a:solidFill>
                   <a:schemeClr val="dk1"/>
                 </a:solidFill>
@@ -14130,10 +14506,10 @@
                 <a:uFillTx/>
                 <a:latin typeface="Calibri"/>
               </a:rPr>
-              <a:t>Use Case</a:t>
-            </a:r>
-            <a:r>
-              <a:rPr b="0" lang="fr-FR" sz="2400" strike="noStrike" u="none">
+              <a:t>The inferred </a:t>
+            </a:r>
+            <a:r>
+              <a:rPr b="0" i="1" sz="2400" strike="noStrike" u="none">
                 <a:solidFill>
                   <a:schemeClr val="dk1"/>
                 </a:solidFill>
@@ -14141,7 +14517,66 @@
                 <a:uFillTx/>
                 <a:latin typeface="Calibri"/>
               </a:rPr>
-              <a:t>: Fast phase-space exploration.</a:t>
+              <a:t>Parameters</a:t>
+            </a:r>
+            <a:r>
+              <a:rPr b="0" sz="2400" strike="noStrike" u="none">
+                <a:solidFill>
+                  <a:schemeClr val="dk1"/>
+                </a:solidFill>
+                <a:effectLst/>
+                <a:uFillTx/>
+                <a:latin typeface="Calibri"/>
+              </a:rPr>
+              <a:t> can be discrete (class) or continuous (regression).</a:t>
+            </a:r>
+            <a:endParaRPr b="0" lang="en-US" sz="2400" strike="noStrike" u="none">
+              <a:solidFill>
+                <a:srgbClr val="000000"/>
+              </a:solidFill>
+              <a:effectLst/>
+              <a:uFillTx/>
+              <a:latin typeface="Arial"/>
+            </a:endParaRPr>
+          </a:p>
+          <a:p>
+            <a:pPr marL="343080" indent="-343080" defTabSz="343080">
+              <a:lnSpc>
+                <a:spcPct val="100000"/>
+              </a:lnSpc>
+              <a:spcBef>
+                <a:spcPts val="479"/>
+              </a:spcBef>
+              <a:buClr>
+                <a:srgbClr val="000000"/>
+              </a:buClr>
+              <a:buFont typeface="Arial"/>
+              <a:buChar char="•"/>
+              <a:tabLst>
+                <a:tab algn="l" pos="0"/>
+              </a:tabLst>
+            </a:pPr>
+            <a:r>
+              <a:rPr b="0" sz="2400" strike="noStrike" u="sng">
+                <a:solidFill>
+                  <a:schemeClr val="dk1"/>
+                </a:solidFill>
+                <a:effectLst/>
+                <a:uFillTx/>
+                <a:latin typeface="Calibri"/>
+              </a:rPr>
+              <a:t>Example</a:t>
+            </a:r>
+            <a:r>
+              <a:rPr b="0" sz="2400" strike="noStrike" u="none">
+                <a:solidFill>
+                  <a:schemeClr val="dk1"/>
+                </a:solidFill>
+                <a:effectLst/>
+                <a:uFillTx/>
+                <a:latin typeface="Calibri"/>
+              </a:rPr>
+              <a:t>: Predict sample composition from a scattering pattern.</a:t>
             </a:r>
             <a:endParaRPr b="0" lang="en-US" sz="2400" strike="noStrike" u="none">
               <a:solidFill>
